--- a/presentations/Calibrated_PPG_BP_Progress_Update.pptx
+++ b/presentations/Calibrated_PPG_BP_Progress_Update.pptx
@@ -2,36 +2,36 @@
 <file path=ppt/presentation.xml><?xml version="1.0" encoding="utf-8"?>
 <p:presentation xmlns:p="http://schemas.openxmlformats.org/presentationml/2006/main" embedTrueTypeFonts="1" saveSubsetFonts="0">
   <p:sldMasterIdLst>
-    <p:sldMasterId xmlns:r="http://schemas.openxmlformats.org/officeDocument/2006/relationships" id="2147483648" r:id="Rb02e67be760c4f2c"/>
+    <p:sldMasterId xmlns:r="http://schemas.openxmlformats.org/officeDocument/2006/relationships" id="2147483648" r:id="R71da70b61835443e"/>
   </p:sldMasterIdLst>
   <p:notesMasterIdLst>
-    <p:notesMasterId xmlns:r="http://schemas.openxmlformats.org/officeDocument/2006/relationships" r:id="Rff96c54ed3e2427f"/>
+    <p:notesMasterId xmlns:r="http://schemas.openxmlformats.org/officeDocument/2006/relationships" r:id="R5938b3494d854050"/>
   </p:notesMasterIdLst>
   <p:sldIdLst>
-    <p:sldId xmlns:r="http://schemas.openxmlformats.org/officeDocument/2006/relationships" id="256" r:id="R120f135d9a7a416c"/>
-    <p:sldId xmlns:r="http://schemas.openxmlformats.org/officeDocument/2006/relationships" id="257" r:id="R4512051c8bdc4ee2"/>
-    <p:sldId xmlns:r="http://schemas.openxmlformats.org/officeDocument/2006/relationships" id="258" r:id="Rd1cf928c5aa240b5"/>
-    <p:sldId xmlns:r="http://schemas.openxmlformats.org/officeDocument/2006/relationships" id="259" r:id="Reff8c761dbb94874"/>
-    <p:sldId xmlns:r="http://schemas.openxmlformats.org/officeDocument/2006/relationships" id="260" r:id="R4e784498a3974734"/>
-    <p:sldId xmlns:r="http://schemas.openxmlformats.org/officeDocument/2006/relationships" id="261" r:id="R9c331af7af8e4117"/>
-    <p:sldId xmlns:r="http://schemas.openxmlformats.org/officeDocument/2006/relationships" id="262" r:id="Re4f20acb97b54523"/>
-    <p:sldId xmlns:r="http://schemas.openxmlformats.org/officeDocument/2006/relationships" id="263" r:id="Ra98e00fa665e45cb"/>
-    <p:sldId xmlns:r="http://schemas.openxmlformats.org/officeDocument/2006/relationships" id="264" r:id="R4dcd391b1a1145d9"/>
+    <p:sldId xmlns:r="http://schemas.openxmlformats.org/officeDocument/2006/relationships" id="256" r:id="R0753763648c544d4"/>
+    <p:sldId xmlns:r="http://schemas.openxmlformats.org/officeDocument/2006/relationships" id="257" r:id="Rf55ab19ac9f64fce"/>
+    <p:sldId xmlns:r="http://schemas.openxmlformats.org/officeDocument/2006/relationships" id="258" r:id="R0d3a7291933b46d3"/>
+    <p:sldId xmlns:r="http://schemas.openxmlformats.org/officeDocument/2006/relationships" id="259" r:id="R2efbeea64cef4ad4"/>
+    <p:sldId xmlns:r="http://schemas.openxmlformats.org/officeDocument/2006/relationships" id="260" r:id="Rb192824405a14491"/>
+    <p:sldId xmlns:r="http://schemas.openxmlformats.org/officeDocument/2006/relationships" id="261" r:id="R8ab4a926527a4de7"/>
+    <p:sldId xmlns:r="http://schemas.openxmlformats.org/officeDocument/2006/relationships" id="262" r:id="R28523149a36e45aa"/>
+    <p:sldId xmlns:r="http://schemas.openxmlformats.org/officeDocument/2006/relationships" id="263" r:id="Rdcbeeffa43b249df"/>
+    <p:sldId xmlns:r="http://schemas.openxmlformats.org/officeDocument/2006/relationships" id="264" r:id="Rbb52ab4d72754578"/>
   </p:sldIdLst>
   <p:sldSz cx="18288000" cy="10287000"/>
   <p:notesSz cx="6858000" cy="9144000"/>
   <p:embeddedFontLst>
     <p:embeddedFont>
       <p:font typeface="Belleza"/>
-      <p:regular xmlns:r="http://schemas.openxmlformats.org/officeDocument/2006/relationships" r:id="Rad694e35cddd4050"/>
+      <p:regular xmlns:r="http://schemas.openxmlformats.org/officeDocument/2006/relationships" r:id="Rfdc6a11cf1d04bdc"/>
     </p:embeddedFont>
     <p:embeddedFont>
       <p:font typeface="Times New Roman"/>
-      <p:regular xmlns:r="http://schemas.openxmlformats.org/officeDocument/2006/relationships" r:id="R785745541f5f41ba"/>
+      <p:regular xmlns:r="http://schemas.openxmlformats.org/officeDocument/2006/relationships" r:id="R967d355eb46f4da5"/>
     </p:embeddedFont>
     <p:embeddedFont>
       <p:font typeface="Times New Roman Bold"/>
-      <p:regular xmlns:r="http://schemas.openxmlformats.org/officeDocument/2006/relationships" r:id="Rf550b42d95c34853"/>
+      <p:regular xmlns:r="http://schemas.openxmlformats.org/officeDocument/2006/relationships" r:id="R304e2d26168d4bf9"/>
     </p:embeddedFont>
   </p:embeddedFontLst>
 </p:presentation>
@@ -1228,7 +1228,7 @@
           </a:p>
           <a:p xmlns:a="http://schemas.openxmlformats.org/drawingml/2006/main">
             <a:r>
-              <a:t>Jobs 819 and 822–825 are isolated single-factor candidates. Fixed-first job 818 is a protocol ablation. Locked meta-test remains untouched.</a:t>
+              <a:t>Jobs 819 and 822–825 are isolated single-factor candidates. Fixed-first job 818 is a single-seed protocol ablation, not a final result. Locked meta-test remains untouched.</a:t>
             </a:r>
             <a:endParaRPr/>
           </a:p>
@@ -4256,17 +4256,17 @@
   </p:cSld>
   <p:clrMap bg1="lt1" tx1="dk1" bg2="lt2" tx2="dk2" accent1="accent1" accent2="accent2" accent3="accent3" accent4="accent4" accent5="accent5" accent6="accent6" hlink="hlink" folHlink="folHlink"/>
   <p:sldLayoutIdLst>
-    <p:sldLayoutId xmlns:r="http://schemas.openxmlformats.org/officeDocument/2006/relationships" id="2147483649" r:id="Rb81ddede41574d4a"/>
-    <p:sldLayoutId xmlns:r="http://schemas.openxmlformats.org/officeDocument/2006/relationships" id="2147483650" r:id="Rc5bda30c01814458"/>
-    <p:sldLayoutId xmlns:r="http://schemas.openxmlformats.org/officeDocument/2006/relationships" id="2147483651" r:id="Rdbb07e8e8d2d41cc"/>
-    <p:sldLayoutId xmlns:r="http://schemas.openxmlformats.org/officeDocument/2006/relationships" id="2147483652" r:id="R3ddb2a2c38c644d5"/>
-    <p:sldLayoutId xmlns:r="http://schemas.openxmlformats.org/officeDocument/2006/relationships" id="2147483653" r:id="Ra66ea01b7493459c"/>
-    <p:sldLayoutId xmlns:r="http://schemas.openxmlformats.org/officeDocument/2006/relationships" id="2147483654" r:id="R9ca07eee567e44d2"/>
-    <p:sldLayoutId xmlns:r="http://schemas.openxmlformats.org/officeDocument/2006/relationships" id="2147483655" r:id="Rd5cf710145ef4fed"/>
-    <p:sldLayoutId xmlns:r="http://schemas.openxmlformats.org/officeDocument/2006/relationships" id="2147483656" r:id="Rf98827c00cb14217"/>
-    <p:sldLayoutId xmlns:r="http://schemas.openxmlformats.org/officeDocument/2006/relationships" id="2147483657" r:id="R1173cca393674ac4"/>
-    <p:sldLayoutId xmlns:r="http://schemas.openxmlformats.org/officeDocument/2006/relationships" id="2147483658" r:id="Rbc005050bcfa4ff8"/>
-    <p:sldLayoutId xmlns:r="http://schemas.openxmlformats.org/officeDocument/2006/relationships" id="2147483659" r:id="R9eff82999b0d4286"/>
+    <p:sldLayoutId xmlns:r="http://schemas.openxmlformats.org/officeDocument/2006/relationships" id="2147483649" r:id="R069cbf31a0d34bec"/>
+    <p:sldLayoutId xmlns:r="http://schemas.openxmlformats.org/officeDocument/2006/relationships" id="2147483650" r:id="R8167daf27ec645c5"/>
+    <p:sldLayoutId xmlns:r="http://schemas.openxmlformats.org/officeDocument/2006/relationships" id="2147483651" r:id="Re5d6323cf01646e3"/>
+    <p:sldLayoutId xmlns:r="http://schemas.openxmlformats.org/officeDocument/2006/relationships" id="2147483652" r:id="Ree0bebf526c5436e"/>
+    <p:sldLayoutId xmlns:r="http://schemas.openxmlformats.org/officeDocument/2006/relationships" id="2147483653" r:id="Rebddcec406954781"/>
+    <p:sldLayoutId xmlns:r="http://schemas.openxmlformats.org/officeDocument/2006/relationships" id="2147483654" r:id="Rcf37dbdce8154058"/>
+    <p:sldLayoutId xmlns:r="http://schemas.openxmlformats.org/officeDocument/2006/relationships" id="2147483655" r:id="R827f7ea86ce74082"/>
+    <p:sldLayoutId xmlns:r="http://schemas.openxmlformats.org/officeDocument/2006/relationships" id="2147483656" r:id="R0b5689db798a42c3"/>
+    <p:sldLayoutId xmlns:r="http://schemas.openxmlformats.org/officeDocument/2006/relationships" id="2147483657" r:id="Rf203982607ba41b1"/>
+    <p:sldLayoutId xmlns:r="http://schemas.openxmlformats.org/officeDocument/2006/relationships" id="2147483658" r:id="Rd689aa1fff1c476e"/>
+    <p:sldLayoutId xmlns:r="http://schemas.openxmlformats.org/officeDocument/2006/relationships" id="2147483659" r:id="Ra80951a2aec84d51"/>
   </p:sldLayoutIdLst>
   <p:txStyles>
     <p:titleStyle>
@@ -4896,7 +4896,7 @@
             </a:pathLst>
           </a:custGeom>
           <a:blipFill xmlns:a="http://schemas.openxmlformats.org/drawingml/2006/main">
-            <a:blip xmlns:r="http://schemas.openxmlformats.org/officeDocument/2006/relationships" r:embed="Recc5b68304a24791"/>
+            <a:blip xmlns:r="http://schemas.openxmlformats.org/officeDocument/2006/relationships" r:embed="Re538bfc553c140ef"/>
             <a:stretch>
               <a:fillRect l="0" t="-23384" r="0" b="-23384"/>
             </a:stretch>
@@ -5162,7 +5162,7 @@
             </a:pathLst>
           </a:custGeom>
           <a:blipFill xmlns:a="http://schemas.openxmlformats.org/drawingml/2006/main">
-            <a:blip xmlns:r="http://schemas.openxmlformats.org/officeDocument/2006/relationships" r:embed="R2f73718620ae405d"/>
+            <a:blip xmlns:r="http://schemas.openxmlformats.org/officeDocument/2006/relationships" r:embed="Rb20544b3b7034403"/>
             <a:stretch>
               <a:fillRect l="-7801" t="0" r="-7801" b="0"/>
             </a:stretch>
@@ -5174,7 +5174,7 @@
           <p:cNvPr id="6" name="">
             <a:extLst xmlns:a="http://schemas.openxmlformats.org/drawingml/2006/main">
               <a:ext uri="{FF2B5EF4-FFF2-40B4-BE49-F238E27FC236}">
-                <a16:creationId xmlns:a16="http://schemas.microsoft.com/office/drawing/2014/main" id="{4247F244-A253-4319-83D7-A69D7B44577E}"/>
+                <a16:creationId xmlns:a16="http://schemas.microsoft.com/office/drawing/2014/main" id="{FC3E2442-5B11-4E4F-AF41-7854055B992A}"/>
               </a:ext>
             </a:extLst>
           </p:cNvPr>
@@ -5232,7 +5232,7 @@
           <p:cNvPr id="7" name="">
             <a:extLst xmlns:a="http://schemas.openxmlformats.org/drawingml/2006/main">
               <a:ext uri="{FF2B5EF4-FFF2-40B4-BE49-F238E27FC236}">
-                <a16:creationId xmlns:a16="http://schemas.microsoft.com/office/drawing/2014/main" id="{CE23028F-B5B8-478C-8371-378588C61E38}"/>
+                <a16:creationId xmlns:a16="http://schemas.microsoft.com/office/drawing/2014/main" id="{4E56B89F-B6B0-4FD3-A810-867DF5A1A42D}"/>
               </a:ext>
             </a:extLst>
           </p:cNvPr>
@@ -5290,7 +5290,7 @@
           <p:cNvPr id="8" name="">
             <a:extLst xmlns:a="http://schemas.openxmlformats.org/drawingml/2006/main">
               <a:ext uri="{FF2B5EF4-FFF2-40B4-BE49-F238E27FC236}">
-                <a16:creationId xmlns:a16="http://schemas.microsoft.com/office/drawing/2014/main" id="{F85EE766-3C9B-49C2-B2E7-70FE641F2268}"/>
+                <a16:creationId xmlns:a16="http://schemas.microsoft.com/office/drawing/2014/main" id="{13C39074-E058-4668-A37F-397FA27416D2}"/>
               </a:ext>
             </a:extLst>
           </p:cNvPr>
@@ -5325,7 +5325,7 @@
           <p:cNvPr id="9" name="">
             <a:extLst xmlns:a="http://schemas.openxmlformats.org/drawingml/2006/main">
               <a:ext uri="{FF2B5EF4-FFF2-40B4-BE49-F238E27FC236}">
-                <a16:creationId xmlns:a16="http://schemas.microsoft.com/office/drawing/2014/main" id="{ADB981FB-012A-47F6-BBAB-162C5820A74C}"/>
+                <a16:creationId xmlns:a16="http://schemas.microsoft.com/office/drawing/2014/main" id="{42C6C7ED-4C20-4FC8-87B3-0E29B73AECA0}"/>
               </a:ext>
             </a:extLst>
           </p:cNvPr>
@@ -5358,7 +5358,7 @@
           <p:cNvPr id="10" name="">
             <a:extLst xmlns:a="http://schemas.openxmlformats.org/drawingml/2006/main">
               <a:ext uri="{FF2B5EF4-FFF2-40B4-BE49-F238E27FC236}">
-                <a16:creationId xmlns:a16="http://schemas.microsoft.com/office/drawing/2014/main" id="{34F71E86-FC53-423B-AB4B-60634B4EF801}"/>
+                <a16:creationId xmlns:a16="http://schemas.microsoft.com/office/drawing/2014/main" id="{ABFF21E3-47E9-4509-B2FC-ED4397F2BCF8}"/>
               </a:ext>
             </a:extLst>
           </p:cNvPr>
@@ -5416,7 +5416,7 @@
           <p:cNvPr id="11" name="">
             <a:extLst xmlns:a="http://schemas.openxmlformats.org/drawingml/2006/main">
               <a:ext uri="{FF2B5EF4-FFF2-40B4-BE49-F238E27FC236}">
-                <a16:creationId xmlns:a16="http://schemas.microsoft.com/office/drawing/2014/main" id="{B738656C-CFCC-4086-9BDD-97BD48875B71}"/>
+                <a16:creationId xmlns:a16="http://schemas.microsoft.com/office/drawing/2014/main" id="{BA2C41F6-5B62-473C-BDD4-27B91526B6EF}"/>
               </a:ext>
             </a:extLst>
           </p:cNvPr>
@@ -5520,7 +5520,7 @@
           <p:cNvPr id="12" name="">
             <a:extLst xmlns:a="http://schemas.openxmlformats.org/drawingml/2006/main">
               <a:ext uri="{FF2B5EF4-FFF2-40B4-BE49-F238E27FC236}">
-                <a16:creationId xmlns:a16="http://schemas.microsoft.com/office/drawing/2014/main" id="{0C5B9DCD-D2E0-49C3-BA96-3FA5F50F0AC5}"/>
+                <a16:creationId xmlns:a16="http://schemas.microsoft.com/office/drawing/2014/main" id="{C80F73E0-F32D-43CC-81AD-DDCF2CAA04BD}"/>
               </a:ext>
             </a:extLst>
           </p:cNvPr>
@@ -5555,7 +5555,7 @@
           <p:cNvPr id="13" name="">
             <a:extLst xmlns:a="http://schemas.openxmlformats.org/drawingml/2006/main">
               <a:ext uri="{FF2B5EF4-FFF2-40B4-BE49-F238E27FC236}">
-                <a16:creationId xmlns:a16="http://schemas.microsoft.com/office/drawing/2014/main" id="{E048C44B-3442-4DFD-A47F-EED62B689F4A}"/>
+                <a16:creationId xmlns:a16="http://schemas.microsoft.com/office/drawing/2014/main" id="{C83C12E9-470B-4543-B5B0-6285D4A2A301}"/>
               </a:ext>
             </a:extLst>
           </p:cNvPr>
@@ -5588,7 +5588,7 @@
           <p:cNvPr id="14" name="">
             <a:extLst xmlns:a="http://schemas.openxmlformats.org/drawingml/2006/main">
               <a:ext uri="{FF2B5EF4-FFF2-40B4-BE49-F238E27FC236}">
-                <a16:creationId xmlns:a16="http://schemas.microsoft.com/office/drawing/2014/main" id="{FC0E5F1A-2EBC-4E41-9334-AFFC41A9B7C9}"/>
+                <a16:creationId xmlns:a16="http://schemas.microsoft.com/office/drawing/2014/main" id="{9EE6E0DB-9370-48E3-B610-E3D1845338A1}"/>
               </a:ext>
             </a:extLst>
           </p:cNvPr>
@@ -5646,7 +5646,7 @@
           <p:cNvPr id="15" name="">
             <a:extLst xmlns:a="http://schemas.openxmlformats.org/drawingml/2006/main">
               <a:ext uri="{FF2B5EF4-FFF2-40B4-BE49-F238E27FC236}">
-                <a16:creationId xmlns:a16="http://schemas.microsoft.com/office/drawing/2014/main" id="{FC3923B0-4E66-4827-8DD6-975DD63D51A3}"/>
+                <a16:creationId xmlns:a16="http://schemas.microsoft.com/office/drawing/2014/main" id="{F4029995-A37F-4711-A93A-CE1857E81480}"/>
               </a:ext>
             </a:extLst>
           </p:cNvPr>
@@ -5750,7 +5750,7 @@
           <p:cNvPr id="16" name="">
             <a:extLst xmlns:a="http://schemas.openxmlformats.org/drawingml/2006/main">
               <a:ext uri="{FF2B5EF4-FFF2-40B4-BE49-F238E27FC236}">
-                <a16:creationId xmlns:a16="http://schemas.microsoft.com/office/drawing/2014/main" id="{6298B0F9-FAC5-4AD0-9BF1-08FA7290A68E}"/>
+                <a16:creationId xmlns:a16="http://schemas.microsoft.com/office/drawing/2014/main" id="{7FBF1138-E970-422D-893F-0D0F1CB71327}"/>
               </a:ext>
             </a:extLst>
           </p:cNvPr>
@@ -5785,7 +5785,7 @@
           <p:cNvPr id="17" name="">
             <a:extLst xmlns:a="http://schemas.openxmlformats.org/drawingml/2006/main">
               <a:ext uri="{FF2B5EF4-FFF2-40B4-BE49-F238E27FC236}">
-                <a16:creationId xmlns:a16="http://schemas.microsoft.com/office/drawing/2014/main" id="{B1C07C3F-B13B-4C96-8234-1F34C76FF346}"/>
+                <a16:creationId xmlns:a16="http://schemas.microsoft.com/office/drawing/2014/main" id="{122A5763-57FA-41A5-B079-986938E8EA30}"/>
               </a:ext>
             </a:extLst>
           </p:cNvPr>
@@ -5818,7 +5818,7 @@
           <p:cNvPr id="18" name="">
             <a:extLst xmlns:a="http://schemas.openxmlformats.org/drawingml/2006/main">
               <a:ext uri="{FF2B5EF4-FFF2-40B4-BE49-F238E27FC236}">
-                <a16:creationId xmlns:a16="http://schemas.microsoft.com/office/drawing/2014/main" id="{B43312DB-4205-480A-8B66-D1B5CF72FCAC}"/>
+                <a16:creationId xmlns:a16="http://schemas.microsoft.com/office/drawing/2014/main" id="{0DB0E84B-5295-48F8-8ACC-A8E537386225}"/>
               </a:ext>
             </a:extLst>
           </p:cNvPr>
@@ -5876,7 +5876,7 @@
           <p:cNvPr id="19" name="">
             <a:extLst xmlns:a="http://schemas.openxmlformats.org/drawingml/2006/main">
               <a:ext uri="{FF2B5EF4-FFF2-40B4-BE49-F238E27FC236}">
-                <a16:creationId xmlns:a16="http://schemas.microsoft.com/office/drawing/2014/main" id="{54797D11-9023-403B-B77C-AA2EADE8B0C5}"/>
+                <a16:creationId xmlns:a16="http://schemas.microsoft.com/office/drawing/2014/main" id="{C8CD0026-AF12-4EA4-9E66-0D95912EB855}"/>
               </a:ext>
             </a:extLst>
           </p:cNvPr>
@@ -5980,7 +5980,7 @@
           <p:cNvPr id="20" name="">
             <a:extLst xmlns:a="http://schemas.openxmlformats.org/drawingml/2006/main">
               <a:ext uri="{FF2B5EF4-FFF2-40B4-BE49-F238E27FC236}">
-                <a16:creationId xmlns:a16="http://schemas.microsoft.com/office/drawing/2014/main" id="{24F4ACB2-DB6F-40C8-BBD7-56F8D7DFB0BB}"/>
+                <a16:creationId xmlns:a16="http://schemas.microsoft.com/office/drawing/2014/main" id="{464F8257-0346-42CD-82E0-55028ABD3E13}"/>
               </a:ext>
             </a:extLst>
           </p:cNvPr>
@@ -6015,7 +6015,7 @@
           <p:cNvPr id="21" name="">
             <a:extLst xmlns:a="http://schemas.openxmlformats.org/drawingml/2006/main">
               <a:ext uri="{FF2B5EF4-FFF2-40B4-BE49-F238E27FC236}">
-                <a16:creationId xmlns:a16="http://schemas.microsoft.com/office/drawing/2014/main" id="{FFA17D78-6AC2-4BE6-8B04-86690D8C1D93}"/>
+                <a16:creationId xmlns:a16="http://schemas.microsoft.com/office/drawing/2014/main" id="{1D366755-A73D-4AB6-A584-C204A7621A9F}"/>
               </a:ext>
             </a:extLst>
           </p:cNvPr>
@@ -6073,7 +6073,7 @@
           <p:cNvPr id="22" name="">
             <a:extLst xmlns:a="http://schemas.openxmlformats.org/drawingml/2006/main">
               <a:ext uri="{FF2B5EF4-FFF2-40B4-BE49-F238E27FC236}">
-                <a16:creationId xmlns:a16="http://schemas.microsoft.com/office/drawing/2014/main" id="{C06E7BF7-59DE-4AAF-A70A-90E7383697B7}"/>
+                <a16:creationId xmlns:a16="http://schemas.microsoft.com/office/drawing/2014/main" id="{1C043640-9D83-496A-84CB-669533A3B050}"/>
               </a:ext>
             </a:extLst>
           </p:cNvPr>
@@ -6131,7 +6131,7 @@
           <p:cNvPr id="23" name="">
             <a:extLst xmlns:a="http://schemas.openxmlformats.org/drawingml/2006/main">
               <a:ext uri="{FF2B5EF4-FFF2-40B4-BE49-F238E27FC236}">
-                <a16:creationId xmlns:a16="http://schemas.microsoft.com/office/drawing/2014/main" id="{19E506AD-CF7E-4AB3-8D15-516C28B6EBC5}"/>
+                <a16:creationId xmlns:a16="http://schemas.microsoft.com/office/drawing/2014/main" id="{3CDF41E5-EBCC-4072-B720-81D3B66CB14B}"/>
               </a:ext>
             </a:extLst>
           </p:cNvPr>
@@ -6166,7 +6166,7 @@
           <p:cNvPr id="24" name="">
             <a:extLst xmlns:a="http://schemas.openxmlformats.org/drawingml/2006/main">
               <a:ext uri="{FF2B5EF4-FFF2-40B4-BE49-F238E27FC236}">
-                <a16:creationId xmlns:a16="http://schemas.microsoft.com/office/drawing/2014/main" id="{5C521121-C48E-4950-9FB7-63565D2B54DB}"/>
+                <a16:creationId xmlns:a16="http://schemas.microsoft.com/office/drawing/2014/main" id="{7DD9B1BF-F781-42E9-BFF0-297CD487FABE}"/>
               </a:ext>
             </a:extLst>
           </p:cNvPr>
@@ -6224,7 +6224,7 @@
           <p:cNvPr id="25" name="">
             <a:extLst xmlns:a="http://schemas.openxmlformats.org/drawingml/2006/main">
               <a:ext uri="{FF2B5EF4-FFF2-40B4-BE49-F238E27FC236}">
-                <a16:creationId xmlns:a16="http://schemas.microsoft.com/office/drawing/2014/main" id="{C7D3866F-3CCB-48D0-B447-F9CA5F8FE27B}"/>
+                <a16:creationId xmlns:a16="http://schemas.microsoft.com/office/drawing/2014/main" id="{AC83360C-3DAE-400A-8C6B-9A4B765D55B7}"/>
               </a:ext>
             </a:extLst>
           </p:cNvPr>
@@ -6282,7 +6282,7 @@
           <p:cNvPr id="26" name="">
             <a:extLst xmlns:a="http://schemas.openxmlformats.org/drawingml/2006/main">
               <a:ext uri="{FF2B5EF4-FFF2-40B4-BE49-F238E27FC236}">
-                <a16:creationId xmlns:a16="http://schemas.microsoft.com/office/drawing/2014/main" id="{DDF3A4AC-4BBA-46BD-9C69-19CDA31F6388}"/>
+                <a16:creationId xmlns:a16="http://schemas.microsoft.com/office/drawing/2014/main" id="{5F003785-524F-4401-9006-450A0D11EC15}"/>
               </a:ext>
             </a:extLst>
           </p:cNvPr>
@@ -6317,7 +6317,7 @@
           <p:cNvPr id="27" name="">
             <a:extLst xmlns:a="http://schemas.openxmlformats.org/drawingml/2006/main">
               <a:ext uri="{FF2B5EF4-FFF2-40B4-BE49-F238E27FC236}">
-                <a16:creationId xmlns:a16="http://schemas.microsoft.com/office/drawing/2014/main" id="{221D7493-458D-4057-82A9-1D76D317EB3C}"/>
+                <a16:creationId xmlns:a16="http://schemas.microsoft.com/office/drawing/2014/main" id="{7DA3A0A2-04F2-4116-A411-CF083E32D2DF}"/>
               </a:ext>
             </a:extLst>
           </p:cNvPr>
@@ -6375,7 +6375,7 @@
           <p:cNvPr id="28" name="">
             <a:extLst xmlns:a="http://schemas.openxmlformats.org/drawingml/2006/main">
               <a:ext uri="{FF2B5EF4-FFF2-40B4-BE49-F238E27FC236}">
-                <a16:creationId xmlns:a16="http://schemas.microsoft.com/office/drawing/2014/main" id="{E5A74276-5212-421F-8508-2A6EEA142150}"/>
+                <a16:creationId xmlns:a16="http://schemas.microsoft.com/office/drawing/2014/main" id="{CAF01846-9090-4AE5-BEE8-76E6CFC3CA11}"/>
               </a:ext>
             </a:extLst>
           </p:cNvPr>
@@ -6433,7 +6433,7 @@
           <p:cNvPr id="29" name="">
             <a:extLst xmlns:a="http://schemas.openxmlformats.org/drawingml/2006/main">
               <a:ext uri="{FF2B5EF4-FFF2-40B4-BE49-F238E27FC236}">
-                <a16:creationId xmlns:a16="http://schemas.microsoft.com/office/drawing/2014/main" id="{4D2B7C08-9D61-4139-80DF-B58CC6BD1172}"/>
+                <a16:creationId xmlns:a16="http://schemas.microsoft.com/office/drawing/2014/main" id="{BFD2D9AE-095B-480B-8CA3-7E8559C2AEC2}"/>
               </a:ext>
             </a:extLst>
           </p:cNvPr>
@@ -6595,7 +6595,7 @@
             </a:pathLst>
           </a:custGeom>
           <a:blipFill xmlns:a="http://schemas.openxmlformats.org/drawingml/2006/main">
-            <a:blip xmlns:r="http://schemas.openxmlformats.org/officeDocument/2006/relationships" r:embed="Rf0926c8320a045af"/>
+            <a:blip xmlns:r="http://schemas.openxmlformats.org/officeDocument/2006/relationships" r:embed="R435e899dfd3942c2"/>
             <a:stretch>
               <a:fillRect l="-7801" t="0" r="-7801" b="0"/>
             </a:stretch>
@@ -6607,7 +6607,7 @@
           <p:cNvPr id="6" name="">
             <a:extLst xmlns:a="http://schemas.openxmlformats.org/drawingml/2006/main">
               <a:ext uri="{FF2B5EF4-FFF2-40B4-BE49-F238E27FC236}">
-                <a16:creationId xmlns:a16="http://schemas.microsoft.com/office/drawing/2014/main" id="{CD2DA7D3-D631-4279-9810-D1A2FEFE88F4}"/>
+                <a16:creationId xmlns:a16="http://schemas.microsoft.com/office/drawing/2014/main" id="{A2FF8814-52EA-4582-BE52-9ADDB5DDB569}"/>
               </a:ext>
             </a:extLst>
           </p:cNvPr>
@@ -6665,7 +6665,7 @@
           <p:cNvPr id="7" name="">
             <a:extLst xmlns:a="http://schemas.openxmlformats.org/drawingml/2006/main">
               <a:ext uri="{FF2B5EF4-FFF2-40B4-BE49-F238E27FC236}">
-                <a16:creationId xmlns:a16="http://schemas.microsoft.com/office/drawing/2014/main" id="{266EE3AE-3DED-44AC-AFE3-283483B001B9}"/>
+                <a16:creationId xmlns:a16="http://schemas.microsoft.com/office/drawing/2014/main" id="{55BF7055-0F62-4F58-B98E-4C1A765D6350}"/>
               </a:ext>
             </a:extLst>
           </p:cNvPr>
@@ -6723,7 +6723,7 @@
           <p:cNvPr id="8" name="">
             <a:extLst xmlns:a="http://schemas.openxmlformats.org/drawingml/2006/main">
               <a:ext uri="{FF2B5EF4-FFF2-40B4-BE49-F238E27FC236}">
-                <a16:creationId xmlns:a16="http://schemas.microsoft.com/office/drawing/2014/main" id="{E8130C83-BB9C-44A3-ADC4-9405A3CE6333}"/>
+                <a16:creationId xmlns:a16="http://schemas.microsoft.com/office/drawing/2014/main" id="{A94A0CEE-37BE-42B3-B254-B742421044F1}"/>
               </a:ext>
             </a:extLst>
           </p:cNvPr>
@@ -6756,7 +6756,7 @@
           <p:cNvPr id="9" name="">
             <a:extLst xmlns:a="http://schemas.openxmlformats.org/drawingml/2006/main">
               <a:ext uri="{FF2B5EF4-FFF2-40B4-BE49-F238E27FC236}">
-                <a16:creationId xmlns:a16="http://schemas.microsoft.com/office/drawing/2014/main" id="{A9E65C5D-2088-4B48-B9EF-3A5A671B2976}"/>
+                <a16:creationId xmlns:a16="http://schemas.microsoft.com/office/drawing/2014/main" id="{73B4B78F-EDF1-4021-9C74-16E39538145A}"/>
               </a:ext>
             </a:extLst>
           </p:cNvPr>
@@ -6814,7 +6814,7 @@
           <p:cNvPr id="10" name="">
             <a:extLst xmlns:a="http://schemas.openxmlformats.org/drawingml/2006/main">
               <a:ext uri="{FF2B5EF4-FFF2-40B4-BE49-F238E27FC236}">
-                <a16:creationId xmlns:a16="http://schemas.microsoft.com/office/drawing/2014/main" id="{6CF7D3ED-2E78-4D7A-8958-0D312E005316}"/>
+                <a16:creationId xmlns:a16="http://schemas.microsoft.com/office/drawing/2014/main" id="{2D818B65-A840-44A0-967C-73A4BB0DBCD1}"/>
               </a:ext>
             </a:extLst>
           </p:cNvPr>
@@ -6847,7 +6847,7 @@
           <p:cNvPr id="11" name="">
             <a:extLst xmlns:a="http://schemas.openxmlformats.org/drawingml/2006/main">
               <a:ext uri="{FF2B5EF4-FFF2-40B4-BE49-F238E27FC236}">
-                <a16:creationId xmlns:a16="http://schemas.microsoft.com/office/drawing/2014/main" id="{9C43A53D-BD59-40CF-BAB3-D6D9C8E08464}"/>
+                <a16:creationId xmlns:a16="http://schemas.microsoft.com/office/drawing/2014/main" id="{ED6A85E6-8547-4D30-8B30-0DA7FA93091F}"/>
               </a:ext>
             </a:extLst>
           </p:cNvPr>
@@ -6905,7 +6905,7 @@
           <p:cNvPr id="12" name="">
             <a:extLst xmlns:a="http://schemas.openxmlformats.org/drawingml/2006/main">
               <a:ext uri="{FF2B5EF4-FFF2-40B4-BE49-F238E27FC236}">
-                <a16:creationId xmlns:a16="http://schemas.microsoft.com/office/drawing/2014/main" id="{3F98D736-902E-4064-8EBF-0A2D05D3ED53}"/>
+                <a16:creationId xmlns:a16="http://schemas.microsoft.com/office/drawing/2014/main" id="{710AA3D4-75D2-4D97-ADDB-167F62EA2DF9}"/>
               </a:ext>
             </a:extLst>
           </p:cNvPr>
@@ -6938,7 +6938,7 @@
           <p:cNvPr id="13" name="">
             <a:extLst xmlns:a="http://schemas.openxmlformats.org/drawingml/2006/main">
               <a:ext uri="{FF2B5EF4-FFF2-40B4-BE49-F238E27FC236}">
-                <a16:creationId xmlns:a16="http://schemas.microsoft.com/office/drawing/2014/main" id="{F6277057-A343-48EA-9170-40B290B5FFE2}"/>
+                <a16:creationId xmlns:a16="http://schemas.microsoft.com/office/drawing/2014/main" id="{4B15C28B-6220-4C52-A311-D36242BA001C}"/>
               </a:ext>
             </a:extLst>
           </p:cNvPr>
@@ -6996,7 +6996,7 @@
           <p:cNvPr id="14" name="">
             <a:extLst xmlns:a="http://schemas.openxmlformats.org/drawingml/2006/main">
               <a:ext uri="{FF2B5EF4-FFF2-40B4-BE49-F238E27FC236}">
-                <a16:creationId xmlns:a16="http://schemas.microsoft.com/office/drawing/2014/main" id="{74C4420A-ADFA-4300-91FA-19CE95C13E50}"/>
+                <a16:creationId xmlns:a16="http://schemas.microsoft.com/office/drawing/2014/main" id="{E191400B-A8E8-47E6-A409-7370EC8613FF}"/>
               </a:ext>
             </a:extLst>
           </p:cNvPr>
@@ -7029,7 +7029,7 @@
           <p:cNvPr id="15" name="">
             <a:extLst xmlns:a="http://schemas.openxmlformats.org/drawingml/2006/main">
               <a:ext uri="{FF2B5EF4-FFF2-40B4-BE49-F238E27FC236}">
-                <a16:creationId xmlns:a16="http://schemas.microsoft.com/office/drawing/2014/main" id="{AE32F893-68F8-4F0F-8478-C881F456E8E9}"/>
+                <a16:creationId xmlns:a16="http://schemas.microsoft.com/office/drawing/2014/main" id="{5FD0EC0A-3E76-4594-8695-5FB7BAE3B25A}"/>
               </a:ext>
             </a:extLst>
           </p:cNvPr>
@@ -7087,7 +7087,7 @@
           <p:cNvPr id="16" name="">
             <a:extLst xmlns:a="http://schemas.openxmlformats.org/drawingml/2006/main">
               <a:ext uri="{FF2B5EF4-FFF2-40B4-BE49-F238E27FC236}">
-                <a16:creationId xmlns:a16="http://schemas.microsoft.com/office/drawing/2014/main" id="{AB374F93-D24A-4AA5-9198-28E42414BAC5}"/>
+                <a16:creationId xmlns:a16="http://schemas.microsoft.com/office/drawing/2014/main" id="{13FD4DBD-5D81-41AF-BB85-AC133D24E189}"/>
               </a:ext>
             </a:extLst>
           </p:cNvPr>
@@ -7120,7 +7120,7 @@
           <p:cNvPr id="17" name="">
             <a:extLst xmlns:a="http://schemas.openxmlformats.org/drawingml/2006/main">
               <a:ext uri="{FF2B5EF4-FFF2-40B4-BE49-F238E27FC236}">
-                <a16:creationId xmlns:a16="http://schemas.microsoft.com/office/drawing/2014/main" id="{92EF7A04-7969-48D6-ADDD-2D549C4DAE99}"/>
+                <a16:creationId xmlns:a16="http://schemas.microsoft.com/office/drawing/2014/main" id="{BA420D1C-FC29-47BE-96E2-45086285D29B}"/>
               </a:ext>
             </a:extLst>
           </p:cNvPr>
@@ -7178,7 +7178,7 @@
           <p:cNvPr id="18" name="">
             <a:extLst xmlns:a="http://schemas.openxmlformats.org/drawingml/2006/main">
               <a:ext uri="{FF2B5EF4-FFF2-40B4-BE49-F238E27FC236}">
-                <a16:creationId xmlns:a16="http://schemas.microsoft.com/office/drawing/2014/main" id="{7691F0DC-52EF-48A5-94CF-A72BCDBC95E8}"/>
+                <a16:creationId xmlns:a16="http://schemas.microsoft.com/office/drawing/2014/main" id="{2108C1AB-8C01-4DC6-A2E8-9FCE5634A64C}"/>
               </a:ext>
             </a:extLst>
           </p:cNvPr>
@@ -7211,7 +7211,7 @@
           <p:cNvPr id="19" name="">
             <a:extLst xmlns:a="http://schemas.openxmlformats.org/drawingml/2006/main">
               <a:ext uri="{FF2B5EF4-FFF2-40B4-BE49-F238E27FC236}">
-                <a16:creationId xmlns:a16="http://schemas.microsoft.com/office/drawing/2014/main" id="{A7BF81CD-33FA-497E-9BA6-1434837111F0}"/>
+                <a16:creationId xmlns:a16="http://schemas.microsoft.com/office/drawing/2014/main" id="{84717A09-4EFA-4B88-9286-4D3A3E6F10D3}"/>
               </a:ext>
             </a:extLst>
           </p:cNvPr>
@@ -7269,7 +7269,7 @@
           <p:cNvPr id="20" name="">
             <a:extLst xmlns:a="http://schemas.openxmlformats.org/drawingml/2006/main">
               <a:ext uri="{FF2B5EF4-FFF2-40B4-BE49-F238E27FC236}">
-                <a16:creationId xmlns:a16="http://schemas.microsoft.com/office/drawing/2014/main" id="{F6BFAA6B-755E-448C-8114-B54B5C69AD76}"/>
+                <a16:creationId xmlns:a16="http://schemas.microsoft.com/office/drawing/2014/main" id="{31AF6AB9-1546-4E31-BA3B-243B3F1D8ACA}"/>
               </a:ext>
             </a:extLst>
           </p:cNvPr>
@@ -7302,7 +7302,7 @@
           <p:cNvPr id="21" name="">
             <a:extLst xmlns:a="http://schemas.openxmlformats.org/drawingml/2006/main">
               <a:ext uri="{FF2B5EF4-FFF2-40B4-BE49-F238E27FC236}">
-                <a16:creationId xmlns:a16="http://schemas.microsoft.com/office/drawing/2014/main" id="{9E804A73-FFC8-430B-AF2A-AD7AF6773E27}"/>
+                <a16:creationId xmlns:a16="http://schemas.microsoft.com/office/drawing/2014/main" id="{46569C7B-5A07-4B29-ADB5-40EC507B3A4A}"/>
               </a:ext>
             </a:extLst>
           </p:cNvPr>
@@ -7360,7 +7360,7 @@
           <p:cNvPr id="22" name="">
             <a:extLst xmlns:a="http://schemas.openxmlformats.org/drawingml/2006/main">
               <a:ext uri="{FF2B5EF4-FFF2-40B4-BE49-F238E27FC236}">
-                <a16:creationId xmlns:a16="http://schemas.microsoft.com/office/drawing/2014/main" id="{E6F37F17-8A41-4C61-86AE-1AFD7630ADE4}"/>
+                <a16:creationId xmlns:a16="http://schemas.microsoft.com/office/drawing/2014/main" id="{8155015C-C2D5-4081-B35B-5C4F294EE312}"/>
               </a:ext>
             </a:extLst>
           </p:cNvPr>
@@ -7393,7 +7393,7 @@
           <p:cNvPr id="23" name="">
             <a:extLst xmlns:a="http://schemas.openxmlformats.org/drawingml/2006/main">
               <a:ext uri="{FF2B5EF4-FFF2-40B4-BE49-F238E27FC236}">
-                <a16:creationId xmlns:a16="http://schemas.microsoft.com/office/drawing/2014/main" id="{91B60031-9F4D-4380-B528-1BD38DA2CF09}"/>
+                <a16:creationId xmlns:a16="http://schemas.microsoft.com/office/drawing/2014/main" id="{DC73226D-7FCB-4422-A704-601B2DCBDF8B}"/>
               </a:ext>
             </a:extLst>
           </p:cNvPr>
@@ -7451,7 +7451,7 @@
           <p:cNvPr id="24" name="">
             <a:extLst xmlns:a="http://schemas.openxmlformats.org/drawingml/2006/main">
               <a:ext uri="{FF2B5EF4-FFF2-40B4-BE49-F238E27FC236}">
-                <a16:creationId xmlns:a16="http://schemas.microsoft.com/office/drawing/2014/main" id="{78AE1A4A-246F-46CB-8EBE-260070C30C94}"/>
+                <a16:creationId xmlns:a16="http://schemas.microsoft.com/office/drawing/2014/main" id="{5ED0E2EC-8425-4279-A539-C56CA7AD7744}"/>
               </a:ext>
             </a:extLst>
           </p:cNvPr>
@@ -7484,7 +7484,7 @@
           <p:cNvPr id="25" name="">
             <a:extLst xmlns:a="http://schemas.openxmlformats.org/drawingml/2006/main">
               <a:ext uri="{FF2B5EF4-FFF2-40B4-BE49-F238E27FC236}">
-                <a16:creationId xmlns:a16="http://schemas.microsoft.com/office/drawing/2014/main" id="{F36EFB22-EEF6-4CBC-8EC8-EF5C25F845A8}"/>
+                <a16:creationId xmlns:a16="http://schemas.microsoft.com/office/drawing/2014/main" id="{B6E57573-2788-431E-BA29-3148577BDA1F}"/>
               </a:ext>
             </a:extLst>
           </p:cNvPr>
@@ -7542,7 +7542,7 @@
           <p:cNvPr id="26" name="">
             <a:extLst xmlns:a="http://schemas.openxmlformats.org/drawingml/2006/main">
               <a:ext uri="{FF2B5EF4-FFF2-40B4-BE49-F238E27FC236}">
-                <a16:creationId xmlns:a16="http://schemas.microsoft.com/office/drawing/2014/main" id="{751FD2A7-FE7C-43E7-B448-8C892A271786}"/>
+                <a16:creationId xmlns:a16="http://schemas.microsoft.com/office/drawing/2014/main" id="{BC74158D-5D93-414C-BD04-3DDD26F791CE}"/>
               </a:ext>
             </a:extLst>
           </p:cNvPr>
@@ -7575,7 +7575,7 @@
           <p:cNvPr id="27" name="">
             <a:extLst xmlns:a="http://schemas.openxmlformats.org/drawingml/2006/main">
               <a:ext uri="{FF2B5EF4-FFF2-40B4-BE49-F238E27FC236}">
-                <a16:creationId xmlns:a16="http://schemas.microsoft.com/office/drawing/2014/main" id="{B2067188-0022-4D0E-989C-3685C40C6D15}"/>
+                <a16:creationId xmlns:a16="http://schemas.microsoft.com/office/drawing/2014/main" id="{721940AA-8DB5-48A9-A704-81791AA8CD4D}"/>
               </a:ext>
             </a:extLst>
           </p:cNvPr>
@@ -7633,7 +7633,7 @@
           <p:cNvPr id="28" name="">
             <a:extLst xmlns:a="http://schemas.openxmlformats.org/drawingml/2006/main">
               <a:ext uri="{FF2B5EF4-FFF2-40B4-BE49-F238E27FC236}">
-                <a16:creationId xmlns:a16="http://schemas.microsoft.com/office/drawing/2014/main" id="{4262F731-E328-4664-ACF7-A4836B7B47F1}"/>
+                <a16:creationId xmlns:a16="http://schemas.microsoft.com/office/drawing/2014/main" id="{28F62052-45C9-4030-8B43-3627B4066AEB}"/>
               </a:ext>
             </a:extLst>
           </p:cNvPr>
@@ -7666,7 +7666,7 @@
           <p:cNvPr id="29" name="">
             <a:extLst xmlns:a="http://schemas.openxmlformats.org/drawingml/2006/main">
               <a:ext uri="{FF2B5EF4-FFF2-40B4-BE49-F238E27FC236}">
-                <a16:creationId xmlns:a16="http://schemas.microsoft.com/office/drawing/2014/main" id="{59CE0CA4-5E4A-44AA-A15B-3483ED4A9B65}"/>
+                <a16:creationId xmlns:a16="http://schemas.microsoft.com/office/drawing/2014/main" id="{D2E31900-193D-4505-B29F-D9FFA351E177}"/>
               </a:ext>
             </a:extLst>
           </p:cNvPr>
@@ -7724,7 +7724,7 @@
           <p:cNvPr id="30" name="">
             <a:extLst xmlns:a="http://schemas.openxmlformats.org/drawingml/2006/main">
               <a:ext uri="{FF2B5EF4-FFF2-40B4-BE49-F238E27FC236}">
-                <a16:creationId xmlns:a16="http://schemas.microsoft.com/office/drawing/2014/main" id="{7CB4D1DC-BBA7-44DF-B27D-23662DB261A1}"/>
+                <a16:creationId xmlns:a16="http://schemas.microsoft.com/office/drawing/2014/main" id="{CC28A53B-BD1E-4B8B-BBF3-44C61EB16F98}"/>
               </a:ext>
             </a:extLst>
           </p:cNvPr>
@@ -7757,7 +7757,7 @@
           <p:cNvPr id="31" name="">
             <a:extLst xmlns:a="http://schemas.openxmlformats.org/drawingml/2006/main">
               <a:ext uri="{FF2B5EF4-FFF2-40B4-BE49-F238E27FC236}">
-                <a16:creationId xmlns:a16="http://schemas.microsoft.com/office/drawing/2014/main" id="{F798F195-C284-49EA-A7E4-D7F43EDC7DFE}"/>
+                <a16:creationId xmlns:a16="http://schemas.microsoft.com/office/drawing/2014/main" id="{99E20EC2-0FD4-48E9-8541-992ED0057989}"/>
               </a:ext>
             </a:extLst>
           </p:cNvPr>
@@ -7815,7 +7815,7 @@
           <p:cNvPr id="32" name="">
             <a:extLst xmlns:a="http://schemas.openxmlformats.org/drawingml/2006/main">
               <a:ext uri="{FF2B5EF4-FFF2-40B4-BE49-F238E27FC236}">
-                <a16:creationId xmlns:a16="http://schemas.microsoft.com/office/drawing/2014/main" id="{57E0536C-9979-4566-8BF9-00B0FD937D0D}"/>
+                <a16:creationId xmlns:a16="http://schemas.microsoft.com/office/drawing/2014/main" id="{9E877315-54F1-4EB8-BD8B-F41BD01B0CF9}"/>
               </a:ext>
             </a:extLst>
           </p:cNvPr>
@@ -7848,7 +7848,7 @@
           <p:cNvPr id="33" name="">
             <a:extLst xmlns:a="http://schemas.openxmlformats.org/drawingml/2006/main">
               <a:ext uri="{FF2B5EF4-FFF2-40B4-BE49-F238E27FC236}">
-                <a16:creationId xmlns:a16="http://schemas.microsoft.com/office/drawing/2014/main" id="{B9CBADD3-042D-40E0-AD3B-16E59C56C5B6}"/>
+                <a16:creationId xmlns:a16="http://schemas.microsoft.com/office/drawing/2014/main" id="{A26E5D1E-8B19-418F-89F1-A91AE191D485}"/>
               </a:ext>
             </a:extLst>
           </p:cNvPr>
@@ -7906,7 +7906,7 @@
           <p:cNvPr id="34" name="">
             <a:extLst xmlns:a="http://schemas.openxmlformats.org/drawingml/2006/main">
               <a:ext uri="{FF2B5EF4-FFF2-40B4-BE49-F238E27FC236}">
-                <a16:creationId xmlns:a16="http://schemas.microsoft.com/office/drawing/2014/main" id="{704C1DF4-0A23-4ACD-887A-77BE6531EAB5}"/>
+                <a16:creationId xmlns:a16="http://schemas.microsoft.com/office/drawing/2014/main" id="{99F5BE93-07FA-4B4B-9374-D6005F011120}"/>
               </a:ext>
             </a:extLst>
           </p:cNvPr>
@@ -7939,7 +7939,7 @@
           <p:cNvPr id="35" name="">
             <a:extLst xmlns:a="http://schemas.openxmlformats.org/drawingml/2006/main">
               <a:ext uri="{FF2B5EF4-FFF2-40B4-BE49-F238E27FC236}">
-                <a16:creationId xmlns:a16="http://schemas.microsoft.com/office/drawing/2014/main" id="{CA695531-02F9-4178-A0E4-E91A827D3C2F}"/>
+                <a16:creationId xmlns:a16="http://schemas.microsoft.com/office/drawing/2014/main" id="{DBF16C90-5853-4C2B-BE05-FEF3E7674CCB}"/>
               </a:ext>
             </a:extLst>
           </p:cNvPr>
@@ -7997,7 +7997,7 @@
           <p:cNvPr id="36" name="">
             <a:extLst xmlns:a="http://schemas.openxmlformats.org/drawingml/2006/main">
               <a:ext uri="{FF2B5EF4-FFF2-40B4-BE49-F238E27FC236}">
-                <a16:creationId xmlns:a16="http://schemas.microsoft.com/office/drawing/2014/main" id="{10483FCA-024D-45C1-8459-0C0F85094C51}"/>
+                <a16:creationId xmlns:a16="http://schemas.microsoft.com/office/drawing/2014/main" id="{F41E1A49-A17A-4808-8A22-A075D8B28F71}"/>
               </a:ext>
             </a:extLst>
           </p:cNvPr>
@@ -8030,7 +8030,7 @@
           <p:cNvPr id="37" name="">
             <a:extLst xmlns:a="http://schemas.openxmlformats.org/drawingml/2006/main">
               <a:ext uri="{FF2B5EF4-FFF2-40B4-BE49-F238E27FC236}">
-                <a16:creationId xmlns:a16="http://schemas.microsoft.com/office/drawing/2014/main" id="{A8CCF2CB-60E1-45B8-A38F-B69B586477AA}"/>
+                <a16:creationId xmlns:a16="http://schemas.microsoft.com/office/drawing/2014/main" id="{B389B4FE-8847-4B2B-81EE-6DC4F835DCFD}"/>
               </a:ext>
             </a:extLst>
           </p:cNvPr>
@@ -8088,7 +8088,7 @@
           <p:cNvPr id="38" name="">
             <a:extLst xmlns:a="http://schemas.openxmlformats.org/drawingml/2006/main">
               <a:ext uri="{FF2B5EF4-FFF2-40B4-BE49-F238E27FC236}">
-                <a16:creationId xmlns:a16="http://schemas.microsoft.com/office/drawing/2014/main" id="{823A868F-AB01-49A8-BEDE-D60D3CD037E9}"/>
+                <a16:creationId xmlns:a16="http://schemas.microsoft.com/office/drawing/2014/main" id="{F6987CB6-322B-4F7E-87A4-B64D07C09D86}"/>
               </a:ext>
             </a:extLst>
           </p:cNvPr>
@@ -8121,7 +8121,7 @@
           <p:cNvPr id="39" name="">
             <a:extLst xmlns:a="http://schemas.openxmlformats.org/drawingml/2006/main">
               <a:ext uri="{FF2B5EF4-FFF2-40B4-BE49-F238E27FC236}">
-                <a16:creationId xmlns:a16="http://schemas.microsoft.com/office/drawing/2014/main" id="{FC30EBD5-FC38-47B8-8EF2-3A76726236DC}"/>
+                <a16:creationId xmlns:a16="http://schemas.microsoft.com/office/drawing/2014/main" id="{F847D6F7-63AA-4C67-BF89-585DDC57DF58}"/>
               </a:ext>
             </a:extLst>
           </p:cNvPr>
@@ -8179,7 +8179,7 @@
           <p:cNvPr id="40" name="">
             <a:extLst xmlns:a="http://schemas.openxmlformats.org/drawingml/2006/main">
               <a:ext uri="{FF2B5EF4-FFF2-40B4-BE49-F238E27FC236}">
-                <a16:creationId xmlns:a16="http://schemas.microsoft.com/office/drawing/2014/main" id="{D81DA713-B883-4F78-88DF-2EAEDA8D8083}"/>
+                <a16:creationId xmlns:a16="http://schemas.microsoft.com/office/drawing/2014/main" id="{678B2A96-E5C6-4B78-B84F-AC3E062852B3}"/>
               </a:ext>
             </a:extLst>
           </p:cNvPr>
@@ -8212,7 +8212,7 @@
           <p:cNvPr id="41" name="">
             <a:extLst xmlns:a="http://schemas.openxmlformats.org/drawingml/2006/main">
               <a:ext uri="{FF2B5EF4-FFF2-40B4-BE49-F238E27FC236}">
-                <a16:creationId xmlns:a16="http://schemas.microsoft.com/office/drawing/2014/main" id="{1992E73E-8224-4D0C-81DA-B4C37C90E959}"/>
+                <a16:creationId xmlns:a16="http://schemas.microsoft.com/office/drawing/2014/main" id="{FEB86E48-4B15-45B1-8133-0273A9FA998F}"/>
               </a:ext>
             </a:extLst>
           </p:cNvPr>
@@ -8270,7 +8270,7 @@
           <p:cNvPr id="42" name="">
             <a:extLst xmlns:a="http://schemas.openxmlformats.org/drawingml/2006/main">
               <a:ext uri="{FF2B5EF4-FFF2-40B4-BE49-F238E27FC236}">
-                <a16:creationId xmlns:a16="http://schemas.microsoft.com/office/drawing/2014/main" id="{51718222-BBE1-4671-B23C-8BAAA969F130}"/>
+                <a16:creationId xmlns:a16="http://schemas.microsoft.com/office/drawing/2014/main" id="{4F78261E-1E26-41BB-B088-CF1FA037D7C1}"/>
               </a:ext>
             </a:extLst>
           </p:cNvPr>
@@ -8303,7 +8303,7 @@
           <p:cNvPr id="43" name="">
             <a:extLst xmlns:a="http://schemas.openxmlformats.org/drawingml/2006/main">
               <a:ext uri="{FF2B5EF4-FFF2-40B4-BE49-F238E27FC236}">
-                <a16:creationId xmlns:a16="http://schemas.microsoft.com/office/drawing/2014/main" id="{7A699DFB-9480-4041-8C70-BFECB206E704}"/>
+                <a16:creationId xmlns:a16="http://schemas.microsoft.com/office/drawing/2014/main" id="{1BCEECC4-6A12-40A2-A0E1-34ED5FC4A091}"/>
               </a:ext>
             </a:extLst>
           </p:cNvPr>
@@ -8361,7 +8361,7 @@
           <p:cNvPr id="44" name="">
             <a:extLst xmlns:a="http://schemas.openxmlformats.org/drawingml/2006/main">
               <a:ext uri="{FF2B5EF4-FFF2-40B4-BE49-F238E27FC236}">
-                <a16:creationId xmlns:a16="http://schemas.microsoft.com/office/drawing/2014/main" id="{4F9E1630-B43A-4489-9C66-04A1C38245D8}"/>
+                <a16:creationId xmlns:a16="http://schemas.microsoft.com/office/drawing/2014/main" id="{72458A8F-2B3C-4E8F-AEE6-387DBEACD4B1}"/>
               </a:ext>
             </a:extLst>
           </p:cNvPr>
@@ -8394,7 +8394,7 @@
           <p:cNvPr id="45" name="">
             <a:extLst xmlns:a="http://schemas.openxmlformats.org/drawingml/2006/main">
               <a:ext uri="{FF2B5EF4-FFF2-40B4-BE49-F238E27FC236}">
-                <a16:creationId xmlns:a16="http://schemas.microsoft.com/office/drawing/2014/main" id="{017CCA8F-4092-4214-8FA3-41B1DA0B81F0}"/>
+                <a16:creationId xmlns:a16="http://schemas.microsoft.com/office/drawing/2014/main" id="{32FC1E98-0574-4A64-99F7-19697D63F383}"/>
               </a:ext>
             </a:extLst>
           </p:cNvPr>
@@ -8452,7 +8452,7 @@
           <p:cNvPr id="46" name="">
             <a:extLst xmlns:a="http://schemas.openxmlformats.org/drawingml/2006/main">
               <a:ext uri="{FF2B5EF4-FFF2-40B4-BE49-F238E27FC236}">
-                <a16:creationId xmlns:a16="http://schemas.microsoft.com/office/drawing/2014/main" id="{18D610CF-4F34-4516-AB83-A8E1481917E1}"/>
+                <a16:creationId xmlns:a16="http://schemas.microsoft.com/office/drawing/2014/main" id="{6C0A99CC-DEB7-4C7A-91B5-E8190B94DDD3}"/>
               </a:ext>
             </a:extLst>
           </p:cNvPr>
@@ -8485,7 +8485,7 @@
           <p:cNvPr id="47" name="">
             <a:extLst xmlns:a="http://schemas.openxmlformats.org/drawingml/2006/main">
               <a:ext uri="{FF2B5EF4-FFF2-40B4-BE49-F238E27FC236}">
-                <a16:creationId xmlns:a16="http://schemas.microsoft.com/office/drawing/2014/main" id="{D3C6749D-532B-4ED9-BF28-93646832E31F}"/>
+                <a16:creationId xmlns:a16="http://schemas.microsoft.com/office/drawing/2014/main" id="{A5F798BB-339F-49E3-B083-038CBCC351F2}"/>
               </a:ext>
             </a:extLst>
           </p:cNvPr>
@@ -8543,7 +8543,7 @@
           <p:cNvPr id="48" name="">
             <a:extLst xmlns:a="http://schemas.openxmlformats.org/drawingml/2006/main">
               <a:ext uri="{FF2B5EF4-FFF2-40B4-BE49-F238E27FC236}">
-                <a16:creationId xmlns:a16="http://schemas.microsoft.com/office/drawing/2014/main" id="{E4A59D92-0FCF-4A62-9646-61C125A1D187}"/>
+                <a16:creationId xmlns:a16="http://schemas.microsoft.com/office/drawing/2014/main" id="{6F26A1C9-25C6-41EE-94BA-06619799D03A}"/>
               </a:ext>
             </a:extLst>
           </p:cNvPr>
@@ -8576,7 +8576,7 @@
           <p:cNvPr id="49" name="">
             <a:extLst xmlns:a="http://schemas.openxmlformats.org/drawingml/2006/main">
               <a:ext uri="{FF2B5EF4-FFF2-40B4-BE49-F238E27FC236}">
-                <a16:creationId xmlns:a16="http://schemas.microsoft.com/office/drawing/2014/main" id="{DA43AE49-493D-4DEC-8DAA-7694F071740A}"/>
+                <a16:creationId xmlns:a16="http://schemas.microsoft.com/office/drawing/2014/main" id="{C61E0EFF-F01E-46A8-8944-10824D8850AD}"/>
               </a:ext>
             </a:extLst>
           </p:cNvPr>
@@ -8634,7 +8634,7 @@
           <p:cNvPr id="50" name="">
             <a:extLst xmlns:a="http://schemas.openxmlformats.org/drawingml/2006/main">
               <a:ext uri="{FF2B5EF4-FFF2-40B4-BE49-F238E27FC236}">
-                <a16:creationId xmlns:a16="http://schemas.microsoft.com/office/drawing/2014/main" id="{9FD3BADE-21D0-4F8A-A48E-4F2CD67BC0AC}"/>
+                <a16:creationId xmlns:a16="http://schemas.microsoft.com/office/drawing/2014/main" id="{FD7CE695-33ED-4DFF-8988-B89ED2CAD616}"/>
               </a:ext>
             </a:extLst>
           </p:cNvPr>
@@ -8667,7 +8667,7 @@
           <p:cNvPr id="51" name="">
             <a:extLst xmlns:a="http://schemas.openxmlformats.org/drawingml/2006/main">
               <a:ext uri="{FF2B5EF4-FFF2-40B4-BE49-F238E27FC236}">
-                <a16:creationId xmlns:a16="http://schemas.microsoft.com/office/drawing/2014/main" id="{5E3B230D-9B50-4A32-80E3-1FEE05A97F24}"/>
+                <a16:creationId xmlns:a16="http://schemas.microsoft.com/office/drawing/2014/main" id="{5A16C228-710A-4FE9-93C5-3531883184C4}"/>
               </a:ext>
             </a:extLst>
           </p:cNvPr>
@@ -8725,7 +8725,7 @@
           <p:cNvPr id="52" name="">
             <a:extLst xmlns:a="http://schemas.openxmlformats.org/drawingml/2006/main">
               <a:ext uri="{FF2B5EF4-FFF2-40B4-BE49-F238E27FC236}">
-                <a16:creationId xmlns:a16="http://schemas.microsoft.com/office/drawing/2014/main" id="{7DBE90BB-1035-4716-B310-9701A494A477}"/>
+                <a16:creationId xmlns:a16="http://schemas.microsoft.com/office/drawing/2014/main" id="{0808FAFD-0DDA-48EA-8C5B-0CCAFE5EC96A}"/>
               </a:ext>
             </a:extLst>
           </p:cNvPr>
@@ -8758,7 +8758,7 @@
           <p:cNvPr id="53" name="">
             <a:extLst xmlns:a="http://schemas.openxmlformats.org/drawingml/2006/main">
               <a:ext uri="{FF2B5EF4-FFF2-40B4-BE49-F238E27FC236}">
-                <a16:creationId xmlns:a16="http://schemas.microsoft.com/office/drawing/2014/main" id="{E940788B-07B7-4AE0-82B9-70727DCA05F8}"/>
+                <a16:creationId xmlns:a16="http://schemas.microsoft.com/office/drawing/2014/main" id="{354D02EC-AAB0-44A7-848D-539AF6994E9D}"/>
               </a:ext>
             </a:extLst>
           </p:cNvPr>
@@ -8816,7 +8816,7 @@
           <p:cNvPr id="54" name="">
             <a:extLst xmlns:a="http://schemas.openxmlformats.org/drawingml/2006/main">
               <a:ext uri="{FF2B5EF4-FFF2-40B4-BE49-F238E27FC236}">
-                <a16:creationId xmlns:a16="http://schemas.microsoft.com/office/drawing/2014/main" id="{DEB3A0AB-310B-4BFA-9171-E633562BCFD2}"/>
+                <a16:creationId xmlns:a16="http://schemas.microsoft.com/office/drawing/2014/main" id="{90060AA4-9D59-4C40-A2B1-0627810F6D92}"/>
               </a:ext>
             </a:extLst>
           </p:cNvPr>
@@ -8849,7 +8849,7 @@
           <p:cNvPr id="55" name="">
             <a:extLst xmlns:a="http://schemas.openxmlformats.org/drawingml/2006/main">
               <a:ext uri="{FF2B5EF4-FFF2-40B4-BE49-F238E27FC236}">
-                <a16:creationId xmlns:a16="http://schemas.microsoft.com/office/drawing/2014/main" id="{7937A2B7-2511-4CAC-BA9A-3EBE2928B88C}"/>
+                <a16:creationId xmlns:a16="http://schemas.microsoft.com/office/drawing/2014/main" id="{45BE7F78-DE41-439D-98A3-00B68C1A326F}"/>
               </a:ext>
             </a:extLst>
           </p:cNvPr>
@@ -8907,7 +8907,7 @@
           <p:cNvPr id="56" name="">
             <a:extLst xmlns:a="http://schemas.openxmlformats.org/drawingml/2006/main">
               <a:ext uri="{FF2B5EF4-FFF2-40B4-BE49-F238E27FC236}">
-                <a16:creationId xmlns:a16="http://schemas.microsoft.com/office/drawing/2014/main" id="{57661DBA-49EB-4EC4-9551-02DEF7E741B3}"/>
+                <a16:creationId xmlns:a16="http://schemas.microsoft.com/office/drawing/2014/main" id="{C3B6B761-A8ED-4DD0-B834-DCF4DE2475A3}"/>
               </a:ext>
             </a:extLst>
           </p:cNvPr>
@@ -8940,7 +8940,7 @@
           <p:cNvPr id="57" name="">
             <a:extLst xmlns:a="http://schemas.openxmlformats.org/drawingml/2006/main">
               <a:ext uri="{FF2B5EF4-FFF2-40B4-BE49-F238E27FC236}">
-                <a16:creationId xmlns:a16="http://schemas.microsoft.com/office/drawing/2014/main" id="{1FB92FBA-69F7-4EC5-A9F2-5B694ACAC070}"/>
+                <a16:creationId xmlns:a16="http://schemas.microsoft.com/office/drawing/2014/main" id="{44DE6667-C295-4C7F-9098-BF69D788D858}"/>
               </a:ext>
             </a:extLst>
           </p:cNvPr>
@@ -8998,7 +8998,7 @@
           <p:cNvPr id="58" name="">
             <a:extLst xmlns:a="http://schemas.openxmlformats.org/drawingml/2006/main">
               <a:ext uri="{FF2B5EF4-FFF2-40B4-BE49-F238E27FC236}">
-                <a16:creationId xmlns:a16="http://schemas.microsoft.com/office/drawing/2014/main" id="{9183CD83-475C-4EA4-BD57-642FEA70B319}"/>
+                <a16:creationId xmlns:a16="http://schemas.microsoft.com/office/drawing/2014/main" id="{43996FCD-B586-4029-805D-89999AD6FE07}"/>
               </a:ext>
             </a:extLst>
           </p:cNvPr>
@@ -9031,7 +9031,7 @@
           <p:cNvPr id="59" name="">
             <a:extLst xmlns:a="http://schemas.openxmlformats.org/drawingml/2006/main">
               <a:ext uri="{FF2B5EF4-FFF2-40B4-BE49-F238E27FC236}">
-                <a16:creationId xmlns:a16="http://schemas.microsoft.com/office/drawing/2014/main" id="{717027A0-4A91-4A47-B5BB-773B830985A8}"/>
+                <a16:creationId xmlns:a16="http://schemas.microsoft.com/office/drawing/2014/main" id="{53A38D8F-97E6-4978-8F36-9E5EF682CAD7}"/>
               </a:ext>
             </a:extLst>
           </p:cNvPr>
@@ -9089,7 +9089,7 @@
           <p:cNvPr id="60" name="">
             <a:extLst xmlns:a="http://schemas.openxmlformats.org/drawingml/2006/main">
               <a:ext uri="{FF2B5EF4-FFF2-40B4-BE49-F238E27FC236}">
-                <a16:creationId xmlns:a16="http://schemas.microsoft.com/office/drawing/2014/main" id="{2693AFF3-41D6-49D2-9A47-B5B111B08666}"/>
+                <a16:creationId xmlns:a16="http://schemas.microsoft.com/office/drawing/2014/main" id="{BE4803CB-2A5D-4D89-B9AB-86B6936C162C}"/>
               </a:ext>
             </a:extLst>
           </p:cNvPr>
@@ -9122,7 +9122,7 @@
           <p:cNvPr id="61" name="">
             <a:extLst xmlns:a="http://schemas.openxmlformats.org/drawingml/2006/main">
               <a:ext uri="{FF2B5EF4-FFF2-40B4-BE49-F238E27FC236}">
-                <a16:creationId xmlns:a16="http://schemas.microsoft.com/office/drawing/2014/main" id="{573A643A-C779-45B5-86C4-8822C92F6AB9}"/>
+                <a16:creationId xmlns:a16="http://schemas.microsoft.com/office/drawing/2014/main" id="{DEC6FE0F-E093-41E2-892D-40A52B2D34E0}"/>
               </a:ext>
             </a:extLst>
           </p:cNvPr>
@@ -9180,7 +9180,7 @@
           <p:cNvPr id="62" name="">
             <a:extLst xmlns:a="http://schemas.openxmlformats.org/drawingml/2006/main">
               <a:ext uri="{FF2B5EF4-FFF2-40B4-BE49-F238E27FC236}">
-                <a16:creationId xmlns:a16="http://schemas.microsoft.com/office/drawing/2014/main" id="{45889318-8D8E-477B-A5A6-48126F4D0045}"/>
+                <a16:creationId xmlns:a16="http://schemas.microsoft.com/office/drawing/2014/main" id="{9F245C10-780A-4185-9BFC-37169273706E}"/>
               </a:ext>
             </a:extLst>
           </p:cNvPr>
@@ -9213,7 +9213,7 @@
           <p:cNvPr id="63" name="">
             <a:extLst xmlns:a="http://schemas.openxmlformats.org/drawingml/2006/main">
               <a:ext uri="{FF2B5EF4-FFF2-40B4-BE49-F238E27FC236}">
-                <a16:creationId xmlns:a16="http://schemas.microsoft.com/office/drawing/2014/main" id="{CEC4B1CD-A048-4F61-A35B-AC5A5702AD9E}"/>
+                <a16:creationId xmlns:a16="http://schemas.microsoft.com/office/drawing/2014/main" id="{D8CB6B66-1940-43CE-ABCC-F7C8FE66C3A6}"/>
               </a:ext>
             </a:extLst>
           </p:cNvPr>
@@ -9271,7 +9271,7 @@
           <p:cNvPr id="64" name="">
             <a:extLst xmlns:a="http://schemas.openxmlformats.org/drawingml/2006/main">
               <a:ext uri="{FF2B5EF4-FFF2-40B4-BE49-F238E27FC236}">
-                <a16:creationId xmlns:a16="http://schemas.microsoft.com/office/drawing/2014/main" id="{3BF3A7F6-CC86-4FF6-A644-3A86ACD01DA6}"/>
+                <a16:creationId xmlns:a16="http://schemas.microsoft.com/office/drawing/2014/main" id="{3EBC110E-A1A8-4DE8-9909-73A3BF7A0057}"/>
               </a:ext>
             </a:extLst>
           </p:cNvPr>
@@ -9304,7 +9304,7 @@
           <p:cNvPr id="65" name="">
             <a:extLst xmlns:a="http://schemas.openxmlformats.org/drawingml/2006/main">
               <a:ext uri="{FF2B5EF4-FFF2-40B4-BE49-F238E27FC236}">
-                <a16:creationId xmlns:a16="http://schemas.microsoft.com/office/drawing/2014/main" id="{11B4660A-7D09-4261-B207-2693ECA3FA5F}"/>
+                <a16:creationId xmlns:a16="http://schemas.microsoft.com/office/drawing/2014/main" id="{8D601CFB-6B65-47D4-89E4-52C00F1248A0}"/>
               </a:ext>
             </a:extLst>
           </p:cNvPr>
@@ -9362,7 +9362,7 @@
           <p:cNvPr id="66" name="">
             <a:extLst xmlns:a="http://schemas.openxmlformats.org/drawingml/2006/main">
               <a:ext uri="{FF2B5EF4-FFF2-40B4-BE49-F238E27FC236}">
-                <a16:creationId xmlns:a16="http://schemas.microsoft.com/office/drawing/2014/main" id="{2EBEAEC4-4525-4505-AE1A-E642525ECEC5}"/>
+                <a16:creationId xmlns:a16="http://schemas.microsoft.com/office/drawing/2014/main" id="{F7DD5C4E-0E08-4A8A-86CB-9ABBF1E72943}"/>
               </a:ext>
             </a:extLst>
           </p:cNvPr>
@@ -9395,7 +9395,7 @@
           <p:cNvPr id="67" name="">
             <a:extLst xmlns:a="http://schemas.openxmlformats.org/drawingml/2006/main">
               <a:ext uri="{FF2B5EF4-FFF2-40B4-BE49-F238E27FC236}">
-                <a16:creationId xmlns:a16="http://schemas.microsoft.com/office/drawing/2014/main" id="{A9669579-332F-4AD7-8871-6634EA887EC1}"/>
+                <a16:creationId xmlns:a16="http://schemas.microsoft.com/office/drawing/2014/main" id="{7E45CAD7-9A32-4548-9614-31A50495412B}"/>
               </a:ext>
             </a:extLst>
           </p:cNvPr>
@@ -9453,7 +9453,7 @@
           <p:cNvPr id="68" name="">
             <a:extLst xmlns:a="http://schemas.openxmlformats.org/drawingml/2006/main">
               <a:ext uri="{FF2B5EF4-FFF2-40B4-BE49-F238E27FC236}">
-                <a16:creationId xmlns:a16="http://schemas.microsoft.com/office/drawing/2014/main" id="{32C7DA14-0568-4FFC-BB59-26D9F2286073}"/>
+                <a16:creationId xmlns:a16="http://schemas.microsoft.com/office/drawing/2014/main" id="{29FAC21E-293F-4A9F-99CA-1CD7A489119D}"/>
               </a:ext>
             </a:extLst>
           </p:cNvPr>
@@ -9486,7 +9486,7 @@
           <p:cNvPr id="69" name="">
             <a:extLst xmlns:a="http://schemas.openxmlformats.org/drawingml/2006/main">
               <a:ext uri="{FF2B5EF4-FFF2-40B4-BE49-F238E27FC236}">
-                <a16:creationId xmlns:a16="http://schemas.microsoft.com/office/drawing/2014/main" id="{4BEDCC5E-4CB3-4830-B659-A6F2D7CDBD47}"/>
+                <a16:creationId xmlns:a16="http://schemas.microsoft.com/office/drawing/2014/main" id="{D837CA80-7E2B-4225-9925-620AFF7366DF}"/>
               </a:ext>
             </a:extLst>
           </p:cNvPr>
@@ -9544,7 +9544,7 @@
           <p:cNvPr id="70" name="">
             <a:extLst xmlns:a="http://schemas.openxmlformats.org/drawingml/2006/main">
               <a:ext uri="{FF2B5EF4-FFF2-40B4-BE49-F238E27FC236}">
-                <a16:creationId xmlns:a16="http://schemas.microsoft.com/office/drawing/2014/main" id="{80762DDC-8164-41DE-AC39-4E15736EC30F}"/>
+                <a16:creationId xmlns:a16="http://schemas.microsoft.com/office/drawing/2014/main" id="{AEDA013A-3F7B-4F21-AC8B-C24099A215C7}"/>
               </a:ext>
             </a:extLst>
           </p:cNvPr>
@@ -9577,7 +9577,7 @@
           <p:cNvPr id="71" name="">
             <a:extLst xmlns:a="http://schemas.openxmlformats.org/drawingml/2006/main">
               <a:ext uri="{FF2B5EF4-FFF2-40B4-BE49-F238E27FC236}">
-                <a16:creationId xmlns:a16="http://schemas.microsoft.com/office/drawing/2014/main" id="{962FAE13-97FA-4D08-973C-8D87D86BE24E}"/>
+                <a16:creationId xmlns:a16="http://schemas.microsoft.com/office/drawing/2014/main" id="{096459CB-E6EA-4529-B55C-A78A6A91DA6C}"/>
               </a:ext>
             </a:extLst>
           </p:cNvPr>
@@ -9635,7 +9635,7 @@
           <p:cNvPr id="72" name="">
             <a:extLst xmlns:a="http://schemas.openxmlformats.org/drawingml/2006/main">
               <a:ext uri="{FF2B5EF4-FFF2-40B4-BE49-F238E27FC236}">
-                <a16:creationId xmlns:a16="http://schemas.microsoft.com/office/drawing/2014/main" id="{FF8CC517-0317-460E-BEF7-776EEB95B6CB}"/>
+                <a16:creationId xmlns:a16="http://schemas.microsoft.com/office/drawing/2014/main" id="{3CBBAA26-7D27-46D6-A87B-A940CFE9B13D}"/>
               </a:ext>
             </a:extLst>
           </p:cNvPr>
@@ -9668,7 +9668,7 @@
           <p:cNvPr id="73" name="">
             <a:extLst xmlns:a="http://schemas.openxmlformats.org/drawingml/2006/main">
               <a:ext uri="{FF2B5EF4-FFF2-40B4-BE49-F238E27FC236}">
-                <a16:creationId xmlns:a16="http://schemas.microsoft.com/office/drawing/2014/main" id="{149377EF-95EC-4EE9-80C3-2A09E4284859}"/>
+                <a16:creationId xmlns:a16="http://schemas.microsoft.com/office/drawing/2014/main" id="{5A13D6B7-6F0E-4D54-AAE6-49177DA4E7C1}"/>
               </a:ext>
             </a:extLst>
           </p:cNvPr>
@@ -9726,7 +9726,7 @@
           <p:cNvPr id="74" name="">
             <a:extLst xmlns:a="http://schemas.openxmlformats.org/drawingml/2006/main">
               <a:ext uri="{FF2B5EF4-FFF2-40B4-BE49-F238E27FC236}">
-                <a16:creationId xmlns:a16="http://schemas.microsoft.com/office/drawing/2014/main" id="{64109A16-6679-4673-AED7-FAE91D1582AB}"/>
+                <a16:creationId xmlns:a16="http://schemas.microsoft.com/office/drawing/2014/main" id="{88595B9C-05B4-4F08-A741-7DF807EF31F5}"/>
               </a:ext>
             </a:extLst>
           </p:cNvPr>
@@ -9759,7 +9759,7 @@
           <p:cNvPr id="75" name="">
             <a:extLst xmlns:a="http://schemas.openxmlformats.org/drawingml/2006/main">
               <a:ext uri="{FF2B5EF4-FFF2-40B4-BE49-F238E27FC236}">
-                <a16:creationId xmlns:a16="http://schemas.microsoft.com/office/drawing/2014/main" id="{14E318DA-481C-4E9C-BD7A-C4A5DAB69A8A}"/>
+                <a16:creationId xmlns:a16="http://schemas.microsoft.com/office/drawing/2014/main" id="{7654C426-AD7D-4568-A063-8E5607A44C23}"/>
               </a:ext>
             </a:extLst>
           </p:cNvPr>
@@ -9817,7 +9817,7 @@
           <p:cNvPr id="76" name="">
             <a:extLst xmlns:a="http://schemas.openxmlformats.org/drawingml/2006/main">
               <a:ext uri="{FF2B5EF4-FFF2-40B4-BE49-F238E27FC236}">
-                <a16:creationId xmlns:a16="http://schemas.microsoft.com/office/drawing/2014/main" id="{5C8E8479-677B-413C-BA15-4625C9E1A273}"/>
+                <a16:creationId xmlns:a16="http://schemas.microsoft.com/office/drawing/2014/main" id="{F1F268CF-2689-4A2E-AA18-91B00F4FEAB2}"/>
               </a:ext>
             </a:extLst>
           </p:cNvPr>
@@ -9850,7 +9850,7 @@
           <p:cNvPr id="77" name="">
             <a:extLst xmlns:a="http://schemas.openxmlformats.org/drawingml/2006/main">
               <a:ext uri="{FF2B5EF4-FFF2-40B4-BE49-F238E27FC236}">
-                <a16:creationId xmlns:a16="http://schemas.microsoft.com/office/drawing/2014/main" id="{C9B6A933-C16A-4ECC-B584-92F3E0FAE40E}"/>
+                <a16:creationId xmlns:a16="http://schemas.microsoft.com/office/drawing/2014/main" id="{79E179C3-F765-4740-9709-C2F1B7B1A202}"/>
               </a:ext>
             </a:extLst>
           </p:cNvPr>
@@ -9908,7 +9908,7 @@
           <p:cNvPr id="78" name="">
             <a:extLst xmlns:a="http://schemas.openxmlformats.org/drawingml/2006/main">
               <a:ext uri="{FF2B5EF4-FFF2-40B4-BE49-F238E27FC236}">
-                <a16:creationId xmlns:a16="http://schemas.microsoft.com/office/drawing/2014/main" id="{3B5C7739-E15A-4466-BBB6-6E30BDB1878B}"/>
+                <a16:creationId xmlns:a16="http://schemas.microsoft.com/office/drawing/2014/main" id="{48631E5F-C995-4112-9839-ECD08A7DFE14}"/>
               </a:ext>
             </a:extLst>
           </p:cNvPr>
@@ -9941,7 +9941,7 @@
           <p:cNvPr id="79" name="">
             <a:extLst xmlns:a="http://schemas.openxmlformats.org/drawingml/2006/main">
               <a:ext uri="{FF2B5EF4-FFF2-40B4-BE49-F238E27FC236}">
-                <a16:creationId xmlns:a16="http://schemas.microsoft.com/office/drawing/2014/main" id="{E01F6F86-E25D-4DEF-A072-AF1CFC0C06EC}"/>
+                <a16:creationId xmlns:a16="http://schemas.microsoft.com/office/drawing/2014/main" id="{D76CF952-B9B8-49E6-B8B9-D9EBB23F3E10}"/>
               </a:ext>
             </a:extLst>
           </p:cNvPr>
@@ -9999,7 +9999,7 @@
           <p:cNvPr id="80" name="">
             <a:extLst xmlns:a="http://schemas.openxmlformats.org/drawingml/2006/main">
               <a:ext uri="{FF2B5EF4-FFF2-40B4-BE49-F238E27FC236}">
-                <a16:creationId xmlns:a16="http://schemas.microsoft.com/office/drawing/2014/main" id="{0F6AAD33-4184-4C10-A4CF-F0C98A932EA2}"/>
+                <a16:creationId xmlns:a16="http://schemas.microsoft.com/office/drawing/2014/main" id="{55A43CA3-2C7B-4300-A596-F10AC8472164}"/>
               </a:ext>
             </a:extLst>
           </p:cNvPr>
@@ -10032,7 +10032,7 @@
           <p:cNvPr id="81" name="">
             <a:extLst xmlns:a="http://schemas.openxmlformats.org/drawingml/2006/main">
               <a:ext uri="{FF2B5EF4-FFF2-40B4-BE49-F238E27FC236}">
-                <a16:creationId xmlns:a16="http://schemas.microsoft.com/office/drawing/2014/main" id="{4E66EC8F-168F-4C36-9B88-18060D214E25}"/>
+                <a16:creationId xmlns:a16="http://schemas.microsoft.com/office/drawing/2014/main" id="{C0AC3D59-93B1-449B-BDD7-C4CB374E7E64}"/>
               </a:ext>
             </a:extLst>
           </p:cNvPr>
@@ -10090,7 +10090,7 @@
           <p:cNvPr id="82" name="">
             <a:extLst xmlns:a="http://schemas.openxmlformats.org/drawingml/2006/main">
               <a:ext uri="{FF2B5EF4-FFF2-40B4-BE49-F238E27FC236}">
-                <a16:creationId xmlns:a16="http://schemas.microsoft.com/office/drawing/2014/main" id="{56F7B2C5-66F2-4891-BF51-77B8EA0A60FE}"/>
+                <a16:creationId xmlns:a16="http://schemas.microsoft.com/office/drawing/2014/main" id="{8CAD43C7-4F66-4F0C-8476-2410281CFF0D}"/>
               </a:ext>
             </a:extLst>
           </p:cNvPr>
@@ -10123,7 +10123,7 @@
           <p:cNvPr id="83" name="">
             <a:extLst xmlns:a="http://schemas.openxmlformats.org/drawingml/2006/main">
               <a:ext uri="{FF2B5EF4-FFF2-40B4-BE49-F238E27FC236}">
-                <a16:creationId xmlns:a16="http://schemas.microsoft.com/office/drawing/2014/main" id="{ECE3A20E-C432-4156-BF23-500A5C460602}"/>
+                <a16:creationId xmlns:a16="http://schemas.microsoft.com/office/drawing/2014/main" id="{D923DDCF-840E-47D0-9634-430DBEA93A52}"/>
               </a:ext>
             </a:extLst>
           </p:cNvPr>
@@ -10181,7 +10181,7 @@
           <p:cNvPr id="84" name="">
             <a:extLst xmlns:a="http://schemas.openxmlformats.org/drawingml/2006/main">
               <a:ext uri="{FF2B5EF4-FFF2-40B4-BE49-F238E27FC236}">
-                <a16:creationId xmlns:a16="http://schemas.microsoft.com/office/drawing/2014/main" id="{C4F765DA-B00F-43DA-B6F6-F7CB5A8E0DB2}"/>
+                <a16:creationId xmlns:a16="http://schemas.microsoft.com/office/drawing/2014/main" id="{2256AD2E-5A04-4965-AB17-B03F43B242FB}"/>
               </a:ext>
             </a:extLst>
           </p:cNvPr>
@@ -10214,7 +10214,7 @@
           <p:cNvPr id="85" name="">
             <a:extLst xmlns:a="http://schemas.openxmlformats.org/drawingml/2006/main">
               <a:ext uri="{FF2B5EF4-FFF2-40B4-BE49-F238E27FC236}">
-                <a16:creationId xmlns:a16="http://schemas.microsoft.com/office/drawing/2014/main" id="{6A57880D-8C23-44DB-92F8-90B6C699BD8A}"/>
+                <a16:creationId xmlns:a16="http://schemas.microsoft.com/office/drawing/2014/main" id="{5107A4F6-F526-4FCF-A421-F826DD747832}"/>
               </a:ext>
             </a:extLst>
           </p:cNvPr>
@@ -10272,7 +10272,7 @@
           <p:cNvPr id="86" name="">
             <a:extLst xmlns:a="http://schemas.openxmlformats.org/drawingml/2006/main">
               <a:ext uri="{FF2B5EF4-FFF2-40B4-BE49-F238E27FC236}">
-                <a16:creationId xmlns:a16="http://schemas.microsoft.com/office/drawing/2014/main" id="{D2A2DB0B-5B5B-4536-B05E-C20AB449E940}"/>
+                <a16:creationId xmlns:a16="http://schemas.microsoft.com/office/drawing/2014/main" id="{E6BADF53-A97C-4D94-8627-655FF3EEBF9F}"/>
               </a:ext>
             </a:extLst>
           </p:cNvPr>
@@ -10434,7 +10434,7 @@
             </a:pathLst>
           </a:custGeom>
           <a:blipFill xmlns:a="http://schemas.openxmlformats.org/drawingml/2006/main">
-            <a:blip xmlns:r="http://schemas.openxmlformats.org/officeDocument/2006/relationships" r:embed="R2d15436cb3eb483e"/>
+            <a:blip xmlns:r="http://schemas.openxmlformats.org/officeDocument/2006/relationships" r:embed="R5b91cea5c1f14faf"/>
             <a:stretch>
               <a:fillRect l="-7801" t="0" r="-7801" b="0"/>
             </a:stretch>
@@ -10446,7 +10446,7 @@
           <p:cNvPr id="6" name="">
             <a:extLst xmlns:a="http://schemas.openxmlformats.org/drawingml/2006/main">
               <a:ext uri="{FF2B5EF4-FFF2-40B4-BE49-F238E27FC236}">
-                <a16:creationId xmlns:a16="http://schemas.microsoft.com/office/drawing/2014/main" id="{9361EAC4-A419-4444-A441-439F99058076}"/>
+                <a16:creationId xmlns:a16="http://schemas.microsoft.com/office/drawing/2014/main" id="{6ECAEDD5-BD6C-466D-B7F6-1B690DFB00D3}"/>
               </a:ext>
             </a:extLst>
           </p:cNvPr>
@@ -10504,7 +10504,7 @@
           <p:cNvPr id="7" name="">
             <a:extLst xmlns:a="http://schemas.openxmlformats.org/drawingml/2006/main">
               <a:ext uri="{FF2B5EF4-FFF2-40B4-BE49-F238E27FC236}">
-                <a16:creationId xmlns:a16="http://schemas.microsoft.com/office/drawing/2014/main" id="{58825C11-86F8-4AFF-AF0E-6FD00FB2E9EF}"/>
+                <a16:creationId xmlns:a16="http://schemas.microsoft.com/office/drawing/2014/main" id="{81A84769-0FB3-4036-8309-CAD1DD631065}"/>
               </a:ext>
             </a:extLst>
           </p:cNvPr>
@@ -10562,7 +10562,7 @@
           <p:cNvPr id="8" name="">
             <a:extLst xmlns:a="http://schemas.openxmlformats.org/drawingml/2006/main">
               <a:ext uri="{FF2B5EF4-FFF2-40B4-BE49-F238E27FC236}">
-                <a16:creationId xmlns:a16="http://schemas.microsoft.com/office/drawing/2014/main" id="{301EEF67-D99C-4C8E-99BE-C12E8F8EAFD0}"/>
+                <a16:creationId xmlns:a16="http://schemas.microsoft.com/office/drawing/2014/main" id="{B7B0493C-9BAB-4B22-BFAB-701E181A5517}"/>
               </a:ext>
             </a:extLst>
           </p:cNvPr>
@@ -10595,7 +10595,7 @@
           <p:cNvPr id="9" name="">
             <a:extLst xmlns:a="http://schemas.openxmlformats.org/drawingml/2006/main">
               <a:ext uri="{FF2B5EF4-FFF2-40B4-BE49-F238E27FC236}">
-                <a16:creationId xmlns:a16="http://schemas.microsoft.com/office/drawing/2014/main" id="{F9418C89-0BED-452D-BFA2-F6AECFD0F0FD}"/>
+                <a16:creationId xmlns:a16="http://schemas.microsoft.com/office/drawing/2014/main" id="{A4AEBDDD-71C5-4927-9D6C-149911CF3D3E}"/>
               </a:ext>
             </a:extLst>
           </p:cNvPr>
@@ -10653,7 +10653,7 @@
           <p:cNvPr id="10" name="">
             <a:extLst xmlns:a="http://schemas.openxmlformats.org/drawingml/2006/main">
               <a:ext uri="{FF2B5EF4-FFF2-40B4-BE49-F238E27FC236}">
-                <a16:creationId xmlns:a16="http://schemas.microsoft.com/office/drawing/2014/main" id="{8EFD0881-CDF5-4688-B1C1-D73D0DD4D6DF}"/>
+                <a16:creationId xmlns:a16="http://schemas.microsoft.com/office/drawing/2014/main" id="{9F840455-EAB9-4F8E-B406-4D16552ABB24}"/>
               </a:ext>
             </a:extLst>
           </p:cNvPr>
@@ -10686,7 +10686,7 @@
           <p:cNvPr id="11" name="">
             <a:extLst xmlns:a="http://schemas.openxmlformats.org/drawingml/2006/main">
               <a:ext uri="{FF2B5EF4-FFF2-40B4-BE49-F238E27FC236}">
-                <a16:creationId xmlns:a16="http://schemas.microsoft.com/office/drawing/2014/main" id="{22BA4B82-90D2-46E9-83D1-8992D0745C36}"/>
+                <a16:creationId xmlns:a16="http://schemas.microsoft.com/office/drawing/2014/main" id="{4B5C50A2-BCFD-41C1-BD99-ED74F64B6C55}"/>
               </a:ext>
             </a:extLst>
           </p:cNvPr>
@@ -10744,7 +10744,7 @@
           <p:cNvPr id="12" name="">
             <a:extLst xmlns:a="http://schemas.openxmlformats.org/drawingml/2006/main">
               <a:ext uri="{FF2B5EF4-FFF2-40B4-BE49-F238E27FC236}">
-                <a16:creationId xmlns:a16="http://schemas.microsoft.com/office/drawing/2014/main" id="{64D5F503-3FDA-40E5-A066-4B6EEFC55877}"/>
+                <a16:creationId xmlns:a16="http://schemas.microsoft.com/office/drawing/2014/main" id="{3E98F7F3-A59C-44E0-87B3-A623228ECC52}"/>
               </a:ext>
             </a:extLst>
           </p:cNvPr>
@@ -10777,7 +10777,7 @@
           <p:cNvPr id="13" name="">
             <a:extLst xmlns:a="http://schemas.openxmlformats.org/drawingml/2006/main">
               <a:ext uri="{FF2B5EF4-FFF2-40B4-BE49-F238E27FC236}">
-                <a16:creationId xmlns:a16="http://schemas.microsoft.com/office/drawing/2014/main" id="{AC14D2FE-E6DB-4CB8-9137-091E251507CA}"/>
+                <a16:creationId xmlns:a16="http://schemas.microsoft.com/office/drawing/2014/main" id="{00BFDEE1-8C66-4996-919F-DCFBCC53BF2F}"/>
               </a:ext>
             </a:extLst>
           </p:cNvPr>
@@ -10835,7 +10835,7 @@
           <p:cNvPr id="14" name="">
             <a:extLst xmlns:a="http://schemas.openxmlformats.org/drawingml/2006/main">
               <a:ext uri="{FF2B5EF4-FFF2-40B4-BE49-F238E27FC236}">
-                <a16:creationId xmlns:a16="http://schemas.microsoft.com/office/drawing/2014/main" id="{EB836E40-AE49-478B-AB1A-32A72262FA78}"/>
+                <a16:creationId xmlns:a16="http://schemas.microsoft.com/office/drawing/2014/main" id="{C9B665A3-71CE-4085-AE5D-8E525DF155E9}"/>
               </a:ext>
             </a:extLst>
           </p:cNvPr>
@@ -10868,7 +10868,7 @@
           <p:cNvPr id="15" name="">
             <a:extLst xmlns:a="http://schemas.openxmlformats.org/drawingml/2006/main">
               <a:ext uri="{FF2B5EF4-FFF2-40B4-BE49-F238E27FC236}">
-                <a16:creationId xmlns:a16="http://schemas.microsoft.com/office/drawing/2014/main" id="{8DFC3498-9799-4855-AAE4-EBB87007D288}"/>
+                <a16:creationId xmlns:a16="http://schemas.microsoft.com/office/drawing/2014/main" id="{5EA361F4-64BD-4FED-B37A-EAEA67A109D2}"/>
               </a:ext>
             </a:extLst>
           </p:cNvPr>
@@ -10926,7 +10926,7 @@
           <p:cNvPr id="16" name="">
             <a:extLst xmlns:a="http://schemas.openxmlformats.org/drawingml/2006/main">
               <a:ext uri="{FF2B5EF4-FFF2-40B4-BE49-F238E27FC236}">
-                <a16:creationId xmlns:a16="http://schemas.microsoft.com/office/drawing/2014/main" id="{6D20DD37-3BF4-41EF-85E3-8A5A9F3644C9}"/>
+                <a16:creationId xmlns:a16="http://schemas.microsoft.com/office/drawing/2014/main" id="{D7B5450C-EA83-48B6-B657-E8E9E5BC21A7}"/>
               </a:ext>
             </a:extLst>
           </p:cNvPr>
@@ -10959,7 +10959,7 @@
           <p:cNvPr id="17" name="">
             <a:extLst xmlns:a="http://schemas.openxmlformats.org/drawingml/2006/main">
               <a:ext uri="{FF2B5EF4-FFF2-40B4-BE49-F238E27FC236}">
-                <a16:creationId xmlns:a16="http://schemas.microsoft.com/office/drawing/2014/main" id="{BC03500F-468B-4E20-A4EE-E6FA48872B69}"/>
+                <a16:creationId xmlns:a16="http://schemas.microsoft.com/office/drawing/2014/main" id="{02F9429A-4E92-43DC-AA61-2AFD4FC7AEBF}"/>
               </a:ext>
             </a:extLst>
           </p:cNvPr>
@@ -11017,7 +11017,7 @@
           <p:cNvPr id="18" name="">
             <a:extLst xmlns:a="http://schemas.openxmlformats.org/drawingml/2006/main">
               <a:ext uri="{FF2B5EF4-FFF2-40B4-BE49-F238E27FC236}">
-                <a16:creationId xmlns:a16="http://schemas.microsoft.com/office/drawing/2014/main" id="{9147B638-2D09-4929-995B-38E4884F2526}"/>
+                <a16:creationId xmlns:a16="http://schemas.microsoft.com/office/drawing/2014/main" id="{5D345C82-CD38-4423-AFEE-E1BFFCD79B1C}"/>
               </a:ext>
             </a:extLst>
           </p:cNvPr>
@@ -11050,7 +11050,7 @@
           <p:cNvPr id="19" name="">
             <a:extLst xmlns:a="http://schemas.openxmlformats.org/drawingml/2006/main">
               <a:ext uri="{FF2B5EF4-FFF2-40B4-BE49-F238E27FC236}">
-                <a16:creationId xmlns:a16="http://schemas.microsoft.com/office/drawing/2014/main" id="{7A32A717-D99F-4E01-BFF0-2E9F95910D3D}"/>
+                <a16:creationId xmlns:a16="http://schemas.microsoft.com/office/drawing/2014/main" id="{BAB962C7-210A-46E6-AE5A-CFD4BAB461B6}"/>
               </a:ext>
             </a:extLst>
           </p:cNvPr>
@@ -11108,7 +11108,7 @@
           <p:cNvPr id="20" name="">
             <a:extLst xmlns:a="http://schemas.openxmlformats.org/drawingml/2006/main">
               <a:ext uri="{FF2B5EF4-FFF2-40B4-BE49-F238E27FC236}">
-                <a16:creationId xmlns:a16="http://schemas.microsoft.com/office/drawing/2014/main" id="{AA70B2D8-71BA-4DE6-BF9A-500FEEADEF34}"/>
+                <a16:creationId xmlns:a16="http://schemas.microsoft.com/office/drawing/2014/main" id="{69E92539-25A0-4446-B7AD-6D3BA2A8E4EC}"/>
               </a:ext>
             </a:extLst>
           </p:cNvPr>
@@ -11141,7 +11141,7 @@
           <p:cNvPr id="21" name="">
             <a:extLst xmlns:a="http://schemas.openxmlformats.org/drawingml/2006/main">
               <a:ext uri="{FF2B5EF4-FFF2-40B4-BE49-F238E27FC236}">
-                <a16:creationId xmlns:a16="http://schemas.microsoft.com/office/drawing/2014/main" id="{D487FE7B-3CDF-417E-AF63-71B1B6FB3042}"/>
+                <a16:creationId xmlns:a16="http://schemas.microsoft.com/office/drawing/2014/main" id="{B03D769E-5877-4506-9CC4-A6F65E5069C2}"/>
               </a:ext>
             </a:extLst>
           </p:cNvPr>
@@ -11199,7 +11199,7 @@
           <p:cNvPr id="22" name="">
             <a:extLst xmlns:a="http://schemas.openxmlformats.org/drawingml/2006/main">
               <a:ext uri="{FF2B5EF4-FFF2-40B4-BE49-F238E27FC236}">
-                <a16:creationId xmlns:a16="http://schemas.microsoft.com/office/drawing/2014/main" id="{59762432-1AFE-4803-925E-FD6A684C1F69}"/>
+                <a16:creationId xmlns:a16="http://schemas.microsoft.com/office/drawing/2014/main" id="{90C5407B-8CFF-4D93-A4E9-77F69E581699}"/>
               </a:ext>
             </a:extLst>
           </p:cNvPr>
@@ -11232,7 +11232,7 @@
           <p:cNvPr id="23" name="">
             <a:extLst xmlns:a="http://schemas.openxmlformats.org/drawingml/2006/main">
               <a:ext uri="{FF2B5EF4-FFF2-40B4-BE49-F238E27FC236}">
-                <a16:creationId xmlns:a16="http://schemas.microsoft.com/office/drawing/2014/main" id="{87845EB3-BEBA-47E3-8B72-E2DCD57E2605}"/>
+                <a16:creationId xmlns:a16="http://schemas.microsoft.com/office/drawing/2014/main" id="{C4C48C20-F7D0-46B5-B67F-6343A19677CA}"/>
               </a:ext>
             </a:extLst>
           </p:cNvPr>
@@ -11290,7 +11290,7 @@
           <p:cNvPr id="24" name="">
             <a:extLst xmlns:a="http://schemas.openxmlformats.org/drawingml/2006/main">
               <a:ext uri="{FF2B5EF4-FFF2-40B4-BE49-F238E27FC236}">
-                <a16:creationId xmlns:a16="http://schemas.microsoft.com/office/drawing/2014/main" id="{D1D80551-6AF1-4A9A-8502-F3152EF774AA}"/>
+                <a16:creationId xmlns:a16="http://schemas.microsoft.com/office/drawing/2014/main" id="{F35091B0-4A44-403F-A507-C0C08423B9C0}"/>
               </a:ext>
             </a:extLst>
           </p:cNvPr>
@@ -11323,7 +11323,7 @@
           <p:cNvPr id="25" name="">
             <a:extLst xmlns:a="http://schemas.openxmlformats.org/drawingml/2006/main">
               <a:ext uri="{FF2B5EF4-FFF2-40B4-BE49-F238E27FC236}">
-                <a16:creationId xmlns:a16="http://schemas.microsoft.com/office/drawing/2014/main" id="{064BB951-84D7-4756-A6BC-C3A8C561CA1F}"/>
+                <a16:creationId xmlns:a16="http://schemas.microsoft.com/office/drawing/2014/main" id="{A586C467-4B19-4D12-8DEB-A971661A2774}"/>
               </a:ext>
             </a:extLst>
           </p:cNvPr>
@@ -11381,7 +11381,7 @@
           <p:cNvPr id="26" name="">
             <a:extLst xmlns:a="http://schemas.openxmlformats.org/drawingml/2006/main">
               <a:ext uri="{FF2B5EF4-FFF2-40B4-BE49-F238E27FC236}">
-                <a16:creationId xmlns:a16="http://schemas.microsoft.com/office/drawing/2014/main" id="{2AC4AD57-6277-4292-903D-3C2AF93B3032}"/>
+                <a16:creationId xmlns:a16="http://schemas.microsoft.com/office/drawing/2014/main" id="{E84D2C5D-DF57-4F49-9BAF-93B3BE47C0A7}"/>
               </a:ext>
             </a:extLst>
           </p:cNvPr>
@@ -11414,7 +11414,7 @@
           <p:cNvPr id="27" name="">
             <a:extLst xmlns:a="http://schemas.openxmlformats.org/drawingml/2006/main">
               <a:ext uri="{FF2B5EF4-FFF2-40B4-BE49-F238E27FC236}">
-                <a16:creationId xmlns:a16="http://schemas.microsoft.com/office/drawing/2014/main" id="{7D9030AF-3F97-4D8F-B278-695370D581A8}"/>
+                <a16:creationId xmlns:a16="http://schemas.microsoft.com/office/drawing/2014/main" id="{4011FCD7-A2D8-4B53-97AF-DEC7F3F11D43}"/>
               </a:ext>
             </a:extLst>
           </p:cNvPr>
@@ -11472,7 +11472,7 @@
           <p:cNvPr id="28" name="">
             <a:extLst xmlns:a="http://schemas.openxmlformats.org/drawingml/2006/main">
               <a:ext uri="{FF2B5EF4-FFF2-40B4-BE49-F238E27FC236}">
-                <a16:creationId xmlns:a16="http://schemas.microsoft.com/office/drawing/2014/main" id="{FF2497E2-812E-4373-86D2-17B7C337EF9B}"/>
+                <a16:creationId xmlns:a16="http://schemas.microsoft.com/office/drawing/2014/main" id="{C215705C-BC25-479D-8027-1091C489192B}"/>
               </a:ext>
             </a:extLst>
           </p:cNvPr>
@@ -11505,7 +11505,7 @@
           <p:cNvPr id="29" name="">
             <a:extLst xmlns:a="http://schemas.openxmlformats.org/drawingml/2006/main">
               <a:ext uri="{FF2B5EF4-FFF2-40B4-BE49-F238E27FC236}">
-                <a16:creationId xmlns:a16="http://schemas.microsoft.com/office/drawing/2014/main" id="{087DB122-BC8D-4C06-B03C-7C3ED5BEE513}"/>
+                <a16:creationId xmlns:a16="http://schemas.microsoft.com/office/drawing/2014/main" id="{81656396-41C8-4729-9E3E-62AA3838984B}"/>
               </a:ext>
             </a:extLst>
           </p:cNvPr>
@@ -11563,7 +11563,7 @@
           <p:cNvPr id="30" name="">
             <a:extLst xmlns:a="http://schemas.openxmlformats.org/drawingml/2006/main">
               <a:ext uri="{FF2B5EF4-FFF2-40B4-BE49-F238E27FC236}">
-                <a16:creationId xmlns:a16="http://schemas.microsoft.com/office/drawing/2014/main" id="{2AEBFF89-581F-44A5-BFC0-D0C327ADD22B}"/>
+                <a16:creationId xmlns:a16="http://schemas.microsoft.com/office/drawing/2014/main" id="{DBB2A9BE-E878-40EE-8B9D-E5682E92D0BD}"/>
               </a:ext>
             </a:extLst>
           </p:cNvPr>
@@ -11596,7 +11596,7 @@
           <p:cNvPr id="31" name="">
             <a:extLst xmlns:a="http://schemas.openxmlformats.org/drawingml/2006/main">
               <a:ext uri="{FF2B5EF4-FFF2-40B4-BE49-F238E27FC236}">
-                <a16:creationId xmlns:a16="http://schemas.microsoft.com/office/drawing/2014/main" id="{9A0B522C-A9D9-41CE-A8A3-B303F8F356AD}"/>
+                <a16:creationId xmlns:a16="http://schemas.microsoft.com/office/drawing/2014/main" id="{38F63858-6517-4026-8E36-9D7F4B9FAE23}"/>
               </a:ext>
             </a:extLst>
           </p:cNvPr>
@@ -11654,7 +11654,7 @@
           <p:cNvPr id="32" name="">
             <a:extLst xmlns:a="http://schemas.openxmlformats.org/drawingml/2006/main">
               <a:ext uri="{FF2B5EF4-FFF2-40B4-BE49-F238E27FC236}">
-                <a16:creationId xmlns:a16="http://schemas.microsoft.com/office/drawing/2014/main" id="{86232286-3262-4112-9682-D532F090BC82}"/>
+                <a16:creationId xmlns:a16="http://schemas.microsoft.com/office/drawing/2014/main" id="{D0C943F3-E9D1-4EF7-9C0D-60D6C1586191}"/>
               </a:ext>
             </a:extLst>
           </p:cNvPr>
@@ -11687,7 +11687,7 @@
           <p:cNvPr id="33" name="">
             <a:extLst xmlns:a="http://schemas.openxmlformats.org/drawingml/2006/main">
               <a:ext uri="{FF2B5EF4-FFF2-40B4-BE49-F238E27FC236}">
-                <a16:creationId xmlns:a16="http://schemas.microsoft.com/office/drawing/2014/main" id="{973FE485-C167-405B-A825-D3DBAB906144}"/>
+                <a16:creationId xmlns:a16="http://schemas.microsoft.com/office/drawing/2014/main" id="{92221D83-0A54-4021-B5EE-704CAD58702C}"/>
               </a:ext>
             </a:extLst>
           </p:cNvPr>
@@ -11745,7 +11745,7 @@
           <p:cNvPr id="34" name="">
             <a:extLst xmlns:a="http://schemas.openxmlformats.org/drawingml/2006/main">
               <a:ext uri="{FF2B5EF4-FFF2-40B4-BE49-F238E27FC236}">
-                <a16:creationId xmlns:a16="http://schemas.microsoft.com/office/drawing/2014/main" id="{3C661E59-8246-424E-B1C6-4072D3DD41F4}"/>
+                <a16:creationId xmlns:a16="http://schemas.microsoft.com/office/drawing/2014/main" id="{2D6A9319-6D1D-4E27-9C5B-1926C9B9498D}"/>
               </a:ext>
             </a:extLst>
           </p:cNvPr>
@@ -11778,7 +11778,7 @@
           <p:cNvPr id="35" name="">
             <a:extLst xmlns:a="http://schemas.openxmlformats.org/drawingml/2006/main">
               <a:ext uri="{FF2B5EF4-FFF2-40B4-BE49-F238E27FC236}">
-                <a16:creationId xmlns:a16="http://schemas.microsoft.com/office/drawing/2014/main" id="{8E69CED0-2FE3-4B50-84A0-8A833EDFBE1E}"/>
+                <a16:creationId xmlns:a16="http://schemas.microsoft.com/office/drawing/2014/main" id="{239E7D68-4806-4C10-87F7-DC295CF50BBC}"/>
               </a:ext>
             </a:extLst>
           </p:cNvPr>
@@ -11836,7 +11836,7 @@
           <p:cNvPr id="36" name="">
             <a:extLst xmlns:a="http://schemas.openxmlformats.org/drawingml/2006/main">
               <a:ext uri="{FF2B5EF4-FFF2-40B4-BE49-F238E27FC236}">
-                <a16:creationId xmlns:a16="http://schemas.microsoft.com/office/drawing/2014/main" id="{CA23FC1E-F989-4807-802B-AD323918FB76}"/>
+                <a16:creationId xmlns:a16="http://schemas.microsoft.com/office/drawing/2014/main" id="{ACE2829B-EE77-4880-BA7E-789A351B1AA9}"/>
               </a:ext>
             </a:extLst>
           </p:cNvPr>
@@ -11869,7 +11869,7 @@
           <p:cNvPr id="37" name="">
             <a:extLst xmlns:a="http://schemas.openxmlformats.org/drawingml/2006/main">
               <a:ext uri="{FF2B5EF4-FFF2-40B4-BE49-F238E27FC236}">
-                <a16:creationId xmlns:a16="http://schemas.microsoft.com/office/drawing/2014/main" id="{231CC980-B315-485F-AC03-34BFFB51FCA0}"/>
+                <a16:creationId xmlns:a16="http://schemas.microsoft.com/office/drawing/2014/main" id="{99798030-7904-4900-9BC9-2EF237402BCD}"/>
               </a:ext>
             </a:extLst>
           </p:cNvPr>
@@ -11927,7 +11927,7 @@
           <p:cNvPr id="38" name="">
             <a:extLst xmlns:a="http://schemas.openxmlformats.org/drawingml/2006/main">
               <a:ext uri="{FF2B5EF4-FFF2-40B4-BE49-F238E27FC236}">
-                <a16:creationId xmlns:a16="http://schemas.microsoft.com/office/drawing/2014/main" id="{6AE71F7D-FE09-4938-86DF-521EDFD488A2}"/>
+                <a16:creationId xmlns:a16="http://schemas.microsoft.com/office/drawing/2014/main" id="{19F8CE8C-9537-4293-AF81-9EB7CE266CAC}"/>
               </a:ext>
             </a:extLst>
           </p:cNvPr>
@@ -11960,7 +11960,7 @@
           <p:cNvPr id="39" name="">
             <a:extLst xmlns:a="http://schemas.openxmlformats.org/drawingml/2006/main">
               <a:ext uri="{FF2B5EF4-FFF2-40B4-BE49-F238E27FC236}">
-                <a16:creationId xmlns:a16="http://schemas.microsoft.com/office/drawing/2014/main" id="{CE6E2193-2B8D-4772-9DA1-29067D171C1D}"/>
+                <a16:creationId xmlns:a16="http://schemas.microsoft.com/office/drawing/2014/main" id="{20584A46-435F-406E-8D09-F1C28883E492}"/>
               </a:ext>
             </a:extLst>
           </p:cNvPr>
@@ -12018,7 +12018,7 @@
           <p:cNvPr id="40" name="">
             <a:extLst xmlns:a="http://schemas.openxmlformats.org/drawingml/2006/main">
               <a:ext uri="{FF2B5EF4-FFF2-40B4-BE49-F238E27FC236}">
-                <a16:creationId xmlns:a16="http://schemas.microsoft.com/office/drawing/2014/main" id="{05333C16-0760-4D7B-A01B-6336D596E397}"/>
+                <a16:creationId xmlns:a16="http://schemas.microsoft.com/office/drawing/2014/main" id="{9BA7153E-0338-451E-823F-09132E0D4F6F}"/>
               </a:ext>
             </a:extLst>
           </p:cNvPr>
@@ -12051,7 +12051,7 @@
           <p:cNvPr id="41" name="">
             <a:extLst xmlns:a="http://schemas.openxmlformats.org/drawingml/2006/main">
               <a:ext uri="{FF2B5EF4-FFF2-40B4-BE49-F238E27FC236}">
-                <a16:creationId xmlns:a16="http://schemas.microsoft.com/office/drawing/2014/main" id="{878BE20B-7521-4F3F-A66A-C6A18188107C}"/>
+                <a16:creationId xmlns:a16="http://schemas.microsoft.com/office/drawing/2014/main" id="{32DB4FE8-4BED-4510-9FCB-F9634EE922F2}"/>
               </a:ext>
             </a:extLst>
           </p:cNvPr>
@@ -12109,7 +12109,7 @@
           <p:cNvPr id="42" name="">
             <a:extLst xmlns:a="http://schemas.openxmlformats.org/drawingml/2006/main">
               <a:ext uri="{FF2B5EF4-FFF2-40B4-BE49-F238E27FC236}">
-                <a16:creationId xmlns:a16="http://schemas.microsoft.com/office/drawing/2014/main" id="{3902F34F-FA45-4DBE-B027-1D33166064E0}"/>
+                <a16:creationId xmlns:a16="http://schemas.microsoft.com/office/drawing/2014/main" id="{0E3C183B-2F27-4C9D-A810-31EF2FEE4301}"/>
               </a:ext>
             </a:extLst>
           </p:cNvPr>
@@ -12142,7 +12142,7 @@
           <p:cNvPr id="43" name="">
             <a:extLst xmlns:a="http://schemas.openxmlformats.org/drawingml/2006/main">
               <a:ext uri="{FF2B5EF4-FFF2-40B4-BE49-F238E27FC236}">
-                <a16:creationId xmlns:a16="http://schemas.microsoft.com/office/drawing/2014/main" id="{E4AD2654-3A9E-4EF1-8CE6-07C83AFB2A82}"/>
+                <a16:creationId xmlns:a16="http://schemas.microsoft.com/office/drawing/2014/main" id="{F4131E0F-1A2B-445B-B3EC-D27668473042}"/>
               </a:ext>
             </a:extLst>
           </p:cNvPr>
@@ -12200,7 +12200,7 @@
           <p:cNvPr id="44" name="">
             <a:extLst xmlns:a="http://schemas.openxmlformats.org/drawingml/2006/main">
               <a:ext uri="{FF2B5EF4-FFF2-40B4-BE49-F238E27FC236}">
-                <a16:creationId xmlns:a16="http://schemas.microsoft.com/office/drawing/2014/main" id="{9C9837EC-ADD8-4464-96CC-27F1F8646CE1}"/>
+                <a16:creationId xmlns:a16="http://schemas.microsoft.com/office/drawing/2014/main" id="{E6A0EED2-6CFA-4197-B88E-A669397297F9}"/>
               </a:ext>
             </a:extLst>
           </p:cNvPr>
@@ -12233,7 +12233,7 @@
           <p:cNvPr id="45" name="">
             <a:extLst xmlns:a="http://schemas.openxmlformats.org/drawingml/2006/main">
               <a:ext uri="{FF2B5EF4-FFF2-40B4-BE49-F238E27FC236}">
-                <a16:creationId xmlns:a16="http://schemas.microsoft.com/office/drawing/2014/main" id="{5949FD0D-985B-4C4F-84BA-5A8FB2A4B252}"/>
+                <a16:creationId xmlns:a16="http://schemas.microsoft.com/office/drawing/2014/main" id="{C0AB209C-3293-4E02-A9DA-794791117C0D}"/>
               </a:ext>
             </a:extLst>
           </p:cNvPr>
@@ -12291,7 +12291,7 @@
           <p:cNvPr id="46" name="">
             <a:extLst xmlns:a="http://schemas.openxmlformats.org/drawingml/2006/main">
               <a:ext uri="{FF2B5EF4-FFF2-40B4-BE49-F238E27FC236}">
-                <a16:creationId xmlns:a16="http://schemas.microsoft.com/office/drawing/2014/main" id="{2309703F-19B5-4AB5-A71A-8E48F1A5C0B6}"/>
+                <a16:creationId xmlns:a16="http://schemas.microsoft.com/office/drawing/2014/main" id="{970A33F1-4DBF-4453-943B-2A96F0E7D7EF}"/>
               </a:ext>
             </a:extLst>
           </p:cNvPr>
@@ -12324,7 +12324,7 @@
           <p:cNvPr id="47" name="">
             <a:extLst xmlns:a="http://schemas.openxmlformats.org/drawingml/2006/main">
               <a:ext uri="{FF2B5EF4-FFF2-40B4-BE49-F238E27FC236}">
-                <a16:creationId xmlns:a16="http://schemas.microsoft.com/office/drawing/2014/main" id="{1FB395FC-BC5A-423C-A1D7-28F9EC66658B}"/>
+                <a16:creationId xmlns:a16="http://schemas.microsoft.com/office/drawing/2014/main" id="{06D53F67-EE48-4B9F-808F-CD6AF080489D}"/>
               </a:ext>
             </a:extLst>
           </p:cNvPr>
@@ -12382,7 +12382,7 @@
           <p:cNvPr id="48" name="">
             <a:extLst xmlns:a="http://schemas.openxmlformats.org/drawingml/2006/main">
               <a:ext uri="{FF2B5EF4-FFF2-40B4-BE49-F238E27FC236}">
-                <a16:creationId xmlns:a16="http://schemas.microsoft.com/office/drawing/2014/main" id="{EB95EF51-228A-4B9A-81CA-9EABD09BD386}"/>
+                <a16:creationId xmlns:a16="http://schemas.microsoft.com/office/drawing/2014/main" id="{3822AE02-FA8D-469B-B1CB-D983BED3BBB8}"/>
               </a:ext>
             </a:extLst>
           </p:cNvPr>
@@ -12415,7 +12415,7 @@
           <p:cNvPr id="49" name="">
             <a:extLst xmlns:a="http://schemas.openxmlformats.org/drawingml/2006/main">
               <a:ext uri="{FF2B5EF4-FFF2-40B4-BE49-F238E27FC236}">
-                <a16:creationId xmlns:a16="http://schemas.microsoft.com/office/drawing/2014/main" id="{DCFE2158-4E4C-42E3-87CB-403228AC5F16}"/>
+                <a16:creationId xmlns:a16="http://schemas.microsoft.com/office/drawing/2014/main" id="{6CE68E63-A950-474C-8DA3-CF736CE11F64}"/>
               </a:ext>
             </a:extLst>
           </p:cNvPr>
@@ -12473,7 +12473,7 @@
           <p:cNvPr id="50" name="">
             <a:extLst xmlns:a="http://schemas.openxmlformats.org/drawingml/2006/main">
               <a:ext uri="{FF2B5EF4-FFF2-40B4-BE49-F238E27FC236}">
-                <a16:creationId xmlns:a16="http://schemas.microsoft.com/office/drawing/2014/main" id="{04148948-8571-473A-9DD3-3C801A2DE5DE}"/>
+                <a16:creationId xmlns:a16="http://schemas.microsoft.com/office/drawing/2014/main" id="{9D07F861-B333-45F6-9AEC-B8DC1DCB1565}"/>
               </a:ext>
             </a:extLst>
           </p:cNvPr>
@@ -12506,7 +12506,7 @@
           <p:cNvPr id="51" name="">
             <a:extLst xmlns:a="http://schemas.openxmlformats.org/drawingml/2006/main">
               <a:ext uri="{FF2B5EF4-FFF2-40B4-BE49-F238E27FC236}">
-                <a16:creationId xmlns:a16="http://schemas.microsoft.com/office/drawing/2014/main" id="{3E660266-D323-4075-95AF-A73B4F7ED510}"/>
+                <a16:creationId xmlns:a16="http://schemas.microsoft.com/office/drawing/2014/main" id="{9DCBE2A3-45F0-4DCF-8DC3-F07C4DB9BA4F}"/>
               </a:ext>
             </a:extLst>
           </p:cNvPr>
@@ -12564,7 +12564,7 @@
           <p:cNvPr id="52" name="">
             <a:extLst xmlns:a="http://schemas.openxmlformats.org/drawingml/2006/main">
               <a:ext uri="{FF2B5EF4-FFF2-40B4-BE49-F238E27FC236}">
-                <a16:creationId xmlns:a16="http://schemas.microsoft.com/office/drawing/2014/main" id="{152A8FF0-B14E-4914-9AD9-813036B74CE7}"/>
+                <a16:creationId xmlns:a16="http://schemas.microsoft.com/office/drawing/2014/main" id="{22B43397-C917-4668-8500-58AF14A27656}"/>
               </a:ext>
             </a:extLst>
           </p:cNvPr>
@@ -12597,7 +12597,7 @@
           <p:cNvPr id="53" name="">
             <a:extLst xmlns:a="http://schemas.openxmlformats.org/drawingml/2006/main">
               <a:ext uri="{FF2B5EF4-FFF2-40B4-BE49-F238E27FC236}">
-                <a16:creationId xmlns:a16="http://schemas.microsoft.com/office/drawing/2014/main" id="{B728D041-19F9-4C64-A413-307944FBC2C0}"/>
+                <a16:creationId xmlns:a16="http://schemas.microsoft.com/office/drawing/2014/main" id="{F2F549BB-9966-4289-898E-8E41E0596764}"/>
               </a:ext>
             </a:extLst>
           </p:cNvPr>
@@ -12655,7 +12655,7 @@
           <p:cNvPr id="54" name="">
             <a:extLst xmlns:a="http://schemas.openxmlformats.org/drawingml/2006/main">
               <a:ext uri="{FF2B5EF4-FFF2-40B4-BE49-F238E27FC236}">
-                <a16:creationId xmlns:a16="http://schemas.microsoft.com/office/drawing/2014/main" id="{8C40101C-A48B-4847-A3F1-600183A696A2}"/>
+                <a16:creationId xmlns:a16="http://schemas.microsoft.com/office/drawing/2014/main" id="{8E541CF7-7E45-4281-ACBB-21E9F5176F39}"/>
               </a:ext>
             </a:extLst>
           </p:cNvPr>
@@ -12688,7 +12688,7 @@
           <p:cNvPr id="55" name="">
             <a:extLst xmlns:a="http://schemas.openxmlformats.org/drawingml/2006/main">
               <a:ext uri="{FF2B5EF4-FFF2-40B4-BE49-F238E27FC236}">
-                <a16:creationId xmlns:a16="http://schemas.microsoft.com/office/drawing/2014/main" id="{F2E776BE-3A00-4DD9-B37C-4E962E176FAF}"/>
+                <a16:creationId xmlns:a16="http://schemas.microsoft.com/office/drawing/2014/main" id="{E968161B-B470-448F-BE38-EB811152D322}"/>
               </a:ext>
             </a:extLst>
           </p:cNvPr>
@@ -12746,7 +12746,7 @@
           <p:cNvPr id="56" name="">
             <a:extLst xmlns:a="http://schemas.openxmlformats.org/drawingml/2006/main">
               <a:ext uri="{FF2B5EF4-FFF2-40B4-BE49-F238E27FC236}">
-                <a16:creationId xmlns:a16="http://schemas.microsoft.com/office/drawing/2014/main" id="{EC18613A-DE77-480E-BE45-873AB694D141}"/>
+                <a16:creationId xmlns:a16="http://schemas.microsoft.com/office/drawing/2014/main" id="{085AE279-D6DC-4A87-97F4-0E865BFDCC22}"/>
               </a:ext>
             </a:extLst>
           </p:cNvPr>
@@ -12779,7 +12779,7 @@
           <p:cNvPr id="57" name="">
             <a:extLst xmlns:a="http://schemas.openxmlformats.org/drawingml/2006/main">
               <a:ext uri="{FF2B5EF4-FFF2-40B4-BE49-F238E27FC236}">
-                <a16:creationId xmlns:a16="http://schemas.microsoft.com/office/drawing/2014/main" id="{C17FC28A-A292-49E0-9B22-BEF74E982A28}"/>
+                <a16:creationId xmlns:a16="http://schemas.microsoft.com/office/drawing/2014/main" id="{28AF33F0-BDD7-46DF-A342-DED863F6406B}"/>
               </a:ext>
             </a:extLst>
           </p:cNvPr>
@@ -12837,7 +12837,7 @@
           <p:cNvPr id="58" name="">
             <a:extLst xmlns:a="http://schemas.openxmlformats.org/drawingml/2006/main">
               <a:ext uri="{FF2B5EF4-FFF2-40B4-BE49-F238E27FC236}">
-                <a16:creationId xmlns:a16="http://schemas.microsoft.com/office/drawing/2014/main" id="{307F6EAD-5A4C-49FD-8DD7-845FFB6E0046}"/>
+                <a16:creationId xmlns:a16="http://schemas.microsoft.com/office/drawing/2014/main" id="{0E1827E1-E0FC-4593-84C6-75B253551821}"/>
               </a:ext>
             </a:extLst>
           </p:cNvPr>
@@ -12870,7 +12870,7 @@
           <p:cNvPr id="59" name="">
             <a:extLst xmlns:a="http://schemas.openxmlformats.org/drawingml/2006/main">
               <a:ext uri="{FF2B5EF4-FFF2-40B4-BE49-F238E27FC236}">
-                <a16:creationId xmlns:a16="http://schemas.microsoft.com/office/drawing/2014/main" id="{AEBE1843-A10F-4A90-A582-69DC0993448A}"/>
+                <a16:creationId xmlns:a16="http://schemas.microsoft.com/office/drawing/2014/main" id="{A06A9066-34FD-47E3-8F06-44EA84696C33}"/>
               </a:ext>
             </a:extLst>
           </p:cNvPr>
@@ -12928,7 +12928,7 @@
           <p:cNvPr id="60" name="">
             <a:extLst xmlns:a="http://schemas.openxmlformats.org/drawingml/2006/main">
               <a:ext uri="{FF2B5EF4-FFF2-40B4-BE49-F238E27FC236}">
-                <a16:creationId xmlns:a16="http://schemas.microsoft.com/office/drawing/2014/main" id="{42496634-C32A-4307-B4C1-90132951EB82}"/>
+                <a16:creationId xmlns:a16="http://schemas.microsoft.com/office/drawing/2014/main" id="{6FFB317A-8695-4976-A5CC-AF0030ED1D6D}"/>
               </a:ext>
             </a:extLst>
           </p:cNvPr>
@@ -12961,7 +12961,7 @@
           <p:cNvPr id="61" name="">
             <a:extLst xmlns:a="http://schemas.openxmlformats.org/drawingml/2006/main">
               <a:ext uri="{FF2B5EF4-FFF2-40B4-BE49-F238E27FC236}">
-                <a16:creationId xmlns:a16="http://schemas.microsoft.com/office/drawing/2014/main" id="{E14E6467-927C-40A4-A5F7-D094B67EC607}"/>
+                <a16:creationId xmlns:a16="http://schemas.microsoft.com/office/drawing/2014/main" id="{F834AC89-E94A-4EA9-B63F-AEEA8F375B39}"/>
               </a:ext>
             </a:extLst>
           </p:cNvPr>
@@ -13019,7 +13019,7 @@
           <p:cNvPr id="62" name="">
             <a:extLst xmlns:a="http://schemas.openxmlformats.org/drawingml/2006/main">
               <a:ext uri="{FF2B5EF4-FFF2-40B4-BE49-F238E27FC236}">
-                <a16:creationId xmlns:a16="http://schemas.microsoft.com/office/drawing/2014/main" id="{EB7A7FBB-7926-44CD-9608-9F88EF84764D}"/>
+                <a16:creationId xmlns:a16="http://schemas.microsoft.com/office/drawing/2014/main" id="{135C0B4E-AB02-48EC-B482-225B3B7267A2}"/>
               </a:ext>
             </a:extLst>
           </p:cNvPr>
@@ -13052,7 +13052,7 @@
           <p:cNvPr id="63" name="">
             <a:extLst xmlns:a="http://schemas.openxmlformats.org/drawingml/2006/main">
               <a:ext uri="{FF2B5EF4-FFF2-40B4-BE49-F238E27FC236}">
-                <a16:creationId xmlns:a16="http://schemas.microsoft.com/office/drawing/2014/main" id="{3A3FD62D-2A6A-494A-BFF5-47D43FB663E4}"/>
+                <a16:creationId xmlns:a16="http://schemas.microsoft.com/office/drawing/2014/main" id="{9D3172F6-45F9-4C88-9A3C-3DFAEC2FE2DD}"/>
               </a:ext>
             </a:extLst>
           </p:cNvPr>
@@ -13110,7 +13110,7 @@
           <p:cNvPr id="64" name="">
             <a:extLst xmlns:a="http://schemas.openxmlformats.org/drawingml/2006/main">
               <a:ext uri="{FF2B5EF4-FFF2-40B4-BE49-F238E27FC236}">
-                <a16:creationId xmlns:a16="http://schemas.microsoft.com/office/drawing/2014/main" id="{ADC26AA4-DFD2-4DD2-A0D9-62FCE5E37104}"/>
+                <a16:creationId xmlns:a16="http://schemas.microsoft.com/office/drawing/2014/main" id="{68F27712-FBFD-4B3B-A521-54CBC0742AB1}"/>
               </a:ext>
             </a:extLst>
           </p:cNvPr>
@@ -13143,7 +13143,7 @@
           <p:cNvPr id="65" name="">
             <a:extLst xmlns:a="http://schemas.openxmlformats.org/drawingml/2006/main">
               <a:ext uri="{FF2B5EF4-FFF2-40B4-BE49-F238E27FC236}">
-                <a16:creationId xmlns:a16="http://schemas.microsoft.com/office/drawing/2014/main" id="{7435A3ED-7F49-421A-AEE2-584011068D0A}"/>
+                <a16:creationId xmlns:a16="http://schemas.microsoft.com/office/drawing/2014/main" id="{B513A9E5-2E75-40E3-94B2-FDA74E0DABA6}"/>
               </a:ext>
             </a:extLst>
           </p:cNvPr>
@@ -13201,7 +13201,7 @@
           <p:cNvPr id="66" name="">
             <a:extLst xmlns:a="http://schemas.openxmlformats.org/drawingml/2006/main">
               <a:ext uri="{FF2B5EF4-FFF2-40B4-BE49-F238E27FC236}">
-                <a16:creationId xmlns:a16="http://schemas.microsoft.com/office/drawing/2014/main" id="{E90AB46D-65FF-47E0-A0C4-41EEF1E09B66}"/>
+                <a16:creationId xmlns:a16="http://schemas.microsoft.com/office/drawing/2014/main" id="{E7CE4033-FDE7-48CD-B2DE-602325547085}"/>
               </a:ext>
             </a:extLst>
           </p:cNvPr>
@@ -13234,7 +13234,7 @@
           <p:cNvPr id="67" name="">
             <a:extLst xmlns:a="http://schemas.openxmlformats.org/drawingml/2006/main">
               <a:ext uri="{FF2B5EF4-FFF2-40B4-BE49-F238E27FC236}">
-                <a16:creationId xmlns:a16="http://schemas.microsoft.com/office/drawing/2014/main" id="{CD4EA785-2A5F-4440-BD22-B091E0F33D64}"/>
+                <a16:creationId xmlns:a16="http://schemas.microsoft.com/office/drawing/2014/main" id="{7CB163F4-44AB-497E-B31F-1D4387130309}"/>
               </a:ext>
             </a:extLst>
           </p:cNvPr>
@@ -13292,7 +13292,7 @@
           <p:cNvPr id="68" name="">
             <a:extLst xmlns:a="http://schemas.openxmlformats.org/drawingml/2006/main">
               <a:ext uri="{FF2B5EF4-FFF2-40B4-BE49-F238E27FC236}">
-                <a16:creationId xmlns:a16="http://schemas.microsoft.com/office/drawing/2014/main" id="{EBF4190B-DA97-4A16-BA4E-5A13815A5805}"/>
+                <a16:creationId xmlns:a16="http://schemas.microsoft.com/office/drawing/2014/main" id="{05C0E3B5-2021-44A9-AF07-F58B74F6C700}"/>
               </a:ext>
             </a:extLst>
           </p:cNvPr>
@@ -13325,7 +13325,7 @@
           <p:cNvPr id="69" name="">
             <a:extLst xmlns:a="http://schemas.openxmlformats.org/drawingml/2006/main">
               <a:ext uri="{FF2B5EF4-FFF2-40B4-BE49-F238E27FC236}">
-                <a16:creationId xmlns:a16="http://schemas.microsoft.com/office/drawing/2014/main" id="{2FC7AD6D-240D-4CBD-85DC-C6B6401A30AB}"/>
+                <a16:creationId xmlns:a16="http://schemas.microsoft.com/office/drawing/2014/main" id="{890A6500-73D7-4AA4-95C2-556831BDFFA1}"/>
               </a:ext>
             </a:extLst>
           </p:cNvPr>
@@ -13383,7 +13383,7 @@
           <p:cNvPr id="70" name="">
             <a:extLst xmlns:a="http://schemas.openxmlformats.org/drawingml/2006/main">
               <a:ext uri="{FF2B5EF4-FFF2-40B4-BE49-F238E27FC236}">
-                <a16:creationId xmlns:a16="http://schemas.microsoft.com/office/drawing/2014/main" id="{EF361B2D-A6FA-4F1C-9662-1CA65BDC3D52}"/>
+                <a16:creationId xmlns:a16="http://schemas.microsoft.com/office/drawing/2014/main" id="{DC51094F-3A44-4CC6-8CFE-7F568C1168DD}"/>
               </a:ext>
             </a:extLst>
           </p:cNvPr>
@@ -13416,7 +13416,7 @@
           <p:cNvPr id="71" name="">
             <a:extLst xmlns:a="http://schemas.openxmlformats.org/drawingml/2006/main">
               <a:ext uri="{FF2B5EF4-FFF2-40B4-BE49-F238E27FC236}">
-                <a16:creationId xmlns:a16="http://schemas.microsoft.com/office/drawing/2014/main" id="{EA5C2D57-2EFE-4322-9BC3-18DAE43CD28D}"/>
+                <a16:creationId xmlns:a16="http://schemas.microsoft.com/office/drawing/2014/main" id="{799C0FD7-60EF-4673-913F-C6E9DD8245B7}"/>
               </a:ext>
             </a:extLst>
           </p:cNvPr>
@@ -13474,7 +13474,7 @@
           <p:cNvPr id="72" name="">
             <a:extLst xmlns:a="http://schemas.openxmlformats.org/drawingml/2006/main">
               <a:ext uri="{FF2B5EF4-FFF2-40B4-BE49-F238E27FC236}">
-                <a16:creationId xmlns:a16="http://schemas.microsoft.com/office/drawing/2014/main" id="{288EFC28-4D36-4EDE-9486-6358BC03F815}"/>
+                <a16:creationId xmlns:a16="http://schemas.microsoft.com/office/drawing/2014/main" id="{0E03DA36-DD34-4F0F-9A68-7EAC6BB7AB28}"/>
               </a:ext>
             </a:extLst>
           </p:cNvPr>
@@ -13507,7 +13507,7 @@
           <p:cNvPr id="73" name="">
             <a:extLst xmlns:a="http://schemas.openxmlformats.org/drawingml/2006/main">
               <a:ext uri="{FF2B5EF4-FFF2-40B4-BE49-F238E27FC236}">
-                <a16:creationId xmlns:a16="http://schemas.microsoft.com/office/drawing/2014/main" id="{9C934873-8560-4119-8B68-0EDAAF8B1642}"/>
+                <a16:creationId xmlns:a16="http://schemas.microsoft.com/office/drawing/2014/main" id="{8BF3FD25-9522-4F8F-B761-0FBBB9CD2C9A}"/>
               </a:ext>
             </a:extLst>
           </p:cNvPr>
@@ -13565,7 +13565,7 @@
           <p:cNvPr id="74" name="">
             <a:extLst xmlns:a="http://schemas.openxmlformats.org/drawingml/2006/main">
               <a:ext uri="{FF2B5EF4-FFF2-40B4-BE49-F238E27FC236}">
-                <a16:creationId xmlns:a16="http://schemas.microsoft.com/office/drawing/2014/main" id="{222C6B93-794F-4FA8-A695-21E759821B98}"/>
+                <a16:creationId xmlns:a16="http://schemas.microsoft.com/office/drawing/2014/main" id="{E1E8C23E-E722-45A9-9920-F73A7D1AA918}"/>
               </a:ext>
             </a:extLst>
           </p:cNvPr>
@@ -13598,7 +13598,7 @@
           <p:cNvPr id="75" name="">
             <a:extLst xmlns:a="http://schemas.openxmlformats.org/drawingml/2006/main">
               <a:ext uri="{FF2B5EF4-FFF2-40B4-BE49-F238E27FC236}">
-                <a16:creationId xmlns:a16="http://schemas.microsoft.com/office/drawing/2014/main" id="{A33B7B39-368E-4CA3-A989-52D1654AFEB5}"/>
+                <a16:creationId xmlns:a16="http://schemas.microsoft.com/office/drawing/2014/main" id="{FF8D407A-FAD3-445D-9381-6CCD02140264}"/>
               </a:ext>
             </a:extLst>
           </p:cNvPr>
@@ -13656,7 +13656,7 @@
           <p:cNvPr id="76" name="">
             <a:extLst xmlns:a="http://schemas.openxmlformats.org/drawingml/2006/main">
               <a:ext uri="{FF2B5EF4-FFF2-40B4-BE49-F238E27FC236}">
-                <a16:creationId xmlns:a16="http://schemas.microsoft.com/office/drawing/2014/main" id="{BADDFBDD-5899-4DC1-A5F1-3D72A909BA30}"/>
+                <a16:creationId xmlns:a16="http://schemas.microsoft.com/office/drawing/2014/main" id="{65AECEB2-CD4F-4F23-AB68-96BDC72D2534}"/>
               </a:ext>
             </a:extLst>
           </p:cNvPr>
@@ -13689,7 +13689,7 @@
           <p:cNvPr id="77" name="">
             <a:extLst xmlns:a="http://schemas.openxmlformats.org/drawingml/2006/main">
               <a:ext uri="{FF2B5EF4-FFF2-40B4-BE49-F238E27FC236}">
-                <a16:creationId xmlns:a16="http://schemas.microsoft.com/office/drawing/2014/main" id="{04B1C421-DF46-4E40-897D-70DCD5AE9EC4}"/>
+                <a16:creationId xmlns:a16="http://schemas.microsoft.com/office/drawing/2014/main" id="{B6FB3BF9-EF58-4770-B8C4-0BE9FBFE6AEF}"/>
               </a:ext>
             </a:extLst>
           </p:cNvPr>
@@ -13747,7 +13747,7 @@
           <p:cNvPr id="78" name="">
             <a:extLst xmlns:a="http://schemas.openxmlformats.org/drawingml/2006/main">
               <a:ext uri="{FF2B5EF4-FFF2-40B4-BE49-F238E27FC236}">
-                <a16:creationId xmlns:a16="http://schemas.microsoft.com/office/drawing/2014/main" id="{7A78A9EC-B495-4E02-BE43-868B9426F410}"/>
+                <a16:creationId xmlns:a16="http://schemas.microsoft.com/office/drawing/2014/main" id="{A7CB8C16-7122-40CA-99BB-88F147D29639}"/>
               </a:ext>
             </a:extLst>
           </p:cNvPr>
@@ -13780,7 +13780,7 @@
           <p:cNvPr id="79" name="">
             <a:extLst xmlns:a="http://schemas.openxmlformats.org/drawingml/2006/main">
               <a:ext uri="{FF2B5EF4-FFF2-40B4-BE49-F238E27FC236}">
-                <a16:creationId xmlns:a16="http://schemas.microsoft.com/office/drawing/2014/main" id="{26D032E2-1330-4739-9804-B2B9E3BE83C6}"/>
+                <a16:creationId xmlns:a16="http://schemas.microsoft.com/office/drawing/2014/main" id="{8AB470CE-6CF9-4199-8663-739ACBD4D2C6}"/>
               </a:ext>
             </a:extLst>
           </p:cNvPr>
@@ -13838,7 +13838,7 @@
           <p:cNvPr id="80" name="">
             <a:extLst xmlns:a="http://schemas.openxmlformats.org/drawingml/2006/main">
               <a:ext uri="{FF2B5EF4-FFF2-40B4-BE49-F238E27FC236}">
-                <a16:creationId xmlns:a16="http://schemas.microsoft.com/office/drawing/2014/main" id="{DD29238A-3EFE-4C13-9116-138A9339A9C4}"/>
+                <a16:creationId xmlns:a16="http://schemas.microsoft.com/office/drawing/2014/main" id="{F83D7BCB-080A-483E-B360-E56B1833A096}"/>
               </a:ext>
             </a:extLst>
           </p:cNvPr>
@@ -13871,7 +13871,7 @@
           <p:cNvPr id="81" name="">
             <a:extLst xmlns:a="http://schemas.openxmlformats.org/drawingml/2006/main">
               <a:ext uri="{FF2B5EF4-FFF2-40B4-BE49-F238E27FC236}">
-                <a16:creationId xmlns:a16="http://schemas.microsoft.com/office/drawing/2014/main" id="{E1DD95D6-5049-4A05-9341-BA218265288E}"/>
+                <a16:creationId xmlns:a16="http://schemas.microsoft.com/office/drawing/2014/main" id="{CCEF6A3E-D38B-4EB0-9A30-0B0FC42055F1}"/>
               </a:ext>
             </a:extLst>
           </p:cNvPr>
@@ -13929,7 +13929,7 @@
           <p:cNvPr id="82" name="">
             <a:extLst xmlns:a="http://schemas.openxmlformats.org/drawingml/2006/main">
               <a:ext uri="{FF2B5EF4-FFF2-40B4-BE49-F238E27FC236}">
-                <a16:creationId xmlns:a16="http://schemas.microsoft.com/office/drawing/2014/main" id="{3265C928-20F1-41FB-803D-F2037B47D347}"/>
+                <a16:creationId xmlns:a16="http://schemas.microsoft.com/office/drawing/2014/main" id="{454EB409-6098-4E4C-8FDF-861BDEF63ED9}"/>
               </a:ext>
             </a:extLst>
           </p:cNvPr>
@@ -13962,7 +13962,7 @@
           <p:cNvPr id="83" name="">
             <a:extLst xmlns:a="http://schemas.openxmlformats.org/drawingml/2006/main">
               <a:ext uri="{FF2B5EF4-FFF2-40B4-BE49-F238E27FC236}">
-                <a16:creationId xmlns:a16="http://schemas.microsoft.com/office/drawing/2014/main" id="{58554B84-9806-4379-8D9D-0116FE680520}"/>
+                <a16:creationId xmlns:a16="http://schemas.microsoft.com/office/drawing/2014/main" id="{9E975625-F73E-42B2-8D17-D099C0E9CFBB}"/>
               </a:ext>
             </a:extLst>
           </p:cNvPr>
@@ -14020,7 +14020,7 @@
           <p:cNvPr id="84" name="">
             <a:extLst xmlns:a="http://schemas.openxmlformats.org/drawingml/2006/main">
               <a:ext uri="{FF2B5EF4-FFF2-40B4-BE49-F238E27FC236}">
-                <a16:creationId xmlns:a16="http://schemas.microsoft.com/office/drawing/2014/main" id="{7774AB0F-ED94-4A8C-87C0-42351B56EBE5}"/>
+                <a16:creationId xmlns:a16="http://schemas.microsoft.com/office/drawing/2014/main" id="{8185D01F-7078-4696-B1CC-164AB9185897}"/>
               </a:ext>
             </a:extLst>
           </p:cNvPr>
@@ -14053,7 +14053,7 @@
           <p:cNvPr id="85" name="">
             <a:extLst xmlns:a="http://schemas.openxmlformats.org/drawingml/2006/main">
               <a:ext uri="{FF2B5EF4-FFF2-40B4-BE49-F238E27FC236}">
-                <a16:creationId xmlns:a16="http://schemas.microsoft.com/office/drawing/2014/main" id="{806DB148-6E12-4410-B224-38385AD2CA64}"/>
+                <a16:creationId xmlns:a16="http://schemas.microsoft.com/office/drawing/2014/main" id="{AB7BCE35-0CDC-4479-944F-D7E40EE844A8}"/>
               </a:ext>
             </a:extLst>
           </p:cNvPr>
@@ -14111,7 +14111,7 @@
           <p:cNvPr id="86" name="">
             <a:extLst xmlns:a="http://schemas.openxmlformats.org/drawingml/2006/main">
               <a:ext uri="{FF2B5EF4-FFF2-40B4-BE49-F238E27FC236}">
-                <a16:creationId xmlns:a16="http://schemas.microsoft.com/office/drawing/2014/main" id="{43EBC88A-8577-4380-834B-28071C037D31}"/>
+                <a16:creationId xmlns:a16="http://schemas.microsoft.com/office/drawing/2014/main" id="{800B7273-75A7-4EBF-AC43-C8E1E2EF6F56}"/>
               </a:ext>
             </a:extLst>
           </p:cNvPr>
@@ -14144,7 +14144,7 @@
           <p:cNvPr id="87" name="">
             <a:extLst xmlns:a="http://schemas.openxmlformats.org/drawingml/2006/main">
               <a:ext uri="{FF2B5EF4-FFF2-40B4-BE49-F238E27FC236}">
-                <a16:creationId xmlns:a16="http://schemas.microsoft.com/office/drawing/2014/main" id="{4FBBCAFE-0894-44D6-813A-E2F7AE937837}"/>
+                <a16:creationId xmlns:a16="http://schemas.microsoft.com/office/drawing/2014/main" id="{FD1CFECE-8513-470F-BC90-634498A6B4FD}"/>
               </a:ext>
             </a:extLst>
           </p:cNvPr>
@@ -14202,7 +14202,7 @@
           <p:cNvPr id="88" name="">
             <a:extLst xmlns:a="http://schemas.openxmlformats.org/drawingml/2006/main">
               <a:ext uri="{FF2B5EF4-FFF2-40B4-BE49-F238E27FC236}">
-                <a16:creationId xmlns:a16="http://schemas.microsoft.com/office/drawing/2014/main" id="{F16F66CE-DD3E-41BC-9CBA-90DAD0873E25}"/>
+                <a16:creationId xmlns:a16="http://schemas.microsoft.com/office/drawing/2014/main" id="{9DEDC7C4-5E7F-4F13-B146-A573C85B2360}"/>
               </a:ext>
             </a:extLst>
           </p:cNvPr>
@@ -14235,7 +14235,7 @@
           <p:cNvPr id="89" name="">
             <a:extLst xmlns:a="http://schemas.openxmlformats.org/drawingml/2006/main">
               <a:ext uri="{FF2B5EF4-FFF2-40B4-BE49-F238E27FC236}">
-                <a16:creationId xmlns:a16="http://schemas.microsoft.com/office/drawing/2014/main" id="{2F36B67B-C66A-46CC-83E0-C9BF3CF2A9E9}"/>
+                <a16:creationId xmlns:a16="http://schemas.microsoft.com/office/drawing/2014/main" id="{15D5E7F4-042A-4DF2-B108-E2D6BE88C5E3}"/>
               </a:ext>
             </a:extLst>
           </p:cNvPr>
@@ -14293,7 +14293,7 @@
           <p:cNvPr id="90" name="">
             <a:extLst xmlns:a="http://schemas.openxmlformats.org/drawingml/2006/main">
               <a:ext uri="{FF2B5EF4-FFF2-40B4-BE49-F238E27FC236}">
-                <a16:creationId xmlns:a16="http://schemas.microsoft.com/office/drawing/2014/main" id="{FD27AADF-7939-4382-8D16-5CE08FB10A0A}"/>
+                <a16:creationId xmlns:a16="http://schemas.microsoft.com/office/drawing/2014/main" id="{D5AEC8A6-A624-4F09-BB48-D25F24E0DA19}"/>
               </a:ext>
             </a:extLst>
           </p:cNvPr>
@@ -14326,7 +14326,7 @@
           <p:cNvPr id="91" name="">
             <a:extLst xmlns:a="http://schemas.openxmlformats.org/drawingml/2006/main">
               <a:ext uri="{FF2B5EF4-FFF2-40B4-BE49-F238E27FC236}">
-                <a16:creationId xmlns:a16="http://schemas.microsoft.com/office/drawing/2014/main" id="{8227746C-0CBA-4BB7-A8B6-576668B5CA3F}"/>
+                <a16:creationId xmlns:a16="http://schemas.microsoft.com/office/drawing/2014/main" id="{06A0626F-8BDC-4CF3-B8D7-D4D84E18841C}"/>
               </a:ext>
             </a:extLst>
           </p:cNvPr>
@@ -14384,7 +14384,7 @@
           <p:cNvPr id="92" name="">
             <a:extLst xmlns:a="http://schemas.openxmlformats.org/drawingml/2006/main">
               <a:ext uri="{FF2B5EF4-FFF2-40B4-BE49-F238E27FC236}">
-                <a16:creationId xmlns:a16="http://schemas.microsoft.com/office/drawing/2014/main" id="{FC94C794-AE5D-4CC5-B4AB-257347BE042C}"/>
+                <a16:creationId xmlns:a16="http://schemas.microsoft.com/office/drawing/2014/main" id="{BF7A4FCC-9452-484F-AB16-B5779D2B7B84}"/>
               </a:ext>
             </a:extLst>
           </p:cNvPr>
@@ -14417,7 +14417,7 @@
           <p:cNvPr id="93" name="">
             <a:extLst xmlns:a="http://schemas.openxmlformats.org/drawingml/2006/main">
               <a:ext uri="{FF2B5EF4-FFF2-40B4-BE49-F238E27FC236}">
-                <a16:creationId xmlns:a16="http://schemas.microsoft.com/office/drawing/2014/main" id="{E0B626FE-64E9-4159-9071-8946617698D8}"/>
+                <a16:creationId xmlns:a16="http://schemas.microsoft.com/office/drawing/2014/main" id="{F4B2C66F-EBCE-46D1-8D2B-0A8CE3D7C4DC}"/>
               </a:ext>
             </a:extLst>
           </p:cNvPr>
@@ -14475,7 +14475,7 @@
           <p:cNvPr id="94" name="">
             <a:extLst xmlns:a="http://schemas.openxmlformats.org/drawingml/2006/main">
               <a:ext uri="{FF2B5EF4-FFF2-40B4-BE49-F238E27FC236}">
-                <a16:creationId xmlns:a16="http://schemas.microsoft.com/office/drawing/2014/main" id="{1C216ED6-3F3B-4C26-8A8D-6DE9CF573CC2}"/>
+                <a16:creationId xmlns:a16="http://schemas.microsoft.com/office/drawing/2014/main" id="{DDE8DF8A-4F68-4F74-9B2B-9F3A3C2FC5D6}"/>
               </a:ext>
             </a:extLst>
           </p:cNvPr>
@@ -14508,7 +14508,7 @@
           <p:cNvPr id="95" name="">
             <a:extLst xmlns:a="http://schemas.openxmlformats.org/drawingml/2006/main">
               <a:ext uri="{FF2B5EF4-FFF2-40B4-BE49-F238E27FC236}">
-                <a16:creationId xmlns:a16="http://schemas.microsoft.com/office/drawing/2014/main" id="{0B789938-5BF4-43E1-A190-64ABC444596E}"/>
+                <a16:creationId xmlns:a16="http://schemas.microsoft.com/office/drawing/2014/main" id="{0289BC85-5024-42D3-BC35-A8E5F6D6BD57}"/>
               </a:ext>
             </a:extLst>
           </p:cNvPr>
@@ -14566,7 +14566,7 @@
           <p:cNvPr id="96" name="">
             <a:extLst xmlns:a="http://schemas.openxmlformats.org/drawingml/2006/main">
               <a:ext uri="{FF2B5EF4-FFF2-40B4-BE49-F238E27FC236}">
-                <a16:creationId xmlns:a16="http://schemas.microsoft.com/office/drawing/2014/main" id="{D9D94564-5020-431B-996D-C5514DF22F5A}"/>
+                <a16:creationId xmlns:a16="http://schemas.microsoft.com/office/drawing/2014/main" id="{626D6F4F-1C84-4AB7-8D31-31B18C83D1D8}"/>
               </a:ext>
             </a:extLst>
           </p:cNvPr>
@@ -14599,7 +14599,7 @@
           <p:cNvPr id="97" name="">
             <a:extLst xmlns:a="http://schemas.openxmlformats.org/drawingml/2006/main">
               <a:ext uri="{FF2B5EF4-FFF2-40B4-BE49-F238E27FC236}">
-                <a16:creationId xmlns:a16="http://schemas.microsoft.com/office/drawing/2014/main" id="{21452720-ECE1-48EE-97C0-3F599336312D}"/>
+                <a16:creationId xmlns:a16="http://schemas.microsoft.com/office/drawing/2014/main" id="{3C9C329B-D0B1-45B3-BF9B-D0462B95C66B}"/>
               </a:ext>
             </a:extLst>
           </p:cNvPr>
@@ -14657,7 +14657,7 @@
           <p:cNvPr id="98" name="">
             <a:extLst xmlns:a="http://schemas.openxmlformats.org/drawingml/2006/main">
               <a:ext uri="{FF2B5EF4-FFF2-40B4-BE49-F238E27FC236}">
-                <a16:creationId xmlns:a16="http://schemas.microsoft.com/office/drawing/2014/main" id="{DEFAF44C-EF94-4940-A1CE-4B93757B5B8A}"/>
+                <a16:creationId xmlns:a16="http://schemas.microsoft.com/office/drawing/2014/main" id="{A873F6BB-9239-4B14-BD4C-4A3E44DDC0D5}"/>
               </a:ext>
             </a:extLst>
           </p:cNvPr>
@@ -14690,7 +14690,7 @@
           <p:cNvPr id="99" name="">
             <a:extLst xmlns:a="http://schemas.openxmlformats.org/drawingml/2006/main">
               <a:ext uri="{FF2B5EF4-FFF2-40B4-BE49-F238E27FC236}">
-                <a16:creationId xmlns:a16="http://schemas.microsoft.com/office/drawing/2014/main" id="{9551CA3E-C5B4-445A-BCF3-85A8E0081008}"/>
+                <a16:creationId xmlns:a16="http://schemas.microsoft.com/office/drawing/2014/main" id="{2AB5C971-9A24-43CE-80BE-F905C0649151}"/>
               </a:ext>
             </a:extLst>
           </p:cNvPr>
@@ -14748,7 +14748,7 @@
           <p:cNvPr id="100" name="">
             <a:extLst xmlns:a="http://schemas.openxmlformats.org/drawingml/2006/main">
               <a:ext uri="{FF2B5EF4-FFF2-40B4-BE49-F238E27FC236}">
-                <a16:creationId xmlns:a16="http://schemas.microsoft.com/office/drawing/2014/main" id="{E0F23C03-93B7-4F07-AF77-75D4A665F994}"/>
+                <a16:creationId xmlns:a16="http://schemas.microsoft.com/office/drawing/2014/main" id="{7DEF9DD9-DD5A-47F1-856E-8D708784A045}"/>
               </a:ext>
             </a:extLst>
           </p:cNvPr>
@@ -14781,7 +14781,7 @@
           <p:cNvPr id="101" name="">
             <a:extLst xmlns:a="http://schemas.openxmlformats.org/drawingml/2006/main">
               <a:ext uri="{FF2B5EF4-FFF2-40B4-BE49-F238E27FC236}">
-                <a16:creationId xmlns:a16="http://schemas.microsoft.com/office/drawing/2014/main" id="{B6245900-599F-4D4A-A587-9CE4CC72289E}"/>
+                <a16:creationId xmlns:a16="http://schemas.microsoft.com/office/drawing/2014/main" id="{144EA100-26BF-423E-A530-7B9C89F2E724}"/>
               </a:ext>
             </a:extLst>
           </p:cNvPr>
@@ -14839,7 +14839,7 @@
           <p:cNvPr id="102" name="">
             <a:extLst xmlns:a="http://schemas.openxmlformats.org/drawingml/2006/main">
               <a:ext uri="{FF2B5EF4-FFF2-40B4-BE49-F238E27FC236}">
-                <a16:creationId xmlns:a16="http://schemas.microsoft.com/office/drawing/2014/main" id="{CC4DD4C2-FAE4-47FD-97CC-ED23A5974F7D}"/>
+                <a16:creationId xmlns:a16="http://schemas.microsoft.com/office/drawing/2014/main" id="{FEF442C9-405C-4FC5-9753-934DF1FB80DA}"/>
               </a:ext>
             </a:extLst>
           </p:cNvPr>
@@ -14872,7 +14872,7 @@
           <p:cNvPr id="103" name="">
             <a:extLst xmlns:a="http://schemas.openxmlformats.org/drawingml/2006/main">
               <a:ext uri="{FF2B5EF4-FFF2-40B4-BE49-F238E27FC236}">
-                <a16:creationId xmlns:a16="http://schemas.microsoft.com/office/drawing/2014/main" id="{50F50E1B-3722-4FFA-8040-E8359EE1B91C}"/>
+                <a16:creationId xmlns:a16="http://schemas.microsoft.com/office/drawing/2014/main" id="{438F797A-0F3A-4948-BF5A-262D816CC436}"/>
               </a:ext>
             </a:extLst>
           </p:cNvPr>
@@ -14930,7 +14930,7 @@
           <p:cNvPr id="104" name="">
             <a:extLst xmlns:a="http://schemas.openxmlformats.org/drawingml/2006/main">
               <a:ext uri="{FF2B5EF4-FFF2-40B4-BE49-F238E27FC236}">
-                <a16:creationId xmlns:a16="http://schemas.microsoft.com/office/drawing/2014/main" id="{DB6E9C4D-1756-4A9B-8EF5-975073434FD5}"/>
+                <a16:creationId xmlns:a16="http://schemas.microsoft.com/office/drawing/2014/main" id="{9F22C850-9BCE-4474-981D-3D3934BAB966}"/>
               </a:ext>
             </a:extLst>
           </p:cNvPr>
@@ -14963,7 +14963,7 @@
           <p:cNvPr id="105" name="">
             <a:extLst xmlns:a="http://schemas.openxmlformats.org/drawingml/2006/main">
               <a:ext uri="{FF2B5EF4-FFF2-40B4-BE49-F238E27FC236}">
-                <a16:creationId xmlns:a16="http://schemas.microsoft.com/office/drawing/2014/main" id="{205E48BF-F2E2-4BFB-B651-0B49BB8488AA}"/>
+                <a16:creationId xmlns:a16="http://schemas.microsoft.com/office/drawing/2014/main" id="{DE0C73C4-1DED-45FF-9777-BD76B48B4A76}"/>
               </a:ext>
             </a:extLst>
           </p:cNvPr>
@@ -15021,7 +15021,7 @@
           <p:cNvPr id="106" name="">
             <a:extLst xmlns:a="http://schemas.openxmlformats.org/drawingml/2006/main">
               <a:ext uri="{FF2B5EF4-FFF2-40B4-BE49-F238E27FC236}">
-                <a16:creationId xmlns:a16="http://schemas.microsoft.com/office/drawing/2014/main" id="{7A494D12-1BE4-411E-89E4-BF8F88644470}"/>
+                <a16:creationId xmlns:a16="http://schemas.microsoft.com/office/drawing/2014/main" id="{93A88E63-7FC5-4D6D-8A68-5BC98EA4521D}"/>
               </a:ext>
             </a:extLst>
           </p:cNvPr>
@@ -15054,7 +15054,7 @@
           <p:cNvPr id="107" name="">
             <a:extLst xmlns:a="http://schemas.openxmlformats.org/drawingml/2006/main">
               <a:ext uri="{FF2B5EF4-FFF2-40B4-BE49-F238E27FC236}">
-                <a16:creationId xmlns:a16="http://schemas.microsoft.com/office/drawing/2014/main" id="{01A6DD09-BCAE-4267-9BEA-CD79DEB110D4}"/>
+                <a16:creationId xmlns:a16="http://schemas.microsoft.com/office/drawing/2014/main" id="{1ED204AD-7B60-4E8F-BD92-9BB9FC686A02}"/>
               </a:ext>
             </a:extLst>
           </p:cNvPr>
@@ -15112,7 +15112,7 @@
           <p:cNvPr id="108" name="">
             <a:extLst xmlns:a="http://schemas.openxmlformats.org/drawingml/2006/main">
               <a:ext uri="{FF2B5EF4-FFF2-40B4-BE49-F238E27FC236}">
-                <a16:creationId xmlns:a16="http://schemas.microsoft.com/office/drawing/2014/main" id="{1BEDB9F5-EC56-4A4F-B1FF-40C8653D4730}"/>
+                <a16:creationId xmlns:a16="http://schemas.microsoft.com/office/drawing/2014/main" id="{55380334-8669-4C19-995E-B40F39B92086}"/>
               </a:ext>
             </a:extLst>
           </p:cNvPr>
@@ -15145,7 +15145,7 @@
           <p:cNvPr id="109" name="">
             <a:extLst xmlns:a="http://schemas.openxmlformats.org/drawingml/2006/main">
               <a:ext uri="{FF2B5EF4-FFF2-40B4-BE49-F238E27FC236}">
-                <a16:creationId xmlns:a16="http://schemas.microsoft.com/office/drawing/2014/main" id="{33BA8954-B53B-457A-B887-86D697AC873B}"/>
+                <a16:creationId xmlns:a16="http://schemas.microsoft.com/office/drawing/2014/main" id="{2F12AAE5-C79F-4556-8975-7E8DFEC2DA04}"/>
               </a:ext>
             </a:extLst>
           </p:cNvPr>
@@ -15203,7 +15203,7 @@
           <p:cNvPr id="110" name="">
             <a:extLst xmlns:a="http://schemas.openxmlformats.org/drawingml/2006/main">
               <a:ext uri="{FF2B5EF4-FFF2-40B4-BE49-F238E27FC236}">
-                <a16:creationId xmlns:a16="http://schemas.microsoft.com/office/drawing/2014/main" id="{89A49D22-905B-4290-BB6E-8B3A4F36876E}"/>
+                <a16:creationId xmlns:a16="http://schemas.microsoft.com/office/drawing/2014/main" id="{0DC330FD-86DB-4768-A04C-E81CFBFADA31}"/>
               </a:ext>
             </a:extLst>
           </p:cNvPr>
@@ -15236,7 +15236,7 @@
           <p:cNvPr id="111" name="">
             <a:extLst xmlns:a="http://schemas.openxmlformats.org/drawingml/2006/main">
               <a:ext uri="{FF2B5EF4-FFF2-40B4-BE49-F238E27FC236}">
-                <a16:creationId xmlns:a16="http://schemas.microsoft.com/office/drawing/2014/main" id="{8CA3D179-1BB8-4273-97E7-CCE260E42609}"/>
+                <a16:creationId xmlns:a16="http://schemas.microsoft.com/office/drawing/2014/main" id="{829B5203-29EF-4A22-A919-10D6C488524F}"/>
               </a:ext>
             </a:extLst>
           </p:cNvPr>
@@ -15294,7 +15294,7 @@
           <p:cNvPr id="112" name="">
             <a:extLst xmlns:a="http://schemas.openxmlformats.org/drawingml/2006/main">
               <a:ext uri="{FF2B5EF4-FFF2-40B4-BE49-F238E27FC236}">
-                <a16:creationId xmlns:a16="http://schemas.microsoft.com/office/drawing/2014/main" id="{948F1581-A08C-4BA4-8D65-FB80E866BE98}"/>
+                <a16:creationId xmlns:a16="http://schemas.microsoft.com/office/drawing/2014/main" id="{35BBCC6A-FDE6-4E93-9CBC-2D16C4A8418E}"/>
               </a:ext>
             </a:extLst>
           </p:cNvPr>
@@ -15327,7 +15327,7 @@
           <p:cNvPr id="113" name="">
             <a:extLst xmlns:a="http://schemas.openxmlformats.org/drawingml/2006/main">
               <a:ext uri="{FF2B5EF4-FFF2-40B4-BE49-F238E27FC236}">
-                <a16:creationId xmlns:a16="http://schemas.microsoft.com/office/drawing/2014/main" id="{0B053D25-08CA-4734-8041-E02D07D7E8CE}"/>
+                <a16:creationId xmlns:a16="http://schemas.microsoft.com/office/drawing/2014/main" id="{D6933D8E-725D-41B0-BA43-BA1CFE2CD057}"/>
               </a:ext>
             </a:extLst>
           </p:cNvPr>
@@ -15385,7 +15385,7 @@
           <p:cNvPr id="114" name="">
             <a:extLst xmlns:a="http://schemas.openxmlformats.org/drawingml/2006/main">
               <a:ext uri="{FF2B5EF4-FFF2-40B4-BE49-F238E27FC236}">
-                <a16:creationId xmlns:a16="http://schemas.microsoft.com/office/drawing/2014/main" id="{A0EE4D24-0E39-4541-8C53-B8981FAC1714}"/>
+                <a16:creationId xmlns:a16="http://schemas.microsoft.com/office/drawing/2014/main" id="{3E461B91-EC9C-4B3A-A0E3-9B9A4EC7DAFC}"/>
               </a:ext>
             </a:extLst>
           </p:cNvPr>
@@ -15418,7 +15418,7 @@
           <p:cNvPr id="115" name="">
             <a:extLst xmlns:a="http://schemas.openxmlformats.org/drawingml/2006/main">
               <a:ext uri="{FF2B5EF4-FFF2-40B4-BE49-F238E27FC236}">
-                <a16:creationId xmlns:a16="http://schemas.microsoft.com/office/drawing/2014/main" id="{2081D498-DB25-409D-BEC7-9296FCCA2878}"/>
+                <a16:creationId xmlns:a16="http://schemas.microsoft.com/office/drawing/2014/main" id="{B1A37A99-B3C9-42C6-8B3A-2FD10C4AC21B}"/>
               </a:ext>
             </a:extLst>
           </p:cNvPr>
@@ -15476,7 +15476,7 @@
           <p:cNvPr id="116" name="">
             <a:extLst xmlns:a="http://schemas.openxmlformats.org/drawingml/2006/main">
               <a:ext uri="{FF2B5EF4-FFF2-40B4-BE49-F238E27FC236}">
-                <a16:creationId xmlns:a16="http://schemas.microsoft.com/office/drawing/2014/main" id="{77FB5BB0-22D5-4AE2-B17C-C30DAFEC9B88}"/>
+                <a16:creationId xmlns:a16="http://schemas.microsoft.com/office/drawing/2014/main" id="{F02D11BF-EAB1-4A4D-81B2-3F99591D516B}"/>
               </a:ext>
             </a:extLst>
           </p:cNvPr>
@@ -15509,7 +15509,7 @@
           <p:cNvPr id="117" name="">
             <a:extLst xmlns:a="http://schemas.openxmlformats.org/drawingml/2006/main">
               <a:ext uri="{FF2B5EF4-FFF2-40B4-BE49-F238E27FC236}">
-                <a16:creationId xmlns:a16="http://schemas.microsoft.com/office/drawing/2014/main" id="{FA488B0B-B88D-4B1A-9451-97A258C560D6}"/>
+                <a16:creationId xmlns:a16="http://schemas.microsoft.com/office/drawing/2014/main" id="{DF60E015-BAF4-4461-B362-3A2BFD295101}"/>
               </a:ext>
             </a:extLst>
           </p:cNvPr>
@@ -15567,7 +15567,7 @@
           <p:cNvPr id="118" name="">
             <a:extLst xmlns:a="http://schemas.openxmlformats.org/drawingml/2006/main">
               <a:ext uri="{FF2B5EF4-FFF2-40B4-BE49-F238E27FC236}">
-                <a16:creationId xmlns:a16="http://schemas.microsoft.com/office/drawing/2014/main" id="{EF124A38-7B4B-4911-9154-58F54089F083}"/>
+                <a16:creationId xmlns:a16="http://schemas.microsoft.com/office/drawing/2014/main" id="{664C6322-7254-49ED-9853-D2F1C95D1DDA}"/>
               </a:ext>
             </a:extLst>
           </p:cNvPr>
@@ -15600,7 +15600,7 @@
           <p:cNvPr id="119" name="">
             <a:extLst xmlns:a="http://schemas.openxmlformats.org/drawingml/2006/main">
               <a:ext uri="{FF2B5EF4-FFF2-40B4-BE49-F238E27FC236}">
-                <a16:creationId xmlns:a16="http://schemas.microsoft.com/office/drawing/2014/main" id="{9FB78CC3-93A4-42DA-BFAC-32ED52316C28}"/>
+                <a16:creationId xmlns:a16="http://schemas.microsoft.com/office/drawing/2014/main" id="{94B8C805-DAA4-4556-8B9B-F653AD1A762E}"/>
               </a:ext>
             </a:extLst>
           </p:cNvPr>
@@ -15658,7 +15658,7 @@
           <p:cNvPr id="120" name="">
             <a:extLst xmlns:a="http://schemas.openxmlformats.org/drawingml/2006/main">
               <a:ext uri="{FF2B5EF4-FFF2-40B4-BE49-F238E27FC236}">
-                <a16:creationId xmlns:a16="http://schemas.microsoft.com/office/drawing/2014/main" id="{84F0F57F-843D-491C-8431-DAF3C2C0AAF6}"/>
+                <a16:creationId xmlns:a16="http://schemas.microsoft.com/office/drawing/2014/main" id="{C0D2DF8F-D520-4B80-B320-08A7689B760E}"/>
               </a:ext>
             </a:extLst>
           </p:cNvPr>
@@ -15691,7 +15691,7 @@
           <p:cNvPr id="121" name="">
             <a:extLst xmlns:a="http://schemas.openxmlformats.org/drawingml/2006/main">
               <a:ext uri="{FF2B5EF4-FFF2-40B4-BE49-F238E27FC236}">
-                <a16:creationId xmlns:a16="http://schemas.microsoft.com/office/drawing/2014/main" id="{967422B2-9F12-4820-9084-C777C662F6A2}"/>
+                <a16:creationId xmlns:a16="http://schemas.microsoft.com/office/drawing/2014/main" id="{18C0952A-8AC4-41C2-BEA6-E9119C84DBC4}"/>
               </a:ext>
             </a:extLst>
           </p:cNvPr>
@@ -15749,7 +15749,7 @@
           <p:cNvPr id="122" name="">
             <a:extLst xmlns:a="http://schemas.openxmlformats.org/drawingml/2006/main">
               <a:ext uri="{FF2B5EF4-FFF2-40B4-BE49-F238E27FC236}">
-                <a16:creationId xmlns:a16="http://schemas.microsoft.com/office/drawing/2014/main" id="{0793D939-3E03-4853-AAD7-CDCFBD89EC8B}"/>
+                <a16:creationId xmlns:a16="http://schemas.microsoft.com/office/drawing/2014/main" id="{6E68B29A-43B3-491D-B437-C6A8D7EA0C00}"/>
               </a:ext>
             </a:extLst>
           </p:cNvPr>
@@ -15782,7 +15782,7 @@
           <p:cNvPr id="123" name="">
             <a:extLst xmlns:a="http://schemas.openxmlformats.org/drawingml/2006/main">
               <a:ext uri="{FF2B5EF4-FFF2-40B4-BE49-F238E27FC236}">
-                <a16:creationId xmlns:a16="http://schemas.microsoft.com/office/drawing/2014/main" id="{7C6B2663-8D0C-4824-AFBF-A2ADE8BADEBE}"/>
+                <a16:creationId xmlns:a16="http://schemas.microsoft.com/office/drawing/2014/main" id="{1FBA44A1-C0D3-4CF3-AE23-60DAE8945E63}"/>
               </a:ext>
             </a:extLst>
           </p:cNvPr>
@@ -15840,7 +15840,7 @@
           <p:cNvPr id="124" name="">
             <a:extLst xmlns:a="http://schemas.openxmlformats.org/drawingml/2006/main">
               <a:ext uri="{FF2B5EF4-FFF2-40B4-BE49-F238E27FC236}">
-                <a16:creationId xmlns:a16="http://schemas.microsoft.com/office/drawing/2014/main" id="{E82DFAFC-4E27-42D2-9BD0-34B73A4155F9}"/>
+                <a16:creationId xmlns:a16="http://schemas.microsoft.com/office/drawing/2014/main" id="{6AFF8F21-77B5-45C7-89C0-30725D793657}"/>
               </a:ext>
             </a:extLst>
           </p:cNvPr>
@@ -15873,7 +15873,7 @@
           <p:cNvPr id="125" name="">
             <a:extLst xmlns:a="http://schemas.openxmlformats.org/drawingml/2006/main">
               <a:ext uri="{FF2B5EF4-FFF2-40B4-BE49-F238E27FC236}">
-                <a16:creationId xmlns:a16="http://schemas.microsoft.com/office/drawing/2014/main" id="{414F74EC-56EF-41FA-AA97-CF1A2C6A6B37}"/>
+                <a16:creationId xmlns:a16="http://schemas.microsoft.com/office/drawing/2014/main" id="{AD1F8069-2E3A-4C40-9068-F27D8B961279}"/>
               </a:ext>
             </a:extLst>
           </p:cNvPr>
@@ -15931,7 +15931,7 @@
           <p:cNvPr id="126" name="">
             <a:extLst xmlns:a="http://schemas.openxmlformats.org/drawingml/2006/main">
               <a:ext uri="{FF2B5EF4-FFF2-40B4-BE49-F238E27FC236}">
-                <a16:creationId xmlns:a16="http://schemas.microsoft.com/office/drawing/2014/main" id="{0BB48652-16D9-48CA-96F6-DD837C86FFD9}"/>
+                <a16:creationId xmlns:a16="http://schemas.microsoft.com/office/drawing/2014/main" id="{6C3B95BA-AD03-490F-A567-24EDE4A5ECA9}"/>
               </a:ext>
             </a:extLst>
           </p:cNvPr>
@@ -15964,7 +15964,7 @@
           <p:cNvPr id="127" name="">
             <a:extLst xmlns:a="http://schemas.openxmlformats.org/drawingml/2006/main">
               <a:ext uri="{FF2B5EF4-FFF2-40B4-BE49-F238E27FC236}">
-                <a16:creationId xmlns:a16="http://schemas.microsoft.com/office/drawing/2014/main" id="{8940968A-D280-495A-8AE3-78B56EEA507E}"/>
+                <a16:creationId xmlns:a16="http://schemas.microsoft.com/office/drawing/2014/main" id="{D09E508D-7ACB-4E10-A842-41EF95F73173}"/>
               </a:ext>
             </a:extLst>
           </p:cNvPr>
@@ -16022,7 +16022,7 @@
           <p:cNvPr id="128" name="">
             <a:extLst xmlns:a="http://schemas.openxmlformats.org/drawingml/2006/main">
               <a:ext uri="{FF2B5EF4-FFF2-40B4-BE49-F238E27FC236}">
-                <a16:creationId xmlns:a16="http://schemas.microsoft.com/office/drawing/2014/main" id="{EC6233D2-20FA-4FC5-9E65-472E89378D20}"/>
+                <a16:creationId xmlns:a16="http://schemas.microsoft.com/office/drawing/2014/main" id="{AFCABD3F-64BE-4C19-A6FC-3058F2D7518E}"/>
               </a:ext>
             </a:extLst>
           </p:cNvPr>
@@ -16055,7 +16055,7 @@
           <p:cNvPr id="129" name="">
             <a:extLst xmlns:a="http://schemas.openxmlformats.org/drawingml/2006/main">
               <a:ext uri="{FF2B5EF4-FFF2-40B4-BE49-F238E27FC236}">
-                <a16:creationId xmlns:a16="http://schemas.microsoft.com/office/drawing/2014/main" id="{6C80F7F9-F69C-4089-A70E-9191C2C0A81B}"/>
+                <a16:creationId xmlns:a16="http://schemas.microsoft.com/office/drawing/2014/main" id="{B2E8F876-2E18-4AD2-B298-AE1DBFED22DC}"/>
               </a:ext>
             </a:extLst>
           </p:cNvPr>
@@ -16113,7 +16113,7 @@
           <p:cNvPr id="130" name="">
             <a:extLst xmlns:a="http://schemas.openxmlformats.org/drawingml/2006/main">
               <a:ext uri="{FF2B5EF4-FFF2-40B4-BE49-F238E27FC236}">
-                <a16:creationId xmlns:a16="http://schemas.microsoft.com/office/drawing/2014/main" id="{A9AB2CD4-5B5D-48E5-B692-8351D49F6A18}"/>
+                <a16:creationId xmlns:a16="http://schemas.microsoft.com/office/drawing/2014/main" id="{853672C7-42AB-4E01-ABE4-3F2F8CE89E23}"/>
               </a:ext>
             </a:extLst>
           </p:cNvPr>
@@ -16146,7 +16146,7 @@
           <p:cNvPr id="131" name="">
             <a:extLst xmlns:a="http://schemas.openxmlformats.org/drawingml/2006/main">
               <a:ext uri="{FF2B5EF4-FFF2-40B4-BE49-F238E27FC236}">
-                <a16:creationId xmlns:a16="http://schemas.microsoft.com/office/drawing/2014/main" id="{02397893-EDD8-4593-807E-2F66761B1C2A}"/>
+                <a16:creationId xmlns:a16="http://schemas.microsoft.com/office/drawing/2014/main" id="{C042EAEC-D241-423D-941E-45D2956D2C4D}"/>
               </a:ext>
             </a:extLst>
           </p:cNvPr>
@@ -16204,7 +16204,7 @@
           <p:cNvPr id="132" name="">
             <a:extLst xmlns:a="http://schemas.openxmlformats.org/drawingml/2006/main">
               <a:ext uri="{FF2B5EF4-FFF2-40B4-BE49-F238E27FC236}">
-                <a16:creationId xmlns:a16="http://schemas.microsoft.com/office/drawing/2014/main" id="{742ABAB0-461F-44F4-B101-0367AE1D8C0C}"/>
+                <a16:creationId xmlns:a16="http://schemas.microsoft.com/office/drawing/2014/main" id="{BC9B9F5C-A2EB-493A-B8DD-535AA786A3F2}"/>
               </a:ext>
             </a:extLst>
           </p:cNvPr>
@@ -16237,7 +16237,7 @@
           <p:cNvPr id="133" name="">
             <a:extLst xmlns:a="http://schemas.openxmlformats.org/drawingml/2006/main">
               <a:ext uri="{FF2B5EF4-FFF2-40B4-BE49-F238E27FC236}">
-                <a16:creationId xmlns:a16="http://schemas.microsoft.com/office/drawing/2014/main" id="{234561E3-F714-4BF1-8E18-11988CAFF099}"/>
+                <a16:creationId xmlns:a16="http://schemas.microsoft.com/office/drawing/2014/main" id="{2D236996-0E61-41BD-95D4-9C5070A93769}"/>
               </a:ext>
             </a:extLst>
           </p:cNvPr>
@@ -16295,7 +16295,7 @@
           <p:cNvPr id="134" name="">
             <a:extLst xmlns:a="http://schemas.openxmlformats.org/drawingml/2006/main">
               <a:ext uri="{FF2B5EF4-FFF2-40B4-BE49-F238E27FC236}">
-                <a16:creationId xmlns:a16="http://schemas.microsoft.com/office/drawing/2014/main" id="{BA3F3116-68E0-407D-88B3-808A51850A97}"/>
+                <a16:creationId xmlns:a16="http://schemas.microsoft.com/office/drawing/2014/main" id="{C709F2D5-F46F-4A4C-AD7F-BCD9B616E0E9}"/>
               </a:ext>
             </a:extLst>
           </p:cNvPr>
@@ -16328,7 +16328,7 @@
           <p:cNvPr id="135" name="">
             <a:extLst xmlns:a="http://schemas.openxmlformats.org/drawingml/2006/main">
               <a:ext uri="{FF2B5EF4-FFF2-40B4-BE49-F238E27FC236}">
-                <a16:creationId xmlns:a16="http://schemas.microsoft.com/office/drawing/2014/main" id="{BC9E94A7-5914-45FA-8743-B517E2066A42}"/>
+                <a16:creationId xmlns:a16="http://schemas.microsoft.com/office/drawing/2014/main" id="{A513F094-DF9A-4DFD-9C67-59B137237A9E}"/>
               </a:ext>
             </a:extLst>
           </p:cNvPr>
@@ -16386,7 +16386,7 @@
           <p:cNvPr id="136" name="">
             <a:extLst xmlns:a="http://schemas.openxmlformats.org/drawingml/2006/main">
               <a:ext uri="{FF2B5EF4-FFF2-40B4-BE49-F238E27FC236}">
-                <a16:creationId xmlns:a16="http://schemas.microsoft.com/office/drawing/2014/main" id="{BD8A68E7-76BC-4AE3-8035-023351AC4518}"/>
+                <a16:creationId xmlns:a16="http://schemas.microsoft.com/office/drawing/2014/main" id="{30200D85-E45F-4E2F-9F3E-89ACFBE60B10}"/>
               </a:ext>
             </a:extLst>
           </p:cNvPr>
@@ -16419,7 +16419,7 @@
           <p:cNvPr id="137" name="">
             <a:extLst xmlns:a="http://schemas.openxmlformats.org/drawingml/2006/main">
               <a:ext uri="{FF2B5EF4-FFF2-40B4-BE49-F238E27FC236}">
-                <a16:creationId xmlns:a16="http://schemas.microsoft.com/office/drawing/2014/main" id="{5300F29C-7AAD-4007-A22C-0E9C3B13143A}"/>
+                <a16:creationId xmlns:a16="http://schemas.microsoft.com/office/drawing/2014/main" id="{61AACBF7-FEF7-486A-A200-0F9EDFF3C0BF}"/>
               </a:ext>
             </a:extLst>
           </p:cNvPr>
@@ -16477,7 +16477,7 @@
           <p:cNvPr id="138" name="">
             <a:extLst xmlns:a="http://schemas.openxmlformats.org/drawingml/2006/main">
               <a:ext uri="{FF2B5EF4-FFF2-40B4-BE49-F238E27FC236}">
-                <a16:creationId xmlns:a16="http://schemas.microsoft.com/office/drawing/2014/main" id="{A36ABD88-855A-4D94-B858-12175D6EFE9F}"/>
+                <a16:creationId xmlns:a16="http://schemas.microsoft.com/office/drawing/2014/main" id="{392D549C-86CB-44A6-B131-700E2055AD6D}"/>
               </a:ext>
             </a:extLst>
           </p:cNvPr>
@@ -16510,7 +16510,7 @@
           <p:cNvPr id="139" name="">
             <a:extLst xmlns:a="http://schemas.openxmlformats.org/drawingml/2006/main">
               <a:ext uri="{FF2B5EF4-FFF2-40B4-BE49-F238E27FC236}">
-                <a16:creationId xmlns:a16="http://schemas.microsoft.com/office/drawing/2014/main" id="{68FC29B2-6567-46EE-95E3-F2F775D56619}"/>
+                <a16:creationId xmlns:a16="http://schemas.microsoft.com/office/drawing/2014/main" id="{A8C4FD8F-8DDA-4EB9-8E24-76834FAA3F2C}"/>
               </a:ext>
             </a:extLst>
           </p:cNvPr>
@@ -16568,7 +16568,7 @@
           <p:cNvPr id="140" name="">
             <a:extLst xmlns:a="http://schemas.openxmlformats.org/drawingml/2006/main">
               <a:ext uri="{FF2B5EF4-FFF2-40B4-BE49-F238E27FC236}">
-                <a16:creationId xmlns:a16="http://schemas.microsoft.com/office/drawing/2014/main" id="{8A53C785-03B3-4DCB-9643-8B7F0DE62917}"/>
+                <a16:creationId xmlns:a16="http://schemas.microsoft.com/office/drawing/2014/main" id="{6B546578-08B5-466B-8CBA-30BBFF117874}"/>
               </a:ext>
             </a:extLst>
           </p:cNvPr>
@@ -16601,7 +16601,7 @@
           <p:cNvPr id="141" name="">
             <a:extLst xmlns:a="http://schemas.openxmlformats.org/drawingml/2006/main">
               <a:ext uri="{FF2B5EF4-FFF2-40B4-BE49-F238E27FC236}">
-                <a16:creationId xmlns:a16="http://schemas.microsoft.com/office/drawing/2014/main" id="{D123AE76-6040-4226-BE92-A19A7763CBAE}"/>
+                <a16:creationId xmlns:a16="http://schemas.microsoft.com/office/drawing/2014/main" id="{AF8EDB09-7BBF-42AE-9C0A-874F9738835B}"/>
               </a:ext>
             </a:extLst>
           </p:cNvPr>
@@ -16659,7 +16659,7 @@
           <p:cNvPr id="142" name="">
             <a:extLst xmlns:a="http://schemas.openxmlformats.org/drawingml/2006/main">
               <a:ext uri="{FF2B5EF4-FFF2-40B4-BE49-F238E27FC236}">
-                <a16:creationId xmlns:a16="http://schemas.microsoft.com/office/drawing/2014/main" id="{F065A42D-6EE6-4ABB-AE02-39D310537D8E}"/>
+                <a16:creationId xmlns:a16="http://schemas.microsoft.com/office/drawing/2014/main" id="{DE8B88F4-1E4A-448B-9457-D809E62EA4AD}"/>
               </a:ext>
             </a:extLst>
           </p:cNvPr>
@@ -16692,7 +16692,7 @@
           <p:cNvPr id="143" name="">
             <a:extLst xmlns:a="http://schemas.openxmlformats.org/drawingml/2006/main">
               <a:ext uri="{FF2B5EF4-FFF2-40B4-BE49-F238E27FC236}">
-                <a16:creationId xmlns:a16="http://schemas.microsoft.com/office/drawing/2014/main" id="{EA34B85E-8D44-4071-9058-99B09F296A36}"/>
+                <a16:creationId xmlns:a16="http://schemas.microsoft.com/office/drawing/2014/main" id="{EC17CBEA-C652-4B72-B18A-727018150014}"/>
               </a:ext>
             </a:extLst>
           </p:cNvPr>
@@ -16750,7 +16750,7 @@
           <p:cNvPr id="144" name="">
             <a:extLst xmlns:a="http://schemas.openxmlformats.org/drawingml/2006/main">
               <a:ext uri="{FF2B5EF4-FFF2-40B4-BE49-F238E27FC236}">
-                <a16:creationId xmlns:a16="http://schemas.microsoft.com/office/drawing/2014/main" id="{7EBEF400-7150-4133-80AD-49A4A7409B60}"/>
+                <a16:creationId xmlns:a16="http://schemas.microsoft.com/office/drawing/2014/main" id="{C48DC0A1-C11D-4756-B7FF-B5C51701473B}"/>
               </a:ext>
             </a:extLst>
           </p:cNvPr>
@@ -16783,7 +16783,7 @@
           <p:cNvPr id="145" name="">
             <a:extLst xmlns:a="http://schemas.openxmlformats.org/drawingml/2006/main">
               <a:ext uri="{FF2B5EF4-FFF2-40B4-BE49-F238E27FC236}">
-                <a16:creationId xmlns:a16="http://schemas.microsoft.com/office/drawing/2014/main" id="{011A9F7F-CA33-43B5-914D-454C18B57B33}"/>
+                <a16:creationId xmlns:a16="http://schemas.microsoft.com/office/drawing/2014/main" id="{B551A86F-C806-4FA1-A4FF-C75A67594770}"/>
               </a:ext>
             </a:extLst>
           </p:cNvPr>
@@ -16841,7 +16841,7 @@
           <p:cNvPr id="146" name="">
             <a:extLst xmlns:a="http://schemas.openxmlformats.org/drawingml/2006/main">
               <a:ext uri="{FF2B5EF4-FFF2-40B4-BE49-F238E27FC236}">
-                <a16:creationId xmlns:a16="http://schemas.microsoft.com/office/drawing/2014/main" id="{CB66BA76-290C-4195-9F95-FD5354889034}"/>
+                <a16:creationId xmlns:a16="http://schemas.microsoft.com/office/drawing/2014/main" id="{7B9F014C-3DFD-4307-A50B-9942017EDC07}"/>
               </a:ext>
             </a:extLst>
           </p:cNvPr>
@@ -16874,7 +16874,7 @@
           <p:cNvPr id="147" name="">
             <a:extLst xmlns:a="http://schemas.openxmlformats.org/drawingml/2006/main">
               <a:ext uri="{FF2B5EF4-FFF2-40B4-BE49-F238E27FC236}">
-                <a16:creationId xmlns:a16="http://schemas.microsoft.com/office/drawing/2014/main" id="{6507894F-BB10-45EA-ACC5-1686EBFAEBEF}"/>
+                <a16:creationId xmlns:a16="http://schemas.microsoft.com/office/drawing/2014/main" id="{EB75D9BA-2377-464A-9EC9-8C2E2555E1E2}"/>
               </a:ext>
             </a:extLst>
           </p:cNvPr>
@@ -16932,7 +16932,7 @@
           <p:cNvPr id="148" name="">
             <a:extLst xmlns:a="http://schemas.openxmlformats.org/drawingml/2006/main">
               <a:ext uri="{FF2B5EF4-FFF2-40B4-BE49-F238E27FC236}">
-                <a16:creationId xmlns:a16="http://schemas.microsoft.com/office/drawing/2014/main" id="{8066A454-0C47-455D-A8D2-A62D157AD948}"/>
+                <a16:creationId xmlns:a16="http://schemas.microsoft.com/office/drawing/2014/main" id="{FDDBA9C1-91CB-497C-8A89-379F64D1F3FB}"/>
               </a:ext>
             </a:extLst>
           </p:cNvPr>
@@ -16965,7 +16965,7 @@
           <p:cNvPr id="149" name="">
             <a:extLst xmlns:a="http://schemas.openxmlformats.org/drawingml/2006/main">
               <a:ext uri="{FF2B5EF4-FFF2-40B4-BE49-F238E27FC236}">
-                <a16:creationId xmlns:a16="http://schemas.microsoft.com/office/drawing/2014/main" id="{8D8C8644-E252-407D-BE51-3975F1F50BA6}"/>
+                <a16:creationId xmlns:a16="http://schemas.microsoft.com/office/drawing/2014/main" id="{3ED5698A-BEE8-4BB1-BFE0-B755DD1DFA0D}"/>
               </a:ext>
             </a:extLst>
           </p:cNvPr>
@@ -17023,7 +17023,7 @@
           <p:cNvPr id="150" name="">
             <a:extLst xmlns:a="http://schemas.openxmlformats.org/drawingml/2006/main">
               <a:ext uri="{FF2B5EF4-FFF2-40B4-BE49-F238E27FC236}">
-                <a16:creationId xmlns:a16="http://schemas.microsoft.com/office/drawing/2014/main" id="{74EF2254-ECA9-4160-9070-9E5BC5579786}"/>
+                <a16:creationId xmlns:a16="http://schemas.microsoft.com/office/drawing/2014/main" id="{369C69BA-4F27-4ADD-9E9A-63F9ACF61B80}"/>
               </a:ext>
             </a:extLst>
           </p:cNvPr>
@@ -17056,7 +17056,7 @@
           <p:cNvPr id="151" name="">
             <a:extLst xmlns:a="http://schemas.openxmlformats.org/drawingml/2006/main">
               <a:ext uri="{FF2B5EF4-FFF2-40B4-BE49-F238E27FC236}">
-                <a16:creationId xmlns:a16="http://schemas.microsoft.com/office/drawing/2014/main" id="{EEAD04C8-9589-4707-A201-C0ACB6BC3266}"/>
+                <a16:creationId xmlns:a16="http://schemas.microsoft.com/office/drawing/2014/main" id="{7EC039B2-A3F1-4FDF-8E69-B258A49724DC}"/>
               </a:ext>
             </a:extLst>
           </p:cNvPr>
@@ -17114,7 +17114,7 @@
           <p:cNvPr id="152" name="">
             <a:extLst xmlns:a="http://schemas.openxmlformats.org/drawingml/2006/main">
               <a:ext uri="{FF2B5EF4-FFF2-40B4-BE49-F238E27FC236}">
-                <a16:creationId xmlns:a16="http://schemas.microsoft.com/office/drawing/2014/main" id="{2F94CF69-59FC-46FF-9167-DF7048CE5641}"/>
+                <a16:creationId xmlns:a16="http://schemas.microsoft.com/office/drawing/2014/main" id="{A319896F-D6DB-4B62-BCBB-82C93E817AB6}"/>
               </a:ext>
             </a:extLst>
           </p:cNvPr>
@@ -17172,7 +17172,7 @@
           <p:cNvPr id="153" name="">
             <a:extLst xmlns:a="http://schemas.openxmlformats.org/drawingml/2006/main">
               <a:ext uri="{FF2B5EF4-FFF2-40B4-BE49-F238E27FC236}">
-                <a16:creationId xmlns:a16="http://schemas.microsoft.com/office/drawing/2014/main" id="{63AA2D43-4B2A-4E7B-9537-BF9AD037093A}"/>
+                <a16:creationId xmlns:a16="http://schemas.microsoft.com/office/drawing/2014/main" id="{7357151A-4157-4C41-AB46-FBA56FBCE528}"/>
               </a:ext>
             </a:extLst>
           </p:cNvPr>
@@ -17334,7 +17334,7 @@
             </a:pathLst>
           </a:custGeom>
           <a:blipFill xmlns:a="http://schemas.openxmlformats.org/drawingml/2006/main">
-            <a:blip xmlns:r="http://schemas.openxmlformats.org/officeDocument/2006/relationships" r:embed="R02f9e8563e0947ef"/>
+            <a:blip xmlns:r="http://schemas.openxmlformats.org/officeDocument/2006/relationships" r:embed="R27122b74ab7d4413"/>
             <a:stretch>
               <a:fillRect l="-7801" t="0" r="-7801" b="0"/>
             </a:stretch>
@@ -17346,7 +17346,7 @@
           <p:cNvPr id="6" name="">
             <a:extLst xmlns:a="http://schemas.openxmlformats.org/drawingml/2006/main">
               <a:ext uri="{FF2B5EF4-FFF2-40B4-BE49-F238E27FC236}">
-                <a16:creationId xmlns:a16="http://schemas.microsoft.com/office/drawing/2014/main" id="{D6B2B0D1-3B0A-4FCF-A908-FBC9D2682A99}"/>
+                <a16:creationId xmlns:a16="http://schemas.microsoft.com/office/drawing/2014/main" id="{348CF28E-7ADA-420B-A994-D7A0B28CDF4B}"/>
               </a:ext>
             </a:extLst>
           </p:cNvPr>
@@ -17404,7 +17404,7 @@
           <p:cNvPr id="7" name="">
             <a:extLst xmlns:a="http://schemas.openxmlformats.org/drawingml/2006/main">
               <a:ext uri="{FF2B5EF4-FFF2-40B4-BE49-F238E27FC236}">
-                <a16:creationId xmlns:a16="http://schemas.microsoft.com/office/drawing/2014/main" id="{3992AEE1-6B38-4F9F-953B-0ED0823FA980}"/>
+                <a16:creationId xmlns:a16="http://schemas.microsoft.com/office/drawing/2014/main" id="{B33185BE-148B-449A-B50D-20F59A70E459}"/>
               </a:ext>
             </a:extLst>
           </p:cNvPr>
@@ -17462,7 +17462,7 @@
           <p:cNvPr id="8" name="">
             <a:extLst xmlns:a="http://schemas.openxmlformats.org/drawingml/2006/main">
               <a:ext uri="{FF2B5EF4-FFF2-40B4-BE49-F238E27FC236}">
-                <a16:creationId xmlns:a16="http://schemas.microsoft.com/office/drawing/2014/main" id="{47E13BD4-5CE0-4FD3-BF58-C159AB4BBA19}"/>
+                <a16:creationId xmlns:a16="http://schemas.microsoft.com/office/drawing/2014/main" id="{00194CE1-8823-4E09-880B-C90A4DCD8F4D}"/>
               </a:ext>
             </a:extLst>
           </p:cNvPr>
@@ -17495,7 +17495,7 @@
           <p:cNvPr id="9" name="">
             <a:extLst xmlns:a="http://schemas.openxmlformats.org/drawingml/2006/main">
               <a:ext uri="{FF2B5EF4-FFF2-40B4-BE49-F238E27FC236}">
-                <a16:creationId xmlns:a16="http://schemas.microsoft.com/office/drawing/2014/main" id="{F50803B5-1E03-481C-956B-2799FCF0C489}"/>
+                <a16:creationId xmlns:a16="http://schemas.microsoft.com/office/drawing/2014/main" id="{99F166AB-CF73-4C9E-8A8E-0C3AB15679D9}"/>
               </a:ext>
             </a:extLst>
           </p:cNvPr>
@@ -17553,7 +17553,7 @@
           <p:cNvPr id="10" name="">
             <a:extLst xmlns:a="http://schemas.openxmlformats.org/drawingml/2006/main">
               <a:ext uri="{FF2B5EF4-FFF2-40B4-BE49-F238E27FC236}">
-                <a16:creationId xmlns:a16="http://schemas.microsoft.com/office/drawing/2014/main" id="{9B2286E0-B9A0-4F31-ACC1-BE94316AEC36}"/>
+                <a16:creationId xmlns:a16="http://schemas.microsoft.com/office/drawing/2014/main" id="{8F7D83DA-12FE-4A07-9310-120C16AEB489}"/>
               </a:ext>
             </a:extLst>
           </p:cNvPr>
@@ -17586,7 +17586,7 @@
           <p:cNvPr id="11" name="">
             <a:extLst xmlns:a="http://schemas.openxmlformats.org/drawingml/2006/main">
               <a:ext uri="{FF2B5EF4-FFF2-40B4-BE49-F238E27FC236}">
-                <a16:creationId xmlns:a16="http://schemas.microsoft.com/office/drawing/2014/main" id="{2F054553-4956-4000-87F8-365624E1600C}"/>
+                <a16:creationId xmlns:a16="http://schemas.microsoft.com/office/drawing/2014/main" id="{844E6159-84E2-41D9-93E6-524C5804AEAB}"/>
               </a:ext>
             </a:extLst>
           </p:cNvPr>
@@ -17644,7 +17644,7 @@
           <p:cNvPr id="12" name="">
             <a:extLst xmlns:a="http://schemas.openxmlformats.org/drawingml/2006/main">
               <a:ext uri="{FF2B5EF4-FFF2-40B4-BE49-F238E27FC236}">
-                <a16:creationId xmlns:a16="http://schemas.microsoft.com/office/drawing/2014/main" id="{1E8FCBA3-D64B-430E-8B7F-92BF1DAB7B69}"/>
+                <a16:creationId xmlns:a16="http://schemas.microsoft.com/office/drawing/2014/main" id="{DACAE1C0-DC07-451B-98C5-FFAC041B66E9}"/>
               </a:ext>
             </a:extLst>
           </p:cNvPr>
@@ -17677,7 +17677,7 @@
           <p:cNvPr id="13" name="">
             <a:extLst xmlns:a="http://schemas.openxmlformats.org/drawingml/2006/main">
               <a:ext uri="{FF2B5EF4-FFF2-40B4-BE49-F238E27FC236}">
-                <a16:creationId xmlns:a16="http://schemas.microsoft.com/office/drawing/2014/main" id="{065BF478-A8F4-4655-9F9B-5CB993A1BED5}"/>
+                <a16:creationId xmlns:a16="http://schemas.microsoft.com/office/drawing/2014/main" id="{684EDC55-D0F6-4635-9361-A98A8F34CED6}"/>
               </a:ext>
             </a:extLst>
           </p:cNvPr>
@@ -17735,7 +17735,7 @@
           <p:cNvPr id="14" name="">
             <a:extLst xmlns:a="http://schemas.openxmlformats.org/drawingml/2006/main">
               <a:ext uri="{FF2B5EF4-FFF2-40B4-BE49-F238E27FC236}">
-                <a16:creationId xmlns:a16="http://schemas.microsoft.com/office/drawing/2014/main" id="{586961E8-AA85-487F-B221-2B74AD9CDCEF}"/>
+                <a16:creationId xmlns:a16="http://schemas.microsoft.com/office/drawing/2014/main" id="{EE3D499E-9F0C-40E5-8C0A-A42702125768}"/>
               </a:ext>
             </a:extLst>
           </p:cNvPr>
@@ -17768,7 +17768,7 @@
           <p:cNvPr id="15" name="">
             <a:extLst xmlns:a="http://schemas.openxmlformats.org/drawingml/2006/main">
               <a:ext uri="{FF2B5EF4-FFF2-40B4-BE49-F238E27FC236}">
-                <a16:creationId xmlns:a16="http://schemas.microsoft.com/office/drawing/2014/main" id="{3BC3ADED-1BCD-4EAA-8463-AECB696988D7}"/>
+                <a16:creationId xmlns:a16="http://schemas.microsoft.com/office/drawing/2014/main" id="{6C28A0E0-D04F-4F79-A65B-ABEAED7C1E02}"/>
               </a:ext>
             </a:extLst>
           </p:cNvPr>
@@ -17826,7 +17826,7 @@
           <p:cNvPr id="16" name="">
             <a:extLst xmlns:a="http://schemas.openxmlformats.org/drawingml/2006/main">
               <a:ext uri="{FF2B5EF4-FFF2-40B4-BE49-F238E27FC236}">
-                <a16:creationId xmlns:a16="http://schemas.microsoft.com/office/drawing/2014/main" id="{0FD7568A-502F-410E-B879-2B63680E1243}"/>
+                <a16:creationId xmlns:a16="http://schemas.microsoft.com/office/drawing/2014/main" id="{E93DC6DD-5FBB-4DF2-BA95-EA24E0ABFF4F}"/>
               </a:ext>
             </a:extLst>
           </p:cNvPr>
@@ -17859,7 +17859,7 @@
           <p:cNvPr id="17" name="">
             <a:extLst xmlns:a="http://schemas.openxmlformats.org/drawingml/2006/main">
               <a:ext uri="{FF2B5EF4-FFF2-40B4-BE49-F238E27FC236}">
-                <a16:creationId xmlns:a16="http://schemas.microsoft.com/office/drawing/2014/main" id="{067537D4-557B-4B80-8F41-961F91419F00}"/>
+                <a16:creationId xmlns:a16="http://schemas.microsoft.com/office/drawing/2014/main" id="{C9509703-6E4D-4CF4-B542-55ADA1E9F57F}"/>
               </a:ext>
             </a:extLst>
           </p:cNvPr>
@@ -17917,7 +17917,7 @@
           <p:cNvPr id="18" name="">
             <a:extLst xmlns:a="http://schemas.openxmlformats.org/drawingml/2006/main">
               <a:ext uri="{FF2B5EF4-FFF2-40B4-BE49-F238E27FC236}">
-                <a16:creationId xmlns:a16="http://schemas.microsoft.com/office/drawing/2014/main" id="{CD3DFEA9-E1FF-4F47-A163-BF3DDDDBEEAB}"/>
+                <a16:creationId xmlns:a16="http://schemas.microsoft.com/office/drawing/2014/main" id="{0812EB36-6A4D-4322-8342-43616726C130}"/>
               </a:ext>
             </a:extLst>
           </p:cNvPr>
@@ -17950,7 +17950,7 @@
           <p:cNvPr id="19" name="">
             <a:extLst xmlns:a="http://schemas.openxmlformats.org/drawingml/2006/main">
               <a:ext uri="{FF2B5EF4-FFF2-40B4-BE49-F238E27FC236}">
-                <a16:creationId xmlns:a16="http://schemas.microsoft.com/office/drawing/2014/main" id="{9F67F656-DF98-4E6A-B9D8-E56A36C38EDF}"/>
+                <a16:creationId xmlns:a16="http://schemas.microsoft.com/office/drawing/2014/main" id="{239E94B9-5641-4265-97AC-378FBF4D7760}"/>
               </a:ext>
             </a:extLst>
           </p:cNvPr>
@@ -18008,7 +18008,7 @@
           <p:cNvPr id="20" name="">
             <a:extLst xmlns:a="http://schemas.openxmlformats.org/drawingml/2006/main">
               <a:ext uri="{FF2B5EF4-FFF2-40B4-BE49-F238E27FC236}">
-                <a16:creationId xmlns:a16="http://schemas.microsoft.com/office/drawing/2014/main" id="{6513BD7F-1231-48AF-803C-599C6A6D7F51}"/>
+                <a16:creationId xmlns:a16="http://schemas.microsoft.com/office/drawing/2014/main" id="{FD2539DD-B218-43A1-8AFB-D87B106EFB13}"/>
               </a:ext>
             </a:extLst>
           </p:cNvPr>
@@ -18041,7 +18041,7 @@
           <p:cNvPr id="21" name="">
             <a:extLst xmlns:a="http://schemas.openxmlformats.org/drawingml/2006/main">
               <a:ext uri="{FF2B5EF4-FFF2-40B4-BE49-F238E27FC236}">
-                <a16:creationId xmlns:a16="http://schemas.microsoft.com/office/drawing/2014/main" id="{3928B36C-888D-48EE-83CB-E20C08566D51}"/>
+                <a16:creationId xmlns:a16="http://schemas.microsoft.com/office/drawing/2014/main" id="{0BD0C274-ED40-4F46-9472-EF4979FA8BF8}"/>
               </a:ext>
             </a:extLst>
           </p:cNvPr>
@@ -18099,7 +18099,7 @@
           <p:cNvPr id="22" name="">
             <a:extLst xmlns:a="http://schemas.openxmlformats.org/drawingml/2006/main">
               <a:ext uri="{FF2B5EF4-FFF2-40B4-BE49-F238E27FC236}">
-                <a16:creationId xmlns:a16="http://schemas.microsoft.com/office/drawing/2014/main" id="{56B01F99-48E3-4BF6-A2E5-6BFD7B69C97E}"/>
+                <a16:creationId xmlns:a16="http://schemas.microsoft.com/office/drawing/2014/main" id="{8A4A9C0F-3672-4E4A-8C70-273B4CA9BE7E}"/>
               </a:ext>
             </a:extLst>
           </p:cNvPr>
@@ -18132,7 +18132,7 @@
           <p:cNvPr id="23" name="">
             <a:extLst xmlns:a="http://schemas.openxmlformats.org/drawingml/2006/main">
               <a:ext uri="{FF2B5EF4-FFF2-40B4-BE49-F238E27FC236}">
-                <a16:creationId xmlns:a16="http://schemas.microsoft.com/office/drawing/2014/main" id="{539AA245-4C38-453B-8B76-EC3B0E19483A}"/>
+                <a16:creationId xmlns:a16="http://schemas.microsoft.com/office/drawing/2014/main" id="{73E0E747-CBE6-4D36-BDD8-C3DA2E190116}"/>
               </a:ext>
             </a:extLst>
           </p:cNvPr>
@@ -18190,7 +18190,7 @@
           <p:cNvPr id="24" name="">
             <a:extLst xmlns:a="http://schemas.openxmlformats.org/drawingml/2006/main">
               <a:ext uri="{FF2B5EF4-FFF2-40B4-BE49-F238E27FC236}">
-                <a16:creationId xmlns:a16="http://schemas.microsoft.com/office/drawing/2014/main" id="{7D351E96-AF2D-4DAC-8897-6AF1F2A7619E}"/>
+                <a16:creationId xmlns:a16="http://schemas.microsoft.com/office/drawing/2014/main" id="{2134851C-3E2B-46D7-ACD3-76308FA843CF}"/>
               </a:ext>
             </a:extLst>
           </p:cNvPr>
@@ -18223,7 +18223,7 @@
           <p:cNvPr id="25" name="">
             <a:extLst xmlns:a="http://schemas.openxmlformats.org/drawingml/2006/main">
               <a:ext uri="{FF2B5EF4-FFF2-40B4-BE49-F238E27FC236}">
-                <a16:creationId xmlns:a16="http://schemas.microsoft.com/office/drawing/2014/main" id="{A23E86FD-17F2-46BF-90D7-A1E49389A436}"/>
+                <a16:creationId xmlns:a16="http://schemas.microsoft.com/office/drawing/2014/main" id="{4F9E10ED-F4BB-4524-91B8-0B11CF3A707B}"/>
               </a:ext>
             </a:extLst>
           </p:cNvPr>
@@ -18281,7 +18281,7 @@
           <p:cNvPr id="26" name="">
             <a:extLst xmlns:a="http://schemas.openxmlformats.org/drawingml/2006/main">
               <a:ext uri="{FF2B5EF4-FFF2-40B4-BE49-F238E27FC236}">
-                <a16:creationId xmlns:a16="http://schemas.microsoft.com/office/drawing/2014/main" id="{1AA39EBF-911F-4F89-9CC7-226AAF032FFB}"/>
+                <a16:creationId xmlns:a16="http://schemas.microsoft.com/office/drawing/2014/main" id="{91B06CE8-9D9E-4298-85E8-A84DD183C819}"/>
               </a:ext>
             </a:extLst>
           </p:cNvPr>
@@ -18314,7 +18314,7 @@
           <p:cNvPr id="27" name="">
             <a:extLst xmlns:a="http://schemas.openxmlformats.org/drawingml/2006/main">
               <a:ext uri="{FF2B5EF4-FFF2-40B4-BE49-F238E27FC236}">
-                <a16:creationId xmlns:a16="http://schemas.microsoft.com/office/drawing/2014/main" id="{8D143CFD-A28D-451F-8AAB-80ED2667E13E}"/>
+                <a16:creationId xmlns:a16="http://schemas.microsoft.com/office/drawing/2014/main" id="{747F833C-1246-43DE-9CF5-E1793E68BECF}"/>
               </a:ext>
             </a:extLst>
           </p:cNvPr>
@@ -18372,7 +18372,7 @@
           <p:cNvPr id="28" name="">
             <a:extLst xmlns:a="http://schemas.openxmlformats.org/drawingml/2006/main">
               <a:ext uri="{FF2B5EF4-FFF2-40B4-BE49-F238E27FC236}">
-                <a16:creationId xmlns:a16="http://schemas.microsoft.com/office/drawing/2014/main" id="{77729D1E-26B0-486E-A427-EF75CCF23085}"/>
+                <a16:creationId xmlns:a16="http://schemas.microsoft.com/office/drawing/2014/main" id="{0176D763-32F7-4056-B7FF-A1C2CE99426B}"/>
               </a:ext>
             </a:extLst>
           </p:cNvPr>
@@ -18405,7 +18405,7 @@
           <p:cNvPr id="29" name="">
             <a:extLst xmlns:a="http://schemas.openxmlformats.org/drawingml/2006/main">
               <a:ext uri="{FF2B5EF4-FFF2-40B4-BE49-F238E27FC236}">
-                <a16:creationId xmlns:a16="http://schemas.microsoft.com/office/drawing/2014/main" id="{842C1932-B3C0-40AB-83C4-401A6ABE211A}"/>
+                <a16:creationId xmlns:a16="http://schemas.microsoft.com/office/drawing/2014/main" id="{79C595EC-37B6-4547-B8CB-6BC69C7EB491}"/>
               </a:ext>
             </a:extLst>
           </p:cNvPr>
@@ -18463,7 +18463,7 @@
           <p:cNvPr id="30" name="">
             <a:extLst xmlns:a="http://schemas.openxmlformats.org/drawingml/2006/main">
               <a:ext uri="{FF2B5EF4-FFF2-40B4-BE49-F238E27FC236}">
-                <a16:creationId xmlns:a16="http://schemas.microsoft.com/office/drawing/2014/main" id="{192F59A8-2B11-4622-BA26-47F16A7984C0}"/>
+                <a16:creationId xmlns:a16="http://schemas.microsoft.com/office/drawing/2014/main" id="{AB6D0B84-8F09-4764-8124-451DBAB23BDA}"/>
               </a:ext>
             </a:extLst>
           </p:cNvPr>
@@ -18496,7 +18496,7 @@
           <p:cNvPr id="31" name="">
             <a:extLst xmlns:a="http://schemas.openxmlformats.org/drawingml/2006/main">
               <a:ext uri="{FF2B5EF4-FFF2-40B4-BE49-F238E27FC236}">
-                <a16:creationId xmlns:a16="http://schemas.microsoft.com/office/drawing/2014/main" id="{819C6FAB-CD16-49FE-99FB-716F4B4AF9C3}"/>
+                <a16:creationId xmlns:a16="http://schemas.microsoft.com/office/drawing/2014/main" id="{73051412-85CD-4C0F-8415-42847DAF58F1}"/>
               </a:ext>
             </a:extLst>
           </p:cNvPr>
@@ -18554,7 +18554,7 @@
           <p:cNvPr id="32" name="">
             <a:extLst xmlns:a="http://schemas.openxmlformats.org/drawingml/2006/main">
               <a:ext uri="{FF2B5EF4-FFF2-40B4-BE49-F238E27FC236}">
-                <a16:creationId xmlns:a16="http://schemas.microsoft.com/office/drawing/2014/main" id="{4D033D1F-ADC0-4AF2-97F7-71B0F48FB5F1}"/>
+                <a16:creationId xmlns:a16="http://schemas.microsoft.com/office/drawing/2014/main" id="{DFE81790-114F-4168-A5F0-5395EA5044EF}"/>
               </a:ext>
             </a:extLst>
           </p:cNvPr>
@@ -18587,7 +18587,7 @@
           <p:cNvPr id="33" name="">
             <a:extLst xmlns:a="http://schemas.openxmlformats.org/drawingml/2006/main">
               <a:ext uri="{FF2B5EF4-FFF2-40B4-BE49-F238E27FC236}">
-                <a16:creationId xmlns:a16="http://schemas.microsoft.com/office/drawing/2014/main" id="{0DFAE6B2-BA0F-47AF-A314-26797182821D}"/>
+                <a16:creationId xmlns:a16="http://schemas.microsoft.com/office/drawing/2014/main" id="{77D01B1D-6737-4293-87E2-6A760B83A620}"/>
               </a:ext>
             </a:extLst>
           </p:cNvPr>
@@ -18645,7 +18645,7 @@
           <p:cNvPr id="34" name="">
             <a:extLst xmlns:a="http://schemas.openxmlformats.org/drawingml/2006/main">
               <a:ext uri="{FF2B5EF4-FFF2-40B4-BE49-F238E27FC236}">
-                <a16:creationId xmlns:a16="http://schemas.microsoft.com/office/drawing/2014/main" id="{95A7B5C1-C16E-4C39-BD9A-1A75961F4E89}"/>
+                <a16:creationId xmlns:a16="http://schemas.microsoft.com/office/drawing/2014/main" id="{C19B6F93-867D-4C3B-8CC3-52A6A15F9542}"/>
               </a:ext>
             </a:extLst>
           </p:cNvPr>
@@ -18678,7 +18678,7 @@
           <p:cNvPr id="35" name="">
             <a:extLst xmlns:a="http://schemas.openxmlformats.org/drawingml/2006/main">
               <a:ext uri="{FF2B5EF4-FFF2-40B4-BE49-F238E27FC236}">
-                <a16:creationId xmlns:a16="http://schemas.microsoft.com/office/drawing/2014/main" id="{AB49C978-0B26-478D-A176-692AAB06DED6}"/>
+                <a16:creationId xmlns:a16="http://schemas.microsoft.com/office/drawing/2014/main" id="{9A6AC83B-3722-4DF3-95F8-E61085C35ECD}"/>
               </a:ext>
             </a:extLst>
           </p:cNvPr>
@@ -18736,7 +18736,7 @@
           <p:cNvPr id="36" name="">
             <a:extLst xmlns:a="http://schemas.openxmlformats.org/drawingml/2006/main">
               <a:ext uri="{FF2B5EF4-FFF2-40B4-BE49-F238E27FC236}">
-                <a16:creationId xmlns:a16="http://schemas.microsoft.com/office/drawing/2014/main" id="{CC051409-9962-4E78-9023-B2ECA88C74C0}"/>
+                <a16:creationId xmlns:a16="http://schemas.microsoft.com/office/drawing/2014/main" id="{A81E83A4-B9D5-46F2-9E08-8B9D15166225}"/>
               </a:ext>
             </a:extLst>
           </p:cNvPr>
@@ -18769,7 +18769,7 @@
           <p:cNvPr id="37" name="">
             <a:extLst xmlns:a="http://schemas.openxmlformats.org/drawingml/2006/main">
               <a:ext uri="{FF2B5EF4-FFF2-40B4-BE49-F238E27FC236}">
-                <a16:creationId xmlns:a16="http://schemas.microsoft.com/office/drawing/2014/main" id="{E4B48557-7BDC-4AF5-A42D-3AAF8F2D26CF}"/>
+                <a16:creationId xmlns:a16="http://schemas.microsoft.com/office/drawing/2014/main" id="{9601A6BD-4108-4605-85AB-1E9C996A9175}"/>
               </a:ext>
             </a:extLst>
           </p:cNvPr>
@@ -18827,7 +18827,7 @@
           <p:cNvPr id="38" name="">
             <a:extLst xmlns:a="http://schemas.openxmlformats.org/drawingml/2006/main">
               <a:ext uri="{FF2B5EF4-FFF2-40B4-BE49-F238E27FC236}">
-                <a16:creationId xmlns:a16="http://schemas.microsoft.com/office/drawing/2014/main" id="{6A517032-2EB8-4AE0-8417-778652381BC3}"/>
+                <a16:creationId xmlns:a16="http://schemas.microsoft.com/office/drawing/2014/main" id="{16177379-7316-42FE-A5A1-B382631C7652}"/>
               </a:ext>
             </a:extLst>
           </p:cNvPr>
@@ -18860,7 +18860,7 @@
           <p:cNvPr id="39" name="">
             <a:extLst xmlns:a="http://schemas.openxmlformats.org/drawingml/2006/main">
               <a:ext uri="{FF2B5EF4-FFF2-40B4-BE49-F238E27FC236}">
-                <a16:creationId xmlns:a16="http://schemas.microsoft.com/office/drawing/2014/main" id="{A39D8E34-B336-458C-82D4-3CE5DBA421E9}"/>
+                <a16:creationId xmlns:a16="http://schemas.microsoft.com/office/drawing/2014/main" id="{C2C6928C-B8A9-4698-805C-B0694006BA52}"/>
               </a:ext>
             </a:extLst>
           </p:cNvPr>
@@ -18918,7 +18918,7 @@
           <p:cNvPr id="40" name="">
             <a:extLst xmlns:a="http://schemas.openxmlformats.org/drawingml/2006/main">
               <a:ext uri="{FF2B5EF4-FFF2-40B4-BE49-F238E27FC236}">
-                <a16:creationId xmlns:a16="http://schemas.microsoft.com/office/drawing/2014/main" id="{418DE462-663D-426B-85C3-A0733B221DEE}"/>
+                <a16:creationId xmlns:a16="http://schemas.microsoft.com/office/drawing/2014/main" id="{C8AFE43C-6516-49E5-A2BC-47972155F6DC}"/>
               </a:ext>
             </a:extLst>
           </p:cNvPr>
@@ -18951,7 +18951,7 @@
           <p:cNvPr id="41" name="">
             <a:extLst xmlns:a="http://schemas.openxmlformats.org/drawingml/2006/main">
               <a:ext uri="{FF2B5EF4-FFF2-40B4-BE49-F238E27FC236}">
-                <a16:creationId xmlns:a16="http://schemas.microsoft.com/office/drawing/2014/main" id="{C794D7B7-73DD-495C-B112-80E5EA196D50}"/>
+                <a16:creationId xmlns:a16="http://schemas.microsoft.com/office/drawing/2014/main" id="{2FB984D3-45BF-46FB-B646-50B13C65DAA8}"/>
               </a:ext>
             </a:extLst>
           </p:cNvPr>
@@ -19009,7 +19009,7 @@
           <p:cNvPr id="42" name="">
             <a:extLst xmlns:a="http://schemas.openxmlformats.org/drawingml/2006/main">
               <a:ext uri="{FF2B5EF4-FFF2-40B4-BE49-F238E27FC236}">
-                <a16:creationId xmlns:a16="http://schemas.microsoft.com/office/drawing/2014/main" id="{324DE58D-482F-4ABF-A3CC-31134390A9E8}"/>
+                <a16:creationId xmlns:a16="http://schemas.microsoft.com/office/drawing/2014/main" id="{354EBF5D-6F96-4B7F-9E30-2F68ED85BAFB}"/>
               </a:ext>
             </a:extLst>
           </p:cNvPr>
@@ -19042,7 +19042,7 @@
           <p:cNvPr id="43" name="">
             <a:extLst xmlns:a="http://schemas.openxmlformats.org/drawingml/2006/main">
               <a:ext uri="{FF2B5EF4-FFF2-40B4-BE49-F238E27FC236}">
-                <a16:creationId xmlns:a16="http://schemas.microsoft.com/office/drawing/2014/main" id="{A61B70E4-903F-470B-8A27-0021382BDB23}"/>
+                <a16:creationId xmlns:a16="http://schemas.microsoft.com/office/drawing/2014/main" id="{02109024-5942-4AC5-B609-AB3273B303B9}"/>
               </a:ext>
             </a:extLst>
           </p:cNvPr>
@@ -19100,7 +19100,7 @@
           <p:cNvPr id="44" name="">
             <a:extLst xmlns:a="http://schemas.openxmlformats.org/drawingml/2006/main">
               <a:ext uri="{FF2B5EF4-FFF2-40B4-BE49-F238E27FC236}">
-                <a16:creationId xmlns:a16="http://schemas.microsoft.com/office/drawing/2014/main" id="{2239DC17-1B61-482F-A6CE-4F9D25CF27D8}"/>
+                <a16:creationId xmlns:a16="http://schemas.microsoft.com/office/drawing/2014/main" id="{E3936EAF-32A5-40B3-AEDF-4659F0CFD65F}"/>
               </a:ext>
             </a:extLst>
           </p:cNvPr>
@@ -19133,7 +19133,7 @@
           <p:cNvPr id="45" name="">
             <a:extLst xmlns:a="http://schemas.openxmlformats.org/drawingml/2006/main">
               <a:ext uri="{FF2B5EF4-FFF2-40B4-BE49-F238E27FC236}">
-                <a16:creationId xmlns:a16="http://schemas.microsoft.com/office/drawing/2014/main" id="{D97077BB-217E-43B2-BE03-8488955C7FB3}"/>
+                <a16:creationId xmlns:a16="http://schemas.microsoft.com/office/drawing/2014/main" id="{791D6B0A-216E-4BEF-8FF4-1D1F9C43CE9F}"/>
               </a:ext>
             </a:extLst>
           </p:cNvPr>
@@ -19191,7 +19191,7 @@
           <p:cNvPr id="46" name="">
             <a:extLst xmlns:a="http://schemas.openxmlformats.org/drawingml/2006/main">
               <a:ext uri="{FF2B5EF4-FFF2-40B4-BE49-F238E27FC236}">
-                <a16:creationId xmlns:a16="http://schemas.microsoft.com/office/drawing/2014/main" id="{05191FFB-5571-426C-9B04-9ED87C79BD65}"/>
+                <a16:creationId xmlns:a16="http://schemas.microsoft.com/office/drawing/2014/main" id="{84C50272-3253-4A82-8303-A18DE33F298B}"/>
               </a:ext>
             </a:extLst>
           </p:cNvPr>
@@ -19224,7 +19224,7 @@
           <p:cNvPr id="47" name="">
             <a:extLst xmlns:a="http://schemas.openxmlformats.org/drawingml/2006/main">
               <a:ext uri="{FF2B5EF4-FFF2-40B4-BE49-F238E27FC236}">
-                <a16:creationId xmlns:a16="http://schemas.microsoft.com/office/drawing/2014/main" id="{EFDD73E4-B770-4EB9-BEA6-1BFF0AAFE4B8}"/>
+                <a16:creationId xmlns:a16="http://schemas.microsoft.com/office/drawing/2014/main" id="{2C31FD30-4C3E-44D7-95B5-B829923A4395}"/>
               </a:ext>
             </a:extLst>
           </p:cNvPr>
@@ -19282,7 +19282,7 @@
           <p:cNvPr id="48" name="">
             <a:extLst xmlns:a="http://schemas.openxmlformats.org/drawingml/2006/main">
               <a:ext uri="{FF2B5EF4-FFF2-40B4-BE49-F238E27FC236}">
-                <a16:creationId xmlns:a16="http://schemas.microsoft.com/office/drawing/2014/main" id="{3F426201-516F-406D-BAB6-9183D8B031E1}"/>
+                <a16:creationId xmlns:a16="http://schemas.microsoft.com/office/drawing/2014/main" id="{7B64AFCF-9887-4372-8218-52EE99A8FCE3}"/>
               </a:ext>
             </a:extLst>
           </p:cNvPr>
@@ -19315,7 +19315,7 @@
           <p:cNvPr id="49" name="">
             <a:extLst xmlns:a="http://schemas.openxmlformats.org/drawingml/2006/main">
               <a:ext uri="{FF2B5EF4-FFF2-40B4-BE49-F238E27FC236}">
-                <a16:creationId xmlns:a16="http://schemas.microsoft.com/office/drawing/2014/main" id="{C1F4D80C-435E-43CE-83F4-7BB11F1CB398}"/>
+                <a16:creationId xmlns:a16="http://schemas.microsoft.com/office/drawing/2014/main" id="{3C9A4BDE-771D-444E-9592-BEF7AD375970}"/>
               </a:ext>
             </a:extLst>
           </p:cNvPr>
@@ -19373,7 +19373,7 @@
           <p:cNvPr id="50" name="">
             <a:extLst xmlns:a="http://schemas.openxmlformats.org/drawingml/2006/main">
               <a:ext uri="{FF2B5EF4-FFF2-40B4-BE49-F238E27FC236}">
-                <a16:creationId xmlns:a16="http://schemas.microsoft.com/office/drawing/2014/main" id="{C68426FC-2106-4047-9915-FC44EC3F6E72}"/>
+                <a16:creationId xmlns:a16="http://schemas.microsoft.com/office/drawing/2014/main" id="{1EFD056D-E4CE-4030-9799-0B958425E002}"/>
               </a:ext>
             </a:extLst>
           </p:cNvPr>
@@ -19406,7 +19406,7 @@
           <p:cNvPr id="51" name="">
             <a:extLst xmlns:a="http://schemas.openxmlformats.org/drawingml/2006/main">
               <a:ext uri="{FF2B5EF4-FFF2-40B4-BE49-F238E27FC236}">
-                <a16:creationId xmlns:a16="http://schemas.microsoft.com/office/drawing/2014/main" id="{98308069-F2E9-4D3F-BBE8-45514D1500DA}"/>
+                <a16:creationId xmlns:a16="http://schemas.microsoft.com/office/drawing/2014/main" id="{F9B5BFCE-7D13-4013-8D82-8EED203CD016}"/>
               </a:ext>
             </a:extLst>
           </p:cNvPr>
@@ -19464,7 +19464,7 @@
           <p:cNvPr id="52" name="">
             <a:extLst xmlns:a="http://schemas.openxmlformats.org/drawingml/2006/main">
               <a:ext uri="{FF2B5EF4-FFF2-40B4-BE49-F238E27FC236}">
-                <a16:creationId xmlns:a16="http://schemas.microsoft.com/office/drawing/2014/main" id="{DD14129D-1E11-4A03-84D9-8BB657E41831}"/>
+                <a16:creationId xmlns:a16="http://schemas.microsoft.com/office/drawing/2014/main" id="{059A7FA3-2272-4797-A6D5-005966E26368}"/>
               </a:ext>
             </a:extLst>
           </p:cNvPr>
@@ -19497,7 +19497,7 @@
           <p:cNvPr id="53" name="">
             <a:extLst xmlns:a="http://schemas.openxmlformats.org/drawingml/2006/main">
               <a:ext uri="{FF2B5EF4-FFF2-40B4-BE49-F238E27FC236}">
-                <a16:creationId xmlns:a16="http://schemas.microsoft.com/office/drawing/2014/main" id="{03B976F4-2823-4469-BA12-F1B145640723}"/>
+                <a16:creationId xmlns:a16="http://schemas.microsoft.com/office/drawing/2014/main" id="{9C1E765C-EF2B-40D2-B23A-2CAC97FA380D}"/>
               </a:ext>
             </a:extLst>
           </p:cNvPr>
@@ -19555,7 +19555,7 @@
           <p:cNvPr id="54" name="">
             <a:extLst xmlns:a="http://schemas.openxmlformats.org/drawingml/2006/main">
               <a:ext uri="{FF2B5EF4-FFF2-40B4-BE49-F238E27FC236}">
-                <a16:creationId xmlns:a16="http://schemas.microsoft.com/office/drawing/2014/main" id="{08ECE608-226E-4576-A040-7FF479669A53}"/>
+                <a16:creationId xmlns:a16="http://schemas.microsoft.com/office/drawing/2014/main" id="{F569CF4D-8859-43E4-88CD-61F6CB17CA77}"/>
               </a:ext>
             </a:extLst>
           </p:cNvPr>
@@ -19588,7 +19588,7 @@
           <p:cNvPr id="55" name="">
             <a:extLst xmlns:a="http://schemas.openxmlformats.org/drawingml/2006/main">
               <a:ext uri="{FF2B5EF4-FFF2-40B4-BE49-F238E27FC236}">
-                <a16:creationId xmlns:a16="http://schemas.microsoft.com/office/drawing/2014/main" id="{C5B3CE19-91DB-4440-8DAA-64FE8F3E4FE1}"/>
+                <a16:creationId xmlns:a16="http://schemas.microsoft.com/office/drawing/2014/main" id="{5AF66F0E-12E1-4AF1-B4BC-34C8E82CDA75}"/>
               </a:ext>
             </a:extLst>
           </p:cNvPr>
@@ -19646,7 +19646,7 @@
           <p:cNvPr id="56" name="">
             <a:extLst xmlns:a="http://schemas.openxmlformats.org/drawingml/2006/main">
               <a:ext uri="{FF2B5EF4-FFF2-40B4-BE49-F238E27FC236}">
-                <a16:creationId xmlns:a16="http://schemas.microsoft.com/office/drawing/2014/main" id="{C559BCDA-3BFC-47FF-AEB7-3405875FD7E1}"/>
+                <a16:creationId xmlns:a16="http://schemas.microsoft.com/office/drawing/2014/main" id="{45E371E2-82FB-4289-AC3B-42DFBB58D798}"/>
               </a:ext>
             </a:extLst>
           </p:cNvPr>
@@ -19679,7 +19679,7 @@
           <p:cNvPr id="57" name="">
             <a:extLst xmlns:a="http://schemas.openxmlformats.org/drawingml/2006/main">
               <a:ext uri="{FF2B5EF4-FFF2-40B4-BE49-F238E27FC236}">
-                <a16:creationId xmlns:a16="http://schemas.microsoft.com/office/drawing/2014/main" id="{7D998F1E-F4AF-49B1-B544-2285CBDA1745}"/>
+                <a16:creationId xmlns:a16="http://schemas.microsoft.com/office/drawing/2014/main" id="{A1152A0E-DB9A-4B7B-8D87-E41138E050F4}"/>
               </a:ext>
             </a:extLst>
           </p:cNvPr>
@@ -19737,7 +19737,7 @@
           <p:cNvPr id="58" name="">
             <a:extLst xmlns:a="http://schemas.openxmlformats.org/drawingml/2006/main">
               <a:ext uri="{FF2B5EF4-FFF2-40B4-BE49-F238E27FC236}">
-                <a16:creationId xmlns:a16="http://schemas.microsoft.com/office/drawing/2014/main" id="{D7B78C9B-6BF7-42A5-8424-A1A1B67AEEFA}"/>
+                <a16:creationId xmlns:a16="http://schemas.microsoft.com/office/drawing/2014/main" id="{0006BF87-C492-43EE-9B12-76D7072F9B33}"/>
               </a:ext>
             </a:extLst>
           </p:cNvPr>
@@ -19770,7 +19770,7 @@
           <p:cNvPr id="59" name="">
             <a:extLst xmlns:a="http://schemas.openxmlformats.org/drawingml/2006/main">
               <a:ext uri="{FF2B5EF4-FFF2-40B4-BE49-F238E27FC236}">
-                <a16:creationId xmlns:a16="http://schemas.microsoft.com/office/drawing/2014/main" id="{5AEB51B1-A5F4-4176-AAD9-351BBDD4AFBC}"/>
+                <a16:creationId xmlns:a16="http://schemas.microsoft.com/office/drawing/2014/main" id="{EF79545D-9464-4639-AF08-5572329028AF}"/>
               </a:ext>
             </a:extLst>
           </p:cNvPr>
@@ -19828,7 +19828,7 @@
           <p:cNvPr id="60" name="">
             <a:extLst xmlns:a="http://schemas.openxmlformats.org/drawingml/2006/main">
               <a:ext uri="{FF2B5EF4-FFF2-40B4-BE49-F238E27FC236}">
-                <a16:creationId xmlns:a16="http://schemas.microsoft.com/office/drawing/2014/main" id="{F78BAF4F-A4B9-4E46-8016-70A5A428A688}"/>
+                <a16:creationId xmlns:a16="http://schemas.microsoft.com/office/drawing/2014/main" id="{C78C3F0C-B165-4493-8C56-EF659CE45ED4}"/>
               </a:ext>
             </a:extLst>
           </p:cNvPr>
@@ -19861,7 +19861,7 @@
           <p:cNvPr id="61" name="">
             <a:extLst xmlns:a="http://schemas.openxmlformats.org/drawingml/2006/main">
               <a:ext uri="{FF2B5EF4-FFF2-40B4-BE49-F238E27FC236}">
-                <a16:creationId xmlns:a16="http://schemas.microsoft.com/office/drawing/2014/main" id="{01DA3E3E-CBE0-4C19-9E1B-B507258F387B}"/>
+                <a16:creationId xmlns:a16="http://schemas.microsoft.com/office/drawing/2014/main" id="{D34066F0-457B-4268-B438-1A091CE6C0FB}"/>
               </a:ext>
             </a:extLst>
           </p:cNvPr>
@@ -19919,7 +19919,7 @@
           <p:cNvPr id="62" name="">
             <a:extLst xmlns:a="http://schemas.openxmlformats.org/drawingml/2006/main">
               <a:ext uri="{FF2B5EF4-FFF2-40B4-BE49-F238E27FC236}">
-                <a16:creationId xmlns:a16="http://schemas.microsoft.com/office/drawing/2014/main" id="{AF94F4B2-8C7D-43F8-8FCF-B804877389B8}"/>
+                <a16:creationId xmlns:a16="http://schemas.microsoft.com/office/drawing/2014/main" id="{EF2757F6-0837-42A2-A366-C5EFDC445969}"/>
               </a:ext>
             </a:extLst>
           </p:cNvPr>
@@ -19952,7 +19952,7 @@
           <p:cNvPr id="63" name="">
             <a:extLst xmlns:a="http://schemas.openxmlformats.org/drawingml/2006/main">
               <a:ext uri="{FF2B5EF4-FFF2-40B4-BE49-F238E27FC236}">
-                <a16:creationId xmlns:a16="http://schemas.microsoft.com/office/drawing/2014/main" id="{0D65BB49-9470-41F9-8B8C-D56F6B137D0E}"/>
+                <a16:creationId xmlns:a16="http://schemas.microsoft.com/office/drawing/2014/main" id="{24E856AB-CDA1-4F82-B5A3-161ED84EC496}"/>
               </a:ext>
             </a:extLst>
           </p:cNvPr>
@@ -20010,7 +20010,7 @@
           <p:cNvPr id="64" name="">
             <a:extLst xmlns:a="http://schemas.openxmlformats.org/drawingml/2006/main">
               <a:ext uri="{FF2B5EF4-FFF2-40B4-BE49-F238E27FC236}">
-                <a16:creationId xmlns:a16="http://schemas.microsoft.com/office/drawing/2014/main" id="{6B21A050-693D-462F-9E72-D059E6334C69}"/>
+                <a16:creationId xmlns:a16="http://schemas.microsoft.com/office/drawing/2014/main" id="{7386679D-0971-403B-B079-31317478F512}"/>
               </a:ext>
             </a:extLst>
           </p:cNvPr>
@@ -20043,7 +20043,7 @@
           <p:cNvPr id="65" name="">
             <a:extLst xmlns:a="http://schemas.openxmlformats.org/drawingml/2006/main">
               <a:ext uri="{FF2B5EF4-FFF2-40B4-BE49-F238E27FC236}">
-                <a16:creationId xmlns:a16="http://schemas.microsoft.com/office/drawing/2014/main" id="{BF159A86-F2A6-4CCD-935B-0EA3DC1529C7}"/>
+                <a16:creationId xmlns:a16="http://schemas.microsoft.com/office/drawing/2014/main" id="{A0F92A97-177B-46C9-8C23-D298BBBDF6FC}"/>
               </a:ext>
             </a:extLst>
           </p:cNvPr>
@@ -20101,7 +20101,7 @@
           <p:cNvPr id="66" name="">
             <a:extLst xmlns:a="http://schemas.openxmlformats.org/drawingml/2006/main">
               <a:ext uri="{FF2B5EF4-FFF2-40B4-BE49-F238E27FC236}">
-                <a16:creationId xmlns:a16="http://schemas.microsoft.com/office/drawing/2014/main" id="{0197EAF9-5340-4C28-8A40-B92EE754E0F6}"/>
+                <a16:creationId xmlns:a16="http://schemas.microsoft.com/office/drawing/2014/main" id="{48B54BA8-02D7-47CC-BF7C-B5923C2921D4}"/>
               </a:ext>
             </a:extLst>
           </p:cNvPr>
@@ -20134,7 +20134,7 @@
           <p:cNvPr id="67" name="">
             <a:extLst xmlns:a="http://schemas.openxmlformats.org/drawingml/2006/main">
               <a:ext uri="{FF2B5EF4-FFF2-40B4-BE49-F238E27FC236}">
-                <a16:creationId xmlns:a16="http://schemas.microsoft.com/office/drawing/2014/main" id="{32E6F6BD-BF2E-4C63-9DD6-0DD7563C7E21}"/>
+                <a16:creationId xmlns:a16="http://schemas.microsoft.com/office/drawing/2014/main" id="{9B34F970-46B5-46A5-A652-8C086DDBDEFA}"/>
               </a:ext>
             </a:extLst>
           </p:cNvPr>
@@ -20192,7 +20192,7 @@
           <p:cNvPr id="68" name="">
             <a:extLst xmlns:a="http://schemas.openxmlformats.org/drawingml/2006/main">
               <a:ext uri="{FF2B5EF4-FFF2-40B4-BE49-F238E27FC236}">
-                <a16:creationId xmlns:a16="http://schemas.microsoft.com/office/drawing/2014/main" id="{49EC12E7-0087-4902-BD58-CFCEF61A3068}"/>
+                <a16:creationId xmlns:a16="http://schemas.microsoft.com/office/drawing/2014/main" id="{D8995A45-F655-4E7D-9969-EEA33EA0DABE}"/>
               </a:ext>
             </a:extLst>
           </p:cNvPr>
@@ -20225,7 +20225,7 @@
           <p:cNvPr id="69" name="">
             <a:extLst xmlns:a="http://schemas.openxmlformats.org/drawingml/2006/main">
               <a:ext uri="{FF2B5EF4-FFF2-40B4-BE49-F238E27FC236}">
-                <a16:creationId xmlns:a16="http://schemas.microsoft.com/office/drawing/2014/main" id="{FE94C0F0-EB37-4287-BEDF-CBF477BE6220}"/>
+                <a16:creationId xmlns:a16="http://schemas.microsoft.com/office/drawing/2014/main" id="{6C53C595-C1ED-4AC1-AE30-368165F1DF13}"/>
               </a:ext>
             </a:extLst>
           </p:cNvPr>
@@ -20283,7 +20283,7 @@
           <p:cNvPr id="70" name="">
             <a:extLst xmlns:a="http://schemas.openxmlformats.org/drawingml/2006/main">
               <a:ext uri="{FF2B5EF4-FFF2-40B4-BE49-F238E27FC236}">
-                <a16:creationId xmlns:a16="http://schemas.microsoft.com/office/drawing/2014/main" id="{FD608AF6-B9DE-45CC-B66F-D6827EEED7A6}"/>
+                <a16:creationId xmlns:a16="http://schemas.microsoft.com/office/drawing/2014/main" id="{335262F0-0298-4F5C-AAB4-E0E5DD3527D0}"/>
               </a:ext>
             </a:extLst>
           </p:cNvPr>
@@ -20316,7 +20316,7 @@
           <p:cNvPr id="71" name="">
             <a:extLst xmlns:a="http://schemas.openxmlformats.org/drawingml/2006/main">
               <a:ext uri="{FF2B5EF4-FFF2-40B4-BE49-F238E27FC236}">
-                <a16:creationId xmlns:a16="http://schemas.microsoft.com/office/drawing/2014/main" id="{0E0F5B41-6514-4A28-8B4B-72F6C557C81E}"/>
+                <a16:creationId xmlns:a16="http://schemas.microsoft.com/office/drawing/2014/main" id="{D6F72A66-DE53-44B0-8DC5-90D766394CC4}"/>
               </a:ext>
             </a:extLst>
           </p:cNvPr>
@@ -20374,7 +20374,7 @@
           <p:cNvPr id="72" name="">
             <a:extLst xmlns:a="http://schemas.openxmlformats.org/drawingml/2006/main">
               <a:ext uri="{FF2B5EF4-FFF2-40B4-BE49-F238E27FC236}">
-                <a16:creationId xmlns:a16="http://schemas.microsoft.com/office/drawing/2014/main" id="{B7F1188F-E267-4B63-AE41-C91F0E23FFA2}"/>
+                <a16:creationId xmlns:a16="http://schemas.microsoft.com/office/drawing/2014/main" id="{D7B2E121-9041-4A33-8663-F3BA8D81AD37}"/>
               </a:ext>
             </a:extLst>
           </p:cNvPr>
@@ -20407,7 +20407,7 @@
           <p:cNvPr id="73" name="">
             <a:extLst xmlns:a="http://schemas.openxmlformats.org/drawingml/2006/main">
               <a:ext uri="{FF2B5EF4-FFF2-40B4-BE49-F238E27FC236}">
-                <a16:creationId xmlns:a16="http://schemas.microsoft.com/office/drawing/2014/main" id="{F0851DDB-21E3-461D-8555-465BF34CE1D6}"/>
+                <a16:creationId xmlns:a16="http://schemas.microsoft.com/office/drawing/2014/main" id="{4F6F0643-411C-4157-BDE8-C73E760A795C}"/>
               </a:ext>
             </a:extLst>
           </p:cNvPr>
@@ -20465,7 +20465,7 @@
           <p:cNvPr id="74" name="">
             <a:extLst xmlns:a="http://schemas.openxmlformats.org/drawingml/2006/main">
               <a:ext uri="{FF2B5EF4-FFF2-40B4-BE49-F238E27FC236}">
-                <a16:creationId xmlns:a16="http://schemas.microsoft.com/office/drawing/2014/main" id="{217AA92E-57D7-479E-9FB6-AC49605E535C}"/>
+                <a16:creationId xmlns:a16="http://schemas.microsoft.com/office/drawing/2014/main" id="{04C06B6E-F6D3-4053-92F9-C9F7B7850B8A}"/>
               </a:ext>
             </a:extLst>
           </p:cNvPr>
@@ -20498,7 +20498,7 @@
           <p:cNvPr id="75" name="">
             <a:extLst xmlns:a="http://schemas.openxmlformats.org/drawingml/2006/main">
               <a:ext uri="{FF2B5EF4-FFF2-40B4-BE49-F238E27FC236}">
-                <a16:creationId xmlns:a16="http://schemas.microsoft.com/office/drawing/2014/main" id="{59C70743-9A4F-4B2A-9A4E-F82DCA0E9C89}"/>
+                <a16:creationId xmlns:a16="http://schemas.microsoft.com/office/drawing/2014/main" id="{68DAB207-1C62-4A4C-B042-F04004652B8E}"/>
               </a:ext>
             </a:extLst>
           </p:cNvPr>
@@ -20556,7 +20556,7 @@
           <p:cNvPr id="76" name="">
             <a:extLst xmlns:a="http://schemas.openxmlformats.org/drawingml/2006/main">
               <a:ext uri="{FF2B5EF4-FFF2-40B4-BE49-F238E27FC236}">
-                <a16:creationId xmlns:a16="http://schemas.microsoft.com/office/drawing/2014/main" id="{D3DB60A8-1535-4F04-8A96-736D9C0ACAA0}"/>
+                <a16:creationId xmlns:a16="http://schemas.microsoft.com/office/drawing/2014/main" id="{ED2760D5-D66A-40CD-A3DE-934F6D648E7F}"/>
               </a:ext>
             </a:extLst>
           </p:cNvPr>
@@ -20589,7 +20589,7 @@
           <p:cNvPr id="77" name="">
             <a:extLst xmlns:a="http://schemas.openxmlformats.org/drawingml/2006/main">
               <a:ext uri="{FF2B5EF4-FFF2-40B4-BE49-F238E27FC236}">
-                <a16:creationId xmlns:a16="http://schemas.microsoft.com/office/drawing/2014/main" id="{6E1E043A-F78A-48B5-B92F-15466933360B}"/>
+                <a16:creationId xmlns:a16="http://schemas.microsoft.com/office/drawing/2014/main" id="{0A787788-1E20-4B6E-9E95-FC8DF54AD964}"/>
               </a:ext>
             </a:extLst>
           </p:cNvPr>
@@ -20647,7 +20647,7 @@
           <p:cNvPr id="78" name="">
             <a:extLst xmlns:a="http://schemas.openxmlformats.org/drawingml/2006/main">
               <a:ext uri="{FF2B5EF4-FFF2-40B4-BE49-F238E27FC236}">
-                <a16:creationId xmlns:a16="http://schemas.microsoft.com/office/drawing/2014/main" id="{5D67E595-614C-4F7A-9978-5BC84C1F0AB1}"/>
+                <a16:creationId xmlns:a16="http://schemas.microsoft.com/office/drawing/2014/main" id="{9D65945E-0ABB-49E6-9B00-4487A903583A}"/>
               </a:ext>
             </a:extLst>
           </p:cNvPr>
@@ -20680,7 +20680,7 @@
           <p:cNvPr id="79" name="">
             <a:extLst xmlns:a="http://schemas.openxmlformats.org/drawingml/2006/main">
               <a:ext uri="{FF2B5EF4-FFF2-40B4-BE49-F238E27FC236}">
-                <a16:creationId xmlns:a16="http://schemas.microsoft.com/office/drawing/2014/main" id="{40895A47-9B7F-491D-84F7-ABF194A0CAE7}"/>
+                <a16:creationId xmlns:a16="http://schemas.microsoft.com/office/drawing/2014/main" id="{7032B9A0-9C8D-428E-BEFA-8B9E6FB70DE1}"/>
               </a:ext>
             </a:extLst>
           </p:cNvPr>
@@ -20738,7 +20738,7 @@
           <p:cNvPr id="80" name="">
             <a:extLst xmlns:a="http://schemas.openxmlformats.org/drawingml/2006/main">
               <a:ext uri="{FF2B5EF4-FFF2-40B4-BE49-F238E27FC236}">
-                <a16:creationId xmlns:a16="http://schemas.microsoft.com/office/drawing/2014/main" id="{F0B423A0-60A3-4BFD-A6F3-00BEBE611D95}"/>
+                <a16:creationId xmlns:a16="http://schemas.microsoft.com/office/drawing/2014/main" id="{F5A219D2-4AF1-4319-BA30-1E3F90095B95}"/>
               </a:ext>
             </a:extLst>
           </p:cNvPr>
@@ -20771,7 +20771,7 @@
           <p:cNvPr id="81" name="">
             <a:extLst xmlns:a="http://schemas.openxmlformats.org/drawingml/2006/main">
               <a:ext uri="{FF2B5EF4-FFF2-40B4-BE49-F238E27FC236}">
-                <a16:creationId xmlns:a16="http://schemas.microsoft.com/office/drawing/2014/main" id="{35A678C0-987A-4ED0-9786-28D9EFE6588B}"/>
+                <a16:creationId xmlns:a16="http://schemas.microsoft.com/office/drawing/2014/main" id="{4969D2F9-A5A3-46C4-8B99-95572FAD32A0}"/>
               </a:ext>
             </a:extLst>
           </p:cNvPr>
@@ -20829,7 +20829,7 @@
           <p:cNvPr id="82" name="">
             <a:extLst xmlns:a="http://schemas.openxmlformats.org/drawingml/2006/main">
               <a:ext uri="{FF2B5EF4-FFF2-40B4-BE49-F238E27FC236}">
-                <a16:creationId xmlns:a16="http://schemas.microsoft.com/office/drawing/2014/main" id="{4202841A-AEA7-44DD-BF77-93EB3BFEDF5D}"/>
+                <a16:creationId xmlns:a16="http://schemas.microsoft.com/office/drawing/2014/main" id="{BB124AAC-AF67-4D8A-BBB6-10CBC7A90578}"/>
               </a:ext>
             </a:extLst>
           </p:cNvPr>
@@ -20862,7 +20862,7 @@
           <p:cNvPr id="83" name="">
             <a:extLst xmlns:a="http://schemas.openxmlformats.org/drawingml/2006/main">
               <a:ext uri="{FF2B5EF4-FFF2-40B4-BE49-F238E27FC236}">
-                <a16:creationId xmlns:a16="http://schemas.microsoft.com/office/drawing/2014/main" id="{1BF6BCB2-A249-4E1A-911E-A3FE1CDECA68}"/>
+                <a16:creationId xmlns:a16="http://schemas.microsoft.com/office/drawing/2014/main" id="{FF5B66A9-8FBF-4EB1-8DD8-FC37B4C983A7}"/>
               </a:ext>
             </a:extLst>
           </p:cNvPr>
@@ -20920,7 +20920,7 @@
           <p:cNvPr id="84" name="">
             <a:extLst xmlns:a="http://schemas.openxmlformats.org/drawingml/2006/main">
               <a:ext uri="{FF2B5EF4-FFF2-40B4-BE49-F238E27FC236}">
-                <a16:creationId xmlns:a16="http://schemas.microsoft.com/office/drawing/2014/main" id="{2B0223E8-8EEC-4C90-A03D-5499970F2F36}"/>
+                <a16:creationId xmlns:a16="http://schemas.microsoft.com/office/drawing/2014/main" id="{EEF8ACF7-40D2-4C03-B9A8-16FBE7FB39BD}"/>
               </a:ext>
             </a:extLst>
           </p:cNvPr>
@@ -20953,7 +20953,7 @@
           <p:cNvPr id="85" name="">
             <a:extLst xmlns:a="http://schemas.openxmlformats.org/drawingml/2006/main">
               <a:ext uri="{FF2B5EF4-FFF2-40B4-BE49-F238E27FC236}">
-                <a16:creationId xmlns:a16="http://schemas.microsoft.com/office/drawing/2014/main" id="{31CB49A7-F100-4794-8B97-AAC95EC7A2AB}"/>
+                <a16:creationId xmlns:a16="http://schemas.microsoft.com/office/drawing/2014/main" id="{0F306445-4094-4B88-8899-1339EEDBE435}"/>
               </a:ext>
             </a:extLst>
           </p:cNvPr>
@@ -21011,7 +21011,7 @@
           <p:cNvPr id="86" name="">
             <a:extLst xmlns:a="http://schemas.openxmlformats.org/drawingml/2006/main">
               <a:ext uri="{FF2B5EF4-FFF2-40B4-BE49-F238E27FC236}">
-                <a16:creationId xmlns:a16="http://schemas.microsoft.com/office/drawing/2014/main" id="{B65169FD-0185-4B86-9B93-2A6F0ACAB55B}"/>
+                <a16:creationId xmlns:a16="http://schemas.microsoft.com/office/drawing/2014/main" id="{8D33532E-8E0C-488E-BC59-1C581747520D}"/>
               </a:ext>
             </a:extLst>
           </p:cNvPr>
@@ -21044,7 +21044,7 @@
           <p:cNvPr id="87" name="">
             <a:extLst xmlns:a="http://schemas.openxmlformats.org/drawingml/2006/main">
               <a:ext uri="{FF2B5EF4-FFF2-40B4-BE49-F238E27FC236}">
-                <a16:creationId xmlns:a16="http://schemas.microsoft.com/office/drawing/2014/main" id="{6632B5FA-DA86-4375-86EB-0A220B6D8019}"/>
+                <a16:creationId xmlns:a16="http://schemas.microsoft.com/office/drawing/2014/main" id="{78006156-C031-481D-841A-5DD2FDC97A02}"/>
               </a:ext>
             </a:extLst>
           </p:cNvPr>
@@ -21102,7 +21102,7 @@
           <p:cNvPr id="88" name="">
             <a:extLst xmlns:a="http://schemas.openxmlformats.org/drawingml/2006/main">
               <a:ext uri="{FF2B5EF4-FFF2-40B4-BE49-F238E27FC236}">
-                <a16:creationId xmlns:a16="http://schemas.microsoft.com/office/drawing/2014/main" id="{1FBB2C8A-E5D1-471C-8910-BD56D5EEC6BE}"/>
+                <a16:creationId xmlns:a16="http://schemas.microsoft.com/office/drawing/2014/main" id="{B1759A82-A082-4ACA-BADA-D46BEB8A11D8}"/>
               </a:ext>
             </a:extLst>
           </p:cNvPr>
@@ -21135,7 +21135,7 @@
           <p:cNvPr id="89" name="">
             <a:extLst xmlns:a="http://schemas.openxmlformats.org/drawingml/2006/main">
               <a:ext uri="{FF2B5EF4-FFF2-40B4-BE49-F238E27FC236}">
-                <a16:creationId xmlns:a16="http://schemas.microsoft.com/office/drawing/2014/main" id="{AA7AABF8-CAE7-4800-B3B3-AA0C9634607B}"/>
+                <a16:creationId xmlns:a16="http://schemas.microsoft.com/office/drawing/2014/main" id="{5CD09554-7743-4E55-ABE8-28CDD568BA63}"/>
               </a:ext>
             </a:extLst>
           </p:cNvPr>
@@ -21193,7 +21193,7 @@
           <p:cNvPr id="90" name="">
             <a:extLst xmlns:a="http://schemas.openxmlformats.org/drawingml/2006/main">
               <a:ext uri="{FF2B5EF4-FFF2-40B4-BE49-F238E27FC236}">
-                <a16:creationId xmlns:a16="http://schemas.microsoft.com/office/drawing/2014/main" id="{642AA52C-0771-4EBB-9E37-FE15106BB51C}"/>
+                <a16:creationId xmlns:a16="http://schemas.microsoft.com/office/drawing/2014/main" id="{6E06699B-4B5E-4C30-949B-81057D69B7EF}"/>
               </a:ext>
             </a:extLst>
           </p:cNvPr>
@@ -21226,7 +21226,7 @@
           <p:cNvPr id="91" name="">
             <a:extLst xmlns:a="http://schemas.openxmlformats.org/drawingml/2006/main">
               <a:ext uri="{FF2B5EF4-FFF2-40B4-BE49-F238E27FC236}">
-                <a16:creationId xmlns:a16="http://schemas.microsoft.com/office/drawing/2014/main" id="{5E937965-7353-4359-B41F-72AB44024276}"/>
+                <a16:creationId xmlns:a16="http://schemas.microsoft.com/office/drawing/2014/main" id="{B2B33DEC-C239-49BE-A290-8D719870A7E3}"/>
               </a:ext>
             </a:extLst>
           </p:cNvPr>
@@ -21284,7 +21284,7 @@
           <p:cNvPr id="92" name="">
             <a:extLst xmlns:a="http://schemas.openxmlformats.org/drawingml/2006/main">
               <a:ext uri="{FF2B5EF4-FFF2-40B4-BE49-F238E27FC236}">
-                <a16:creationId xmlns:a16="http://schemas.microsoft.com/office/drawing/2014/main" id="{726980B4-D0D0-41DE-BC80-6B45411955FC}"/>
+                <a16:creationId xmlns:a16="http://schemas.microsoft.com/office/drawing/2014/main" id="{1199C408-7CF0-4A35-B251-718D1DEF13CE}"/>
               </a:ext>
             </a:extLst>
           </p:cNvPr>
@@ -21317,7 +21317,7 @@
           <p:cNvPr id="93" name="">
             <a:extLst xmlns:a="http://schemas.openxmlformats.org/drawingml/2006/main">
               <a:ext uri="{FF2B5EF4-FFF2-40B4-BE49-F238E27FC236}">
-                <a16:creationId xmlns:a16="http://schemas.microsoft.com/office/drawing/2014/main" id="{1FB5B6D2-192E-4801-BFC1-8CB9FB51DDAB}"/>
+                <a16:creationId xmlns:a16="http://schemas.microsoft.com/office/drawing/2014/main" id="{0A34AA64-F232-42FD-BC5F-7CDD9FD184D3}"/>
               </a:ext>
             </a:extLst>
           </p:cNvPr>
@@ -21375,7 +21375,7 @@
           <p:cNvPr id="94" name="">
             <a:extLst xmlns:a="http://schemas.openxmlformats.org/drawingml/2006/main">
               <a:ext uri="{FF2B5EF4-FFF2-40B4-BE49-F238E27FC236}">
-                <a16:creationId xmlns:a16="http://schemas.microsoft.com/office/drawing/2014/main" id="{78DE0C9A-D718-4725-831E-159C520D66D7}"/>
+                <a16:creationId xmlns:a16="http://schemas.microsoft.com/office/drawing/2014/main" id="{2F3E7A94-6916-463E-970E-D7084000A0DB}"/>
               </a:ext>
             </a:extLst>
           </p:cNvPr>
@@ -21408,7 +21408,7 @@
           <p:cNvPr id="95" name="">
             <a:extLst xmlns:a="http://schemas.openxmlformats.org/drawingml/2006/main">
               <a:ext uri="{FF2B5EF4-FFF2-40B4-BE49-F238E27FC236}">
-                <a16:creationId xmlns:a16="http://schemas.microsoft.com/office/drawing/2014/main" id="{550FA284-6C0E-4C3A-99F7-A23A5A2C0F8D}"/>
+                <a16:creationId xmlns:a16="http://schemas.microsoft.com/office/drawing/2014/main" id="{F5FD2B25-8BBB-4DFD-ABDE-DC077CBD45D4}"/>
               </a:ext>
             </a:extLst>
           </p:cNvPr>
@@ -21466,7 +21466,7 @@
           <p:cNvPr id="96" name="">
             <a:extLst xmlns:a="http://schemas.openxmlformats.org/drawingml/2006/main">
               <a:ext uri="{FF2B5EF4-FFF2-40B4-BE49-F238E27FC236}">
-                <a16:creationId xmlns:a16="http://schemas.microsoft.com/office/drawing/2014/main" id="{6D3494FF-679B-4094-B015-9734498D20E0}"/>
+                <a16:creationId xmlns:a16="http://schemas.microsoft.com/office/drawing/2014/main" id="{381F869B-E304-4958-86CA-48B0A199089C}"/>
               </a:ext>
             </a:extLst>
           </p:cNvPr>
@@ -21499,7 +21499,7 @@
           <p:cNvPr id="97" name="">
             <a:extLst xmlns:a="http://schemas.openxmlformats.org/drawingml/2006/main">
               <a:ext uri="{FF2B5EF4-FFF2-40B4-BE49-F238E27FC236}">
-                <a16:creationId xmlns:a16="http://schemas.microsoft.com/office/drawing/2014/main" id="{763F5296-EA3A-4399-8FDC-6B04217AE17C}"/>
+                <a16:creationId xmlns:a16="http://schemas.microsoft.com/office/drawing/2014/main" id="{C697D000-C43E-46ED-8BDB-5D45724C764F}"/>
               </a:ext>
             </a:extLst>
           </p:cNvPr>
@@ -21557,7 +21557,7 @@
           <p:cNvPr id="98" name="">
             <a:extLst xmlns:a="http://schemas.openxmlformats.org/drawingml/2006/main">
               <a:ext uri="{FF2B5EF4-FFF2-40B4-BE49-F238E27FC236}">
-                <a16:creationId xmlns:a16="http://schemas.microsoft.com/office/drawing/2014/main" id="{3AB4ABF5-96F0-44C4-A48B-B7F543063DA4}"/>
+                <a16:creationId xmlns:a16="http://schemas.microsoft.com/office/drawing/2014/main" id="{C33E5670-ACA6-4AE0-9224-B0780D87A9C1}"/>
               </a:ext>
             </a:extLst>
           </p:cNvPr>
@@ -21590,7 +21590,7 @@
           <p:cNvPr id="99" name="">
             <a:extLst xmlns:a="http://schemas.openxmlformats.org/drawingml/2006/main">
               <a:ext uri="{FF2B5EF4-FFF2-40B4-BE49-F238E27FC236}">
-                <a16:creationId xmlns:a16="http://schemas.microsoft.com/office/drawing/2014/main" id="{1C2D87D7-878D-4661-9D7F-2F6C758C0324}"/>
+                <a16:creationId xmlns:a16="http://schemas.microsoft.com/office/drawing/2014/main" id="{FD6B2DF7-EE3B-4EE6-8429-300A5AFFD337}"/>
               </a:ext>
             </a:extLst>
           </p:cNvPr>
@@ -21648,7 +21648,7 @@
           <p:cNvPr id="100" name="">
             <a:extLst xmlns:a="http://schemas.openxmlformats.org/drawingml/2006/main">
               <a:ext uri="{FF2B5EF4-FFF2-40B4-BE49-F238E27FC236}">
-                <a16:creationId xmlns:a16="http://schemas.microsoft.com/office/drawing/2014/main" id="{E210177B-12C5-4199-97B6-799F37DC8A77}"/>
+                <a16:creationId xmlns:a16="http://schemas.microsoft.com/office/drawing/2014/main" id="{5A8D8743-D8FB-4F55-8831-74083520A896}"/>
               </a:ext>
             </a:extLst>
           </p:cNvPr>
@@ -21681,7 +21681,7 @@
           <p:cNvPr id="101" name="">
             <a:extLst xmlns:a="http://schemas.openxmlformats.org/drawingml/2006/main">
               <a:ext uri="{FF2B5EF4-FFF2-40B4-BE49-F238E27FC236}">
-                <a16:creationId xmlns:a16="http://schemas.microsoft.com/office/drawing/2014/main" id="{CA5CCFBD-CD11-470C-AC5A-1BC18534AF0C}"/>
+                <a16:creationId xmlns:a16="http://schemas.microsoft.com/office/drawing/2014/main" id="{CCD5C880-6624-42B2-B487-8B2EA68D86C9}"/>
               </a:ext>
             </a:extLst>
           </p:cNvPr>
@@ -21739,7 +21739,7 @@
           <p:cNvPr id="102" name="">
             <a:extLst xmlns:a="http://schemas.openxmlformats.org/drawingml/2006/main">
               <a:ext uri="{FF2B5EF4-FFF2-40B4-BE49-F238E27FC236}">
-                <a16:creationId xmlns:a16="http://schemas.microsoft.com/office/drawing/2014/main" id="{E4DEE14D-021D-4747-A4F6-E5DCE4B17800}"/>
+                <a16:creationId xmlns:a16="http://schemas.microsoft.com/office/drawing/2014/main" id="{3595D325-F113-429D-A470-D9AC000A05B5}"/>
               </a:ext>
             </a:extLst>
           </p:cNvPr>
@@ -21772,7 +21772,7 @@
           <p:cNvPr id="103" name="">
             <a:extLst xmlns:a="http://schemas.openxmlformats.org/drawingml/2006/main">
               <a:ext uri="{FF2B5EF4-FFF2-40B4-BE49-F238E27FC236}">
-                <a16:creationId xmlns:a16="http://schemas.microsoft.com/office/drawing/2014/main" id="{614E39D0-9329-40C6-906F-DF0D40278B65}"/>
+                <a16:creationId xmlns:a16="http://schemas.microsoft.com/office/drawing/2014/main" id="{B3A28D88-DCDF-4FF5-95B2-925B7342EB47}"/>
               </a:ext>
             </a:extLst>
           </p:cNvPr>
@@ -21830,7 +21830,7 @@
           <p:cNvPr id="104" name="">
             <a:extLst xmlns:a="http://schemas.openxmlformats.org/drawingml/2006/main">
               <a:ext uri="{FF2B5EF4-FFF2-40B4-BE49-F238E27FC236}">
-                <a16:creationId xmlns:a16="http://schemas.microsoft.com/office/drawing/2014/main" id="{4895F4AE-6C6E-42A5-B7F1-BA0EC592BAE5}"/>
+                <a16:creationId xmlns:a16="http://schemas.microsoft.com/office/drawing/2014/main" id="{E08F530A-0775-4B13-97A7-D5B889B06535}"/>
               </a:ext>
             </a:extLst>
           </p:cNvPr>
@@ -21863,7 +21863,7 @@
           <p:cNvPr id="105" name="">
             <a:extLst xmlns:a="http://schemas.openxmlformats.org/drawingml/2006/main">
               <a:ext uri="{FF2B5EF4-FFF2-40B4-BE49-F238E27FC236}">
-                <a16:creationId xmlns:a16="http://schemas.microsoft.com/office/drawing/2014/main" id="{673EF45F-5B3A-4E79-B329-4F6310BC57C0}"/>
+                <a16:creationId xmlns:a16="http://schemas.microsoft.com/office/drawing/2014/main" id="{DF7A290D-5758-4648-A96D-A31144288E75}"/>
               </a:ext>
             </a:extLst>
           </p:cNvPr>
@@ -21921,7 +21921,7 @@
           <p:cNvPr id="106" name="">
             <a:extLst xmlns:a="http://schemas.openxmlformats.org/drawingml/2006/main">
               <a:ext uri="{FF2B5EF4-FFF2-40B4-BE49-F238E27FC236}">
-                <a16:creationId xmlns:a16="http://schemas.microsoft.com/office/drawing/2014/main" id="{3F99378C-9E70-4F2D-A7FC-C034E06F9DD2}"/>
+                <a16:creationId xmlns:a16="http://schemas.microsoft.com/office/drawing/2014/main" id="{B0D225FC-A451-4664-85DD-168640A320F4}"/>
               </a:ext>
             </a:extLst>
           </p:cNvPr>
@@ -21954,7 +21954,7 @@
           <p:cNvPr id="107" name="">
             <a:extLst xmlns:a="http://schemas.openxmlformats.org/drawingml/2006/main">
               <a:ext uri="{FF2B5EF4-FFF2-40B4-BE49-F238E27FC236}">
-                <a16:creationId xmlns:a16="http://schemas.microsoft.com/office/drawing/2014/main" id="{7E9D7F7D-9B87-4AC4-8E9A-44A6E91BCD09}"/>
+                <a16:creationId xmlns:a16="http://schemas.microsoft.com/office/drawing/2014/main" id="{BE9EB843-4D2B-4AD5-9548-4595606466D5}"/>
               </a:ext>
             </a:extLst>
           </p:cNvPr>
@@ -22012,7 +22012,7 @@
           <p:cNvPr id="108" name="">
             <a:extLst xmlns:a="http://schemas.openxmlformats.org/drawingml/2006/main">
               <a:ext uri="{FF2B5EF4-FFF2-40B4-BE49-F238E27FC236}">
-                <a16:creationId xmlns:a16="http://schemas.microsoft.com/office/drawing/2014/main" id="{88D6CA1C-C387-48C6-8C7C-4ABC6EDD5D3F}"/>
+                <a16:creationId xmlns:a16="http://schemas.microsoft.com/office/drawing/2014/main" id="{2A39B1AA-3A07-4166-A581-C83745C6338B}"/>
               </a:ext>
             </a:extLst>
           </p:cNvPr>
@@ -22045,7 +22045,7 @@
           <p:cNvPr id="109" name="">
             <a:extLst xmlns:a="http://schemas.openxmlformats.org/drawingml/2006/main">
               <a:ext uri="{FF2B5EF4-FFF2-40B4-BE49-F238E27FC236}">
-                <a16:creationId xmlns:a16="http://schemas.microsoft.com/office/drawing/2014/main" id="{2C0A80BF-E830-456D-8203-3E1796A2011E}"/>
+                <a16:creationId xmlns:a16="http://schemas.microsoft.com/office/drawing/2014/main" id="{D514CBBA-A6F5-49D9-B261-01E2555CD610}"/>
               </a:ext>
             </a:extLst>
           </p:cNvPr>
@@ -22103,7 +22103,7 @@
           <p:cNvPr id="110" name="">
             <a:extLst xmlns:a="http://schemas.openxmlformats.org/drawingml/2006/main">
               <a:ext uri="{FF2B5EF4-FFF2-40B4-BE49-F238E27FC236}">
-                <a16:creationId xmlns:a16="http://schemas.microsoft.com/office/drawing/2014/main" id="{62FDE04A-B923-4C0E-B9C0-918604009B54}"/>
+                <a16:creationId xmlns:a16="http://schemas.microsoft.com/office/drawing/2014/main" id="{0CD692A4-B7EE-4F9D-8661-CA84967528D3}"/>
               </a:ext>
             </a:extLst>
           </p:cNvPr>
@@ -22136,7 +22136,7 @@
           <p:cNvPr id="111" name="">
             <a:extLst xmlns:a="http://schemas.openxmlformats.org/drawingml/2006/main">
               <a:ext uri="{FF2B5EF4-FFF2-40B4-BE49-F238E27FC236}">
-                <a16:creationId xmlns:a16="http://schemas.microsoft.com/office/drawing/2014/main" id="{9C5D60BA-73C0-4B5A-A614-4D89AD3F2524}"/>
+                <a16:creationId xmlns:a16="http://schemas.microsoft.com/office/drawing/2014/main" id="{D062FD17-C359-405C-AC84-D1F37A4CA32E}"/>
               </a:ext>
             </a:extLst>
           </p:cNvPr>
@@ -22194,7 +22194,7 @@
           <p:cNvPr id="112" name="">
             <a:extLst xmlns:a="http://schemas.openxmlformats.org/drawingml/2006/main">
               <a:ext uri="{FF2B5EF4-FFF2-40B4-BE49-F238E27FC236}">
-                <a16:creationId xmlns:a16="http://schemas.microsoft.com/office/drawing/2014/main" id="{B341BB6D-FD39-4120-A960-597018C536B0}"/>
+                <a16:creationId xmlns:a16="http://schemas.microsoft.com/office/drawing/2014/main" id="{637D93A4-5BD5-46BD-AB9B-F6A27FE20BB6}"/>
               </a:ext>
             </a:extLst>
           </p:cNvPr>
@@ -22227,7 +22227,7 @@
           <p:cNvPr id="113" name="">
             <a:extLst xmlns:a="http://schemas.openxmlformats.org/drawingml/2006/main">
               <a:ext uri="{FF2B5EF4-FFF2-40B4-BE49-F238E27FC236}">
-                <a16:creationId xmlns:a16="http://schemas.microsoft.com/office/drawing/2014/main" id="{848D6CAD-3498-4FE8-B740-7BF9D072E564}"/>
+                <a16:creationId xmlns:a16="http://schemas.microsoft.com/office/drawing/2014/main" id="{245AA1A2-AE82-4E37-A424-C72B07C50279}"/>
               </a:ext>
             </a:extLst>
           </p:cNvPr>
@@ -22285,7 +22285,7 @@
           <p:cNvPr id="114" name="">
             <a:extLst xmlns:a="http://schemas.openxmlformats.org/drawingml/2006/main">
               <a:ext uri="{FF2B5EF4-FFF2-40B4-BE49-F238E27FC236}">
-                <a16:creationId xmlns:a16="http://schemas.microsoft.com/office/drawing/2014/main" id="{DB2F27E4-E9E1-4268-B637-446B3E6C48B0}"/>
+                <a16:creationId xmlns:a16="http://schemas.microsoft.com/office/drawing/2014/main" id="{03C33B94-B460-431D-81A6-47C1E25D41B9}"/>
               </a:ext>
             </a:extLst>
           </p:cNvPr>
@@ -22318,7 +22318,7 @@
           <p:cNvPr id="115" name="">
             <a:extLst xmlns:a="http://schemas.openxmlformats.org/drawingml/2006/main">
               <a:ext uri="{FF2B5EF4-FFF2-40B4-BE49-F238E27FC236}">
-                <a16:creationId xmlns:a16="http://schemas.microsoft.com/office/drawing/2014/main" id="{E1FCB9FF-89F5-4F5B-9C00-22D82222E171}"/>
+                <a16:creationId xmlns:a16="http://schemas.microsoft.com/office/drawing/2014/main" id="{A3D071AC-14CE-4038-81BF-4DB9CC11DA4F}"/>
               </a:ext>
             </a:extLst>
           </p:cNvPr>
@@ -22376,7 +22376,7 @@
           <p:cNvPr id="116" name="">
             <a:extLst xmlns:a="http://schemas.openxmlformats.org/drawingml/2006/main">
               <a:ext uri="{FF2B5EF4-FFF2-40B4-BE49-F238E27FC236}">
-                <a16:creationId xmlns:a16="http://schemas.microsoft.com/office/drawing/2014/main" id="{B1741D4B-2A04-4603-8B45-B47813C3119C}"/>
+                <a16:creationId xmlns:a16="http://schemas.microsoft.com/office/drawing/2014/main" id="{BCFDA3C4-FDF7-4769-9974-B25325C8B7AA}"/>
               </a:ext>
             </a:extLst>
           </p:cNvPr>
@@ -22409,7 +22409,7 @@
           <p:cNvPr id="117" name="">
             <a:extLst xmlns:a="http://schemas.openxmlformats.org/drawingml/2006/main">
               <a:ext uri="{FF2B5EF4-FFF2-40B4-BE49-F238E27FC236}">
-                <a16:creationId xmlns:a16="http://schemas.microsoft.com/office/drawing/2014/main" id="{971B3595-3D84-45B6-B1F5-229E76787F3F}"/>
+                <a16:creationId xmlns:a16="http://schemas.microsoft.com/office/drawing/2014/main" id="{011786CE-5CCC-4886-9C8B-6DB95E5A35D9}"/>
               </a:ext>
             </a:extLst>
           </p:cNvPr>
@@ -22467,7 +22467,7 @@
           <p:cNvPr id="118" name="">
             <a:extLst xmlns:a="http://schemas.openxmlformats.org/drawingml/2006/main">
               <a:ext uri="{FF2B5EF4-FFF2-40B4-BE49-F238E27FC236}">
-                <a16:creationId xmlns:a16="http://schemas.microsoft.com/office/drawing/2014/main" id="{F6294D48-559A-4F20-BFEC-56727B14C206}"/>
+                <a16:creationId xmlns:a16="http://schemas.microsoft.com/office/drawing/2014/main" id="{AF629596-FB70-40ED-851F-A2BC95E867D4}"/>
               </a:ext>
             </a:extLst>
           </p:cNvPr>
@@ -22500,7 +22500,7 @@
           <p:cNvPr id="119" name="">
             <a:extLst xmlns:a="http://schemas.openxmlformats.org/drawingml/2006/main">
               <a:ext uri="{FF2B5EF4-FFF2-40B4-BE49-F238E27FC236}">
-                <a16:creationId xmlns:a16="http://schemas.microsoft.com/office/drawing/2014/main" id="{CF237551-59A6-43A4-B9FF-25419A47F2EC}"/>
+                <a16:creationId xmlns:a16="http://schemas.microsoft.com/office/drawing/2014/main" id="{B589B1D0-3746-4215-96A1-ED5EABC8ED48}"/>
               </a:ext>
             </a:extLst>
           </p:cNvPr>
@@ -22558,7 +22558,7 @@
           <p:cNvPr id="120" name="">
             <a:extLst xmlns:a="http://schemas.openxmlformats.org/drawingml/2006/main">
               <a:ext uri="{FF2B5EF4-FFF2-40B4-BE49-F238E27FC236}">
-                <a16:creationId xmlns:a16="http://schemas.microsoft.com/office/drawing/2014/main" id="{E9E7B8B2-B859-4B8F-991E-AEA706CFF4EA}"/>
+                <a16:creationId xmlns:a16="http://schemas.microsoft.com/office/drawing/2014/main" id="{E4196C27-3976-4BA8-A7A8-04F4D2A033E0}"/>
               </a:ext>
             </a:extLst>
           </p:cNvPr>
@@ -22591,7 +22591,7 @@
           <p:cNvPr id="121" name="">
             <a:extLst xmlns:a="http://schemas.openxmlformats.org/drawingml/2006/main">
               <a:ext uri="{FF2B5EF4-FFF2-40B4-BE49-F238E27FC236}">
-                <a16:creationId xmlns:a16="http://schemas.microsoft.com/office/drawing/2014/main" id="{119B97E8-4828-42DC-A4B9-1E8E6DF6CCDA}"/>
+                <a16:creationId xmlns:a16="http://schemas.microsoft.com/office/drawing/2014/main" id="{5C31F6BF-C594-457B-B002-3D04A1760EF5}"/>
               </a:ext>
             </a:extLst>
           </p:cNvPr>
@@ -22649,7 +22649,7 @@
           <p:cNvPr id="122" name="">
             <a:extLst xmlns:a="http://schemas.openxmlformats.org/drawingml/2006/main">
               <a:ext uri="{FF2B5EF4-FFF2-40B4-BE49-F238E27FC236}">
-                <a16:creationId xmlns:a16="http://schemas.microsoft.com/office/drawing/2014/main" id="{0F2C83B4-21D5-45DF-AC36-45E2F736DC50}"/>
+                <a16:creationId xmlns:a16="http://schemas.microsoft.com/office/drawing/2014/main" id="{56E7947B-ACAE-42B1-B6B8-CF1704EDCFD1}"/>
               </a:ext>
             </a:extLst>
           </p:cNvPr>
@@ -22682,7 +22682,7 @@
           <p:cNvPr id="123" name="">
             <a:extLst xmlns:a="http://schemas.openxmlformats.org/drawingml/2006/main">
               <a:ext uri="{FF2B5EF4-FFF2-40B4-BE49-F238E27FC236}">
-                <a16:creationId xmlns:a16="http://schemas.microsoft.com/office/drawing/2014/main" id="{7AA6280F-4195-43CF-9635-7D656B8BFEBA}"/>
+                <a16:creationId xmlns:a16="http://schemas.microsoft.com/office/drawing/2014/main" id="{A6CFE616-568B-4C04-A08D-E09F15B89C72}"/>
               </a:ext>
             </a:extLst>
           </p:cNvPr>
@@ -22740,7 +22740,7 @@
           <p:cNvPr id="124" name="">
             <a:extLst xmlns:a="http://schemas.openxmlformats.org/drawingml/2006/main">
               <a:ext uri="{FF2B5EF4-FFF2-40B4-BE49-F238E27FC236}">
-                <a16:creationId xmlns:a16="http://schemas.microsoft.com/office/drawing/2014/main" id="{9CE621DB-147F-47E4-8F0D-BA678CA877B4}"/>
+                <a16:creationId xmlns:a16="http://schemas.microsoft.com/office/drawing/2014/main" id="{81E7D779-DF3D-4568-B72E-D5D1A6C9C302}"/>
               </a:ext>
             </a:extLst>
           </p:cNvPr>
@@ -22773,7 +22773,7 @@
           <p:cNvPr id="125" name="">
             <a:extLst xmlns:a="http://schemas.openxmlformats.org/drawingml/2006/main">
               <a:ext uri="{FF2B5EF4-FFF2-40B4-BE49-F238E27FC236}">
-                <a16:creationId xmlns:a16="http://schemas.microsoft.com/office/drawing/2014/main" id="{FA9DBA31-611C-415E-8AE9-DE8DE161BB25}"/>
+                <a16:creationId xmlns:a16="http://schemas.microsoft.com/office/drawing/2014/main" id="{B8551294-D0BE-440C-89AE-2973842D17FC}"/>
               </a:ext>
             </a:extLst>
           </p:cNvPr>
@@ -22831,7 +22831,7 @@
           <p:cNvPr id="126" name="">
             <a:extLst xmlns:a="http://schemas.openxmlformats.org/drawingml/2006/main">
               <a:ext uri="{FF2B5EF4-FFF2-40B4-BE49-F238E27FC236}">
-                <a16:creationId xmlns:a16="http://schemas.microsoft.com/office/drawing/2014/main" id="{90F8F4BA-B25D-44A9-B9D4-8B299B579AD4}"/>
+                <a16:creationId xmlns:a16="http://schemas.microsoft.com/office/drawing/2014/main" id="{9DA8146E-C43A-43CF-854A-FE5049742FBE}"/>
               </a:ext>
             </a:extLst>
           </p:cNvPr>
@@ -22864,7 +22864,7 @@
           <p:cNvPr id="127" name="">
             <a:extLst xmlns:a="http://schemas.openxmlformats.org/drawingml/2006/main">
               <a:ext uri="{FF2B5EF4-FFF2-40B4-BE49-F238E27FC236}">
-                <a16:creationId xmlns:a16="http://schemas.microsoft.com/office/drawing/2014/main" id="{AD77EE4A-9A23-496B-B4F5-2E40639B52AA}"/>
+                <a16:creationId xmlns:a16="http://schemas.microsoft.com/office/drawing/2014/main" id="{FCC37DEB-71A8-4ED0-A210-16BBAB582052}"/>
               </a:ext>
             </a:extLst>
           </p:cNvPr>
@@ -22922,7 +22922,7 @@
           <p:cNvPr id="128" name="">
             <a:extLst xmlns:a="http://schemas.openxmlformats.org/drawingml/2006/main">
               <a:ext uri="{FF2B5EF4-FFF2-40B4-BE49-F238E27FC236}">
-                <a16:creationId xmlns:a16="http://schemas.microsoft.com/office/drawing/2014/main" id="{D71EC012-AA27-471F-A3AB-CEDC9027F86B}"/>
+                <a16:creationId xmlns:a16="http://schemas.microsoft.com/office/drawing/2014/main" id="{02C29868-27C7-4AAF-9910-4175BDA8884B}"/>
               </a:ext>
             </a:extLst>
           </p:cNvPr>
@@ -22955,7 +22955,7 @@
           <p:cNvPr id="129" name="">
             <a:extLst xmlns:a="http://schemas.openxmlformats.org/drawingml/2006/main">
               <a:ext uri="{FF2B5EF4-FFF2-40B4-BE49-F238E27FC236}">
-                <a16:creationId xmlns:a16="http://schemas.microsoft.com/office/drawing/2014/main" id="{F812CF38-EE4C-4BBF-8204-828C4868D3A8}"/>
+                <a16:creationId xmlns:a16="http://schemas.microsoft.com/office/drawing/2014/main" id="{58CC198A-2C75-4EF1-B60E-B0F3F17759E7}"/>
               </a:ext>
             </a:extLst>
           </p:cNvPr>
@@ -23013,7 +23013,7 @@
           <p:cNvPr id="130" name="">
             <a:extLst xmlns:a="http://schemas.openxmlformats.org/drawingml/2006/main">
               <a:ext uri="{FF2B5EF4-FFF2-40B4-BE49-F238E27FC236}">
-                <a16:creationId xmlns:a16="http://schemas.microsoft.com/office/drawing/2014/main" id="{87B26C9B-5313-4321-BFD6-CF58AA744B90}"/>
+                <a16:creationId xmlns:a16="http://schemas.microsoft.com/office/drawing/2014/main" id="{31E3E88B-9799-4F84-BBB5-A60B6C3BD1D6}"/>
               </a:ext>
             </a:extLst>
           </p:cNvPr>
@@ -23046,7 +23046,7 @@
           <p:cNvPr id="131" name="">
             <a:extLst xmlns:a="http://schemas.openxmlformats.org/drawingml/2006/main">
               <a:ext uri="{FF2B5EF4-FFF2-40B4-BE49-F238E27FC236}">
-                <a16:creationId xmlns:a16="http://schemas.microsoft.com/office/drawing/2014/main" id="{E05D3CD9-E93D-4562-882B-068430183B99}"/>
+                <a16:creationId xmlns:a16="http://schemas.microsoft.com/office/drawing/2014/main" id="{8FAEF8E5-D8D8-403C-8651-64A856431A6C}"/>
               </a:ext>
             </a:extLst>
           </p:cNvPr>
@@ -23104,7 +23104,7 @@
           <p:cNvPr id="132" name="">
             <a:extLst xmlns:a="http://schemas.openxmlformats.org/drawingml/2006/main">
               <a:ext uri="{FF2B5EF4-FFF2-40B4-BE49-F238E27FC236}">
-                <a16:creationId xmlns:a16="http://schemas.microsoft.com/office/drawing/2014/main" id="{46DEC76B-D993-4664-93DA-4B315735CF23}"/>
+                <a16:creationId xmlns:a16="http://schemas.microsoft.com/office/drawing/2014/main" id="{FA426E09-446E-43D7-AD43-08B9C3B1262B}"/>
               </a:ext>
             </a:extLst>
           </p:cNvPr>
@@ -23137,7 +23137,7 @@
           <p:cNvPr id="133" name="">
             <a:extLst xmlns:a="http://schemas.openxmlformats.org/drawingml/2006/main">
               <a:ext uri="{FF2B5EF4-FFF2-40B4-BE49-F238E27FC236}">
-                <a16:creationId xmlns:a16="http://schemas.microsoft.com/office/drawing/2014/main" id="{6B59AAF0-6F5E-4437-8C08-1447E0ED2C0D}"/>
+                <a16:creationId xmlns:a16="http://schemas.microsoft.com/office/drawing/2014/main" id="{1445F18A-951E-4509-836D-D88CF37BBE2B}"/>
               </a:ext>
             </a:extLst>
           </p:cNvPr>
@@ -23195,7 +23195,7 @@
           <p:cNvPr id="134" name="">
             <a:extLst xmlns:a="http://schemas.openxmlformats.org/drawingml/2006/main">
               <a:ext uri="{FF2B5EF4-FFF2-40B4-BE49-F238E27FC236}">
-                <a16:creationId xmlns:a16="http://schemas.microsoft.com/office/drawing/2014/main" id="{A7ADF0FC-EA80-4762-A239-6620E3EB53AC}"/>
+                <a16:creationId xmlns:a16="http://schemas.microsoft.com/office/drawing/2014/main" id="{997FE813-9E06-49A0-99B7-0EF46311C6D8}"/>
               </a:ext>
             </a:extLst>
           </p:cNvPr>
@@ -23228,7 +23228,7 @@
           <p:cNvPr id="135" name="">
             <a:extLst xmlns:a="http://schemas.openxmlformats.org/drawingml/2006/main">
               <a:ext uri="{FF2B5EF4-FFF2-40B4-BE49-F238E27FC236}">
-                <a16:creationId xmlns:a16="http://schemas.microsoft.com/office/drawing/2014/main" id="{D20EE449-EFEC-4151-A481-1C1BFEBD4517}"/>
+                <a16:creationId xmlns:a16="http://schemas.microsoft.com/office/drawing/2014/main" id="{4E6DC903-7BEC-4926-A5BB-DF1A03609A9E}"/>
               </a:ext>
             </a:extLst>
           </p:cNvPr>
@@ -23286,7 +23286,7 @@
           <p:cNvPr id="136" name="">
             <a:extLst xmlns:a="http://schemas.openxmlformats.org/drawingml/2006/main">
               <a:ext uri="{FF2B5EF4-FFF2-40B4-BE49-F238E27FC236}">
-                <a16:creationId xmlns:a16="http://schemas.microsoft.com/office/drawing/2014/main" id="{150CE46E-B2B6-453F-B074-747C5CC1FC35}"/>
+                <a16:creationId xmlns:a16="http://schemas.microsoft.com/office/drawing/2014/main" id="{724AD8C8-CE76-4E55-B9CB-6574CF77CB03}"/>
               </a:ext>
             </a:extLst>
           </p:cNvPr>
@@ -23319,7 +23319,7 @@
           <p:cNvPr id="137" name="">
             <a:extLst xmlns:a="http://schemas.openxmlformats.org/drawingml/2006/main">
               <a:ext uri="{FF2B5EF4-FFF2-40B4-BE49-F238E27FC236}">
-                <a16:creationId xmlns:a16="http://schemas.microsoft.com/office/drawing/2014/main" id="{E3E791CA-47BA-40FC-8CA5-BA79D04C67B2}"/>
+                <a16:creationId xmlns:a16="http://schemas.microsoft.com/office/drawing/2014/main" id="{9C702776-A47E-442E-A773-B97CC8D7DD78}"/>
               </a:ext>
             </a:extLst>
           </p:cNvPr>
@@ -23377,7 +23377,7 @@
           <p:cNvPr id="138" name="">
             <a:extLst xmlns:a="http://schemas.openxmlformats.org/drawingml/2006/main">
               <a:ext uri="{FF2B5EF4-FFF2-40B4-BE49-F238E27FC236}">
-                <a16:creationId xmlns:a16="http://schemas.microsoft.com/office/drawing/2014/main" id="{DCFB32B2-EEF1-4256-A7ED-686FE95203B4}"/>
+                <a16:creationId xmlns:a16="http://schemas.microsoft.com/office/drawing/2014/main" id="{A5FC5571-8D3A-4C6A-A082-1FFEEADC138D}"/>
               </a:ext>
             </a:extLst>
           </p:cNvPr>
@@ -23410,7 +23410,7 @@
           <p:cNvPr id="139" name="">
             <a:extLst xmlns:a="http://schemas.openxmlformats.org/drawingml/2006/main">
               <a:ext uri="{FF2B5EF4-FFF2-40B4-BE49-F238E27FC236}">
-                <a16:creationId xmlns:a16="http://schemas.microsoft.com/office/drawing/2014/main" id="{9BB5049F-E46E-4E38-BAE9-EE3E7592A0CC}"/>
+                <a16:creationId xmlns:a16="http://schemas.microsoft.com/office/drawing/2014/main" id="{2D09B6E0-5EDE-4428-B9D1-F956DCB1E158}"/>
               </a:ext>
             </a:extLst>
           </p:cNvPr>
@@ -23468,7 +23468,7 @@
           <p:cNvPr id="140" name="">
             <a:extLst xmlns:a="http://schemas.openxmlformats.org/drawingml/2006/main">
               <a:ext uri="{FF2B5EF4-FFF2-40B4-BE49-F238E27FC236}">
-                <a16:creationId xmlns:a16="http://schemas.microsoft.com/office/drawing/2014/main" id="{908E204B-C6CB-4ADA-BB03-D16D7E8C9F4A}"/>
+                <a16:creationId xmlns:a16="http://schemas.microsoft.com/office/drawing/2014/main" id="{C823A893-AFF1-4CC0-8AED-77F3D0918455}"/>
               </a:ext>
             </a:extLst>
           </p:cNvPr>
@@ -23501,7 +23501,7 @@
           <p:cNvPr id="141" name="">
             <a:extLst xmlns:a="http://schemas.openxmlformats.org/drawingml/2006/main">
               <a:ext uri="{FF2B5EF4-FFF2-40B4-BE49-F238E27FC236}">
-                <a16:creationId xmlns:a16="http://schemas.microsoft.com/office/drawing/2014/main" id="{E6642A78-B670-43C3-B436-217AF3F760A2}"/>
+                <a16:creationId xmlns:a16="http://schemas.microsoft.com/office/drawing/2014/main" id="{D7125EDC-6A11-425A-AE27-E5EB17079890}"/>
               </a:ext>
             </a:extLst>
           </p:cNvPr>
@@ -23559,7 +23559,7 @@
           <p:cNvPr id="142" name="">
             <a:extLst xmlns:a="http://schemas.openxmlformats.org/drawingml/2006/main">
               <a:ext uri="{FF2B5EF4-FFF2-40B4-BE49-F238E27FC236}">
-                <a16:creationId xmlns:a16="http://schemas.microsoft.com/office/drawing/2014/main" id="{82701025-0F44-43D8-AA76-27AED2C94A99}"/>
+                <a16:creationId xmlns:a16="http://schemas.microsoft.com/office/drawing/2014/main" id="{21148F61-DE5F-40E2-B0FD-0D3D95AB27BD}"/>
               </a:ext>
             </a:extLst>
           </p:cNvPr>
@@ -23592,7 +23592,7 @@
           <p:cNvPr id="143" name="">
             <a:extLst xmlns:a="http://schemas.openxmlformats.org/drawingml/2006/main">
               <a:ext uri="{FF2B5EF4-FFF2-40B4-BE49-F238E27FC236}">
-                <a16:creationId xmlns:a16="http://schemas.microsoft.com/office/drawing/2014/main" id="{39F94AA7-2566-4638-85D6-DF842F3514B0}"/>
+                <a16:creationId xmlns:a16="http://schemas.microsoft.com/office/drawing/2014/main" id="{3EEF71A5-A649-4465-9FAF-4D1042107C24}"/>
               </a:ext>
             </a:extLst>
           </p:cNvPr>
@@ -23650,7 +23650,7 @@
           <p:cNvPr id="144" name="">
             <a:extLst xmlns:a="http://schemas.openxmlformats.org/drawingml/2006/main">
               <a:ext uri="{FF2B5EF4-FFF2-40B4-BE49-F238E27FC236}">
-                <a16:creationId xmlns:a16="http://schemas.microsoft.com/office/drawing/2014/main" id="{54BD1719-4866-4644-840F-71AFB478D6C2}"/>
+                <a16:creationId xmlns:a16="http://schemas.microsoft.com/office/drawing/2014/main" id="{3DF29255-9813-453F-95C6-81BE9DFF8A03}"/>
               </a:ext>
             </a:extLst>
           </p:cNvPr>
@@ -23683,7 +23683,7 @@
           <p:cNvPr id="145" name="">
             <a:extLst xmlns:a="http://schemas.openxmlformats.org/drawingml/2006/main">
               <a:ext uri="{FF2B5EF4-FFF2-40B4-BE49-F238E27FC236}">
-                <a16:creationId xmlns:a16="http://schemas.microsoft.com/office/drawing/2014/main" id="{F6895519-152C-403B-995F-9855A1776218}"/>
+                <a16:creationId xmlns:a16="http://schemas.microsoft.com/office/drawing/2014/main" id="{5058B02C-F986-4260-B92F-5F9225E5ECEC}"/>
               </a:ext>
             </a:extLst>
           </p:cNvPr>
@@ -23741,7 +23741,7 @@
           <p:cNvPr id="146" name="">
             <a:extLst xmlns:a="http://schemas.openxmlformats.org/drawingml/2006/main">
               <a:ext uri="{FF2B5EF4-FFF2-40B4-BE49-F238E27FC236}">
-                <a16:creationId xmlns:a16="http://schemas.microsoft.com/office/drawing/2014/main" id="{8B557DCF-04D5-4AC5-97FC-54DF22BC3FA5}"/>
+                <a16:creationId xmlns:a16="http://schemas.microsoft.com/office/drawing/2014/main" id="{36F6EA81-EAEB-4A9C-862D-65BE00DC72A7}"/>
               </a:ext>
             </a:extLst>
           </p:cNvPr>
@@ -23774,7 +23774,7 @@
           <p:cNvPr id="147" name="">
             <a:extLst xmlns:a="http://schemas.openxmlformats.org/drawingml/2006/main">
               <a:ext uri="{FF2B5EF4-FFF2-40B4-BE49-F238E27FC236}">
-                <a16:creationId xmlns:a16="http://schemas.microsoft.com/office/drawing/2014/main" id="{78BD3F76-7463-448B-A88E-F21FF9F0665F}"/>
+                <a16:creationId xmlns:a16="http://schemas.microsoft.com/office/drawing/2014/main" id="{1A65AB02-12A5-40BE-9534-220F40A3EDE3}"/>
               </a:ext>
             </a:extLst>
           </p:cNvPr>
@@ -23832,7 +23832,7 @@
           <p:cNvPr id="148" name="">
             <a:extLst xmlns:a="http://schemas.openxmlformats.org/drawingml/2006/main">
               <a:ext uri="{FF2B5EF4-FFF2-40B4-BE49-F238E27FC236}">
-                <a16:creationId xmlns:a16="http://schemas.microsoft.com/office/drawing/2014/main" id="{9881B1A7-025A-4CE3-AC73-96D3918E68B6}"/>
+                <a16:creationId xmlns:a16="http://schemas.microsoft.com/office/drawing/2014/main" id="{C912FCCA-3380-46B4-AEEA-1C4D63B63ACA}"/>
               </a:ext>
             </a:extLst>
           </p:cNvPr>
@@ -23865,7 +23865,7 @@
           <p:cNvPr id="149" name="">
             <a:extLst xmlns:a="http://schemas.openxmlformats.org/drawingml/2006/main">
               <a:ext uri="{FF2B5EF4-FFF2-40B4-BE49-F238E27FC236}">
-                <a16:creationId xmlns:a16="http://schemas.microsoft.com/office/drawing/2014/main" id="{916632DB-820A-45FF-8E72-FC7937AF05B2}"/>
+                <a16:creationId xmlns:a16="http://schemas.microsoft.com/office/drawing/2014/main" id="{32375014-8A7D-4A22-A7D1-C40BD8259E8C}"/>
               </a:ext>
             </a:extLst>
           </p:cNvPr>
@@ -23923,7 +23923,7 @@
           <p:cNvPr id="150" name="">
             <a:extLst xmlns:a="http://schemas.openxmlformats.org/drawingml/2006/main">
               <a:ext uri="{FF2B5EF4-FFF2-40B4-BE49-F238E27FC236}">
-                <a16:creationId xmlns:a16="http://schemas.microsoft.com/office/drawing/2014/main" id="{E653A6C5-6F16-44BA-9BEB-1FE01201227C}"/>
+                <a16:creationId xmlns:a16="http://schemas.microsoft.com/office/drawing/2014/main" id="{B4E1AEFE-5489-49EF-95A6-E693FAF9D178}"/>
               </a:ext>
             </a:extLst>
           </p:cNvPr>
@@ -23956,7 +23956,7 @@
           <p:cNvPr id="151" name="">
             <a:extLst xmlns:a="http://schemas.openxmlformats.org/drawingml/2006/main">
               <a:ext uri="{FF2B5EF4-FFF2-40B4-BE49-F238E27FC236}">
-                <a16:creationId xmlns:a16="http://schemas.microsoft.com/office/drawing/2014/main" id="{2BBA4A92-9A8D-4DB8-8BB3-2AF4C53E1786}"/>
+                <a16:creationId xmlns:a16="http://schemas.microsoft.com/office/drawing/2014/main" id="{38935F89-D2FF-4328-9C32-EBD42439C0DC}"/>
               </a:ext>
             </a:extLst>
           </p:cNvPr>
@@ -24014,7 +24014,7 @@
           <p:cNvPr id="152" name="">
             <a:extLst xmlns:a="http://schemas.openxmlformats.org/drawingml/2006/main">
               <a:ext uri="{FF2B5EF4-FFF2-40B4-BE49-F238E27FC236}">
-                <a16:creationId xmlns:a16="http://schemas.microsoft.com/office/drawing/2014/main" id="{141EF861-8311-4B4C-AD96-FF43A45385CB}"/>
+                <a16:creationId xmlns:a16="http://schemas.microsoft.com/office/drawing/2014/main" id="{138C2FE5-667E-444E-8357-CB027FD4B53E}"/>
               </a:ext>
             </a:extLst>
           </p:cNvPr>
@@ -24072,7 +24072,7 @@
           <p:cNvPr id="153" name="">
             <a:extLst xmlns:a="http://schemas.openxmlformats.org/drawingml/2006/main">
               <a:ext uri="{FF2B5EF4-FFF2-40B4-BE49-F238E27FC236}">
-                <a16:creationId xmlns:a16="http://schemas.microsoft.com/office/drawing/2014/main" id="{D6445D2D-5354-48C6-AFE7-F9278C9B057A}"/>
+                <a16:creationId xmlns:a16="http://schemas.microsoft.com/office/drawing/2014/main" id="{7496FFFE-C25B-4B64-A1BD-B63F35A24C78}"/>
               </a:ext>
             </a:extLst>
           </p:cNvPr>
@@ -24234,7 +24234,7 @@
             </a:pathLst>
           </a:custGeom>
           <a:blipFill xmlns:a="http://schemas.openxmlformats.org/drawingml/2006/main">
-            <a:blip xmlns:r="http://schemas.openxmlformats.org/officeDocument/2006/relationships" r:embed="Rc16a108187164688"/>
+            <a:blip xmlns:r="http://schemas.openxmlformats.org/officeDocument/2006/relationships" r:embed="Rada6ceb9e2514540"/>
             <a:stretch>
               <a:fillRect l="-7801" t="0" r="-7801" b="0"/>
             </a:stretch>
@@ -24246,7 +24246,7 @@
           <p:cNvPr id="6" name="">
             <a:extLst xmlns:a="http://schemas.openxmlformats.org/drawingml/2006/main">
               <a:ext uri="{FF2B5EF4-FFF2-40B4-BE49-F238E27FC236}">
-                <a16:creationId xmlns:a16="http://schemas.microsoft.com/office/drawing/2014/main" id="{FD388E16-78C9-497D-AD05-EAF1BC9669B8}"/>
+                <a16:creationId xmlns:a16="http://schemas.microsoft.com/office/drawing/2014/main" id="{0A796875-0F58-42A1-B482-53183289265F}"/>
               </a:ext>
             </a:extLst>
           </p:cNvPr>
@@ -24304,7 +24304,7 @@
           <p:cNvPr id="7" name="">
             <a:extLst xmlns:a="http://schemas.openxmlformats.org/drawingml/2006/main">
               <a:ext uri="{FF2B5EF4-FFF2-40B4-BE49-F238E27FC236}">
-                <a16:creationId xmlns:a16="http://schemas.microsoft.com/office/drawing/2014/main" id="{A435677C-A213-4F9A-B2FF-72F664CEF5B1}"/>
+                <a16:creationId xmlns:a16="http://schemas.microsoft.com/office/drawing/2014/main" id="{8DA0B55A-9C77-4523-A54F-861954488D86}"/>
               </a:ext>
             </a:extLst>
           </p:cNvPr>
@@ -24362,7 +24362,7 @@
           <p:cNvPr id="8" name="">
             <a:extLst xmlns:a="http://schemas.openxmlformats.org/drawingml/2006/main">
               <a:ext uri="{FF2B5EF4-FFF2-40B4-BE49-F238E27FC236}">
-                <a16:creationId xmlns:a16="http://schemas.microsoft.com/office/drawing/2014/main" id="{B4B6E311-3129-48A1-A4FC-DA1AC5A4C530}"/>
+                <a16:creationId xmlns:a16="http://schemas.microsoft.com/office/drawing/2014/main" id="{78485885-E1DB-400D-B8D1-E1F499557FAA}"/>
               </a:ext>
             </a:extLst>
           </p:cNvPr>
@@ -24395,7 +24395,7 @@
           <p:cNvPr id="9" name="">
             <a:extLst xmlns:a="http://schemas.openxmlformats.org/drawingml/2006/main">
               <a:ext uri="{FF2B5EF4-FFF2-40B4-BE49-F238E27FC236}">
-                <a16:creationId xmlns:a16="http://schemas.microsoft.com/office/drawing/2014/main" id="{9666EB33-4625-45A5-8744-BCE7ED8A14FF}"/>
+                <a16:creationId xmlns:a16="http://schemas.microsoft.com/office/drawing/2014/main" id="{76D1A489-511D-47E6-ACA1-8313723CF5F2}"/>
               </a:ext>
             </a:extLst>
           </p:cNvPr>
@@ -24453,7 +24453,7 @@
           <p:cNvPr id="10" name="">
             <a:extLst xmlns:a="http://schemas.openxmlformats.org/drawingml/2006/main">
               <a:ext uri="{FF2B5EF4-FFF2-40B4-BE49-F238E27FC236}">
-                <a16:creationId xmlns:a16="http://schemas.microsoft.com/office/drawing/2014/main" id="{9E2F44B2-8D44-4035-9980-F3B50AD25685}"/>
+                <a16:creationId xmlns:a16="http://schemas.microsoft.com/office/drawing/2014/main" id="{2F98368D-41F9-4E0C-9FE1-B4C79252482D}"/>
               </a:ext>
             </a:extLst>
           </p:cNvPr>
@@ -24486,7 +24486,7 @@
           <p:cNvPr id="11" name="">
             <a:extLst xmlns:a="http://schemas.openxmlformats.org/drawingml/2006/main">
               <a:ext uri="{FF2B5EF4-FFF2-40B4-BE49-F238E27FC236}">
-                <a16:creationId xmlns:a16="http://schemas.microsoft.com/office/drawing/2014/main" id="{E26C049D-9B50-4076-9FBD-6C2D34584B7C}"/>
+                <a16:creationId xmlns:a16="http://schemas.microsoft.com/office/drawing/2014/main" id="{467CF28F-B0F4-42C2-8277-E74B92D4C672}"/>
               </a:ext>
             </a:extLst>
           </p:cNvPr>
@@ -24544,7 +24544,7 @@
           <p:cNvPr id="12" name="">
             <a:extLst xmlns:a="http://schemas.openxmlformats.org/drawingml/2006/main">
               <a:ext uri="{FF2B5EF4-FFF2-40B4-BE49-F238E27FC236}">
-                <a16:creationId xmlns:a16="http://schemas.microsoft.com/office/drawing/2014/main" id="{5C03070D-FBAE-417A-8CB0-B66294B23900}"/>
+                <a16:creationId xmlns:a16="http://schemas.microsoft.com/office/drawing/2014/main" id="{92E36335-469C-4C63-88A8-CB05551C36A1}"/>
               </a:ext>
             </a:extLst>
           </p:cNvPr>
@@ -24577,7 +24577,7 @@
           <p:cNvPr id="13" name="">
             <a:extLst xmlns:a="http://schemas.openxmlformats.org/drawingml/2006/main">
               <a:ext uri="{FF2B5EF4-FFF2-40B4-BE49-F238E27FC236}">
-                <a16:creationId xmlns:a16="http://schemas.microsoft.com/office/drawing/2014/main" id="{7A5900B3-AABC-484A-A6C3-6683CD6C0678}"/>
+                <a16:creationId xmlns:a16="http://schemas.microsoft.com/office/drawing/2014/main" id="{DF3EB576-A112-4FB4-9C3D-089D0F145246}"/>
               </a:ext>
             </a:extLst>
           </p:cNvPr>
@@ -24635,7 +24635,7 @@
           <p:cNvPr id="14" name="">
             <a:extLst xmlns:a="http://schemas.openxmlformats.org/drawingml/2006/main">
               <a:ext uri="{FF2B5EF4-FFF2-40B4-BE49-F238E27FC236}">
-                <a16:creationId xmlns:a16="http://schemas.microsoft.com/office/drawing/2014/main" id="{6EBDCBC9-8196-40E8-95B8-7ADCA58E1432}"/>
+                <a16:creationId xmlns:a16="http://schemas.microsoft.com/office/drawing/2014/main" id="{0713B03A-A60E-4297-B66D-CB87206CAA6A}"/>
               </a:ext>
             </a:extLst>
           </p:cNvPr>
@@ -24668,7 +24668,7 @@
           <p:cNvPr id="15" name="">
             <a:extLst xmlns:a="http://schemas.openxmlformats.org/drawingml/2006/main">
               <a:ext uri="{FF2B5EF4-FFF2-40B4-BE49-F238E27FC236}">
-                <a16:creationId xmlns:a16="http://schemas.microsoft.com/office/drawing/2014/main" id="{82C47306-AA31-439D-966B-A5835A1662A8}"/>
+                <a16:creationId xmlns:a16="http://schemas.microsoft.com/office/drawing/2014/main" id="{9487436A-3A36-4C52-870B-F975EA15BB94}"/>
               </a:ext>
             </a:extLst>
           </p:cNvPr>
@@ -24726,7 +24726,7 @@
           <p:cNvPr id="16" name="">
             <a:extLst xmlns:a="http://schemas.openxmlformats.org/drawingml/2006/main">
               <a:ext uri="{FF2B5EF4-FFF2-40B4-BE49-F238E27FC236}">
-                <a16:creationId xmlns:a16="http://schemas.microsoft.com/office/drawing/2014/main" id="{773FBE1C-5249-45EC-B38E-1B97623BBB96}"/>
+                <a16:creationId xmlns:a16="http://schemas.microsoft.com/office/drawing/2014/main" id="{31635C78-20F6-4670-BB9A-F324EC6A966A}"/>
               </a:ext>
             </a:extLst>
           </p:cNvPr>
@@ -24759,7 +24759,7 @@
           <p:cNvPr id="17" name="">
             <a:extLst xmlns:a="http://schemas.openxmlformats.org/drawingml/2006/main">
               <a:ext uri="{FF2B5EF4-FFF2-40B4-BE49-F238E27FC236}">
-                <a16:creationId xmlns:a16="http://schemas.microsoft.com/office/drawing/2014/main" id="{FF013BCB-8B22-42D8-A83E-007C9ED6FBDE}"/>
+                <a16:creationId xmlns:a16="http://schemas.microsoft.com/office/drawing/2014/main" id="{0A366666-0F08-4578-B1D4-6C82909BF0E6}"/>
               </a:ext>
             </a:extLst>
           </p:cNvPr>
@@ -24817,7 +24817,7 @@
           <p:cNvPr id="18" name="">
             <a:extLst xmlns:a="http://schemas.openxmlformats.org/drawingml/2006/main">
               <a:ext uri="{FF2B5EF4-FFF2-40B4-BE49-F238E27FC236}">
-                <a16:creationId xmlns:a16="http://schemas.microsoft.com/office/drawing/2014/main" id="{274FBF37-0D30-417A-B83A-AD849937BBEC}"/>
+                <a16:creationId xmlns:a16="http://schemas.microsoft.com/office/drawing/2014/main" id="{B677615A-EC5A-4433-B952-6446A7BF3E77}"/>
               </a:ext>
             </a:extLst>
           </p:cNvPr>
@@ -24850,7 +24850,7 @@
           <p:cNvPr id="19" name="">
             <a:extLst xmlns:a="http://schemas.openxmlformats.org/drawingml/2006/main">
               <a:ext uri="{FF2B5EF4-FFF2-40B4-BE49-F238E27FC236}">
-                <a16:creationId xmlns:a16="http://schemas.microsoft.com/office/drawing/2014/main" id="{F2CD68B3-9315-43D4-8A7B-E750623226FB}"/>
+                <a16:creationId xmlns:a16="http://schemas.microsoft.com/office/drawing/2014/main" id="{D276E6EF-0E65-430B-BEE5-717158AF25F9}"/>
               </a:ext>
             </a:extLst>
           </p:cNvPr>
@@ -24908,7 +24908,7 @@
           <p:cNvPr id="20" name="">
             <a:extLst xmlns:a="http://schemas.openxmlformats.org/drawingml/2006/main">
               <a:ext uri="{FF2B5EF4-FFF2-40B4-BE49-F238E27FC236}">
-                <a16:creationId xmlns:a16="http://schemas.microsoft.com/office/drawing/2014/main" id="{A7194CC2-012C-41C8-8D3F-D92569DC6603}"/>
+                <a16:creationId xmlns:a16="http://schemas.microsoft.com/office/drawing/2014/main" id="{CFBBDF86-2EF2-4B80-888C-43B0E5451D38}"/>
               </a:ext>
             </a:extLst>
           </p:cNvPr>
@@ -24941,7 +24941,7 @@
           <p:cNvPr id="21" name="">
             <a:extLst xmlns:a="http://schemas.openxmlformats.org/drawingml/2006/main">
               <a:ext uri="{FF2B5EF4-FFF2-40B4-BE49-F238E27FC236}">
-                <a16:creationId xmlns:a16="http://schemas.microsoft.com/office/drawing/2014/main" id="{72986553-80D7-48FB-9497-495F807CF63B}"/>
+                <a16:creationId xmlns:a16="http://schemas.microsoft.com/office/drawing/2014/main" id="{56ACACE8-BD92-430C-AE8B-0D1A2D7C717D}"/>
               </a:ext>
             </a:extLst>
           </p:cNvPr>
@@ -24999,7 +24999,7 @@
           <p:cNvPr id="22" name="">
             <a:extLst xmlns:a="http://schemas.openxmlformats.org/drawingml/2006/main">
               <a:ext uri="{FF2B5EF4-FFF2-40B4-BE49-F238E27FC236}">
-                <a16:creationId xmlns:a16="http://schemas.microsoft.com/office/drawing/2014/main" id="{D45E3D9C-4E28-413F-A0FD-DDEF8EEE6817}"/>
+                <a16:creationId xmlns:a16="http://schemas.microsoft.com/office/drawing/2014/main" id="{27C5EB6D-BF96-43CB-B9ED-6F76BDA9C4B2}"/>
               </a:ext>
             </a:extLst>
           </p:cNvPr>
@@ -25032,7 +25032,7 @@
           <p:cNvPr id="23" name="">
             <a:extLst xmlns:a="http://schemas.openxmlformats.org/drawingml/2006/main">
               <a:ext uri="{FF2B5EF4-FFF2-40B4-BE49-F238E27FC236}">
-                <a16:creationId xmlns:a16="http://schemas.microsoft.com/office/drawing/2014/main" id="{BBD4C621-A8CE-47A3-9296-12CE44367C34}"/>
+                <a16:creationId xmlns:a16="http://schemas.microsoft.com/office/drawing/2014/main" id="{BCAEB2E2-8585-4086-8B2B-B1FEF1CDA8AE}"/>
               </a:ext>
             </a:extLst>
           </p:cNvPr>
@@ -25090,7 +25090,7 @@
           <p:cNvPr id="24" name="">
             <a:extLst xmlns:a="http://schemas.openxmlformats.org/drawingml/2006/main">
               <a:ext uri="{FF2B5EF4-FFF2-40B4-BE49-F238E27FC236}">
-                <a16:creationId xmlns:a16="http://schemas.microsoft.com/office/drawing/2014/main" id="{E801D655-815A-40FA-86FD-88535D164707}"/>
+                <a16:creationId xmlns:a16="http://schemas.microsoft.com/office/drawing/2014/main" id="{11943D43-0623-4AFC-99C8-DE5A0888AA10}"/>
               </a:ext>
             </a:extLst>
           </p:cNvPr>
@@ -25123,7 +25123,7 @@
           <p:cNvPr id="25" name="">
             <a:extLst xmlns:a="http://schemas.openxmlformats.org/drawingml/2006/main">
               <a:ext uri="{FF2B5EF4-FFF2-40B4-BE49-F238E27FC236}">
-                <a16:creationId xmlns:a16="http://schemas.microsoft.com/office/drawing/2014/main" id="{C3432356-7ED9-41A1-9494-6B36829BB50D}"/>
+                <a16:creationId xmlns:a16="http://schemas.microsoft.com/office/drawing/2014/main" id="{1A262034-EAA0-40FC-BB9E-31E2DBA56E53}"/>
               </a:ext>
             </a:extLst>
           </p:cNvPr>
@@ -25181,7 +25181,7 @@
           <p:cNvPr id="26" name="">
             <a:extLst xmlns:a="http://schemas.openxmlformats.org/drawingml/2006/main">
               <a:ext uri="{FF2B5EF4-FFF2-40B4-BE49-F238E27FC236}">
-                <a16:creationId xmlns:a16="http://schemas.microsoft.com/office/drawing/2014/main" id="{60118C56-2B4F-43C0-8289-99B2CCBAD98C}"/>
+                <a16:creationId xmlns:a16="http://schemas.microsoft.com/office/drawing/2014/main" id="{59902052-D47E-4B77-A740-CCB56EE9FB65}"/>
               </a:ext>
             </a:extLst>
           </p:cNvPr>
@@ -25214,7 +25214,7 @@
           <p:cNvPr id="27" name="">
             <a:extLst xmlns:a="http://schemas.openxmlformats.org/drawingml/2006/main">
               <a:ext uri="{FF2B5EF4-FFF2-40B4-BE49-F238E27FC236}">
-                <a16:creationId xmlns:a16="http://schemas.microsoft.com/office/drawing/2014/main" id="{B3ABE79B-96D2-4A63-863A-CAA2F861BEE0}"/>
+                <a16:creationId xmlns:a16="http://schemas.microsoft.com/office/drawing/2014/main" id="{542BD3DE-6528-4AE8-8D7D-5739625C9370}"/>
               </a:ext>
             </a:extLst>
           </p:cNvPr>
@@ -25272,7 +25272,7 @@
           <p:cNvPr id="28" name="">
             <a:extLst xmlns:a="http://schemas.openxmlformats.org/drawingml/2006/main">
               <a:ext uri="{FF2B5EF4-FFF2-40B4-BE49-F238E27FC236}">
-                <a16:creationId xmlns:a16="http://schemas.microsoft.com/office/drawing/2014/main" id="{0C4D44FF-9C20-49B3-B59E-5BCD2A81AA51}"/>
+                <a16:creationId xmlns:a16="http://schemas.microsoft.com/office/drawing/2014/main" id="{1A759E24-020E-46E0-96A1-3049F5B8CCB5}"/>
               </a:ext>
             </a:extLst>
           </p:cNvPr>
@@ -25305,7 +25305,7 @@
           <p:cNvPr id="29" name="">
             <a:extLst xmlns:a="http://schemas.openxmlformats.org/drawingml/2006/main">
               <a:ext uri="{FF2B5EF4-FFF2-40B4-BE49-F238E27FC236}">
-                <a16:creationId xmlns:a16="http://schemas.microsoft.com/office/drawing/2014/main" id="{7362451C-B229-4E83-B75F-EC31874E49B9}"/>
+                <a16:creationId xmlns:a16="http://schemas.microsoft.com/office/drawing/2014/main" id="{1F871704-5BAB-4E9A-A7F6-2DEB0902B379}"/>
               </a:ext>
             </a:extLst>
           </p:cNvPr>
@@ -25363,7 +25363,7 @@
           <p:cNvPr id="30" name="">
             <a:extLst xmlns:a="http://schemas.openxmlformats.org/drawingml/2006/main">
               <a:ext uri="{FF2B5EF4-FFF2-40B4-BE49-F238E27FC236}">
-                <a16:creationId xmlns:a16="http://schemas.microsoft.com/office/drawing/2014/main" id="{CEFA0E92-D0DE-4A83-94F7-5A264536CB13}"/>
+                <a16:creationId xmlns:a16="http://schemas.microsoft.com/office/drawing/2014/main" id="{9FE883AE-4EA6-418D-8E70-E4152E0E72A6}"/>
               </a:ext>
             </a:extLst>
           </p:cNvPr>
@@ -25396,7 +25396,7 @@
           <p:cNvPr id="31" name="">
             <a:extLst xmlns:a="http://schemas.openxmlformats.org/drawingml/2006/main">
               <a:ext uri="{FF2B5EF4-FFF2-40B4-BE49-F238E27FC236}">
-                <a16:creationId xmlns:a16="http://schemas.microsoft.com/office/drawing/2014/main" id="{325DD8D8-63B0-411E-A58D-AFC356CC3029}"/>
+                <a16:creationId xmlns:a16="http://schemas.microsoft.com/office/drawing/2014/main" id="{3F5A34CB-03FF-4AB4-97DB-6C05920DF2B0}"/>
               </a:ext>
             </a:extLst>
           </p:cNvPr>
@@ -25454,7 +25454,7 @@
           <p:cNvPr id="32" name="">
             <a:extLst xmlns:a="http://schemas.openxmlformats.org/drawingml/2006/main">
               <a:ext uri="{FF2B5EF4-FFF2-40B4-BE49-F238E27FC236}">
-                <a16:creationId xmlns:a16="http://schemas.microsoft.com/office/drawing/2014/main" id="{E7DB7E59-7A9D-40AE-B7CF-4DE520144824}"/>
+                <a16:creationId xmlns:a16="http://schemas.microsoft.com/office/drawing/2014/main" id="{8D300F3A-FB04-4703-9F80-445E99072647}"/>
               </a:ext>
             </a:extLst>
           </p:cNvPr>
@@ -25487,7 +25487,7 @@
           <p:cNvPr id="33" name="">
             <a:extLst xmlns:a="http://schemas.openxmlformats.org/drawingml/2006/main">
               <a:ext uri="{FF2B5EF4-FFF2-40B4-BE49-F238E27FC236}">
-                <a16:creationId xmlns:a16="http://schemas.microsoft.com/office/drawing/2014/main" id="{FC8FDA2A-498C-40FF-A7C8-FEEFBE574E2B}"/>
+                <a16:creationId xmlns:a16="http://schemas.microsoft.com/office/drawing/2014/main" id="{EEBFFC85-6F5E-4B53-8621-C8D7C1DEE76A}"/>
               </a:ext>
             </a:extLst>
           </p:cNvPr>
@@ -25545,7 +25545,7 @@
           <p:cNvPr id="34" name="">
             <a:extLst xmlns:a="http://schemas.openxmlformats.org/drawingml/2006/main">
               <a:ext uri="{FF2B5EF4-FFF2-40B4-BE49-F238E27FC236}">
-                <a16:creationId xmlns:a16="http://schemas.microsoft.com/office/drawing/2014/main" id="{C25C86EB-4535-46F9-AB32-FF8D1795814A}"/>
+                <a16:creationId xmlns:a16="http://schemas.microsoft.com/office/drawing/2014/main" id="{68631567-7420-406E-B8B9-8E9E1C773EDC}"/>
               </a:ext>
             </a:extLst>
           </p:cNvPr>
@@ -25578,7 +25578,7 @@
           <p:cNvPr id="35" name="">
             <a:extLst xmlns:a="http://schemas.openxmlformats.org/drawingml/2006/main">
               <a:ext uri="{FF2B5EF4-FFF2-40B4-BE49-F238E27FC236}">
-                <a16:creationId xmlns:a16="http://schemas.microsoft.com/office/drawing/2014/main" id="{281567B3-7092-43E7-B567-5D3F3F7CC66B}"/>
+                <a16:creationId xmlns:a16="http://schemas.microsoft.com/office/drawing/2014/main" id="{0055F67B-E650-466E-A4FE-7FD95401DDF5}"/>
               </a:ext>
             </a:extLst>
           </p:cNvPr>
@@ -25636,7 +25636,7 @@
           <p:cNvPr id="36" name="">
             <a:extLst xmlns:a="http://schemas.openxmlformats.org/drawingml/2006/main">
               <a:ext uri="{FF2B5EF4-FFF2-40B4-BE49-F238E27FC236}">
-                <a16:creationId xmlns:a16="http://schemas.microsoft.com/office/drawing/2014/main" id="{D8C95566-9290-4C14-AB17-5E43B8AB5AE9}"/>
+                <a16:creationId xmlns:a16="http://schemas.microsoft.com/office/drawing/2014/main" id="{4DCD6079-BD43-4B8C-BDDE-C4B59C172371}"/>
               </a:ext>
             </a:extLst>
           </p:cNvPr>
@@ -25669,7 +25669,7 @@
           <p:cNvPr id="37" name="">
             <a:extLst xmlns:a="http://schemas.openxmlformats.org/drawingml/2006/main">
               <a:ext uri="{FF2B5EF4-FFF2-40B4-BE49-F238E27FC236}">
-                <a16:creationId xmlns:a16="http://schemas.microsoft.com/office/drawing/2014/main" id="{3A46FEF5-0B65-41A5-A1BC-B335CF926C9E}"/>
+                <a16:creationId xmlns:a16="http://schemas.microsoft.com/office/drawing/2014/main" id="{F78442D4-E65F-4D0B-9B16-50C055B0BF00}"/>
               </a:ext>
             </a:extLst>
           </p:cNvPr>
@@ -25727,7 +25727,7 @@
           <p:cNvPr id="38" name="">
             <a:extLst xmlns:a="http://schemas.openxmlformats.org/drawingml/2006/main">
               <a:ext uri="{FF2B5EF4-FFF2-40B4-BE49-F238E27FC236}">
-                <a16:creationId xmlns:a16="http://schemas.microsoft.com/office/drawing/2014/main" id="{07CB05AD-17FB-4D8D-BA9C-C9507B7F0B92}"/>
+                <a16:creationId xmlns:a16="http://schemas.microsoft.com/office/drawing/2014/main" id="{6972C755-A35A-4D79-83A2-78CCC75F9A0F}"/>
               </a:ext>
             </a:extLst>
           </p:cNvPr>
@@ -25760,7 +25760,7 @@
           <p:cNvPr id="39" name="">
             <a:extLst xmlns:a="http://schemas.openxmlformats.org/drawingml/2006/main">
               <a:ext uri="{FF2B5EF4-FFF2-40B4-BE49-F238E27FC236}">
-                <a16:creationId xmlns:a16="http://schemas.microsoft.com/office/drawing/2014/main" id="{5F52708B-B440-4DA8-94F0-AEEF0FFE5175}"/>
+                <a16:creationId xmlns:a16="http://schemas.microsoft.com/office/drawing/2014/main" id="{77157096-6AA6-44F2-864B-94E06DE566AD}"/>
               </a:ext>
             </a:extLst>
           </p:cNvPr>
@@ -25818,7 +25818,7 @@
           <p:cNvPr id="40" name="">
             <a:extLst xmlns:a="http://schemas.openxmlformats.org/drawingml/2006/main">
               <a:ext uri="{FF2B5EF4-FFF2-40B4-BE49-F238E27FC236}">
-                <a16:creationId xmlns:a16="http://schemas.microsoft.com/office/drawing/2014/main" id="{62C65BA0-D72F-4237-842B-F626C3F51506}"/>
+                <a16:creationId xmlns:a16="http://schemas.microsoft.com/office/drawing/2014/main" id="{3DCAC4A1-8995-4F89-9FBB-A48EABF090D0}"/>
               </a:ext>
             </a:extLst>
           </p:cNvPr>
@@ -25851,7 +25851,7 @@
           <p:cNvPr id="41" name="">
             <a:extLst xmlns:a="http://schemas.openxmlformats.org/drawingml/2006/main">
               <a:ext uri="{FF2B5EF4-FFF2-40B4-BE49-F238E27FC236}">
-                <a16:creationId xmlns:a16="http://schemas.microsoft.com/office/drawing/2014/main" id="{2CDF59F0-FB62-416C-8F36-52BAD959F0C8}"/>
+                <a16:creationId xmlns:a16="http://schemas.microsoft.com/office/drawing/2014/main" id="{A564360E-3384-4B76-82F9-64423107762F}"/>
               </a:ext>
             </a:extLst>
           </p:cNvPr>
@@ -25909,7 +25909,7 @@
           <p:cNvPr id="42" name="">
             <a:extLst xmlns:a="http://schemas.openxmlformats.org/drawingml/2006/main">
               <a:ext uri="{FF2B5EF4-FFF2-40B4-BE49-F238E27FC236}">
-                <a16:creationId xmlns:a16="http://schemas.microsoft.com/office/drawing/2014/main" id="{955217C1-9119-4D83-9B20-8EFC8E79EE3E}"/>
+                <a16:creationId xmlns:a16="http://schemas.microsoft.com/office/drawing/2014/main" id="{F15C24C7-6C78-459E-AFB3-164843E3483A}"/>
               </a:ext>
             </a:extLst>
           </p:cNvPr>
@@ -25942,7 +25942,7 @@
           <p:cNvPr id="43" name="">
             <a:extLst xmlns:a="http://schemas.openxmlformats.org/drawingml/2006/main">
               <a:ext uri="{FF2B5EF4-FFF2-40B4-BE49-F238E27FC236}">
-                <a16:creationId xmlns:a16="http://schemas.microsoft.com/office/drawing/2014/main" id="{2172EBD3-6AE8-428B-A13D-00E47863B2ED}"/>
+                <a16:creationId xmlns:a16="http://schemas.microsoft.com/office/drawing/2014/main" id="{7FCDA7D0-DC8A-44D0-92E4-EDB4FDA2FDA8}"/>
               </a:ext>
             </a:extLst>
           </p:cNvPr>
@@ -26000,7 +26000,7 @@
           <p:cNvPr id="44" name="">
             <a:extLst xmlns:a="http://schemas.openxmlformats.org/drawingml/2006/main">
               <a:ext uri="{FF2B5EF4-FFF2-40B4-BE49-F238E27FC236}">
-                <a16:creationId xmlns:a16="http://schemas.microsoft.com/office/drawing/2014/main" id="{2018A1FF-AAC2-42BE-B281-2819AB280A32}"/>
+                <a16:creationId xmlns:a16="http://schemas.microsoft.com/office/drawing/2014/main" id="{BE15C4E3-560F-497B-848A-BA23F406B954}"/>
               </a:ext>
             </a:extLst>
           </p:cNvPr>
@@ -26033,7 +26033,7 @@
           <p:cNvPr id="45" name="">
             <a:extLst xmlns:a="http://schemas.openxmlformats.org/drawingml/2006/main">
               <a:ext uri="{FF2B5EF4-FFF2-40B4-BE49-F238E27FC236}">
-                <a16:creationId xmlns:a16="http://schemas.microsoft.com/office/drawing/2014/main" id="{DF8EAED8-5C1C-40D5-94C0-D0E9A5DACFB4}"/>
+                <a16:creationId xmlns:a16="http://schemas.microsoft.com/office/drawing/2014/main" id="{BC2FBAC0-5F9B-471E-9150-69B639712BB2}"/>
               </a:ext>
             </a:extLst>
           </p:cNvPr>
@@ -26091,7 +26091,7 @@
           <p:cNvPr id="46" name="">
             <a:extLst xmlns:a="http://schemas.openxmlformats.org/drawingml/2006/main">
               <a:ext uri="{FF2B5EF4-FFF2-40B4-BE49-F238E27FC236}">
-                <a16:creationId xmlns:a16="http://schemas.microsoft.com/office/drawing/2014/main" id="{C1063530-0676-429F-90C5-C7AD2669C242}"/>
+                <a16:creationId xmlns:a16="http://schemas.microsoft.com/office/drawing/2014/main" id="{17751F1D-EA5E-4E66-8970-23862722A0BF}"/>
               </a:ext>
             </a:extLst>
           </p:cNvPr>
@@ -26124,7 +26124,7 @@
           <p:cNvPr id="47" name="">
             <a:extLst xmlns:a="http://schemas.openxmlformats.org/drawingml/2006/main">
               <a:ext uri="{FF2B5EF4-FFF2-40B4-BE49-F238E27FC236}">
-                <a16:creationId xmlns:a16="http://schemas.microsoft.com/office/drawing/2014/main" id="{4D5D37F4-0C8F-4BBC-A5D9-7B52BE9BE021}"/>
+                <a16:creationId xmlns:a16="http://schemas.microsoft.com/office/drawing/2014/main" id="{249754E8-28DE-4904-960E-FB6AA810DEC9}"/>
               </a:ext>
             </a:extLst>
           </p:cNvPr>
@@ -26182,7 +26182,7 @@
           <p:cNvPr id="48" name="">
             <a:extLst xmlns:a="http://schemas.openxmlformats.org/drawingml/2006/main">
               <a:ext uri="{FF2B5EF4-FFF2-40B4-BE49-F238E27FC236}">
-                <a16:creationId xmlns:a16="http://schemas.microsoft.com/office/drawing/2014/main" id="{7B9AC044-DDD4-4750-AB2D-6D1E6A2FAE95}"/>
+                <a16:creationId xmlns:a16="http://schemas.microsoft.com/office/drawing/2014/main" id="{AA3133B0-9FAC-4491-9409-D90E82318FF8}"/>
               </a:ext>
             </a:extLst>
           </p:cNvPr>
@@ -26215,7 +26215,7 @@
           <p:cNvPr id="49" name="">
             <a:extLst xmlns:a="http://schemas.openxmlformats.org/drawingml/2006/main">
               <a:ext uri="{FF2B5EF4-FFF2-40B4-BE49-F238E27FC236}">
-                <a16:creationId xmlns:a16="http://schemas.microsoft.com/office/drawing/2014/main" id="{52F4BAD2-B1E1-4322-83BD-D28A9DD0D748}"/>
+                <a16:creationId xmlns:a16="http://schemas.microsoft.com/office/drawing/2014/main" id="{9EAB0C7C-7CEA-4809-89CF-2D337DAAFE1C}"/>
               </a:ext>
             </a:extLst>
           </p:cNvPr>
@@ -26273,7 +26273,7 @@
           <p:cNvPr id="50" name="">
             <a:extLst xmlns:a="http://schemas.openxmlformats.org/drawingml/2006/main">
               <a:ext uri="{FF2B5EF4-FFF2-40B4-BE49-F238E27FC236}">
-                <a16:creationId xmlns:a16="http://schemas.microsoft.com/office/drawing/2014/main" id="{29137CB9-7005-4CFE-B4CD-6F6FF3B1E753}"/>
+                <a16:creationId xmlns:a16="http://schemas.microsoft.com/office/drawing/2014/main" id="{8FC63451-4D3B-45DA-913C-13A03E33973A}"/>
               </a:ext>
             </a:extLst>
           </p:cNvPr>
@@ -26306,7 +26306,7 @@
           <p:cNvPr id="51" name="">
             <a:extLst xmlns:a="http://schemas.openxmlformats.org/drawingml/2006/main">
               <a:ext uri="{FF2B5EF4-FFF2-40B4-BE49-F238E27FC236}">
-                <a16:creationId xmlns:a16="http://schemas.microsoft.com/office/drawing/2014/main" id="{659BDA20-8828-476C-8073-59C5DEA39481}"/>
+                <a16:creationId xmlns:a16="http://schemas.microsoft.com/office/drawing/2014/main" id="{6C988218-050D-46E4-9A22-8F4723519313}"/>
               </a:ext>
             </a:extLst>
           </p:cNvPr>
@@ -26364,7 +26364,7 @@
           <p:cNvPr id="52" name="">
             <a:extLst xmlns:a="http://schemas.openxmlformats.org/drawingml/2006/main">
               <a:ext uri="{FF2B5EF4-FFF2-40B4-BE49-F238E27FC236}">
-                <a16:creationId xmlns:a16="http://schemas.microsoft.com/office/drawing/2014/main" id="{3FFC2CB8-A5EF-4F25-862E-E4A0E4F5681C}"/>
+                <a16:creationId xmlns:a16="http://schemas.microsoft.com/office/drawing/2014/main" id="{1EA2DC94-E380-4B19-92F8-492641BEB090}"/>
               </a:ext>
             </a:extLst>
           </p:cNvPr>
@@ -26397,7 +26397,7 @@
           <p:cNvPr id="53" name="">
             <a:extLst xmlns:a="http://schemas.openxmlformats.org/drawingml/2006/main">
               <a:ext uri="{FF2B5EF4-FFF2-40B4-BE49-F238E27FC236}">
-                <a16:creationId xmlns:a16="http://schemas.microsoft.com/office/drawing/2014/main" id="{C7821DE4-1D05-4EDA-932A-5645E5D666D8}"/>
+                <a16:creationId xmlns:a16="http://schemas.microsoft.com/office/drawing/2014/main" id="{E17307B0-52EC-42A2-89E4-EAC411B1C64D}"/>
               </a:ext>
             </a:extLst>
           </p:cNvPr>
@@ -26455,7 +26455,7 @@
           <p:cNvPr id="54" name="">
             <a:extLst xmlns:a="http://schemas.openxmlformats.org/drawingml/2006/main">
               <a:ext uri="{FF2B5EF4-FFF2-40B4-BE49-F238E27FC236}">
-                <a16:creationId xmlns:a16="http://schemas.microsoft.com/office/drawing/2014/main" id="{C0F00CD9-0BAE-4D24-8720-7DF1D9AFFADD}"/>
+                <a16:creationId xmlns:a16="http://schemas.microsoft.com/office/drawing/2014/main" id="{FB9F64C8-D297-4EF4-9EF8-17DAFC00CA97}"/>
               </a:ext>
             </a:extLst>
           </p:cNvPr>
@@ -26488,7 +26488,7 @@
           <p:cNvPr id="55" name="">
             <a:extLst xmlns:a="http://schemas.openxmlformats.org/drawingml/2006/main">
               <a:ext uri="{FF2B5EF4-FFF2-40B4-BE49-F238E27FC236}">
-                <a16:creationId xmlns:a16="http://schemas.microsoft.com/office/drawing/2014/main" id="{48674BB9-DF9D-42AF-85EB-924FF6C10BB8}"/>
+                <a16:creationId xmlns:a16="http://schemas.microsoft.com/office/drawing/2014/main" id="{7A5FE9AF-BA11-4A08-9F71-D85BF41BD675}"/>
               </a:ext>
             </a:extLst>
           </p:cNvPr>
@@ -26546,7 +26546,7 @@
           <p:cNvPr id="56" name="">
             <a:extLst xmlns:a="http://schemas.openxmlformats.org/drawingml/2006/main">
               <a:ext uri="{FF2B5EF4-FFF2-40B4-BE49-F238E27FC236}">
-                <a16:creationId xmlns:a16="http://schemas.microsoft.com/office/drawing/2014/main" id="{F1BA413A-18FF-45E7-8665-C2BEBB06AD70}"/>
+                <a16:creationId xmlns:a16="http://schemas.microsoft.com/office/drawing/2014/main" id="{A3607BFE-0226-4AC5-8118-9F39361EC600}"/>
               </a:ext>
             </a:extLst>
           </p:cNvPr>
@@ -26579,7 +26579,7 @@
           <p:cNvPr id="57" name="">
             <a:extLst xmlns:a="http://schemas.openxmlformats.org/drawingml/2006/main">
               <a:ext uri="{FF2B5EF4-FFF2-40B4-BE49-F238E27FC236}">
-                <a16:creationId xmlns:a16="http://schemas.microsoft.com/office/drawing/2014/main" id="{C2EB7A37-2FDA-4521-92F2-FE71B84742C6}"/>
+                <a16:creationId xmlns:a16="http://schemas.microsoft.com/office/drawing/2014/main" id="{9197A036-23D8-48AE-B59A-4EDBD62EB49D}"/>
               </a:ext>
             </a:extLst>
           </p:cNvPr>
@@ -26637,7 +26637,7 @@
           <p:cNvPr id="58" name="">
             <a:extLst xmlns:a="http://schemas.openxmlformats.org/drawingml/2006/main">
               <a:ext uri="{FF2B5EF4-FFF2-40B4-BE49-F238E27FC236}">
-                <a16:creationId xmlns:a16="http://schemas.microsoft.com/office/drawing/2014/main" id="{181BDA6B-27AB-4095-B11F-361D3EF61415}"/>
+                <a16:creationId xmlns:a16="http://schemas.microsoft.com/office/drawing/2014/main" id="{C7C28156-BF88-4ABE-B7C6-AF3C457180AA}"/>
               </a:ext>
             </a:extLst>
           </p:cNvPr>
@@ -26672,7 +26672,7 @@
           <p:cNvPr id="59" name="">
             <a:extLst xmlns:a="http://schemas.openxmlformats.org/drawingml/2006/main">
               <a:ext uri="{FF2B5EF4-FFF2-40B4-BE49-F238E27FC236}">
-                <a16:creationId xmlns:a16="http://schemas.microsoft.com/office/drawing/2014/main" id="{0227BB46-5668-4ABD-97C0-133DC3C66285}"/>
+                <a16:creationId xmlns:a16="http://schemas.microsoft.com/office/drawing/2014/main" id="{F181CEBB-4724-43C4-9B6A-FA42200E6EC1}"/>
               </a:ext>
             </a:extLst>
           </p:cNvPr>
@@ -26705,7 +26705,7 @@
           <p:cNvPr id="60" name="">
             <a:extLst xmlns:a="http://schemas.openxmlformats.org/drawingml/2006/main">
               <a:ext uri="{FF2B5EF4-FFF2-40B4-BE49-F238E27FC236}">
-                <a16:creationId xmlns:a16="http://schemas.microsoft.com/office/drawing/2014/main" id="{4CBE6E3B-D5EE-4FA7-B22B-AF8558838C5D}"/>
+                <a16:creationId xmlns:a16="http://schemas.microsoft.com/office/drawing/2014/main" id="{79CCFC1C-7CBE-4A54-92F5-75F446624D00}"/>
               </a:ext>
             </a:extLst>
           </p:cNvPr>
@@ -26763,7 +26763,7 @@
           <p:cNvPr id="61" name="">
             <a:extLst xmlns:a="http://schemas.openxmlformats.org/drawingml/2006/main">
               <a:ext uri="{FF2B5EF4-FFF2-40B4-BE49-F238E27FC236}">
-                <a16:creationId xmlns:a16="http://schemas.microsoft.com/office/drawing/2014/main" id="{BA4F1873-8EB0-4F0D-BD30-9FB278BA6971}"/>
+                <a16:creationId xmlns:a16="http://schemas.microsoft.com/office/drawing/2014/main" id="{5207DC83-0DBA-402C-9BCE-AF86275E0691}"/>
               </a:ext>
             </a:extLst>
           </p:cNvPr>
@@ -26821,7 +26821,7 @@
           <p:cNvPr id="62" name="">
             <a:extLst xmlns:a="http://schemas.openxmlformats.org/drawingml/2006/main">
               <a:ext uri="{FF2B5EF4-FFF2-40B4-BE49-F238E27FC236}">
-                <a16:creationId xmlns:a16="http://schemas.microsoft.com/office/drawing/2014/main" id="{630AE9AD-8022-47E3-955A-F3D63089C582}"/>
+                <a16:creationId xmlns:a16="http://schemas.microsoft.com/office/drawing/2014/main" id="{10624B19-3089-4823-B7FA-CDDBA79AE392}"/>
               </a:ext>
             </a:extLst>
           </p:cNvPr>
@@ -26856,7 +26856,7 @@
           <p:cNvPr id="63" name="">
             <a:extLst xmlns:a="http://schemas.openxmlformats.org/drawingml/2006/main">
               <a:ext uri="{FF2B5EF4-FFF2-40B4-BE49-F238E27FC236}">
-                <a16:creationId xmlns:a16="http://schemas.microsoft.com/office/drawing/2014/main" id="{307CC5DD-D528-43B8-BE84-B63539E7C853}"/>
+                <a16:creationId xmlns:a16="http://schemas.microsoft.com/office/drawing/2014/main" id="{689634B6-5ED5-4DB3-A09E-26A3F574A8F0}"/>
               </a:ext>
             </a:extLst>
           </p:cNvPr>
@@ -26889,7 +26889,7 @@
           <p:cNvPr id="64" name="">
             <a:extLst xmlns:a="http://schemas.openxmlformats.org/drawingml/2006/main">
               <a:ext uri="{FF2B5EF4-FFF2-40B4-BE49-F238E27FC236}">
-                <a16:creationId xmlns:a16="http://schemas.microsoft.com/office/drawing/2014/main" id="{1756FC02-0A90-44D0-A921-0A98F7975F8B}"/>
+                <a16:creationId xmlns:a16="http://schemas.microsoft.com/office/drawing/2014/main" id="{CFBA8615-F8AD-46AB-982B-B894B022D716}"/>
               </a:ext>
             </a:extLst>
           </p:cNvPr>
@@ -26947,7 +26947,7 @@
           <p:cNvPr id="65" name="">
             <a:extLst xmlns:a="http://schemas.openxmlformats.org/drawingml/2006/main">
               <a:ext uri="{FF2B5EF4-FFF2-40B4-BE49-F238E27FC236}">
-                <a16:creationId xmlns:a16="http://schemas.microsoft.com/office/drawing/2014/main" id="{6BD85485-B71F-49F6-9EED-A4D1917B3CE4}"/>
+                <a16:creationId xmlns:a16="http://schemas.microsoft.com/office/drawing/2014/main" id="{362CEEDF-ACC9-4682-A61E-FC751FCA8033}"/>
               </a:ext>
             </a:extLst>
           </p:cNvPr>
@@ -27005,7 +27005,7 @@
           <p:cNvPr id="66" name="">
             <a:extLst xmlns:a="http://schemas.openxmlformats.org/drawingml/2006/main">
               <a:ext uri="{FF2B5EF4-FFF2-40B4-BE49-F238E27FC236}">
-                <a16:creationId xmlns:a16="http://schemas.microsoft.com/office/drawing/2014/main" id="{7EA9621E-08D4-4D8C-909D-9B54768731AE}"/>
+                <a16:creationId xmlns:a16="http://schemas.microsoft.com/office/drawing/2014/main" id="{DE1D50B6-2695-4479-9677-85871B459B27}"/>
               </a:ext>
             </a:extLst>
           </p:cNvPr>
@@ -27040,7 +27040,7 @@
           <p:cNvPr id="67" name="">
             <a:extLst xmlns:a="http://schemas.openxmlformats.org/drawingml/2006/main">
               <a:ext uri="{FF2B5EF4-FFF2-40B4-BE49-F238E27FC236}">
-                <a16:creationId xmlns:a16="http://schemas.microsoft.com/office/drawing/2014/main" id="{897D8A01-30C2-4734-97A0-735AA903FA3F}"/>
+                <a16:creationId xmlns:a16="http://schemas.microsoft.com/office/drawing/2014/main" id="{7FEFCA84-AF6D-41DC-9AAA-9883C3E63585}"/>
               </a:ext>
             </a:extLst>
           </p:cNvPr>
@@ -27073,7 +27073,7 @@
           <p:cNvPr id="68" name="">
             <a:extLst xmlns:a="http://schemas.openxmlformats.org/drawingml/2006/main">
               <a:ext uri="{FF2B5EF4-FFF2-40B4-BE49-F238E27FC236}">
-                <a16:creationId xmlns:a16="http://schemas.microsoft.com/office/drawing/2014/main" id="{BBD5F15D-D846-4A16-A9D3-E7945A9A4034}"/>
+                <a16:creationId xmlns:a16="http://schemas.microsoft.com/office/drawing/2014/main" id="{852F2B68-8D75-4535-AF44-9986E1A53754}"/>
               </a:ext>
             </a:extLst>
           </p:cNvPr>
@@ -27131,7 +27131,7 @@
           <p:cNvPr id="69" name="">
             <a:extLst xmlns:a="http://schemas.openxmlformats.org/drawingml/2006/main">
               <a:ext uri="{FF2B5EF4-FFF2-40B4-BE49-F238E27FC236}">
-                <a16:creationId xmlns:a16="http://schemas.microsoft.com/office/drawing/2014/main" id="{CFA37779-FC50-427C-BC24-9EB498F82D9B}"/>
+                <a16:creationId xmlns:a16="http://schemas.microsoft.com/office/drawing/2014/main" id="{97123C19-3B47-4D30-B061-D18B5C2F856D}"/>
               </a:ext>
             </a:extLst>
           </p:cNvPr>
@@ -27189,7 +27189,7 @@
           <p:cNvPr id="70" name="">
             <a:extLst xmlns:a="http://schemas.openxmlformats.org/drawingml/2006/main">
               <a:ext uri="{FF2B5EF4-FFF2-40B4-BE49-F238E27FC236}">
-                <a16:creationId xmlns:a16="http://schemas.microsoft.com/office/drawing/2014/main" id="{757F4080-450D-4191-84EE-5B4B2744B90B}"/>
+                <a16:creationId xmlns:a16="http://schemas.microsoft.com/office/drawing/2014/main" id="{0482DD4C-466B-41F2-BCEE-B32C0CD98635}"/>
               </a:ext>
             </a:extLst>
           </p:cNvPr>
@@ -27351,7 +27351,7 @@
             </a:pathLst>
           </a:custGeom>
           <a:blipFill xmlns:a="http://schemas.openxmlformats.org/drawingml/2006/main">
-            <a:blip xmlns:r="http://schemas.openxmlformats.org/officeDocument/2006/relationships" r:embed="Rfb5e1269850b4217"/>
+            <a:blip xmlns:r="http://schemas.openxmlformats.org/officeDocument/2006/relationships" r:embed="R68f0116223e54527"/>
             <a:stretch>
               <a:fillRect l="-7801" t="0" r="-7801" b="0"/>
             </a:stretch>
@@ -27363,7 +27363,7 @@
           <p:cNvPr id="6" name="">
             <a:extLst xmlns:a="http://schemas.openxmlformats.org/drawingml/2006/main">
               <a:ext uri="{FF2B5EF4-FFF2-40B4-BE49-F238E27FC236}">
-                <a16:creationId xmlns:a16="http://schemas.microsoft.com/office/drawing/2014/main" id="{14FF335D-66A9-433A-95A2-546D41E204B3}"/>
+                <a16:creationId xmlns:a16="http://schemas.microsoft.com/office/drawing/2014/main" id="{AEFDCB54-18B1-45B0-82FF-457C187FEE94}"/>
               </a:ext>
             </a:extLst>
           </p:cNvPr>
@@ -27421,7 +27421,7 @@
           <p:cNvPr id="7" name="">
             <a:extLst xmlns:a="http://schemas.openxmlformats.org/drawingml/2006/main">
               <a:ext uri="{FF2B5EF4-FFF2-40B4-BE49-F238E27FC236}">
-                <a16:creationId xmlns:a16="http://schemas.microsoft.com/office/drawing/2014/main" id="{17953E02-2194-4A54-A1DC-BBE32CDBE292}"/>
+                <a16:creationId xmlns:a16="http://schemas.microsoft.com/office/drawing/2014/main" id="{BB4C2074-4F22-4BE9-ADA5-462FF75107B4}"/>
               </a:ext>
             </a:extLst>
           </p:cNvPr>
@@ -27479,7 +27479,7 @@
           <p:cNvPr id="8" name="">
             <a:extLst xmlns:a="http://schemas.openxmlformats.org/drawingml/2006/main">
               <a:ext uri="{FF2B5EF4-FFF2-40B4-BE49-F238E27FC236}">
-                <a16:creationId xmlns:a16="http://schemas.microsoft.com/office/drawing/2014/main" id="{3B3F6118-B74A-4226-8F73-87C469C9B87A}"/>
+                <a16:creationId xmlns:a16="http://schemas.microsoft.com/office/drawing/2014/main" id="{214B4BD8-4EF5-4317-ABAE-C3BB8CE4EE77}"/>
               </a:ext>
             </a:extLst>
           </p:cNvPr>
@@ -27512,7 +27512,7 @@
           <p:cNvPr id="9" name="">
             <a:extLst xmlns:a="http://schemas.openxmlformats.org/drawingml/2006/main">
               <a:ext uri="{FF2B5EF4-FFF2-40B4-BE49-F238E27FC236}">
-                <a16:creationId xmlns:a16="http://schemas.microsoft.com/office/drawing/2014/main" id="{0FB0DD0D-0DF0-4FA6-9988-AE576F1EBC13}"/>
+                <a16:creationId xmlns:a16="http://schemas.microsoft.com/office/drawing/2014/main" id="{405C1C7A-73DF-4DEE-AA6B-6EBC3658FFD8}"/>
               </a:ext>
             </a:extLst>
           </p:cNvPr>
@@ -27570,7 +27570,7 @@
           <p:cNvPr id="10" name="">
             <a:extLst xmlns:a="http://schemas.openxmlformats.org/drawingml/2006/main">
               <a:ext uri="{FF2B5EF4-FFF2-40B4-BE49-F238E27FC236}">
-                <a16:creationId xmlns:a16="http://schemas.microsoft.com/office/drawing/2014/main" id="{EDA38E85-8C5C-423B-B7DC-86A86A7E2015}"/>
+                <a16:creationId xmlns:a16="http://schemas.microsoft.com/office/drawing/2014/main" id="{9CC13094-CD14-44ED-9281-502267A46E39}"/>
               </a:ext>
             </a:extLst>
           </p:cNvPr>
@@ -27603,7 +27603,7 @@
           <p:cNvPr id="11" name="">
             <a:extLst xmlns:a="http://schemas.openxmlformats.org/drawingml/2006/main">
               <a:ext uri="{FF2B5EF4-FFF2-40B4-BE49-F238E27FC236}">
-                <a16:creationId xmlns:a16="http://schemas.microsoft.com/office/drawing/2014/main" id="{A2037F2E-571F-446B-805F-A1BF121018A9}"/>
+                <a16:creationId xmlns:a16="http://schemas.microsoft.com/office/drawing/2014/main" id="{E654C3EF-2FF0-406F-90CD-042EE5692807}"/>
               </a:ext>
             </a:extLst>
           </p:cNvPr>
@@ -27661,7 +27661,7 @@
           <p:cNvPr id="12" name="">
             <a:extLst xmlns:a="http://schemas.openxmlformats.org/drawingml/2006/main">
               <a:ext uri="{FF2B5EF4-FFF2-40B4-BE49-F238E27FC236}">
-                <a16:creationId xmlns:a16="http://schemas.microsoft.com/office/drawing/2014/main" id="{CF03F6AE-D031-44FE-8EE2-951D10C6E2B4}"/>
+                <a16:creationId xmlns:a16="http://schemas.microsoft.com/office/drawing/2014/main" id="{285E9B21-88FF-4FAE-A481-94B9B242A8E4}"/>
               </a:ext>
             </a:extLst>
           </p:cNvPr>
@@ -27694,7 +27694,7 @@
           <p:cNvPr id="13" name="">
             <a:extLst xmlns:a="http://schemas.openxmlformats.org/drawingml/2006/main">
               <a:ext uri="{FF2B5EF4-FFF2-40B4-BE49-F238E27FC236}">
-                <a16:creationId xmlns:a16="http://schemas.microsoft.com/office/drawing/2014/main" id="{47FCC1A0-5A4E-494E-96EE-A81CC07592AC}"/>
+                <a16:creationId xmlns:a16="http://schemas.microsoft.com/office/drawing/2014/main" id="{9D397D59-7C21-4522-BFF5-182853EA9CB3}"/>
               </a:ext>
             </a:extLst>
           </p:cNvPr>
@@ -27752,7 +27752,7 @@
           <p:cNvPr id="14" name="">
             <a:extLst xmlns:a="http://schemas.openxmlformats.org/drawingml/2006/main">
               <a:ext uri="{FF2B5EF4-FFF2-40B4-BE49-F238E27FC236}">
-                <a16:creationId xmlns:a16="http://schemas.microsoft.com/office/drawing/2014/main" id="{D670718E-8A76-4A0A-989A-5DDC168AF0B6}"/>
+                <a16:creationId xmlns:a16="http://schemas.microsoft.com/office/drawing/2014/main" id="{A0D79AB4-8A5F-48F9-953D-902991B77970}"/>
               </a:ext>
             </a:extLst>
           </p:cNvPr>
@@ -27785,7 +27785,7 @@
           <p:cNvPr id="15" name="">
             <a:extLst xmlns:a="http://schemas.openxmlformats.org/drawingml/2006/main">
               <a:ext uri="{FF2B5EF4-FFF2-40B4-BE49-F238E27FC236}">
-                <a16:creationId xmlns:a16="http://schemas.microsoft.com/office/drawing/2014/main" id="{E9366EAB-6772-47B6-8518-F455AC296EFA}"/>
+                <a16:creationId xmlns:a16="http://schemas.microsoft.com/office/drawing/2014/main" id="{2A7F3D8D-30BA-42EA-BDA4-9A51B7C72F4C}"/>
               </a:ext>
             </a:extLst>
           </p:cNvPr>
@@ -27843,7 +27843,7 @@
           <p:cNvPr id="16" name="">
             <a:extLst xmlns:a="http://schemas.openxmlformats.org/drawingml/2006/main">
               <a:ext uri="{FF2B5EF4-FFF2-40B4-BE49-F238E27FC236}">
-                <a16:creationId xmlns:a16="http://schemas.microsoft.com/office/drawing/2014/main" id="{0C86DD65-92AD-41F0-BE57-B4EB34CF87F6}"/>
+                <a16:creationId xmlns:a16="http://schemas.microsoft.com/office/drawing/2014/main" id="{A7D44607-D24A-48D3-B65B-0B8BFB511F1A}"/>
               </a:ext>
             </a:extLst>
           </p:cNvPr>
@@ -27876,7 +27876,7 @@
           <p:cNvPr id="17" name="">
             <a:extLst xmlns:a="http://schemas.openxmlformats.org/drawingml/2006/main">
               <a:ext uri="{FF2B5EF4-FFF2-40B4-BE49-F238E27FC236}">
-                <a16:creationId xmlns:a16="http://schemas.microsoft.com/office/drawing/2014/main" id="{AD592D68-A952-45CE-B162-CA9F09E2A87B}"/>
+                <a16:creationId xmlns:a16="http://schemas.microsoft.com/office/drawing/2014/main" id="{9CEAAE63-E106-4B16-876A-ACBBF3F902D0}"/>
               </a:ext>
             </a:extLst>
           </p:cNvPr>
@@ -27934,7 +27934,7 @@
           <p:cNvPr id="18" name="">
             <a:extLst xmlns:a="http://schemas.openxmlformats.org/drawingml/2006/main">
               <a:ext uri="{FF2B5EF4-FFF2-40B4-BE49-F238E27FC236}">
-                <a16:creationId xmlns:a16="http://schemas.microsoft.com/office/drawing/2014/main" id="{C6BB4274-FB73-4C70-851B-CAE844BCF95F}"/>
+                <a16:creationId xmlns:a16="http://schemas.microsoft.com/office/drawing/2014/main" id="{5533D19A-D7A6-48FF-B288-5215380AEFCF}"/>
               </a:ext>
             </a:extLst>
           </p:cNvPr>
@@ -27967,7 +27967,7 @@
           <p:cNvPr id="19" name="">
             <a:extLst xmlns:a="http://schemas.openxmlformats.org/drawingml/2006/main">
               <a:ext uri="{FF2B5EF4-FFF2-40B4-BE49-F238E27FC236}">
-                <a16:creationId xmlns:a16="http://schemas.microsoft.com/office/drawing/2014/main" id="{8069D409-9808-4FC5-9CEE-DC878F0E751A}"/>
+                <a16:creationId xmlns:a16="http://schemas.microsoft.com/office/drawing/2014/main" id="{0CD7652B-BBBF-4C64-9785-66CDDD22D85C}"/>
               </a:ext>
             </a:extLst>
           </p:cNvPr>
@@ -28025,7 +28025,7 @@
           <p:cNvPr id="20" name="">
             <a:extLst xmlns:a="http://schemas.openxmlformats.org/drawingml/2006/main">
               <a:ext uri="{FF2B5EF4-FFF2-40B4-BE49-F238E27FC236}">
-                <a16:creationId xmlns:a16="http://schemas.microsoft.com/office/drawing/2014/main" id="{70D98BBF-0153-4C49-8279-3DFA46FE999B}"/>
+                <a16:creationId xmlns:a16="http://schemas.microsoft.com/office/drawing/2014/main" id="{7DDCA370-0DF2-4624-9707-5B05E8F03554}"/>
               </a:ext>
             </a:extLst>
           </p:cNvPr>
@@ -28058,7 +28058,7 @@
           <p:cNvPr id="21" name="">
             <a:extLst xmlns:a="http://schemas.openxmlformats.org/drawingml/2006/main">
               <a:ext uri="{FF2B5EF4-FFF2-40B4-BE49-F238E27FC236}">
-                <a16:creationId xmlns:a16="http://schemas.microsoft.com/office/drawing/2014/main" id="{817BE051-9335-433F-9DE6-B44F53B8CCFA}"/>
+                <a16:creationId xmlns:a16="http://schemas.microsoft.com/office/drawing/2014/main" id="{954AA1F8-C9FD-408B-A8E9-DC6CB82466CE}"/>
               </a:ext>
             </a:extLst>
           </p:cNvPr>
@@ -28116,7 +28116,7 @@
           <p:cNvPr id="22" name="">
             <a:extLst xmlns:a="http://schemas.openxmlformats.org/drawingml/2006/main">
               <a:ext uri="{FF2B5EF4-FFF2-40B4-BE49-F238E27FC236}">
-                <a16:creationId xmlns:a16="http://schemas.microsoft.com/office/drawing/2014/main" id="{F0FA13AC-3276-4ABD-A5D1-D7A36B79CA68}"/>
+                <a16:creationId xmlns:a16="http://schemas.microsoft.com/office/drawing/2014/main" id="{26F2671E-8DB0-4E11-B5E6-519DA2F64DD1}"/>
               </a:ext>
             </a:extLst>
           </p:cNvPr>
@@ -28149,7 +28149,7 @@
           <p:cNvPr id="23" name="">
             <a:extLst xmlns:a="http://schemas.openxmlformats.org/drawingml/2006/main">
               <a:ext uri="{FF2B5EF4-FFF2-40B4-BE49-F238E27FC236}">
-                <a16:creationId xmlns:a16="http://schemas.microsoft.com/office/drawing/2014/main" id="{F8D4E3BA-BE23-4272-AF93-8810A6C76F16}"/>
+                <a16:creationId xmlns:a16="http://schemas.microsoft.com/office/drawing/2014/main" id="{D7961B2F-2165-4B1A-9151-A7636416E9B0}"/>
               </a:ext>
             </a:extLst>
           </p:cNvPr>
@@ -28207,7 +28207,7 @@
           <p:cNvPr id="24" name="">
             <a:extLst xmlns:a="http://schemas.openxmlformats.org/drawingml/2006/main">
               <a:ext uri="{FF2B5EF4-FFF2-40B4-BE49-F238E27FC236}">
-                <a16:creationId xmlns:a16="http://schemas.microsoft.com/office/drawing/2014/main" id="{1575C35A-3B73-4D51-86F6-80F745BAB002}"/>
+                <a16:creationId xmlns:a16="http://schemas.microsoft.com/office/drawing/2014/main" id="{37C36EE9-D306-47F8-8607-941791BC6240}"/>
               </a:ext>
             </a:extLst>
           </p:cNvPr>
@@ -28240,7 +28240,7 @@
           <p:cNvPr id="25" name="">
             <a:extLst xmlns:a="http://schemas.openxmlformats.org/drawingml/2006/main">
               <a:ext uri="{FF2B5EF4-FFF2-40B4-BE49-F238E27FC236}">
-                <a16:creationId xmlns:a16="http://schemas.microsoft.com/office/drawing/2014/main" id="{70AFBCCF-0302-43B8-8300-B92540F993CF}"/>
+                <a16:creationId xmlns:a16="http://schemas.microsoft.com/office/drawing/2014/main" id="{28B2AED7-2163-4B7E-8C7D-EC230B527023}"/>
               </a:ext>
             </a:extLst>
           </p:cNvPr>
@@ -28298,7 +28298,7 @@
           <p:cNvPr id="26" name="">
             <a:extLst xmlns:a="http://schemas.openxmlformats.org/drawingml/2006/main">
               <a:ext uri="{FF2B5EF4-FFF2-40B4-BE49-F238E27FC236}">
-                <a16:creationId xmlns:a16="http://schemas.microsoft.com/office/drawing/2014/main" id="{ABD289CB-63E1-46DE-9D4B-C965C146F775}"/>
+                <a16:creationId xmlns:a16="http://schemas.microsoft.com/office/drawing/2014/main" id="{A4777D7B-EB2C-40D5-A7BC-D33B2F71272B}"/>
               </a:ext>
             </a:extLst>
           </p:cNvPr>
@@ -28331,7 +28331,7 @@
           <p:cNvPr id="27" name="">
             <a:extLst xmlns:a="http://schemas.openxmlformats.org/drawingml/2006/main">
               <a:ext uri="{FF2B5EF4-FFF2-40B4-BE49-F238E27FC236}">
-                <a16:creationId xmlns:a16="http://schemas.microsoft.com/office/drawing/2014/main" id="{48CB7871-4F67-4602-95C2-7623A14D3D3A}"/>
+                <a16:creationId xmlns:a16="http://schemas.microsoft.com/office/drawing/2014/main" id="{EB5F0E3E-E7D3-439E-AF82-F842CA98DDFF}"/>
               </a:ext>
             </a:extLst>
           </p:cNvPr>
@@ -28389,7 +28389,7 @@
           <p:cNvPr id="28" name="">
             <a:extLst xmlns:a="http://schemas.openxmlformats.org/drawingml/2006/main">
               <a:ext uri="{FF2B5EF4-FFF2-40B4-BE49-F238E27FC236}">
-                <a16:creationId xmlns:a16="http://schemas.microsoft.com/office/drawing/2014/main" id="{D2A2DDDC-964F-46C7-AB60-948C3B011102}"/>
+                <a16:creationId xmlns:a16="http://schemas.microsoft.com/office/drawing/2014/main" id="{9BBB9EBE-9EFB-47E4-A2E1-B5D4BD370182}"/>
               </a:ext>
             </a:extLst>
           </p:cNvPr>
@@ -28422,7 +28422,7 @@
           <p:cNvPr id="29" name="">
             <a:extLst xmlns:a="http://schemas.openxmlformats.org/drawingml/2006/main">
               <a:ext uri="{FF2B5EF4-FFF2-40B4-BE49-F238E27FC236}">
-                <a16:creationId xmlns:a16="http://schemas.microsoft.com/office/drawing/2014/main" id="{C3D51C86-EEDF-4353-92E6-DBA609F2EB11}"/>
+                <a16:creationId xmlns:a16="http://schemas.microsoft.com/office/drawing/2014/main" id="{F20B3D75-0E0F-4852-B56A-B7ABB26E8CC5}"/>
               </a:ext>
             </a:extLst>
           </p:cNvPr>
@@ -28480,7 +28480,7 @@
           <p:cNvPr id="30" name="">
             <a:extLst xmlns:a="http://schemas.openxmlformats.org/drawingml/2006/main">
               <a:ext uri="{FF2B5EF4-FFF2-40B4-BE49-F238E27FC236}">
-                <a16:creationId xmlns:a16="http://schemas.microsoft.com/office/drawing/2014/main" id="{8FD0A50F-542F-4AD3-8C0F-E80141FD66D3}"/>
+                <a16:creationId xmlns:a16="http://schemas.microsoft.com/office/drawing/2014/main" id="{258259C5-7526-4BE1-8609-5E46773D5D58}"/>
               </a:ext>
             </a:extLst>
           </p:cNvPr>
@@ -28513,7 +28513,7 @@
           <p:cNvPr id="31" name="">
             <a:extLst xmlns:a="http://schemas.openxmlformats.org/drawingml/2006/main">
               <a:ext uri="{FF2B5EF4-FFF2-40B4-BE49-F238E27FC236}">
-                <a16:creationId xmlns:a16="http://schemas.microsoft.com/office/drawing/2014/main" id="{E0769A66-DBAE-4CA2-BF95-5D9097948122}"/>
+                <a16:creationId xmlns:a16="http://schemas.microsoft.com/office/drawing/2014/main" id="{EC772DC2-E1D2-4E6A-9733-05FA2B1074D4}"/>
               </a:ext>
             </a:extLst>
           </p:cNvPr>
@@ -28571,7 +28571,7 @@
           <p:cNvPr id="32" name="">
             <a:extLst xmlns:a="http://schemas.openxmlformats.org/drawingml/2006/main">
               <a:ext uri="{FF2B5EF4-FFF2-40B4-BE49-F238E27FC236}">
-                <a16:creationId xmlns:a16="http://schemas.microsoft.com/office/drawing/2014/main" id="{1D5F8A8C-45D2-4540-A80E-0769D0354FCF}"/>
+                <a16:creationId xmlns:a16="http://schemas.microsoft.com/office/drawing/2014/main" id="{CDB499FA-309D-49E9-809B-BCF458629D8C}"/>
               </a:ext>
             </a:extLst>
           </p:cNvPr>
@@ -28604,7 +28604,7 @@
           <p:cNvPr id="33" name="">
             <a:extLst xmlns:a="http://schemas.openxmlformats.org/drawingml/2006/main">
               <a:ext uri="{FF2B5EF4-FFF2-40B4-BE49-F238E27FC236}">
-                <a16:creationId xmlns:a16="http://schemas.microsoft.com/office/drawing/2014/main" id="{FE275689-7360-4480-9C42-CEA4FE2F6D39}"/>
+                <a16:creationId xmlns:a16="http://schemas.microsoft.com/office/drawing/2014/main" id="{635F5B01-B63F-4E24-8121-B9B2DD7305F1}"/>
               </a:ext>
             </a:extLst>
           </p:cNvPr>
@@ -28662,7 +28662,7 @@
           <p:cNvPr id="34" name="">
             <a:extLst xmlns:a="http://schemas.openxmlformats.org/drawingml/2006/main">
               <a:ext uri="{FF2B5EF4-FFF2-40B4-BE49-F238E27FC236}">
-                <a16:creationId xmlns:a16="http://schemas.microsoft.com/office/drawing/2014/main" id="{7235738F-B27A-4D94-B85A-1340C0027433}"/>
+                <a16:creationId xmlns:a16="http://schemas.microsoft.com/office/drawing/2014/main" id="{BAC5C749-ABFE-4C6F-97B8-D0AF158C9F0F}"/>
               </a:ext>
             </a:extLst>
           </p:cNvPr>
@@ -28695,7 +28695,7 @@
           <p:cNvPr id="35" name="">
             <a:extLst xmlns:a="http://schemas.openxmlformats.org/drawingml/2006/main">
               <a:ext uri="{FF2B5EF4-FFF2-40B4-BE49-F238E27FC236}">
-                <a16:creationId xmlns:a16="http://schemas.microsoft.com/office/drawing/2014/main" id="{4E81C90C-9AD5-428E-902A-9706C4EA4F03}"/>
+                <a16:creationId xmlns:a16="http://schemas.microsoft.com/office/drawing/2014/main" id="{6651067A-2CC7-4726-B738-D09AA7FB01C1}"/>
               </a:ext>
             </a:extLst>
           </p:cNvPr>
@@ -28753,7 +28753,7 @@
           <p:cNvPr id="36" name="">
             <a:extLst xmlns:a="http://schemas.openxmlformats.org/drawingml/2006/main">
               <a:ext uri="{FF2B5EF4-FFF2-40B4-BE49-F238E27FC236}">
-                <a16:creationId xmlns:a16="http://schemas.microsoft.com/office/drawing/2014/main" id="{30215486-8DD1-4343-8E6B-8173618F570F}"/>
+                <a16:creationId xmlns:a16="http://schemas.microsoft.com/office/drawing/2014/main" id="{23CCA4D2-1A39-4B75-82CC-FD5BFF17F5F9}"/>
               </a:ext>
             </a:extLst>
           </p:cNvPr>
@@ -28786,7 +28786,7 @@
           <p:cNvPr id="37" name="">
             <a:extLst xmlns:a="http://schemas.openxmlformats.org/drawingml/2006/main">
               <a:ext uri="{FF2B5EF4-FFF2-40B4-BE49-F238E27FC236}">
-                <a16:creationId xmlns:a16="http://schemas.microsoft.com/office/drawing/2014/main" id="{38370D54-0314-43E0-A485-4B5B3637D156}"/>
+                <a16:creationId xmlns:a16="http://schemas.microsoft.com/office/drawing/2014/main" id="{11EFDD43-5216-48F7-AD7C-73AA41C5DE10}"/>
               </a:ext>
             </a:extLst>
           </p:cNvPr>
@@ -28844,7 +28844,7 @@
           <p:cNvPr id="38" name="">
             <a:extLst xmlns:a="http://schemas.openxmlformats.org/drawingml/2006/main">
               <a:ext uri="{FF2B5EF4-FFF2-40B4-BE49-F238E27FC236}">
-                <a16:creationId xmlns:a16="http://schemas.microsoft.com/office/drawing/2014/main" id="{59D6BE6A-F08E-4DC8-8561-9EBE28D7C784}"/>
+                <a16:creationId xmlns:a16="http://schemas.microsoft.com/office/drawing/2014/main" id="{BC3A00B3-2AA4-4C55-961A-899FF46C9091}"/>
               </a:ext>
             </a:extLst>
           </p:cNvPr>
@@ -28879,7 +28879,7 @@
           <p:cNvPr id="39" name="">
             <a:extLst xmlns:a="http://schemas.openxmlformats.org/drawingml/2006/main">
               <a:ext uri="{FF2B5EF4-FFF2-40B4-BE49-F238E27FC236}">
-                <a16:creationId xmlns:a16="http://schemas.microsoft.com/office/drawing/2014/main" id="{D05CEE9D-23BC-481B-BE33-18961E5C450F}"/>
+                <a16:creationId xmlns:a16="http://schemas.microsoft.com/office/drawing/2014/main" id="{3B882514-EDB9-41A4-8CAB-CF65F5AC380D}"/>
               </a:ext>
             </a:extLst>
           </p:cNvPr>
@@ -28912,7 +28912,7 @@
           <p:cNvPr id="40" name="">
             <a:extLst xmlns:a="http://schemas.openxmlformats.org/drawingml/2006/main">
               <a:ext uri="{FF2B5EF4-FFF2-40B4-BE49-F238E27FC236}">
-                <a16:creationId xmlns:a16="http://schemas.microsoft.com/office/drawing/2014/main" id="{2F0419E8-E422-4293-90AD-9CD0E8B92EB1}"/>
+                <a16:creationId xmlns:a16="http://schemas.microsoft.com/office/drawing/2014/main" id="{3330678A-B8DC-4A06-93BF-A33AB83C67D8}"/>
               </a:ext>
             </a:extLst>
           </p:cNvPr>
@@ -28970,7 +28970,7 @@
           <p:cNvPr id="41" name="">
             <a:extLst xmlns:a="http://schemas.openxmlformats.org/drawingml/2006/main">
               <a:ext uri="{FF2B5EF4-FFF2-40B4-BE49-F238E27FC236}">
-                <a16:creationId xmlns:a16="http://schemas.microsoft.com/office/drawing/2014/main" id="{3F98097D-3352-4E67-9480-F161FCA2FD10}"/>
+                <a16:creationId xmlns:a16="http://schemas.microsoft.com/office/drawing/2014/main" id="{93C43DF4-0F4C-4193-B86E-3069669DB0AC}"/>
               </a:ext>
             </a:extLst>
           </p:cNvPr>
@@ -29028,7 +29028,7 @@
           <p:cNvPr id="42" name="">
             <a:extLst xmlns:a="http://schemas.openxmlformats.org/drawingml/2006/main">
               <a:ext uri="{FF2B5EF4-FFF2-40B4-BE49-F238E27FC236}">
-                <a16:creationId xmlns:a16="http://schemas.microsoft.com/office/drawing/2014/main" id="{9E27C0A3-2792-4695-A298-7640D156596E}"/>
+                <a16:creationId xmlns:a16="http://schemas.microsoft.com/office/drawing/2014/main" id="{C7269CD6-2B2C-475F-9637-391773AB6621}"/>
               </a:ext>
             </a:extLst>
           </p:cNvPr>
@@ -29190,7 +29190,7 @@
             </a:pathLst>
           </a:custGeom>
           <a:blipFill xmlns:a="http://schemas.openxmlformats.org/drawingml/2006/main">
-            <a:blip xmlns:r="http://schemas.openxmlformats.org/officeDocument/2006/relationships" r:embed="Rd53dc2852b764c45"/>
+            <a:blip xmlns:r="http://schemas.openxmlformats.org/officeDocument/2006/relationships" r:embed="R927782874fa44839"/>
             <a:stretch>
               <a:fillRect l="-7801" t="0" r="-7801" b="0"/>
             </a:stretch>
@@ -29202,7 +29202,7 @@
           <p:cNvPr id="6" name="">
             <a:extLst xmlns:a="http://schemas.openxmlformats.org/drawingml/2006/main">
               <a:ext uri="{FF2B5EF4-FFF2-40B4-BE49-F238E27FC236}">
-                <a16:creationId xmlns:a16="http://schemas.microsoft.com/office/drawing/2014/main" id="{29E538BE-4F4D-4F81-A2DB-03FE1C425038}"/>
+                <a16:creationId xmlns:a16="http://schemas.microsoft.com/office/drawing/2014/main" id="{C49003F0-25E0-44FE-A106-7212063C2239}"/>
               </a:ext>
             </a:extLst>
           </p:cNvPr>
@@ -29260,7 +29260,7 @@
           <p:cNvPr id="7" name="">
             <a:extLst xmlns:a="http://schemas.openxmlformats.org/drawingml/2006/main">
               <a:ext uri="{FF2B5EF4-FFF2-40B4-BE49-F238E27FC236}">
-                <a16:creationId xmlns:a16="http://schemas.microsoft.com/office/drawing/2014/main" id="{B97AF7DF-B7E6-432C-885B-412BF9B95BA6}"/>
+                <a16:creationId xmlns:a16="http://schemas.microsoft.com/office/drawing/2014/main" id="{91405DAE-A8A3-4227-A282-178C17FFE0C0}"/>
               </a:ext>
             </a:extLst>
           </p:cNvPr>
@@ -29318,7 +29318,7 @@
           <p:cNvPr id="8" name="">
             <a:extLst xmlns:a="http://schemas.openxmlformats.org/drawingml/2006/main">
               <a:ext uri="{FF2B5EF4-FFF2-40B4-BE49-F238E27FC236}">
-                <a16:creationId xmlns:a16="http://schemas.microsoft.com/office/drawing/2014/main" id="{90455155-CB1E-40FB-AA66-815A7B1C26C4}"/>
+                <a16:creationId xmlns:a16="http://schemas.microsoft.com/office/drawing/2014/main" id="{916B3CCF-6FF7-46CF-89F8-07C66AE4DC77}"/>
               </a:ext>
             </a:extLst>
           </p:cNvPr>
@@ -29351,7 +29351,7 @@
           <p:cNvPr id="9" name="">
             <a:extLst xmlns:a="http://schemas.openxmlformats.org/drawingml/2006/main">
               <a:ext uri="{FF2B5EF4-FFF2-40B4-BE49-F238E27FC236}">
-                <a16:creationId xmlns:a16="http://schemas.microsoft.com/office/drawing/2014/main" id="{CF680D61-74A4-44FA-BDEC-55DA39ADCF46}"/>
+                <a16:creationId xmlns:a16="http://schemas.microsoft.com/office/drawing/2014/main" id="{C1473AB1-6C82-4252-BC19-9D458026C6F6}"/>
               </a:ext>
             </a:extLst>
           </p:cNvPr>
@@ -29409,7 +29409,7 @@
           <p:cNvPr id="10" name="">
             <a:extLst xmlns:a="http://schemas.openxmlformats.org/drawingml/2006/main">
               <a:ext uri="{FF2B5EF4-FFF2-40B4-BE49-F238E27FC236}">
-                <a16:creationId xmlns:a16="http://schemas.microsoft.com/office/drawing/2014/main" id="{72B8577E-DE24-4D37-A9B9-A29602EFA777}"/>
+                <a16:creationId xmlns:a16="http://schemas.microsoft.com/office/drawing/2014/main" id="{C830AD35-2FE8-44E7-804A-11B883F7FBCF}"/>
               </a:ext>
             </a:extLst>
           </p:cNvPr>
@@ -29442,7 +29442,7 @@
           <p:cNvPr id="11" name="">
             <a:extLst xmlns:a="http://schemas.openxmlformats.org/drawingml/2006/main">
               <a:ext uri="{FF2B5EF4-FFF2-40B4-BE49-F238E27FC236}">
-                <a16:creationId xmlns:a16="http://schemas.microsoft.com/office/drawing/2014/main" id="{093FCD05-AED1-4296-A7EC-6EC1F7F9C5A1}"/>
+                <a16:creationId xmlns:a16="http://schemas.microsoft.com/office/drawing/2014/main" id="{AB8A2D0F-0940-42B2-971D-59B5F44283C4}"/>
               </a:ext>
             </a:extLst>
           </p:cNvPr>
@@ -29500,7 +29500,7 @@
           <p:cNvPr id="12" name="">
             <a:extLst xmlns:a="http://schemas.openxmlformats.org/drawingml/2006/main">
               <a:ext uri="{FF2B5EF4-FFF2-40B4-BE49-F238E27FC236}">
-                <a16:creationId xmlns:a16="http://schemas.microsoft.com/office/drawing/2014/main" id="{C14CFDCD-39B1-4DD1-A865-E718BC071053}"/>
+                <a16:creationId xmlns:a16="http://schemas.microsoft.com/office/drawing/2014/main" id="{BE6624F7-8B90-4275-9161-B071DD7531FD}"/>
               </a:ext>
             </a:extLst>
           </p:cNvPr>
@@ -29533,7 +29533,7 @@
           <p:cNvPr id="13" name="">
             <a:extLst xmlns:a="http://schemas.openxmlformats.org/drawingml/2006/main">
               <a:ext uri="{FF2B5EF4-FFF2-40B4-BE49-F238E27FC236}">
-                <a16:creationId xmlns:a16="http://schemas.microsoft.com/office/drawing/2014/main" id="{AC45A36B-C696-4AF0-AA30-3B2A2F548AB3}"/>
+                <a16:creationId xmlns:a16="http://schemas.microsoft.com/office/drawing/2014/main" id="{528BDEA9-AE5F-4036-A205-D5A1FA96D73C}"/>
               </a:ext>
             </a:extLst>
           </p:cNvPr>
@@ -29591,7 +29591,7 @@
           <p:cNvPr id="14" name="">
             <a:extLst xmlns:a="http://schemas.openxmlformats.org/drawingml/2006/main">
               <a:ext uri="{FF2B5EF4-FFF2-40B4-BE49-F238E27FC236}">
-                <a16:creationId xmlns:a16="http://schemas.microsoft.com/office/drawing/2014/main" id="{5B285419-3917-4246-8EF9-FB108936681F}"/>
+                <a16:creationId xmlns:a16="http://schemas.microsoft.com/office/drawing/2014/main" id="{9C93F649-B3D4-4A70-848F-7F29343D7E90}"/>
               </a:ext>
             </a:extLst>
           </p:cNvPr>
@@ -29624,7 +29624,7 @@
           <p:cNvPr id="15" name="">
             <a:extLst xmlns:a="http://schemas.openxmlformats.org/drawingml/2006/main">
               <a:ext uri="{FF2B5EF4-FFF2-40B4-BE49-F238E27FC236}">
-                <a16:creationId xmlns:a16="http://schemas.microsoft.com/office/drawing/2014/main" id="{F47C62B5-52BD-4571-8918-D3A178E9C2D3}"/>
+                <a16:creationId xmlns:a16="http://schemas.microsoft.com/office/drawing/2014/main" id="{1CA28B2F-183A-4570-9090-8108F12F6D45}"/>
               </a:ext>
             </a:extLst>
           </p:cNvPr>
@@ -29682,7 +29682,7 @@
           <p:cNvPr id="16" name="">
             <a:extLst xmlns:a="http://schemas.openxmlformats.org/drawingml/2006/main">
               <a:ext uri="{FF2B5EF4-FFF2-40B4-BE49-F238E27FC236}">
-                <a16:creationId xmlns:a16="http://schemas.microsoft.com/office/drawing/2014/main" id="{FBA382A0-8FA9-47AB-ABFA-678F88E9C160}"/>
+                <a16:creationId xmlns:a16="http://schemas.microsoft.com/office/drawing/2014/main" id="{F071F761-4AB4-45C4-8AF0-974AF250D746}"/>
               </a:ext>
             </a:extLst>
           </p:cNvPr>
@@ -29715,7 +29715,7 @@
           <p:cNvPr id="17" name="">
             <a:extLst xmlns:a="http://schemas.openxmlformats.org/drawingml/2006/main">
               <a:ext uri="{FF2B5EF4-FFF2-40B4-BE49-F238E27FC236}">
-                <a16:creationId xmlns:a16="http://schemas.microsoft.com/office/drawing/2014/main" id="{9D33C5CB-54C2-41EA-8ECB-BAA999C42ED2}"/>
+                <a16:creationId xmlns:a16="http://schemas.microsoft.com/office/drawing/2014/main" id="{FDD2B09A-65F8-44C5-8262-96657BD6AAE4}"/>
               </a:ext>
             </a:extLst>
           </p:cNvPr>
@@ -29773,7 +29773,7 @@
           <p:cNvPr id="18" name="">
             <a:extLst xmlns:a="http://schemas.openxmlformats.org/drawingml/2006/main">
               <a:ext uri="{FF2B5EF4-FFF2-40B4-BE49-F238E27FC236}">
-                <a16:creationId xmlns:a16="http://schemas.microsoft.com/office/drawing/2014/main" id="{78CFF03D-E015-48CF-9676-1B810A7E3D5B}"/>
+                <a16:creationId xmlns:a16="http://schemas.microsoft.com/office/drawing/2014/main" id="{B9522403-2991-48D1-9579-7B4690180721}"/>
               </a:ext>
             </a:extLst>
           </p:cNvPr>
@@ -29806,7 +29806,7 @@
           <p:cNvPr id="19" name="">
             <a:extLst xmlns:a="http://schemas.openxmlformats.org/drawingml/2006/main">
               <a:ext uri="{FF2B5EF4-FFF2-40B4-BE49-F238E27FC236}">
-                <a16:creationId xmlns:a16="http://schemas.microsoft.com/office/drawing/2014/main" id="{0FBCFBC3-F308-4B83-BEDA-E5E83F85C8BC}"/>
+                <a16:creationId xmlns:a16="http://schemas.microsoft.com/office/drawing/2014/main" id="{ED9E9E72-0C1B-4535-8802-F7528F14FE31}"/>
               </a:ext>
             </a:extLst>
           </p:cNvPr>
@@ -29864,7 +29864,7 @@
           <p:cNvPr id="20" name="">
             <a:extLst xmlns:a="http://schemas.openxmlformats.org/drawingml/2006/main">
               <a:ext uri="{FF2B5EF4-FFF2-40B4-BE49-F238E27FC236}">
-                <a16:creationId xmlns:a16="http://schemas.microsoft.com/office/drawing/2014/main" id="{B1163809-FA4C-4816-ACD2-310A0EB2F08E}"/>
+                <a16:creationId xmlns:a16="http://schemas.microsoft.com/office/drawing/2014/main" id="{F6D52448-C235-44A1-8F75-493AFE6A2F37}"/>
               </a:ext>
             </a:extLst>
           </p:cNvPr>
@@ -29897,7 +29897,7 @@
           <p:cNvPr id="21" name="">
             <a:extLst xmlns:a="http://schemas.openxmlformats.org/drawingml/2006/main">
               <a:ext uri="{FF2B5EF4-FFF2-40B4-BE49-F238E27FC236}">
-                <a16:creationId xmlns:a16="http://schemas.microsoft.com/office/drawing/2014/main" id="{755504CA-C67C-4EF3-AC64-8E4179F872BF}"/>
+                <a16:creationId xmlns:a16="http://schemas.microsoft.com/office/drawing/2014/main" id="{CEC2A35F-B278-4869-8BF9-3C57D1E3699B}"/>
               </a:ext>
             </a:extLst>
           </p:cNvPr>
@@ -29955,7 +29955,7 @@
           <p:cNvPr id="22" name="">
             <a:extLst xmlns:a="http://schemas.openxmlformats.org/drawingml/2006/main">
               <a:ext uri="{FF2B5EF4-FFF2-40B4-BE49-F238E27FC236}">
-                <a16:creationId xmlns:a16="http://schemas.microsoft.com/office/drawing/2014/main" id="{751AD6E5-E648-43CD-9C74-29563465B060}"/>
+                <a16:creationId xmlns:a16="http://schemas.microsoft.com/office/drawing/2014/main" id="{4047E884-C736-4F8C-B24D-CA0A69F8238B}"/>
               </a:ext>
             </a:extLst>
           </p:cNvPr>
@@ -29988,7 +29988,7 @@
           <p:cNvPr id="23" name="">
             <a:extLst xmlns:a="http://schemas.openxmlformats.org/drawingml/2006/main">
               <a:ext uri="{FF2B5EF4-FFF2-40B4-BE49-F238E27FC236}">
-                <a16:creationId xmlns:a16="http://schemas.microsoft.com/office/drawing/2014/main" id="{1FF237C0-5939-4B0A-98F9-C8F764C9DB89}"/>
+                <a16:creationId xmlns:a16="http://schemas.microsoft.com/office/drawing/2014/main" id="{F53E08C3-156C-4760-B4DB-591F8B3A2FE7}"/>
               </a:ext>
             </a:extLst>
           </p:cNvPr>
@@ -30046,7 +30046,7 @@
           <p:cNvPr id="24" name="">
             <a:extLst xmlns:a="http://schemas.openxmlformats.org/drawingml/2006/main">
               <a:ext uri="{FF2B5EF4-FFF2-40B4-BE49-F238E27FC236}">
-                <a16:creationId xmlns:a16="http://schemas.microsoft.com/office/drawing/2014/main" id="{1D5A5D0A-DE71-4DA3-87F0-D1722707DBBB}"/>
+                <a16:creationId xmlns:a16="http://schemas.microsoft.com/office/drawing/2014/main" id="{DBDD038B-A809-45B3-9983-269DDDD6B13B}"/>
               </a:ext>
             </a:extLst>
           </p:cNvPr>
@@ -30079,7 +30079,7 @@
           <p:cNvPr id="25" name="">
             <a:extLst xmlns:a="http://schemas.openxmlformats.org/drawingml/2006/main">
               <a:ext uri="{FF2B5EF4-FFF2-40B4-BE49-F238E27FC236}">
-                <a16:creationId xmlns:a16="http://schemas.microsoft.com/office/drawing/2014/main" id="{33968AAD-D01E-4772-A528-1B68F18B92BF}"/>
+                <a16:creationId xmlns:a16="http://schemas.microsoft.com/office/drawing/2014/main" id="{1E22495C-DD64-4901-910E-E96BC4D3152C}"/>
               </a:ext>
             </a:extLst>
           </p:cNvPr>
@@ -30137,7 +30137,7 @@
           <p:cNvPr id="26" name="">
             <a:extLst xmlns:a="http://schemas.openxmlformats.org/drawingml/2006/main">
               <a:ext uri="{FF2B5EF4-FFF2-40B4-BE49-F238E27FC236}">
-                <a16:creationId xmlns:a16="http://schemas.microsoft.com/office/drawing/2014/main" id="{C441E225-EB13-4973-9DDB-678D268FACE3}"/>
+                <a16:creationId xmlns:a16="http://schemas.microsoft.com/office/drawing/2014/main" id="{A34612A7-EA45-4E58-BA55-0B4754C2F354}"/>
               </a:ext>
             </a:extLst>
           </p:cNvPr>
@@ -30170,7 +30170,7 @@
           <p:cNvPr id="27" name="">
             <a:extLst xmlns:a="http://schemas.openxmlformats.org/drawingml/2006/main">
               <a:ext uri="{FF2B5EF4-FFF2-40B4-BE49-F238E27FC236}">
-                <a16:creationId xmlns:a16="http://schemas.microsoft.com/office/drawing/2014/main" id="{C7405E0E-9B49-429C-A7A2-353D82CDE17B}"/>
+                <a16:creationId xmlns:a16="http://schemas.microsoft.com/office/drawing/2014/main" id="{5FC02A99-FE5B-4E99-A3F1-955A8A15BA96}"/>
               </a:ext>
             </a:extLst>
           </p:cNvPr>
@@ -30228,7 +30228,7 @@
           <p:cNvPr id="28" name="">
             <a:extLst xmlns:a="http://schemas.openxmlformats.org/drawingml/2006/main">
               <a:ext uri="{FF2B5EF4-FFF2-40B4-BE49-F238E27FC236}">
-                <a16:creationId xmlns:a16="http://schemas.microsoft.com/office/drawing/2014/main" id="{BD522D5A-89C3-4E02-87FF-220D9BB4009B}"/>
+                <a16:creationId xmlns:a16="http://schemas.microsoft.com/office/drawing/2014/main" id="{4778276F-B454-473B-828B-822C91455BFB}"/>
               </a:ext>
             </a:extLst>
           </p:cNvPr>
@@ -30261,7 +30261,7 @@
           <p:cNvPr id="29" name="">
             <a:extLst xmlns:a="http://schemas.openxmlformats.org/drawingml/2006/main">
               <a:ext uri="{FF2B5EF4-FFF2-40B4-BE49-F238E27FC236}">
-                <a16:creationId xmlns:a16="http://schemas.microsoft.com/office/drawing/2014/main" id="{2B8521BE-9AA4-4940-883C-EAA31A17AC08}"/>
+                <a16:creationId xmlns:a16="http://schemas.microsoft.com/office/drawing/2014/main" id="{815CB8B2-E044-40F9-BCB5-C9146F7D5430}"/>
               </a:ext>
             </a:extLst>
           </p:cNvPr>
@@ -30319,7 +30319,7 @@
           <p:cNvPr id="30" name="">
             <a:extLst xmlns:a="http://schemas.openxmlformats.org/drawingml/2006/main">
               <a:ext uri="{FF2B5EF4-FFF2-40B4-BE49-F238E27FC236}">
-                <a16:creationId xmlns:a16="http://schemas.microsoft.com/office/drawing/2014/main" id="{9B1427A0-1139-4E55-BFC9-6A81DE6D2792}"/>
+                <a16:creationId xmlns:a16="http://schemas.microsoft.com/office/drawing/2014/main" id="{E43E66CD-EEF2-4C9D-A90D-8C093ED1CED0}"/>
               </a:ext>
             </a:extLst>
           </p:cNvPr>
@@ -30352,7 +30352,7 @@
           <p:cNvPr id="31" name="">
             <a:extLst xmlns:a="http://schemas.openxmlformats.org/drawingml/2006/main">
               <a:ext uri="{FF2B5EF4-FFF2-40B4-BE49-F238E27FC236}">
-                <a16:creationId xmlns:a16="http://schemas.microsoft.com/office/drawing/2014/main" id="{A114A5FE-1444-4643-9BF7-4F9AB240186B}"/>
+                <a16:creationId xmlns:a16="http://schemas.microsoft.com/office/drawing/2014/main" id="{78176264-7F45-4510-B45B-EE62E82F890B}"/>
               </a:ext>
             </a:extLst>
           </p:cNvPr>
@@ -30410,7 +30410,7 @@
           <p:cNvPr id="32" name="">
             <a:extLst xmlns:a="http://schemas.openxmlformats.org/drawingml/2006/main">
               <a:ext uri="{FF2B5EF4-FFF2-40B4-BE49-F238E27FC236}">
-                <a16:creationId xmlns:a16="http://schemas.microsoft.com/office/drawing/2014/main" id="{4A90163B-C85F-4832-9BA5-3336606C758E}"/>
+                <a16:creationId xmlns:a16="http://schemas.microsoft.com/office/drawing/2014/main" id="{8F3622A3-5525-478C-B13E-FB36F74A5031}"/>
               </a:ext>
             </a:extLst>
           </p:cNvPr>
@@ -30443,7 +30443,7 @@
           <p:cNvPr id="33" name="">
             <a:extLst xmlns:a="http://schemas.openxmlformats.org/drawingml/2006/main">
               <a:ext uri="{FF2B5EF4-FFF2-40B4-BE49-F238E27FC236}">
-                <a16:creationId xmlns:a16="http://schemas.microsoft.com/office/drawing/2014/main" id="{94DE2E2B-9D11-4696-9D3C-061593019E38}"/>
+                <a16:creationId xmlns:a16="http://schemas.microsoft.com/office/drawing/2014/main" id="{DC853169-8478-4993-9F47-C104FC64C692}"/>
               </a:ext>
             </a:extLst>
           </p:cNvPr>
@@ -30501,7 +30501,7 @@
           <p:cNvPr id="34" name="">
             <a:extLst xmlns:a="http://schemas.openxmlformats.org/drawingml/2006/main">
               <a:ext uri="{FF2B5EF4-FFF2-40B4-BE49-F238E27FC236}">
-                <a16:creationId xmlns:a16="http://schemas.microsoft.com/office/drawing/2014/main" id="{19CC15E5-1D06-4492-A47A-D6A5BA84BA9B}"/>
+                <a16:creationId xmlns:a16="http://schemas.microsoft.com/office/drawing/2014/main" id="{1943BA0E-06D9-4307-90C7-D7E2FBB8CB74}"/>
               </a:ext>
             </a:extLst>
           </p:cNvPr>
@@ -30534,7 +30534,7 @@
           <p:cNvPr id="35" name="">
             <a:extLst xmlns:a="http://schemas.openxmlformats.org/drawingml/2006/main">
               <a:ext uri="{FF2B5EF4-FFF2-40B4-BE49-F238E27FC236}">
-                <a16:creationId xmlns:a16="http://schemas.microsoft.com/office/drawing/2014/main" id="{58DB8C90-D308-49FC-BC12-3394C0DEC84D}"/>
+                <a16:creationId xmlns:a16="http://schemas.microsoft.com/office/drawing/2014/main" id="{544FC9E1-5550-4C11-970A-941C8FDED20E}"/>
               </a:ext>
             </a:extLst>
           </p:cNvPr>
@@ -30592,7 +30592,7 @@
           <p:cNvPr id="36" name="">
             <a:extLst xmlns:a="http://schemas.openxmlformats.org/drawingml/2006/main">
               <a:ext uri="{FF2B5EF4-FFF2-40B4-BE49-F238E27FC236}">
-                <a16:creationId xmlns:a16="http://schemas.microsoft.com/office/drawing/2014/main" id="{695D0382-7567-4192-9829-9D03B6308716}"/>
+                <a16:creationId xmlns:a16="http://schemas.microsoft.com/office/drawing/2014/main" id="{D91B2054-7751-4213-87DD-8C666B806FEA}"/>
               </a:ext>
             </a:extLst>
           </p:cNvPr>
@@ -30625,7 +30625,7 @@
           <p:cNvPr id="37" name="">
             <a:extLst xmlns:a="http://schemas.openxmlformats.org/drawingml/2006/main">
               <a:ext uri="{FF2B5EF4-FFF2-40B4-BE49-F238E27FC236}">
-                <a16:creationId xmlns:a16="http://schemas.microsoft.com/office/drawing/2014/main" id="{CB52D9EA-D8B7-4803-8A2B-7E3A536609F8}"/>
+                <a16:creationId xmlns:a16="http://schemas.microsoft.com/office/drawing/2014/main" id="{2BDFE8D7-4B40-4D98-816F-F6A0774634A3}"/>
               </a:ext>
             </a:extLst>
           </p:cNvPr>
@@ -30683,7 +30683,7 @@
           <p:cNvPr id="38" name="">
             <a:extLst xmlns:a="http://schemas.openxmlformats.org/drawingml/2006/main">
               <a:ext uri="{FF2B5EF4-FFF2-40B4-BE49-F238E27FC236}">
-                <a16:creationId xmlns:a16="http://schemas.microsoft.com/office/drawing/2014/main" id="{21DE409A-31E8-4947-A549-1A91AC62CD18}"/>
+                <a16:creationId xmlns:a16="http://schemas.microsoft.com/office/drawing/2014/main" id="{429102F6-31DE-4CBD-ACD0-674E61C4D82C}"/>
               </a:ext>
             </a:extLst>
           </p:cNvPr>
@@ -30716,7 +30716,7 @@
           <p:cNvPr id="39" name="">
             <a:extLst xmlns:a="http://schemas.openxmlformats.org/drawingml/2006/main">
               <a:ext uri="{FF2B5EF4-FFF2-40B4-BE49-F238E27FC236}">
-                <a16:creationId xmlns:a16="http://schemas.microsoft.com/office/drawing/2014/main" id="{04ED9C10-8F02-476C-8886-5A7E39D13FD9}"/>
+                <a16:creationId xmlns:a16="http://schemas.microsoft.com/office/drawing/2014/main" id="{C712D162-F4BE-4C64-9C75-FC0FAD324112}"/>
               </a:ext>
             </a:extLst>
           </p:cNvPr>
@@ -30774,7 +30774,7 @@
           <p:cNvPr id="40" name="">
             <a:extLst xmlns:a="http://schemas.openxmlformats.org/drawingml/2006/main">
               <a:ext uri="{FF2B5EF4-FFF2-40B4-BE49-F238E27FC236}">
-                <a16:creationId xmlns:a16="http://schemas.microsoft.com/office/drawing/2014/main" id="{5089566C-1022-4A21-AC16-2AB03F38CFF2}"/>
+                <a16:creationId xmlns:a16="http://schemas.microsoft.com/office/drawing/2014/main" id="{772650C2-4586-4985-B99E-72978853A997}"/>
               </a:ext>
             </a:extLst>
           </p:cNvPr>
@@ -30807,7 +30807,7 @@
           <p:cNvPr id="41" name="">
             <a:extLst xmlns:a="http://schemas.openxmlformats.org/drawingml/2006/main">
               <a:ext uri="{FF2B5EF4-FFF2-40B4-BE49-F238E27FC236}">
-                <a16:creationId xmlns:a16="http://schemas.microsoft.com/office/drawing/2014/main" id="{BE177167-3E83-4B2F-81CB-E5ADB2E8DE61}"/>
+                <a16:creationId xmlns:a16="http://schemas.microsoft.com/office/drawing/2014/main" id="{EFABFBD9-C2E3-4DAA-803D-7EB9ECD2F7E6}"/>
               </a:ext>
             </a:extLst>
           </p:cNvPr>
@@ -30865,7 +30865,7 @@
           <p:cNvPr id="42" name="">
             <a:extLst xmlns:a="http://schemas.openxmlformats.org/drawingml/2006/main">
               <a:ext uri="{FF2B5EF4-FFF2-40B4-BE49-F238E27FC236}">
-                <a16:creationId xmlns:a16="http://schemas.microsoft.com/office/drawing/2014/main" id="{00DA54CE-4E53-4B17-A392-9B24DD9FB720}"/>
+                <a16:creationId xmlns:a16="http://schemas.microsoft.com/office/drawing/2014/main" id="{411B588D-3024-4CD3-9B65-46638FD19191}"/>
               </a:ext>
             </a:extLst>
           </p:cNvPr>
@@ -30898,7 +30898,7 @@
           <p:cNvPr id="43" name="">
             <a:extLst xmlns:a="http://schemas.openxmlformats.org/drawingml/2006/main">
               <a:ext uri="{FF2B5EF4-FFF2-40B4-BE49-F238E27FC236}">
-                <a16:creationId xmlns:a16="http://schemas.microsoft.com/office/drawing/2014/main" id="{746687C0-1BD2-4935-9437-87AF2F24642E}"/>
+                <a16:creationId xmlns:a16="http://schemas.microsoft.com/office/drawing/2014/main" id="{09835CB9-A0BD-4047-A3C5-35A4BEFD8889}"/>
               </a:ext>
             </a:extLst>
           </p:cNvPr>
@@ -30956,7 +30956,7 @@
           <p:cNvPr id="44" name="">
             <a:extLst xmlns:a="http://schemas.openxmlformats.org/drawingml/2006/main">
               <a:ext uri="{FF2B5EF4-FFF2-40B4-BE49-F238E27FC236}">
-                <a16:creationId xmlns:a16="http://schemas.microsoft.com/office/drawing/2014/main" id="{C4BDE9DD-EB16-46A5-A830-4DF5113F17F6}"/>
+                <a16:creationId xmlns:a16="http://schemas.microsoft.com/office/drawing/2014/main" id="{196BFCF5-77A8-4CCB-AF60-239DDD080B61}"/>
               </a:ext>
             </a:extLst>
           </p:cNvPr>
@@ -30989,7 +30989,7 @@
           <p:cNvPr id="45" name="">
             <a:extLst xmlns:a="http://schemas.openxmlformats.org/drawingml/2006/main">
               <a:ext uri="{FF2B5EF4-FFF2-40B4-BE49-F238E27FC236}">
-                <a16:creationId xmlns:a16="http://schemas.microsoft.com/office/drawing/2014/main" id="{607BDA0D-0B16-44D2-A1B8-99E34B25F0C2}"/>
+                <a16:creationId xmlns:a16="http://schemas.microsoft.com/office/drawing/2014/main" id="{C3B41107-1855-45BF-B6AA-A4BF7A7F98D7}"/>
               </a:ext>
             </a:extLst>
           </p:cNvPr>
@@ -31047,7 +31047,7 @@
           <p:cNvPr id="46" name="">
             <a:extLst xmlns:a="http://schemas.openxmlformats.org/drawingml/2006/main">
               <a:ext uri="{FF2B5EF4-FFF2-40B4-BE49-F238E27FC236}">
-                <a16:creationId xmlns:a16="http://schemas.microsoft.com/office/drawing/2014/main" id="{C6934A39-D209-4050-AFFA-0C909EEDC61A}"/>
+                <a16:creationId xmlns:a16="http://schemas.microsoft.com/office/drawing/2014/main" id="{A5078E2C-179D-45FA-BED4-F3092C0ECBBC}"/>
               </a:ext>
             </a:extLst>
           </p:cNvPr>
@@ -31080,7 +31080,7 @@
           <p:cNvPr id="47" name="">
             <a:extLst xmlns:a="http://schemas.openxmlformats.org/drawingml/2006/main">
               <a:ext uri="{FF2B5EF4-FFF2-40B4-BE49-F238E27FC236}">
-                <a16:creationId xmlns:a16="http://schemas.microsoft.com/office/drawing/2014/main" id="{C6E6169A-3D6A-4FD2-A6F3-E3399CA1CB05}"/>
+                <a16:creationId xmlns:a16="http://schemas.microsoft.com/office/drawing/2014/main" id="{1F500C85-2C15-48DE-80C2-1A507F487D18}"/>
               </a:ext>
             </a:extLst>
           </p:cNvPr>
@@ -31138,7 +31138,7 @@
           <p:cNvPr id="48" name="">
             <a:extLst xmlns:a="http://schemas.openxmlformats.org/drawingml/2006/main">
               <a:ext uri="{FF2B5EF4-FFF2-40B4-BE49-F238E27FC236}">
-                <a16:creationId xmlns:a16="http://schemas.microsoft.com/office/drawing/2014/main" id="{D73A5405-6063-4407-B41E-DDFD629A1A52}"/>
+                <a16:creationId xmlns:a16="http://schemas.microsoft.com/office/drawing/2014/main" id="{8DD63941-4755-4A29-A30A-7CA839FD33BC}"/>
               </a:ext>
             </a:extLst>
           </p:cNvPr>
@@ -31171,7 +31171,7 @@
           <p:cNvPr id="49" name="">
             <a:extLst xmlns:a="http://schemas.openxmlformats.org/drawingml/2006/main">
               <a:ext uri="{FF2B5EF4-FFF2-40B4-BE49-F238E27FC236}">
-                <a16:creationId xmlns:a16="http://schemas.microsoft.com/office/drawing/2014/main" id="{37539C79-7000-4160-A047-B0959059CF73}"/>
+                <a16:creationId xmlns:a16="http://schemas.microsoft.com/office/drawing/2014/main" id="{6198193B-3419-4AA1-9270-D01ED12684A8}"/>
               </a:ext>
             </a:extLst>
           </p:cNvPr>
@@ -31229,7 +31229,7 @@
           <p:cNvPr id="50" name="">
             <a:extLst xmlns:a="http://schemas.openxmlformats.org/drawingml/2006/main">
               <a:ext uri="{FF2B5EF4-FFF2-40B4-BE49-F238E27FC236}">
-                <a16:creationId xmlns:a16="http://schemas.microsoft.com/office/drawing/2014/main" id="{21B285ED-2862-44BE-A284-139696F352B4}"/>
+                <a16:creationId xmlns:a16="http://schemas.microsoft.com/office/drawing/2014/main" id="{70467D28-FCFD-43C8-A149-EFCD8EE86F5C}"/>
               </a:ext>
             </a:extLst>
           </p:cNvPr>
@@ -31262,7 +31262,7 @@
           <p:cNvPr id="51" name="">
             <a:extLst xmlns:a="http://schemas.openxmlformats.org/drawingml/2006/main">
               <a:ext uri="{FF2B5EF4-FFF2-40B4-BE49-F238E27FC236}">
-                <a16:creationId xmlns:a16="http://schemas.microsoft.com/office/drawing/2014/main" id="{63D7226A-95A7-4BA6-8114-991C0E96EAC1}"/>
+                <a16:creationId xmlns:a16="http://schemas.microsoft.com/office/drawing/2014/main" id="{33E12825-B5E4-45B2-8C2C-868191ADFAD7}"/>
               </a:ext>
             </a:extLst>
           </p:cNvPr>
@@ -31320,7 +31320,7 @@
           <p:cNvPr id="52" name="">
             <a:extLst xmlns:a="http://schemas.openxmlformats.org/drawingml/2006/main">
               <a:ext uri="{FF2B5EF4-FFF2-40B4-BE49-F238E27FC236}">
-                <a16:creationId xmlns:a16="http://schemas.microsoft.com/office/drawing/2014/main" id="{19FA2C5F-3B5B-4633-BBB8-B0028509CBC8}"/>
+                <a16:creationId xmlns:a16="http://schemas.microsoft.com/office/drawing/2014/main" id="{5C52D09F-43D1-4B23-BDDC-41D8DB3FBAFF}"/>
               </a:ext>
             </a:extLst>
           </p:cNvPr>
@@ -31353,7 +31353,7 @@
           <p:cNvPr id="53" name="">
             <a:extLst xmlns:a="http://schemas.openxmlformats.org/drawingml/2006/main">
               <a:ext uri="{FF2B5EF4-FFF2-40B4-BE49-F238E27FC236}">
-                <a16:creationId xmlns:a16="http://schemas.microsoft.com/office/drawing/2014/main" id="{DE0FB929-B482-42DC-A9BA-BDCC2E268281}"/>
+                <a16:creationId xmlns:a16="http://schemas.microsoft.com/office/drawing/2014/main" id="{A8C70CE7-F707-4704-A64E-8DBB87800028}"/>
               </a:ext>
             </a:extLst>
           </p:cNvPr>
@@ -31411,7 +31411,7 @@
           <p:cNvPr id="54" name="">
             <a:extLst xmlns:a="http://schemas.openxmlformats.org/drawingml/2006/main">
               <a:ext uri="{FF2B5EF4-FFF2-40B4-BE49-F238E27FC236}">
-                <a16:creationId xmlns:a16="http://schemas.microsoft.com/office/drawing/2014/main" id="{D801D946-9C94-4028-8E56-C40F5D29DD50}"/>
+                <a16:creationId xmlns:a16="http://schemas.microsoft.com/office/drawing/2014/main" id="{686E8C2A-A4BF-47E1-963D-29CF28E8BACA}"/>
               </a:ext>
             </a:extLst>
           </p:cNvPr>
@@ -31444,7 +31444,7 @@
           <p:cNvPr id="55" name="">
             <a:extLst xmlns:a="http://schemas.openxmlformats.org/drawingml/2006/main">
               <a:ext uri="{FF2B5EF4-FFF2-40B4-BE49-F238E27FC236}">
-                <a16:creationId xmlns:a16="http://schemas.microsoft.com/office/drawing/2014/main" id="{69D270F6-3D11-48A8-899B-EA643E6AF571}"/>
+                <a16:creationId xmlns:a16="http://schemas.microsoft.com/office/drawing/2014/main" id="{3C95CF3B-3C22-4B6B-9E31-603A9EAAC476}"/>
               </a:ext>
             </a:extLst>
           </p:cNvPr>
@@ -31502,7 +31502,7 @@
           <p:cNvPr id="56" name="">
             <a:extLst xmlns:a="http://schemas.openxmlformats.org/drawingml/2006/main">
               <a:ext uri="{FF2B5EF4-FFF2-40B4-BE49-F238E27FC236}">
-                <a16:creationId xmlns:a16="http://schemas.microsoft.com/office/drawing/2014/main" id="{BDD34C03-79DF-4EA8-973B-0A105A66DB35}"/>
+                <a16:creationId xmlns:a16="http://schemas.microsoft.com/office/drawing/2014/main" id="{5F974929-6BA7-4DB7-A9CA-8FDF87EFD904}"/>
               </a:ext>
             </a:extLst>
           </p:cNvPr>
@@ -31535,7 +31535,7 @@
           <p:cNvPr id="57" name="">
             <a:extLst xmlns:a="http://schemas.openxmlformats.org/drawingml/2006/main">
               <a:ext uri="{FF2B5EF4-FFF2-40B4-BE49-F238E27FC236}">
-                <a16:creationId xmlns:a16="http://schemas.microsoft.com/office/drawing/2014/main" id="{BC40FD5B-A21E-46B3-A610-0222AB62894E}"/>
+                <a16:creationId xmlns:a16="http://schemas.microsoft.com/office/drawing/2014/main" id="{4C02EC57-C225-4CF2-BB17-A871DA27067E}"/>
               </a:ext>
             </a:extLst>
           </p:cNvPr>
@@ -31593,7 +31593,7 @@
           <p:cNvPr id="58" name="">
             <a:extLst xmlns:a="http://schemas.openxmlformats.org/drawingml/2006/main">
               <a:ext uri="{FF2B5EF4-FFF2-40B4-BE49-F238E27FC236}">
-                <a16:creationId xmlns:a16="http://schemas.microsoft.com/office/drawing/2014/main" id="{0228EE83-E7F8-48FF-A2F0-BC873C00FDC2}"/>
+                <a16:creationId xmlns:a16="http://schemas.microsoft.com/office/drawing/2014/main" id="{7A3850CC-5052-432F-BEBF-B223EC8A6577}"/>
               </a:ext>
             </a:extLst>
           </p:cNvPr>
@@ -31626,7 +31626,7 @@
           <p:cNvPr id="59" name="">
             <a:extLst xmlns:a="http://schemas.openxmlformats.org/drawingml/2006/main">
               <a:ext uri="{FF2B5EF4-FFF2-40B4-BE49-F238E27FC236}">
-                <a16:creationId xmlns:a16="http://schemas.microsoft.com/office/drawing/2014/main" id="{AF7F9FF1-F950-49BF-AB3C-4804D50BAC76}"/>
+                <a16:creationId xmlns:a16="http://schemas.microsoft.com/office/drawing/2014/main" id="{B5164A84-6585-4144-A60F-F63C88523715}"/>
               </a:ext>
             </a:extLst>
           </p:cNvPr>
@@ -31684,7 +31684,7 @@
           <p:cNvPr id="60" name="">
             <a:extLst xmlns:a="http://schemas.openxmlformats.org/drawingml/2006/main">
               <a:ext uri="{FF2B5EF4-FFF2-40B4-BE49-F238E27FC236}">
-                <a16:creationId xmlns:a16="http://schemas.microsoft.com/office/drawing/2014/main" id="{E1C5D52A-BCE8-48B7-B29C-1C6422447E67}"/>
+                <a16:creationId xmlns:a16="http://schemas.microsoft.com/office/drawing/2014/main" id="{207F82EA-6D21-4075-8F2F-640AC9FDCE6C}"/>
               </a:ext>
             </a:extLst>
           </p:cNvPr>
@@ -31717,7 +31717,7 @@
           <p:cNvPr id="61" name="">
             <a:extLst xmlns:a="http://schemas.openxmlformats.org/drawingml/2006/main">
               <a:ext uri="{FF2B5EF4-FFF2-40B4-BE49-F238E27FC236}">
-                <a16:creationId xmlns:a16="http://schemas.microsoft.com/office/drawing/2014/main" id="{8B3DEA2B-3E36-4E18-9D44-A1A43B33C233}"/>
+                <a16:creationId xmlns:a16="http://schemas.microsoft.com/office/drawing/2014/main" id="{7F05E84E-B794-41FF-A740-12A5D9C5E56B}"/>
               </a:ext>
             </a:extLst>
           </p:cNvPr>
@@ -31775,7 +31775,7 @@
           <p:cNvPr id="62" name="">
             <a:extLst xmlns:a="http://schemas.openxmlformats.org/drawingml/2006/main">
               <a:ext uri="{FF2B5EF4-FFF2-40B4-BE49-F238E27FC236}">
-                <a16:creationId xmlns:a16="http://schemas.microsoft.com/office/drawing/2014/main" id="{ACC1877F-9709-4990-B477-D432714D9809}"/>
+                <a16:creationId xmlns:a16="http://schemas.microsoft.com/office/drawing/2014/main" id="{02A2CCC4-06BF-4EBA-8A58-215895995922}"/>
               </a:ext>
             </a:extLst>
           </p:cNvPr>
@@ -31808,7 +31808,7 @@
           <p:cNvPr id="63" name="">
             <a:extLst xmlns:a="http://schemas.openxmlformats.org/drawingml/2006/main">
               <a:ext uri="{FF2B5EF4-FFF2-40B4-BE49-F238E27FC236}">
-                <a16:creationId xmlns:a16="http://schemas.microsoft.com/office/drawing/2014/main" id="{30520748-1C0D-4338-8878-3C09750434F1}"/>
+                <a16:creationId xmlns:a16="http://schemas.microsoft.com/office/drawing/2014/main" id="{FAC471F1-786B-4B73-8B21-05EB847665A4}"/>
               </a:ext>
             </a:extLst>
           </p:cNvPr>
@@ -31866,7 +31866,7 @@
           <p:cNvPr id="64" name="">
             <a:extLst xmlns:a="http://schemas.openxmlformats.org/drawingml/2006/main">
               <a:ext uri="{FF2B5EF4-FFF2-40B4-BE49-F238E27FC236}">
-                <a16:creationId xmlns:a16="http://schemas.microsoft.com/office/drawing/2014/main" id="{F4A74323-6931-4DC0-812A-50CC80EC84D4}"/>
+                <a16:creationId xmlns:a16="http://schemas.microsoft.com/office/drawing/2014/main" id="{272AF95C-F0BC-422D-A1CD-4B295BB25195}"/>
               </a:ext>
             </a:extLst>
           </p:cNvPr>
@@ -31899,7 +31899,7 @@
           <p:cNvPr id="65" name="">
             <a:extLst xmlns:a="http://schemas.openxmlformats.org/drawingml/2006/main">
               <a:ext uri="{FF2B5EF4-FFF2-40B4-BE49-F238E27FC236}">
-                <a16:creationId xmlns:a16="http://schemas.microsoft.com/office/drawing/2014/main" id="{6A2EF354-B202-4CE1-BBA5-8FC844BE9844}"/>
+                <a16:creationId xmlns:a16="http://schemas.microsoft.com/office/drawing/2014/main" id="{89617B62-982E-4CB9-A8DD-18D30B045172}"/>
               </a:ext>
             </a:extLst>
           </p:cNvPr>
@@ -31957,7 +31957,7 @@
           <p:cNvPr id="66" name="">
             <a:extLst xmlns:a="http://schemas.openxmlformats.org/drawingml/2006/main">
               <a:ext uri="{FF2B5EF4-FFF2-40B4-BE49-F238E27FC236}">
-                <a16:creationId xmlns:a16="http://schemas.microsoft.com/office/drawing/2014/main" id="{0B02E956-82C6-4694-AF33-FD0DAD846081}"/>
+                <a16:creationId xmlns:a16="http://schemas.microsoft.com/office/drawing/2014/main" id="{AA084338-C787-4DA2-B8E1-6EF0A5B66B6B}"/>
               </a:ext>
             </a:extLst>
           </p:cNvPr>
@@ -31990,7 +31990,7 @@
           <p:cNvPr id="67" name="">
             <a:extLst xmlns:a="http://schemas.openxmlformats.org/drawingml/2006/main">
               <a:ext uri="{FF2B5EF4-FFF2-40B4-BE49-F238E27FC236}">
-                <a16:creationId xmlns:a16="http://schemas.microsoft.com/office/drawing/2014/main" id="{089F689F-4268-4933-B13D-D38A2176F59E}"/>
+                <a16:creationId xmlns:a16="http://schemas.microsoft.com/office/drawing/2014/main" id="{6191C6FD-8FE8-483E-AA25-75EE22719E4F}"/>
               </a:ext>
             </a:extLst>
           </p:cNvPr>
@@ -32048,7 +32048,7 @@
           <p:cNvPr id="68" name="">
             <a:extLst xmlns:a="http://schemas.openxmlformats.org/drawingml/2006/main">
               <a:ext uri="{FF2B5EF4-FFF2-40B4-BE49-F238E27FC236}">
-                <a16:creationId xmlns:a16="http://schemas.microsoft.com/office/drawing/2014/main" id="{2C03834F-1438-4B30-80B2-FCA3BC7A1D83}"/>
+                <a16:creationId xmlns:a16="http://schemas.microsoft.com/office/drawing/2014/main" id="{1844C6C3-3F53-4BAF-A19E-D313732D779D}"/>
               </a:ext>
             </a:extLst>
           </p:cNvPr>
@@ -32081,7 +32081,7 @@
           <p:cNvPr id="69" name="">
             <a:extLst xmlns:a="http://schemas.openxmlformats.org/drawingml/2006/main">
               <a:ext uri="{FF2B5EF4-FFF2-40B4-BE49-F238E27FC236}">
-                <a16:creationId xmlns:a16="http://schemas.microsoft.com/office/drawing/2014/main" id="{78F1FA4F-1C6B-4C51-A18D-1E1CD4BDDBFA}"/>
+                <a16:creationId xmlns:a16="http://schemas.microsoft.com/office/drawing/2014/main" id="{948DB4DC-A33A-4508-8021-D78FBB2CCB07}"/>
               </a:ext>
             </a:extLst>
           </p:cNvPr>
@@ -32139,7 +32139,7 @@
           <p:cNvPr id="70" name="">
             <a:extLst xmlns:a="http://schemas.openxmlformats.org/drawingml/2006/main">
               <a:ext uri="{FF2B5EF4-FFF2-40B4-BE49-F238E27FC236}">
-                <a16:creationId xmlns:a16="http://schemas.microsoft.com/office/drawing/2014/main" id="{99BBC803-C127-485C-9F8F-378ED7224178}"/>
+                <a16:creationId xmlns:a16="http://schemas.microsoft.com/office/drawing/2014/main" id="{ED215627-91BB-4ED9-9B91-4009CD3E32C1}"/>
               </a:ext>
             </a:extLst>
           </p:cNvPr>
@@ -32172,7 +32172,7 @@
           <p:cNvPr id="71" name="">
             <a:extLst xmlns:a="http://schemas.openxmlformats.org/drawingml/2006/main">
               <a:ext uri="{FF2B5EF4-FFF2-40B4-BE49-F238E27FC236}">
-                <a16:creationId xmlns:a16="http://schemas.microsoft.com/office/drawing/2014/main" id="{542454CF-9F6A-433A-96DC-5E795B0407B0}"/>
+                <a16:creationId xmlns:a16="http://schemas.microsoft.com/office/drawing/2014/main" id="{6D005153-2C02-4EB1-8882-3476B52910CD}"/>
               </a:ext>
             </a:extLst>
           </p:cNvPr>
@@ -32230,7 +32230,7 @@
           <p:cNvPr id="72" name="">
             <a:extLst xmlns:a="http://schemas.openxmlformats.org/drawingml/2006/main">
               <a:ext uri="{FF2B5EF4-FFF2-40B4-BE49-F238E27FC236}">
-                <a16:creationId xmlns:a16="http://schemas.microsoft.com/office/drawing/2014/main" id="{B435F247-63F2-472F-B484-5FF52C4D0E60}"/>
+                <a16:creationId xmlns:a16="http://schemas.microsoft.com/office/drawing/2014/main" id="{C1B210ED-FC0A-44DA-BF04-76219EB67231}"/>
               </a:ext>
             </a:extLst>
           </p:cNvPr>
@@ -32265,7 +32265,7 @@
           <p:cNvPr id="73" name="">
             <a:extLst xmlns:a="http://schemas.openxmlformats.org/drawingml/2006/main">
               <a:ext uri="{FF2B5EF4-FFF2-40B4-BE49-F238E27FC236}">
-                <a16:creationId xmlns:a16="http://schemas.microsoft.com/office/drawing/2014/main" id="{F95C8FDB-11C7-4E71-812C-7C9A29C1E4DA}"/>
+                <a16:creationId xmlns:a16="http://schemas.microsoft.com/office/drawing/2014/main" id="{DB9FD960-4155-47F9-B334-5EDEF87C158C}"/>
               </a:ext>
             </a:extLst>
           </p:cNvPr>
@@ -32298,7 +32298,7 @@
           <p:cNvPr id="74" name="">
             <a:extLst xmlns:a="http://schemas.openxmlformats.org/drawingml/2006/main">
               <a:ext uri="{FF2B5EF4-FFF2-40B4-BE49-F238E27FC236}">
-                <a16:creationId xmlns:a16="http://schemas.microsoft.com/office/drawing/2014/main" id="{8EA7B68D-FFF2-4FFA-8FD6-35C6AAC37A86}"/>
+                <a16:creationId xmlns:a16="http://schemas.microsoft.com/office/drawing/2014/main" id="{35CE1D43-D7FE-47B2-B0AD-EC6877CDEC2B}"/>
               </a:ext>
             </a:extLst>
           </p:cNvPr>
@@ -32356,7 +32356,7 @@
           <p:cNvPr id="75" name="">
             <a:extLst xmlns:a="http://schemas.openxmlformats.org/drawingml/2006/main">
               <a:ext uri="{FF2B5EF4-FFF2-40B4-BE49-F238E27FC236}">
-                <a16:creationId xmlns:a16="http://schemas.microsoft.com/office/drawing/2014/main" id="{0BE15EEA-8338-4416-998B-56C62F4F83C5}"/>
+                <a16:creationId xmlns:a16="http://schemas.microsoft.com/office/drawing/2014/main" id="{24791171-B013-4A6F-A58F-8B32948D262E}"/>
               </a:ext>
             </a:extLst>
           </p:cNvPr>
@@ -32414,7 +32414,7 @@
           <p:cNvPr id="76" name="">
             <a:extLst xmlns:a="http://schemas.openxmlformats.org/drawingml/2006/main">
               <a:ext uri="{FF2B5EF4-FFF2-40B4-BE49-F238E27FC236}">
-                <a16:creationId xmlns:a16="http://schemas.microsoft.com/office/drawing/2014/main" id="{EFC420C3-9303-4C01-961A-1ED2088413C5}"/>
+                <a16:creationId xmlns:a16="http://schemas.microsoft.com/office/drawing/2014/main" id="{3D10C649-2C9C-4289-BD07-F2C25B0D66BE}"/>
               </a:ext>
             </a:extLst>
           </p:cNvPr>
@@ -32449,7 +32449,7 @@
           <p:cNvPr id="77" name="">
             <a:extLst xmlns:a="http://schemas.openxmlformats.org/drawingml/2006/main">
               <a:ext uri="{FF2B5EF4-FFF2-40B4-BE49-F238E27FC236}">
-                <a16:creationId xmlns:a16="http://schemas.microsoft.com/office/drawing/2014/main" id="{0941D065-C82D-405E-9789-D0D458981AF3}"/>
+                <a16:creationId xmlns:a16="http://schemas.microsoft.com/office/drawing/2014/main" id="{CAD7945A-80F9-49E9-B2AE-D4E861336849}"/>
               </a:ext>
             </a:extLst>
           </p:cNvPr>
@@ -32482,7 +32482,7 @@
           <p:cNvPr id="78" name="">
             <a:extLst xmlns:a="http://schemas.openxmlformats.org/drawingml/2006/main">
               <a:ext uri="{FF2B5EF4-FFF2-40B4-BE49-F238E27FC236}">
-                <a16:creationId xmlns:a16="http://schemas.microsoft.com/office/drawing/2014/main" id="{B99CB5DE-1165-4F32-BE7C-2F7F10B05EB2}"/>
+                <a16:creationId xmlns:a16="http://schemas.microsoft.com/office/drawing/2014/main" id="{B26082BA-9BA2-4A32-91E9-50D6B8C8BF61}"/>
               </a:ext>
             </a:extLst>
           </p:cNvPr>
@@ -32540,7 +32540,7 @@
           <p:cNvPr id="79" name="">
             <a:extLst xmlns:a="http://schemas.openxmlformats.org/drawingml/2006/main">
               <a:ext uri="{FF2B5EF4-FFF2-40B4-BE49-F238E27FC236}">
-                <a16:creationId xmlns:a16="http://schemas.microsoft.com/office/drawing/2014/main" id="{10FFA59D-7599-4843-AD9E-9A6384CAD07E}"/>
+                <a16:creationId xmlns:a16="http://schemas.microsoft.com/office/drawing/2014/main" id="{8D475231-3ACD-4A84-B140-C79734DB7B49}"/>
               </a:ext>
             </a:extLst>
           </p:cNvPr>
@@ -32598,7 +32598,7 @@
           <p:cNvPr id="80" name="">
             <a:extLst xmlns:a="http://schemas.openxmlformats.org/drawingml/2006/main">
               <a:ext uri="{FF2B5EF4-FFF2-40B4-BE49-F238E27FC236}">
-                <a16:creationId xmlns:a16="http://schemas.microsoft.com/office/drawing/2014/main" id="{F351D970-5F5E-476B-866D-14E7FEE2F2FB}"/>
+                <a16:creationId xmlns:a16="http://schemas.microsoft.com/office/drawing/2014/main" id="{1155E1E7-912F-4243-8CB3-EDBD0DD5E58B}"/>
               </a:ext>
             </a:extLst>
           </p:cNvPr>
@@ -32760,7 +32760,7 @@
             </a:pathLst>
           </a:custGeom>
           <a:blipFill xmlns:a="http://schemas.openxmlformats.org/drawingml/2006/main">
-            <a:blip xmlns:r="http://schemas.openxmlformats.org/officeDocument/2006/relationships" r:embed="Re91454699b8b43b5"/>
+            <a:blip xmlns:r="http://schemas.openxmlformats.org/officeDocument/2006/relationships" r:embed="Rd4fe255998604778"/>
             <a:stretch>
               <a:fillRect l="-7801" t="0" r="-7801" b="0"/>
             </a:stretch>
@@ -32772,7 +32772,7 @@
           <p:cNvPr id="6" name="">
             <a:extLst xmlns:a="http://schemas.openxmlformats.org/drawingml/2006/main">
               <a:ext uri="{FF2B5EF4-FFF2-40B4-BE49-F238E27FC236}">
-                <a16:creationId xmlns:a16="http://schemas.microsoft.com/office/drawing/2014/main" id="{2031CD9F-29FE-45EC-A519-179F7C717DA8}"/>
+                <a16:creationId xmlns:a16="http://schemas.microsoft.com/office/drawing/2014/main" id="{2C400172-DEDD-450F-BD06-656C073CD806}"/>
               </a:ext>
             </a:extLst>
           </p:cNvPr>
@@ -32830,7 +32830,7 @@
           <p:cNvPr id="7" name="">
             <a:extLst xmlns:a="http://schemas.openxmlformats.org/drawingml/2006/main">
               <a:ext uri="{FF2B5EF4-FFF2-40B4-BE49-F238E27FC236}">
-                <a16:creationId xmlns:a16="http://schemas.microsoft.com/office/drawing/2014/main" id="{0F7D452A-5CDA-49F2-81E0-69BE3D36BDE4}"/>
+                <a16:creationId xmlns:a16="http://schemas.microsoft.com/office/drawing/2014/main" id="{9DB4F470-2D5E-4781-B30A-956BE89AF42D}"/>
               </a:ext>
             </a:extLst>
           </p:cNvPr>
@@ -32888,7 +32888,7 @@
           <p:cNvPr id="8" name="">
             <a:extLst xmlns:a="http://schemas.openxmlformats.org/drawingml/2006/main">
               <a:ext uri="{FF2B5EF4-FFF2-40B4-BE49-F238E27FC236}">
-                <a16:creationId xmlns:a16="http://schemas.microsoft.com/office/drawing/2014/main" id="{02FFF6BE-19BE-4536-BCCE-F9B19F609A67}"/>
+                <a16:creationId xmlns:a16="http://schemas.microsoft.com/office/drawing/2014/main" id="{48A4BFC9-1588-4965-9791-B4B62D3E7CB5}"/>
               </a:ext>
             </a:extLst>
           </p:cNvPr>
@@ -32921,7 +32921,7 @@
           <p:cNvPr id="9" name="">
             <a:extLst xmlns:a="http://schemas.openxmlformats.org/drawingml/2006/main">
               <a:ext uri="{FF2B5EF4-FFF2-40B4-BE49-F238E27FC236}">
-                <a16:creationId xmlns:a16="http://schemas.microsoft.com/office/drawing/2014/main" id="{033FE1AF-039D-4A77-8F11-B633BC5E5ED9}"/>
+                <a16:creationId xmlns:a16="http://schemas.microsoft.com/office/drawing/2014/main" id="{92E08AFC-1FDF-4002-8459-CF3878A95837}"/>
               </a:ext>
             </a:extLst>
           </p:cNvPr>
@@ -32979,7 +32979,7 @@
           <p:cNvPr id="10" name="">
             <a:extLst xmlns:a="http://schemas.openxmlformats.org/drawingml/2006/main">
               <a:ext uri="{FF2B5EF4-FFF2-40B4-BE49-F238E27FC236}">
-                <a16:creationId xmlns:a16="http://schemas.microsoft.com/office/drawing/2014/main" id="{5C8446E9-EB31-484E-AFD6-B7228202413C}"/>
+                <a16:creationId xmlns:a16="http://schemas.microsoft.com/office/drawing/2014/main" id="{4C5E2CD1-63D5-412E-B32E-39F5504B7E92}"/>
               </a:ext>
             </a:extLst>
           </p:cNvPr>
@@ -33012,7 +33012,7 @@
           <p:cNvPr id="11" name="">
             <a:extLst xmlns:a="http://schemas.openxmlformats.org/drawingml/2006/main">
               <a:ext uri="{FF2B5EF4-FFF2-40B4-BE49-F238E27FC236}">
-                <a16:creationId xmlns:a16="http://schemas.microsoft.com/office/drawing/2014/main" id="{D2E0594D-5506-47C7-835C-93F70A7C8B30}"/>
+                <a16:creationId xmlns:a16="http://schemas.microsoft.com/office/drawing/2014/main" id="{C978AB11-4795-4116-9B8D-777FAA8DAB39}"/>
               </a:ext>
             </a:extLst>
           </p:cNvPr>
@@ -33070,7 +33070,7 @@
           <p:cNvPr id="12" name="">
             <a:extLst xmlns:a="http://schemas.openxmlformats.org/drawingml/2006/main">
               <a:ext uri="{FF2B5EF4-FFF2-40B4-BE49-F238E27FC236}">
-                <a16:creationId xmlns:a16="http://schemas.microsoft.com/office/drawing/2014/main" id="{08AE7980-CB8B-4ABA-BC4F-0511313511EE}"/>
+                <a16:creationId xmlns:a16="http://schemas.microsoft.com/office/drawing/2014/main" id="{6354B8DF-F72F-4B93-B226-B9356036E7F4}"/>
               </a:ext>
             </a:extLst>
           </p:cNvPr>
@@ -33103,7 +33103,7 @@
           <p:cNvPr id="13" name="">
             <a:extLst xmlns:a="http://schemas.openxmlformats.org/drawingml/2006/main">
               <a:ext uri="{FF2B5EF4-FFF2-40B4-BE49-F238E27FC236}">
-                <a16:creationId xmlns:a16="http://schemas.microsoft.com/office/drawing/2014/main" id="{A00FB809-00AC-4E15-B888-2189F5C10A27}"/>
+                <a16:creationId xmlns:a16="http://schemas.microsoft.com/office/drawing/2014/main" id="{121BA919-3D4E-439E-B64B-5CD888359C42}"/>
               </a:ext>
             </a:extLst>
           </p:cNvPr>
@@ -33161,7 +33161,7 @@
           <p:cNvPr id="14" name="">
             <a:extLst xmlns:a="http://schemas.openxmlformats.org/drawingml/2006/main">
               <a:ext uri="{FF2B5EF4-FFF2-40B4-BE49-F238E27FC236}">
-                <a16:creationId xmlns:a16="http://schemas.microsoft.com/office/drawing/2014/main" id="{B7332E2E-2098-4DFD-8214-C98E3BAD31F0}"/>
+                <a16:creationId xmlns:a16="http://schemas.microsoft.com/office/drawing/2014/main" id="{C59E7A85-BE01-41BB-8FEF-594E4DA8A884}"/>
               </a:ext>
             </a:extLst>
           </p:cNvPr>
@@ -33194,7 +33194,7 @@
           <p:cNvPr id="15" name="">
             <a:extLst xmlns:a="http://schemas.openxmlformats.org/drawingml/2006/main">
               <a:ext uri="{FF2B5EF4-FFF2-40B4-BE49-F238E27FC236}">
-                <a16:creationId xmlns:a16="http://schemas.microsoft.com/office/drawing/2014/main" id="{4012E282-80E5-42AA-B8BF-6FE38841324D}"/>
+                <a16:creationId xmlns:a16="http://schemas.microsoft.com/office/drawing/2014/main" id="{4546383F-72DF-4394-A57F-C32B3F3F65B6}"/>
               </a:ext>
             </a:extLst>
           </p:cNvPr>
@@ -33252,7 +33252,7 @@
           <p:cNvPr id="16" name="">
             <a:extLst xmlns:a="http://schemas.openxmlformats.org/drawingml/2006/main">
               <a:ext uri="{FF2B5EF4-FFF2-40B4-BE49-F238E27FC236}">
-                <a16:creationId xmlns:a16="http://schemas.microsoft.com/office/drawing/2014/main" id="{B588CB93-3649-4F28-B528-045146952AD4}"/>
+                <a16:creationId xmlns:a16="http://schemas.microsoft.com/office/drawing/2014/main" id="{D4953535-53CD-43C7-9BDB-4B65B5D56131}"/>
               </a:ext>
             </a:extLst>
           </p:cNvPr>
@@ -33285,7 +33285,7 @@
           <p:cNvPr id="17" name="">
             <a:extLst xmlns:a="http://schemas.openxmlformats.org/drawingml/2006/main">
               <a:ext uri="{FF2B5EF4-FFF2-40B4-BE49-F238E27FC236}">
-                <a16:creationId xmlns:a16="http://schemas.microsoft.com/office/drawing/2014/main" id="{1354175C-CF29-439E-8C03-C1C1E7E0D3DF}"/>
+                <a16:creationId xmlns:a16="http://schemas.microsoft.com/office/drawing/2014/main" id="{1B17AED9-99B2-4336-B507-2FBA7711C749}"/>
               </a:ext>
             </a:extLst>
           </p:cNvPr>
@@ -33343,7 +33343,7 @@
           <p:cNvPr id="18" name="">
             <a:extLst xmlns:a="http://schemas.openxmlformats.org/drawingml/2006/main">
               <a:ext uri="{FF2B5EF4-FFF2-40B4-BE49-F238E27FC236}">
-                <a16:creationId xmlns:a16="http://schemas.microsoft.com/office/drawing/2014/main" id="{1FEB3837-0DE5-479B-9360-5CB7B21A791E}"/>
+                <a16:creationId xmlns:a16="http://schemas.microsoft.com/office/drawing/2014/main" id="{FE3903FB-CA10-44DB-9FFC-FFCFAE1245D4}"/>
               </a:ext>
             </a:extLst>
           </p:cNvPr>
@@ -33376,7 +33376,7 @@
           <p:cNvPr id="19" name="">
             <a:extLst xmlns:a="http://schemas.openxmlformats.org/drawingml/2006/main">
               <a:ext uri="{FF2B5EF4-FFF2-40B4-BE49-F238E27FC236}">
-                <a16:creationId xmlns:a16="http://schemas.microsoft.com/office/drawing/2014/main" id="{E4841D99-B79A-4353-B87A-A7190F2B6A32}"/>
+                <a16:creationId xmlns:a16="http://schemas.microsoft.com/office/drawing/2014/main" id="{F40FDC67-89DC-4F5B-9849-C8A6B948922E}"/>
               </a:ext>
             </a:extLst>
           </p:cNvPr>
@@ -33434,7 +33434,7 @@
           <p:cNvPr id="20" name="">
             <a:extLst xmlns:a="http://schemas.openxmlformats.org/drawingml/2006/main">
               <a:ext uri="{FF2B5EF4-FFF2-40B4-BE49-F238E27FC236}">
-                <a16:creationId xmlns:a16="http://schemas.microsoft.com/office/drawing/2014/main" id="{E0A0DE02-C479-424A-ACDB-AB9949EB8F7F}"/>
+                <a16:creationId xmlns:a16="http://schemas.microsoft.com/office/drawing/2014/main" id="{30A4F4C7-FA07-46D2-9F9B-DBA7D8E3BE9F}"/>
               </a:ext>
             </a:extLst>
           </p:cNvPr>
@@ -33467,7 +33467,7 @@
           <p:cNvPr id="21" name="">
             <a:extLst xmlns:a="http://schemas.openxmlformats.org/drawingml/2006/main">
               <a:ext uri="{FF2B5EF4-FFF2-40B4-BE49-F238E27FC236}">
-                <a16:creationId xmlns:a16="http://schemas.microsoft.com/office/drawing/2014/main" id="{3AB2EAF7-9623-4B11-99CE-BCC4FB211C1E}"/>
+                <a16:creationId xmlns:a16="http://schemas.microsoft.com/office/drawing/2014/main" id="{C8067FBC-A24F-4B6A-90FB-49C6D5045815}"/>
               </a:ext>
             </a:extLst>
           </p:cNvPr>
@@ -33525,7 +33525,7 @@
           <p:cNvPr id="22" name="">
             <a:extLst xmlns:a="http://schemas.openxmlformats.org/drawingml/2006/main">
               <a:ext uri="{FF2B5EF4-FFF2-40B4-BE49-F238E27FC236}">
-                <a16:creationId xmlns:a16="http://schemas.microsoft.com/office/drawing/2014/main" id="{5931E082-8634-4E61-9ACD-0BF26515B59E}"/>
+                <a16:creationId xmlns:a16="http://schemas.microsoft.com/office/drawing/2014/main" id="{B171B1A7-C1F2-41D0-BFAD-3B5D9C5B12A4}"/>
               </a:ext>
             </a:extLst>
           </p:cNvPr>
@@ -33558,7 +33558,7 @@
           <p:cNvPr id="23" name="">
             <a:extLst xmlns:a="http://schemas.openxmlformats.org/drawingml/2006/main">
               <a:ext uri="{FF2B5EF4-FFF2-40B4-BE49-F238E27FC236}">
-                <a16:creationId xmlns:a16="http://schemas.microsoft.com/office/drawing/2014/main" id="{FCC4A0EF-5551-4605-A2DF-8226D0A461FB}"/>
+                <a16:creationId xmlns:a16="http://schemas.microsoft.com/office/drawing/2014/main" id="{6349EE56-3132-43F2-B586-BC4BED8BB7E8}"/>
               </a:ext>
             </a:extLst>
           </p:cNvPr>
@@ -33616,7 +33616,7 @@
           <p:cNvPr id="24" name="">
             <a:extLst xmlns:a="http://schemas.openxmlformats.org/drawingml/2006/main">
               <a:ext uri="{FF2B5EF4-FFF2-40B4-BE49-F238E27FC236}">
-                <a16:creationId xmlns:a16="http://schemas.microsoft.com/office/drawing/2014/main" id="{1DDF1155-E918-4296-9E1A-F7E5FBAE25A1}"/>
+                <a16:creationId xmlns:a16="http://schemas.microsoft.com/office/drawing/2014/main" id="{9641D884-ED18-408F-8629-8B10876D3DE8}"/>
               </a:ext>
             </a:extLst>
           </p:cNvPr>
@@ -33649,7 +33649,7 @@
           <p:cNvPr id="25" name="">
             <a:extLst xmlns:a="http://schemas.openxmlformats.org/drawingml/2006/main">
               <a:ext uri="{FF2B5EF4-FFF2-40B4-BE49-F238E27FC236}">
-                <a16:creationId xmlns:a16="http://schemas.microsoft.com/office/drawing/2014/main" id="{9491B8B7-7C92-4FA8-9C13-5F2A65A32199}"/>
+                <a16:creationId xmlns:a16="http://schemas.microsoft.com/office/drawing/2014/main" id="{07BDD95C-FC17-492B-896D-EA5F3A508D62}"/>
               </a:ext>
             </a:extLst>
           </p:cNvPr>
@@ -33707,7 +33707,7 @@
           <p:cNvPr id="26" name="">
             <a:extLst xmlns:a="http://schemas.openxmlformats.org/drawingml/2006/main">
               <a:ext uri="{FF2B5EF4-FFF2-40B4-BE49-F238E27FC236}">
-                <a16:creationId xmlns:a16="http://schemas.microsoft.com/office/drawing/2014/main" id="{D09B56B0-800F-48D0-9980-D78030F940F4}"/>
+                <a16:creationId xmlns:a16="http://schemas.microsoft.com/office/drawing/2014/main" id="{947F058D-1545-4CCB-8639-7E8C05DFBB24}"/>
               </a:ext>
             </a:extLst>
           </p:cNvPr>
@@ -33740,7 +33740,7 @@
           <p:cNvPr id="27" name="">
             <a:extLst xmlns:a="http://schemas.openxmlformats.org/drawingml/2006/main">
               <a:ext uri="{FF2B5EF4-FFF2-40B4-BE49-F238E27FC236}">
-                <a16:creationId xmlns:a16="http://schemas.microsoft.com/office/drawing/2014/main" id="{C024266A-5005-43B7-B782-6BCF7848DE17}"/>
+                <a16:creationId xmlns:a16="http://schemas.microsoft.com/office/drawing/2014/main" id="{227E7CAF-6E25-4AEF-8773-24A7F6664112}"/>
               </a:ext>
             </a:extLst>
           </p:cNvPr>
@@ -33798,7 +33798,7 @@
           <p:cNvPr id="28" name="">
             <a:extLst xmlns:a="http://schemas.openxmlformats.org/drawingml/2006/main">
               <a:ext uri="{FF2B5EF4-FFF2-40B4-BE49-F238E27FC236}">
-                <a16:creationId xmlns:a16="http://schemas.microsoft.com/office/drawing/2014/main" id="{D2AAC7F9-E12A-468A-979D-CD2CF267AEA2}"/>
+                <a16:creationId xmlns:a16="http://schemas.microsoft.com/office/drawing/2014/main" id="{B216426B-91A1-44C8-83FC-CD668648DFAF}"/>
               </a:ext>
             </a:extLst>
           </p:cNvPr>
@@ -33831,7 +33831,7 @@
           <p:cNvPr id="29" name="">
             <a:extLst xmlns:a="http://schemas.openxmlformats.org/drawingml/2006/main">
               <a:ext uri="{FF2B5EF4-FFF2-40B4-BE49-F238E27FC236}">
-                <a16:creationId xmlns:a16="http://schemas.microsoft.com/office/drawing/2014/main" id="{7B709A0E-36EE-444B-802D-0A5AEE51850F}"/>
+                <a16:creationId xmlns:a16="http://schemas.microsoft.com/office/drawing/2014/main" id="{09AF0241-3C61-45F3-8C4C-A8E4D2AC79FB}"/>
               </a:ext>
             </a:extLst>
           </p:cNvPr>
@@ -33889,7 +33889,7 @@
           <p:cNvPr id="30" name="">
             <a:extLst xmlns:a="http://schemas.openxmlformats.org/drawingml/2006/main">
               <a:ext uri="{FF2B5EF4-FFF2-40B4-BE49-F238E27FC236}">
-                <a16:creationId xmlns:a16="http://schemas.microsoft.com/office/drawing/2014/main" id="{ECECC7A9-CEF0-46D4-AFFC-4655C1B9DA5E}"/>
+                <a16:creationId xmlns:a16="http://schemas.microsoft.com/office/drawing/2014/main" id="{603A7989-0E46-4D19-AF4B-B154BD7B5681}"/>
               </a:ext>
             </a:extLst>
           </p:cNvPr>
@@ -33922,7 +33922,7 @@
           <p:cNvPr id="31" name="">
             <a:extLst xmlns:a="http://schemas.openxmlformats.org/drawingml/2006/main">
               <a:ext uri="{FF2B5EF4-FFF2-40B4-BE49-F238E27FC236}">
-                <a16:creationId xmlns:a16="http://schemas.microsoft.com/office/drawing/2014/main" id="{A6238FB2-68BF-4BE9-B358-2616F83D0C95}"/>
+                <a16:creationId xmlns:a16="http://schemas.microsoft.com/office/drawing/2014/main" id="{5198D052-2945-4174-AA87-0A0313384370}"/>
               </a:ext>
             </a:extLst>
           </p:cNvPr>
@@ -33980,7 +33980,7 @@
           <p:cNvPr id="32" name="">
             <a:extLst xmlns:a="http://schemas.openxmlformats.org/drawingml/2006/main">
               <a:ext uri="{FF2B5EF4-FFF2-40B4-BE49-F238E27FC236}">
-                <a16:creationId xmlns:a16="http://schemas.microsoft.com/office/drawing/2014/main" id="{7D49D4FD-A995-4466-A1A4-486555D9DC75}"/>
+                <a16:creationId xmlns:a16="http://schemas.microsoft.com/office/drawing/2014/main" id="{2433EAE1-A842-4C4B-9665-750322BCE133}"/>
               </a:ext>
             </a:extLst>
           </p:cNvPr>
@@ -34013,7 +34013,7 @@
           <p:cNvPr id="33" name="">
             <a:extLst xmlns:a="http://schemas.openxmlformats.org/drawingml/2006/main">
               <a:ext uri="{FF2B5EF4-FFF2-40B4-BE49-F238E27FC236}">
-                <a16:creationId xmlns:a16="http://schemas.microsoft.com/office/drawing/2014/main" id="{2C961E3D-6082-45D2-ADCD-621BD9586055}"/>
+                <a16:creationId xmlns:a16="http://schemas.microsoft.com/office/drawing/2014/main" id="{DDA47D7B-8661-4693-B182-892841A3D1DC}"/>
               </a:ext>
             </a:extLst>
           </p:cNvPr>
@@ -34071,7 +34071,7 @@
           <p:cNvPr id="34" name="">
             <a:extLst xmlns:a="http://schemas.openxmlformats.org/drawingml/2006/main">
               <a:ext uri="{FF2B5EF4-FFF2-40B4-BE49-F238E27FC236}">
-                <a16:creationId xmlns:a16="http://schemas.microsoft.com/office/drawing/2014/main" id="{3849464E-D27C-4AD3-A883-6BBF76FB9E84}"/>
+                <a16:creationId xmlns:a16="http://schemas.microsoft.com/office/drawing/2014/main" id="{E09FD793-75C5-4877-B24E-515CD101AC14}"/>
               </a:ext>
             </a:extLst>
           </p:cNvPr>
@@ -34104,7 +34104,7 @@
           <p:cNvPr id="35" name="">
             <a:extLst xmlns:a="http://schemas.openxmlformats.org/drawingml/2006/main">
               <a:ext uri="{FF2B5EF4-FFF2-40B4-BE49-F238E27FC236}">
-                <a16:creationId xmlns:a16="http://schemas.microsoft.com/office/drawing/2014/main" id="{4AF3E9D5-1277-4F78-BD6E-8D5D336766AF}"/>
+                <a16:creationId xmlns:a16="http://schemas.microsoft.com/office/drawing/2014/main" id="{CFC78422-E65C-4723-933F-9E55650E383D}"/>
               </a:ext>
             </a:extLst>
           </p:cNvPr>
@@ -34162,7 +34162,7 @@
           <p:cNvPr id="36" name="">
             <a:extLst xmlns:a="http://schemas.openxmlformats.org/drawingml/2006/main">
               <a:ext uri="{FF2B5EF4-FFF2-40B4-BE49-F238E27FC236}">
-                <a16:creationId xmlns:a16="http://schemas.microsoft.com/office/drawing/2014/main" id="{8B8BDF0B-2AA9-4DE0-9238-C963F4CFF4C4}"/>
+                <a16:creationId xmlns:a16="http://schemas.microsoft.com/office/drawing/2014/main" id="{205B47E8-FEFA-492C-99E7-DF2A03DAA1ED}"/>
               </a:ext>
             </a:extLst>
           </p:cNvPr>
@@ -34195,7 +34195,7 @@
           <p:cNvPr id="37" name="">
             <a:extLst xmlns:a="http://schemas.openxmlformats.org/drawingml/2006/main">
               <a:ext uri="{FF2B5EF4-FFF2-40B4-BE49-F238E27FC236}">
-                <a16:creationId xmlns:a16="http://schemas.microsoft.com/office/drawing/2014/main" id="{F3226FD6-A6FB-4215-884B-C094309A681D}"/>
+                <a16:creationId xmlns:a16="http://schemas.microsoft.com/office/drawing/2014/main" id="{A46E00DC-FEAE-4094-BEB4-332DA20FB2C5}"/>
               </a:ext>
             </a:extLst>
           </p:cNvPr>
@@ -34253,7 +34253,7 @@
           <p:cNvPr id="38" name="">
             <a:extLst xmlns:a="http://schemas.openxmlformats.org/drawingml/2006/main">
               <a:ext uri="{FF2B5EF4-FFF2-40B4-BE49-F238E27FC236}">
-                <a16:creationId xmlns:a16="http://schemas.microsoft.com/office/drawing/2014/main" id="{4F56009A-248C-4764-8FE8-F6F11664A3FC}"/>
+                <a16:creationId xmlns:a16="http://schemas.microsoft.com/office/drawing/2014/main" id="{07A6A99D-910B-4B3C-AA27-09876883C1ED}"/>
               </a:ext>
             </a:extLst>
           </p:cNvPr>
@@ -34286,7 +34286,7 @@
           <p:cNvPr id="39" name="">
             <a:extLst xmlns:a="http://schemas.openxmlformats.org/drawingml/2006/main">
               <a:ext uri="{FF2B5EF4-FFF2-40B4-BE49-F238E27FC236}">
-                <a16:creationId xmlns:a16="http://schemas.microsoft.com/office/drawing/2014/main" id="{D0E590A4-79CD-4A49-95B8-777BA780FB8D}"/>
+                <a16:creationId xmlns:a16="http://schemas.microsoft.com/office/drawing/2014/main" id="{5FE503CC-E852-4578-A9DF-89B081AA32A3}"/>
               </a:ext>
             </a:extLst>
           </p:cNvPr>
@@ -34344,7 +34344,7 @@
           <p:cNvPr id="40" name="">
             <a:extLst xmlns:a="http://schemas.openxmlformats.org/drawingml/2006/main">
               <a:ext uri="{FF2B5EF4-FFF2-40B4-BE49-F238E27FC236}">
-                <a16:creationId xmlns:a16="http://schemas.microsoft.com/office/drawing/2014/main" id="{04F0DC6B-D9E4-4FC7-B51E-479DB0799D47}"/>
+                <a16:creationId xmlns:a16="http://schemas.microsoft.com/office/drawing/2014/main" id="{47762885-1C70-44E6-9B3D-2E952DBDAE04}"/>
               </a:ext>
             </a:extLst>
           </p:cNvPr>
@@ -34377,7 +34377,7 @@
           <p:cNvPr id="41" name="">
             <a:extLst xmlns:a="http://schemas.openxmlformats.org/drawingml/2006/main">
               <a:ext uri="{FF2B5EF4-FFF2-40B4-BE49-F238E27FC236}">
-                <a16:creationId xmlns:a16="http://schemas.microsoft.com/office/drawing/2014/main" id="{AC212B19-3388-47A2-A8A9-5892BB45E9DB}"/>
+                <a16:creationId xmlns:a16="http://schemas.microsoft.com/office/drawing/2014/main" id="{1C3AA106-A613-4D67-BC33-ADE917B324D4}"/>
               </a:ext>
             </a:extLst>
           </p:cNvPr>
@@ -34435,7 +34435,7 @@
           <p:cNvPr id="42" name="">
             <a:extLst xmlns:a="http://schemas.openxmlformats.org/drawingml/2006/main">
               <a:ext uri="{FF2B5EF4-FFF2-40B4-BE49-F238E27FC236}">
-                <a16:creationId xmlns:a16="http://schemas.microsoft.com/office/drawing/2014/main" id="{8A947A95-8C91-4DCF-95B8-F69E54D68279}"/>
+                <a16:creationId xmlns:a16="http://schemas.microsoft.com/office/drawing/2014/main" id="{BAA3B93A-AE42-4612-AB47-F63155B61D2C}"/>
               </a:ext>
             </a:extLst>
           </p:cNvPr>
@@ -34468,7 +34468,7 @@
           <p:cNvPr id="43" name="">
             <a:extLst xmlns:a="http://schemas.openxmlformats.org/drawingml/2006/main">
               <a:ext uri="{FF2B5EF4-FFF2-40B4-BE49-F238E27FC236}">
-                <a16:creationId xmlns:a16="http://schemas.microsoft.com/office/drawing/2014/main" id="{508DD55F-D517-49DE-8591-8D2BEFA3F026}"/>
+                <a16:creationId xmlns:a16="http://schemas.microsoft.com/office/drawing/2014/main" id="{B30D9966-0A71-4BAF-98AF-6EB416F9160D}"/>
               </a:ext>
             </a:extLst>
           </p:cNvPr>
@@ -34526,7 +34526,7 @@
           <p:cNvPr id="44" name="">
             <a:extLst xmlns:a="http://schemas.openxmlformats.org/drawingml/2006/main">
               <a:ext uri="{FF2B5EF4-FFF2-40B4-BE49-F238E27FC236}">
-                <a16:creationId xmlns:a16="http://schemas.microsoft.com/office/drawing/2014/main" id="{1765263F-D216-4691-B0D4-0159C7E75D20}"/>
+                <a16:creationId xmlns:a16="http://schemas.microsoft.com/office/drawing/2014/main" id="{186522B5-676D-4584-A7D8-69FDD3E456D1}"/>
               </a:ext>
             </a:extLst>
           </p:cNvPr>
@@ -34559,7 +34559,7 @@
           <p:cNvPr id="45" name="">
             <a:extLst xmlns:a="http://schemas.openxmlformats.org/drawingml/2006/main">
               <a:ext uri="{FF2B5EF4-FFF2-40B4-BE49-F238E27FC236}">
-                <a16:creationId xmlns:a16="http://schemas.microsoft.com/office/drawing/2014/main" id="{62470000-A6D7-43FB-990D-5AC7BE1226B3}"/>
+                <a16:creationId xmlns:a16="http://schemas.microsoft.com/office/drawing/2014/main" id="{34A00B9D-6F80-42A5-85C1-132E49CBF717}"/>
               </a:ext>
             </a:extLst>
           </p:cNvPr>
@@ -34617,7 +34617,7 @@
           <p:cNvPr id="46" name="">
             <a:extLst xmlns:a="http://schemas.openxmlformats.org/drawingml/2006/main">
               <a:ext uri="{FF2B5EF4-FFF2-40B4-BE49-F238E27FC236}">
-                <a16:creationId xmlns:a16="http://schemas.microsoft.com/office/drawing/2014/main" id="{75763DA8-7A93-4C15-BC1F-9A578C697148}"/>
+                <a16:creationId xmlns:a16="http://schemas.microsoft.com/office/drawing/2014/main" id="{1C540EE7-2914-466C-A39C-93C51FC799BC}"/>
               </a:ext>
             </a:extLst>
           </p:cNvPr>
@@ -34650,7 +34650,7 @@
           <p:cNvPr id="47" name="">
             <a:extLst xmlns:a="http://schemas.openxmlformats.org/drawingml/2006/main">
               <a:ext uri="{FF2B5EF4-FFF2-40B4-BE49-F238E27FC236}">
-                <a16:creationId xmlns:a16="http://schemas.microsoft.com/office/drawing/2014/main" id="{9F8A186C-E1C3-4DF0-9AB2-ED02828B4FCD}"/>
+                <a16:creationId xmlns:a16="http://schemas.microsoft.com/office/drawing/2014/main" id="{86B91D6B-7E63-4AD4-9041-C843C33D4758}"/>
               </a:ext>
             </a:extLst>
           </p:cNvPr>
@@ -34708,7 +34708,7 @@
           <p:cNvPr id="48" name="">
             <a:extLst xmlns:a="http://schemas.openxmlformats.org/drawingml/2006/main">
               <a:ext uri="{FF2B5EF4-FFF2-40B4-BE49-F238E27FC236}">
-                <a16:creationId xmlns:a16="http://schemas.microsoft.com/office/drawing/2014/main" id="{610890F5-DD84-4373-9D71-F5A3F3D5B46F}"/>
+                <a16:creationId xmlns:a16="http://schemas.microsoft.com/office/drawing/2014/main" id="{E3AAD0C4-AE3F-46CB-8C90-AB81363884B6}"/>
               </a:ext>
             </a:extLst>
           </p:cNvPr>
@@ -34741,7 +34741,7 @@
           <p:cNvPr id="49" name="">
             <a:extLst xmlns:a="http://schemas.openxmlformats.org/drawingml/2006/main">
               <a:ext uri="{FF2B5EF4-FFF2-40B4-BE49-F238E27FC236}">
-                <a16:creationId xmlns:a16="http://schemas.microsoft.com/office/drawing/2014/main" id="{F3AF23E7-FEFF-47CE-BD4B-5C7352FFE835}"/>
+                <a16:creationId xmlns:a16="http://schemas.microsoft.com/office/drawing/2014/main" id="{4D804E7A-B7E4-4BD5-8301-0ED1294E2B7A}"/>
               </a:ext>
             </a:extLst>
           </p:cNvPr>
@@ -34799,7 +34799,7 @@
           <p:cNvPr id="50" name="">
             <a:extLst xmlns:a="http://schemas.openxmlformats.org/drawingml/2006/main">
               <a:ext uri="{FF2B5EF4-FFF2-40B4-BE49-F238E27FC236}">
-                <a16:creationId xmlns:a16="http://schemas.microsoft.com/office/drawing/2014/main" id="{B4881D74-1484-465E-85B5-7767597D7C2E}"/>
+                <a16:creationId xmlns:a16="http://schemas.microsoft.com/office/drawing/2014/main" id="{5B31B6B1-95FF-4FDD-9C5E-E89B1C819106}"/>
               </a:ext>
             </a:extLst>
           </p:cNvPr>
@@ -34832,7 +34832,7 @@
           <p:cNvPr id="51" name="">
             <a:extLst xmlns:a="http://schemas.openxmlformats.org/drawingml/2006/main">
               <a:ext uri="{FF2B5EF4-FFF2-40B4-BE49-F238E27FC236}">
-                <a16:creationId xmlns:a16="http://schemas.microsoft.com/office/drawing/2014/main" id="{C064FF19-B8C1-4C75-91A8-9CCEB973E050}"/>
+                <a16:creationId xmlns:a16="http://schemas.microsoft.com/office/drawing/2014/main" id="{F9CCCA1E-DF22-4213-B07C-B287AAB0A3ED}"/>
               </a:ext>
             </a:extLst>
           </p:cNvPr>
@@ -34890,7 +34890,7 @@
           <p:cNvPr id="52" name="">
             <a:extLst xmlns:a="http://schemas.openxmlformats.org/drawingml/2006/main">
               <a:ext uri="{FF2B5EF4-FFF2-40B4-BE49-F238E27FC236}">
-                <a16:creationId xmlns:a16="http://schemas.microsoft.com/office/drawing/2014/main" id="{82348113-082F-4F21-A775-4B23EAD5D9F3}"/>
+                <a16:creationId xmlns:a16="http://schemas.microsoft.com/office/drawing/2014/main" id="{6C441E58-AF57-4E57-90F8-4EB23DA06A7A}"/>
               </a:ext>
             </a:extLst>
           </p:cNvPr>
@@ -34923,7 +34923,7 @@
           <p:cNvPr id="53" name="">
             <a:extLst xmlns:a="http://schemas.openxmlformats.org/drawingml/2006/main">
               <a:ext uri="{FF2B5EF4-FFF2-40B4-BE49-F238E27FC236}">
-                <a16:creationId xmlns:a16="http://schemas.microsoft.com/office/drawing/2014/main" id="{B251482D-7F7D-4014-B37A-8592B2C7B3AB}"/>
+                <a16:creationId xmlns:a16="http://schemas.microsoft.com/office/drawing/2014/main" id="{92E5DD33-93F5-4897-BA79-BB8A0EA9DA85}"/>
               </a:ext>
             </a:extLst>
           </p:cNvPr>
@@ -34981,7 +34981,7 @@
           <p:cNvPr id="54" name="">
             <a:extLst xmlns:a="http://schemas.openxmlformats.org/drawingml/2006/main">
               <a:ext uri="{FF2B5EF4-FFF2-40B4-BE49-F238E27FC236}">
-                <a16:creationId xmlns:a16="http://schemas.microsoft.com/office/drawing/2014/main" id="{29CD748F-5680-436A-9D3C-9F2E03706715}"/>
+                <a16:creationId xmlns:a16="http://schemas.microsoft.com/office/drawing/2014/main" id="{BDAC89B5-0535-426F-BE41-3154A74177B2}"/>
               </a:ext>
             </a:extLst>
           </p:cNvPr>
@@ -35014,7 +35014,7 @@
           <p:cNvPr id="55" name="">
             <a:extLst xmlns:a="http://schemas.openxmlformats.org/drawingml/2006/main">
               <a:ext uri="{FF2B5EF4-FFF2-40B4-BE49-F238E27FC236}">
-                <a16:creationId xmlns:a16="http://schemas.microsoft.com/office/drawing/2014/main" id="{064ACD75-867F-4BC9-B7B7-9143243D43B4}"/>
+                <a16:creationId xmlns:a16="http://schemas.microsoft.com/office/drawing/2014/main" id="{54F58188-AF64-4CF0-834F-394910BA5E34}"/>
               </a:ext>
             </a:extLst>
           </p:cNvPr>
@@ -35072,7 +35072,7 @@
           <p:cNvPr id="56" name="">
             <a:extLst xmlns:a="http://schemas.openxmlformats.org/drawingml/2006/main">
               <a:ext uri="{FF2B5EF4-FFF2-40B4-BE49-F238E27FC236}">
-                <a16:creationId xmlns:a16="http://schemas.microsoft.com/office/drawing/2014/main" id="{F0347728-F714-4FE1-8721-8BA078E54C39}"/>
+                <a16:creationId xmlns:a16="http://schemas.microsoft.com/office/drawing/2014/main" id="{D7013564-B325-4447-87C9-E98DBC8C7E57}"/>
               </a:ext>
             </a:extLst>
           </p:cNvPr>
@@ -35107,7 +35107,7 @@
           <p:cNvPr id="57" name="">
             <a:extLst xmlns:a="http://schemas.openxmlformats.org/drawingml/2006/main">
               <a:ext uri="{FF2B5EF4-FFF2-40B4-BE49-F238E27FC236}">
-                <a16:creationId xmlns:a16="http://schemas.microsoft.com/office/drawing/2014/main" id="{EB14E1E4-19BC-4F56-8758-A31948F0FA60}"/>
+                <a16:creationId xmlns:a16="http://schemas.microsoft.com/office/drawing/2014/main" id="{215058D2-EE01-46CE-B12C-61642D2FBA35}"/>
               </a:ext>
             </a:extLst>
           </p:cNvPr>
@@ -35155,7 +35155,7 @@
                 <a:ea typeface="Arial"/>
                 <a:cs typeface="Arial"/>
               </a:rPr>
-              <a:t>Protocol comparator: fixed-first support (job 818) · Single seed now · Multi-seed / multi-fold only after a clear gain</a:t>
+              <a:t>Fixed-first job 818 complete: four-K mean 9.137 mmHg (−0.173 vs same-seed M0); K1–3 improved, K5 +0.094</a:t>
             </a:r>
           </a:p>
         </p:txBody>
@@ -35165,7 +35165,7 @@
           <p:cNvPr id="58" name="">
             <a:extLst xmlns:a="http://schemas.openxmlformats.org/drawingml/2006/main">
               <a:ext uri="{FF2B5EF4-FFF2-40B4-BE49-F238E27FC236}">
-                <a16:creationId xmlns:a16="http://schemas.microsoft.com/office/drawing/2014/main" id="{074FF5DC-71AD-446D-890F-D6F557BA930D}"/>
+                <a16:creationId xmlns:a16="http://schemas.microsoft.com/office/drawing/2014/main" id="{5356DBC7-CE66-4A3A-8101-04A6F8780F3C}"/>
               </a:ext>
             </a:extLst>
           </p:cNvPr>
